--- a/latex/figure/fig3_why_selective.pptx
+++ b/latex/figure/fig3_why_selective.pptx
@@ -3118,7 +3118,7 @@
                 </a:solidFill>
                 <a:latin typeface="Helvetica"/>
               </a:rPr>
-              <a:t>(a) Reconstruction rank vs forecasting-utility rank</a:t>
+              <a:t>(a) Reconstruction rank vs realised-utility rank</a:t>
             </a:r>
           </a:p>
         </p:txBody>
@@ -3131,8 +3131,8 @@
         </p:nvCxnSpPr>
         <p:spPr>
           <a:xfrm>
-            <a:off x="508000" y="1549400"/>
-            <a:ext cx="1701800" cy="0"/>
+            <a:off x="533400" y="1549400"/>
+            <a:ext cx="1524000" cy="0"/>
           </a:xfrm>
           <a:prstGeom prst="line">
             <a:avLst/>
@@ -3166,7 +3166,7 @@
         </p:nvCxnSpPr>
         <p:spPr>
           <a:xfrm>
-            <a:off x="508000" y="381000"/>
+            <a:off x="533400" y="381000"/>
             <a:ext cx="0" cy="1168400"/>
           </a:xfrm>
           <a:prstGeom prst="line">
@@ -3201,7 +3201,7 @@
         </p:nvCxnSpPr>
         <p:spPr>
           <a:xfrm>
-            <a:off x="508000" y="1549400"/>
+            <a:off x="723900" y="1549400"/>
             <a:ext cx="0" cy="31750"/>
           </a:xfrm>
           <a:prstGeom prst="line">
@@ -3236,7 +3236,7 @@
         </p:nvSpPr>
         <p:spPr>
           <a:xfrm>
-            <a:off x="-1016000" y="1571117"/>
+            <a:off x="-800100" y="1571117"/>
             <a:ext cx="3048000" cy="164592"/>
           </a:xfrm>
           <a:prstGeom prst="rect">
@@ -3271,7 +3271,7 @@
         </p:nvCxnSpPr>
         <p:spPr>
           <a:xfrm>
-            <a:off x="1358900" y="1549400"/>
+            <a:off x="1104900" y="1549400"/>
             <a:ext cx="0" cy="31750"/>
           </a:xfrm>
           <a:prstGeom prst="line">
@@ -3306,7 +3306,7 @@
         </p:nvSpPr>
         <p:spPr>
           <a:xfrm>
-            <a:off x="-165100" y="1571117"/>
+            <a:off x="-419100" y="1571117"/>
             <a:ext cx="3048000" cy="164592"/>
           </a:xfrm>
           <a:prstGeom prst="rect">
@@ -3328,7 +3328,7 @@
                 </a:solidFill>
                 <a:latin typeface="Helvetica"/>
               </a:rPr>
-              <a:t/>
+              <a:t>2</a:t>
             </a:r>
           </a:p>
         </p:txBody>
@@ -3341,7 +3341,7 @@
         </p:nvCxnSpPr>
         <p:spPr>
           <a:xfrm>
-            <a:off x="2209800" y="1549400"/>
+            <a:off x="1485900" y="1549400"/>
             <a:ext cx="0" cy="31750"/>
           </a:xfrm>
           <a:prstGeom prst="line">
@@ -3376,7 +3376,7 @@
         </p:nvSpPr>
         <p:spPr>
           <a:xfrm>
-            <a:off x="685800" y="1571117"/>
+            <a:off x="-38100" y="1571117"/>
             <a:ext cx="3048000" cy="164592"/>
           </a:xfrm>
           <a:prstGeom prst="rect">
@@ -3398,7 +3398,7 @@
                 </a:solidFill>
                 <a:latin typeface="Helvetica"/>
               </a:rPr>
-              <a:t>5</a:t>
+              <a:t>3</a:t>
             </a:r>
           </a:p>
         </p:txBody>
@@ -3411,8 +3411,8 @@
         </p:nvCxnSpPr>
         <p:spPr>
           <a:xfrm>
-            <a:off x="476250" y="1549400"/>
-            <a:ext cx="31750" cy="0"/>
+            <a:off x="1866900" y="1549400"/>
+            <a:ext cx="0" cy="31750"/>
           </a:xfrm>
           <a:prstGeom prst="line">
             <a:avLst/>
@@ -3446,7 +3446,287 @@
         </p:nvSpPr>
         <p:spPr>
           <a:xfrm>
-            <a:off x="-1061720" y="1480947"/>
+            <a:off x="342900" y="1571117"/>
+            <a:ext cx="3048000" cy="164592"/>
+          </a:xfrm>
+          <a:prstGeom prst="rect">
+            <a:avLst/>
+          </a:prstGeom>
+          <a:noFill/>
+        </p:spPr>
+        <p:txBody>
+          <a:bodyPr wrap="none" lIns="0" rIns="0" tIns="0" bIns="0" anchor="ctr">
+            <a:spAutoFit/>
+          </a:bodyPr>
+          <a:lstStyle/>
+          <a:p>
+            <a:pPr algn="ctr"/>
+            <a:r>
+              <a:rPr sz="540" b="0" i="0">
+                <a:solidFill>
+                  <a:srgbClr val="6B727C"/>
+                </a:solidFill>
+                <a:latin typeface="Helvetica"/>
+              </a:rPr>
+              <a:t>4</a:t>
+            </a:r>
+          </a:p>
+        </p:txBody>
+      </p:sp>
+      <p:cxnSp>
+        <p:nvCxnSpPr>
+          <p:cNvPr id="13" name="Connector 12"/>
+          <p:cNvCxnSpPr/>
+          <p:nvPr/>
+        </p:nvCxnSpPr>
+        <p:spPr>
+          <a:xfrm>
+            <a:off x="501650" y="1403350"/>
+            <a:ext cx="31750" cy="0"/>
+          </a:xfrm>
+          <a:prstGeom prst="line">
+            <a:avLst/>
+          </a:prstGeom>
+          <a:ln w="7620">
+            <a:solidFill>
+              <a:srgbClr val="1C1E23"/>
+            </a:solidFill>
+          </a:ln>
+        </p:spPr>
+        <p:style>
+          <a:lnRef idx="2">
+            <a:schemeClr val="accent1"/>
+          </a:lnRef>
+          <a:fillRef idx="0">
+            <a:schemeClr val="accent1"/>
+          </a:fillRef>
+          <a:effectRef idx="1">
+            <a:schemeClr val="accent1"/>
+          </a:effectRef>
+          <a:fontRef idx="minor">
+            <a:schemeClr val="tx1"/>
+          </a:fontRef>
+        </p:style>
+      </p:cxnSp>
+      <p:sp>
+        <p:nvSpPr>
+          <p:cNvPr id="14" name="TextBox 13"/>
+          <p:cNvSpPr txBox="1"/>
+          <p:nvPr/>
+        </p:nvSpPr>
+        <p:spPr>
+          <a:xfrm>
+            <a:off x="-1036319" y="1334897"/>
+            <a:ext cx="3048000" cy="164592"/>
+          </a:xfrm>
+          <a:prstGeom prst="rect">
+            <a:avLst/>
+          </a:prstGeom>
+          <a:noFill/>
+        </p:spPr>
+        <p:txBody>
+          <a:bodyPr wrap="none" lIns="0" rIns="0" tIns="0" bIns="0" anchor="ctr">
+            <a:spAutoFit/>
+          </a:bodyPr>
+          <a:lstStyle/>
+          <a:p>
+            <a:pPr algn="r"/>
+            <a:r>
+              <a:rPr sz="540" b="0" i="0">
+                <a:solidFill>
+                  <a:srgbClr val="6B727C"/>
+                </a:solidFill>
+                <a:latin typeface="Helvetica"/>
+              </a:rPr>
+              <a:t>4</a:t>
+            </a:r>
+          </a:p>
+        </p:txBody>
+      </p:sp>
+      <p:cxnSp>
+        <p:nvCxnSpPr>
+          <p:cNvPr id="15" name="Connector 14"/>
+          <p:cNvCxnSpPr/>
+          <p:nvPr/>
+        </p:nvCxnSpPr>
+        <p:spPr>
+          <a:xfrm>
+            <a:off x="501650" y="1111250"/>
+            <a:ext cx="31750" cy="0"/>
+          </a:xfrm>
+          <a:prstGeom prst="line">
+            <a:avLst/>
+          </a:prstGeom>
+          <a:ln w="7620">
+            <a:solidFill>
+              <a:srgbClr val="1C1E23"/>
+            </a:solidFill>
+          </a:ln>
+        </p:spPr>
+        <p:style>
+          <a:lnRef idx="2">
+            <a:schemeClr val="accent1"/>
+          </a:lnRef>
+          <a:fillRef idx="0">
+            <a:schemeClr val="accent1"/>
+          </a:fillRef>
+          <a:effectRef idx="1">
+            <a:schemeClr val="accent1"/>
+          </a:effectRef>
+          <a:fontRef idx="minor">
+            <a:schemeClr val="tx1"/>
+          </a:fontRef>
+        </p:style>
+      </p:cxnSp>
+      <p:sp>
+        <p:nvSpPr>
+          <p:cNvPr id="16" name="TextBox 15"/>
+          <p:cNvSpPr txBox="1"/>
+          <p:nvPr/>
+        </p:nvSpPr>
+        <p:spPr>
+          <a:xfrm>
+            <a:off x="-1036319" y="1042797"/>
+            <a:ext cx="3048000" cy="164592"/>
+          </a:xfrm>
+          <a:prstGeom prst="rect">
+            <a:avLst/>
+          </a:prstGeom>
+          <a:noFill/>
+        </p:spPr>
+        <p:txBody>
+          <a:bodyPr wrap="none" lIns="0" rIns="0" tIns="0" bIns="0" anchor="ctr">
+            <a:spAutoFit/>
+          </a:bodyPr>
+          <a:lstStyle/>
+          <a:p>
+            <a:pPr algn="r"/>
+            <a:r>
+              <a:rPr sz="540" b="0" i="0">
+                <a:solidFill>
+                  <a:srgbClr val="6B727C"/>
+                </a:solidFill>
+                <a:latin typeface="Helvetica"/>
+              </a:rPr>
+              <a:t>3</a:t>
+            </a:r>
+          </a:p>
+        </p:txBody>
+      </p:sp>
+      <p:cxnSp>
+        <p:nvCxnSpPr>
+          <p:cNvPr id="17" name="Connector 16"/>
+          <p:cNvCxnSpPr/>
+          <p:nvPr/>
+        </p:nvCxnSpPr>
+        <p:spPr>
+          <a:xfrm>
+            <a:off x="501650" y="819150"/>
+            <a:ext cx="31750" cy="0"/>
+          </a:xfrm>
+          <a:prstGeom prst="line">
+            <a:avLst/>
+          </a:prstGeom>
+          <a:ln w="7620">
+            <a:solidFill>
+              <a:srgbClr val="1C1E23"/>
+            </a:solidFill>
+          </a:ln>
+        </p:spPr>
+        <p:style>
+          <a:lnRef idx="2">
+            <a:schemeClr val="accent1"/>
+          </a:lnRef>
+          <a:fillRef idx="0">
+            <a:schemeClr val="accent1"/>
+          </a:fillRef>
+          <a:effectRef idx="1">
+            <a:schemeClr val="accent1"/>
+          </a:effectRef>
+          <a:fontRef idx="minor">
+            <a:schemeClr val="tx1"/>
+          </a:fontRef>
+        </p:style>
+      </p:cxnSp>
+      <p:sp>
+        <p:nvSpPr>
+          <p:cNvPr id="18" name="TextBox 17"/>
+          <p:cNvSpPr txBox="1"/>
+          <p:nvPr/>
+        </p:nvSpPr>
+        <p:spPr>
+          <a:xfrm>
+            <a:off x="-1036319" y="750697"/>
+            <a:ext cx="3048000" cy="164592"/>
+          </a:xfrm>
+          <a:prstGeom prst="rect">
+            <a:avLst/>
+          </a:prstGeom>
+          <a:noFill/>
+        </p:spPr>
+        <p:txBody>
+          <a:bodyPr wrap="none" lIns="0" rIns="0" tIns="0" bIns="0" anchor="ctr">
+            <a:spAutoFit/>
+          </a:bodyPr>
+          <a:lstStyle/>
+          <a:p>
+            <a:pPr algn="r"/>
+            <a:r>
+              <a:rPr sz="540" b="0" i="0">
+                <a:solidFill>
+                  <a:srgbClr val="6B727C"/>
+                </a:solidFill>
+                <a:latin typeface="Helvetica"/>
+              </a:rPr>
+              <a:t>2</a:t>
+            </a:r>
+          </a:p>
+        </p:txBody>
+      </p:sp>
+      <p:cxnSp>
+        <p:nvCxnSpPr>
+          <p:cNvPr id="19" name="Connector 18"/>
+          <p:cNvCxnSpPr/>
+          <p:nvPr/>
+        </p:nvCxnSpPr>
+        <p:spPr>
+          <a:xfrm>
+            <a:off x="501650" y="527050"/>
+            <a:ext cx="31750" cy="0"/>
+          </a:xfrm>
+          <a:prstGeom prst="line">
+            <a:avLst/>
+          </a:prstGeom>
+          <a:ln w="7620">
+            <a:solidFill>
+              <a:srgbClr val="1C1E23"/>
+            </a:solidFill>
+          </a:ln>
+        </p:spPr>
+        <p:style>
+          <a:lnRef idx="2">
+            <a:schemeClr val="accent1"/>
+          </a:lnRef>
+          <a:fillRef idx="0">
+            <a:schemeClr val="accent1"/>
+          </a:fillRef>
+          <a:effectRef idx="1">
+            <a:schemeClr val="accent1"/>
+          </a:effectRef>
+          <a:fontRef idx="minor">
+            <a:schemeClr val="tx1"/>
+          </a:fontRef>
+        </p:style>
+      </p:cxnSp>
+      <p:sp>
+        <p:nvSpPr>
+          <p:cNvPr id="20" name="TextBox 19"/>
+          <p:cNvSpPr txBox="1"/>
+          <p:nvPr/>
+        </p:nvSpPr>
+        <p:spPr>
+          <a:xfrm>
+            <a:off x="-1036319" y="458597"/>
             <a:ext cx="3048000" cy="164592"/>
           </a:xfrm>
           <a:prstGeom prst="rect">
@@ -3473,24 +3753,1356 @@
           </a:p>
         </p:txBody>
       </p:sp>
+      <p:sp>
+        <p:nvSpPr>
+          <p:cNvPr id="21" name="TextBox 20"/>
+          <p:cNvSpPr txBox="1"/>
+          <p:nvPr/>
+        </p:nvSpPr>
+        <p:spPr>
+          <a:xfrm>
+            <a:off x="-1028700" y="224917"/>
+            <a:ext cx="3048000" cy="164592"/>
+          </a:xfrm>
+          <a:prstGeom prst="rect">
+            <a:avLst/>
+          </a:prstGeom>
+          <a:noFill/>
+        </p:spPr>
+        <p:txBody>
+          <a:bodyPr wrap="none" lIns="0" rIns="0" tIns="0" bIns="0" anchor="ctr">
+            <a:spAutoFit/>
+          </a:bodyPr>
+          <a:lstStyle/>
+          <a:p>
+            <a:pPr algn="l"/>
+            <a:r>
+              <a:rPr sz="540" b="0" i="0">
+                <a:solidFill>
+                  <a:srgbClr val="1C1E23"/>
+                </a:solidFill>
+                <a:latin typeface="Helvetica"/>
+              </a:rPr>
+              <a:t>realised utility rank</a:t>
+            </a:r>
+          </a:p>
+        </p:txBody>
+      </p:sp>
+      <p:sp>
+        <p:nvSpPr>
+          <p:cNvPr id="22" name="Rectangle 21"/>
+          <p:cNvSpPr/>
+          <p:nvPr/>
+        </p:nvSpPr>
+        <p:spPr>
+          <a:xfrm>
+            <a:off x="533400" y="381000"/>
+            <a:ext cx="381000" cy="292100"/>
+          </a:xfrm>
+          <a:prstGeom prst="rect">
+            <a:avLst/>
+          </a:prstGeom>
+          <a:solidFill>
+            <a:srgbClr val="6288BA"/>
+          </a:solidFill>
+          <a:ln w="6350">
+            <a:solidFill>
+              <a:srgbClr val="FFFFFF"/>
+            </a:solidFill>
+          </a:ln>
+          <a:effectLst/>
+        </p:spPr>
+        <p:style>
+          <a:lnRef idx="1">
+            <a:schemeClr val="accent1"/>
+          </a:lnRef>
+          <a:fillRef idx="3">
+            <a:schemeClr val="accent1"/>
+          </a:fillRef>
+          <a:effectRef idx="2">
+            <a:schemeClr val="accent1"/>
+          </a:effectRef>
+          <a:fontRef idx="minor">
+            <a:schemeClr val="lt1"/>
+          </a:fontRef>
+        </p:style>
+        <p:txBody>
+          <a:bodyPr rtlCol="0" anchor="ctr"/>
+          <a:lstStyle/>
+          <a:p>
+            <a:pPr algn="ctr"/>
+          </a:p>
+        </p:txBody>
+      </p:sp>
+      <p:sp>
+        <p:nvSpPr>
+          <p:cNvPr id="23" name="TextBox 22"/>
+          <p:cNvSpPr txBox="1"/>
+          <p:nvPr/>
+        </p:nvSpPr>
+        <p:spPr>
+          <a:xfrm>
+            <a:off x="-800100" y="468503"/>
+            <a:ext cx="3048000" cy="140208"/>
+          </a:xfrm>
+          <a:prstGeom prst="rect">
+            <a:avLst/>
+          </a:prstGeom>
+          <a:noFill/>
+        </p:spPr>
+        <p:txBody>
+          <a:bodyPr wrap="none" lIns="0" rIns="0" tIns="0" bIns="0" anchor="ctr">
+            <a:spAutoFit/>
+          </a:bodyPr>
+          <a:lstStyle/>
+          <a:p>
+            <a:pPr algn="ctr"/>
+            <a:r>
+              <a:rPr sz="459" b="0" i="0">
+                <a:solidFill>
+                  <a:srgbClr val="FFFFFF"/>
+                </a:solidFill>
+                <a:latin typeface="Helvetica"/>
+              </a:rPr>
+              <a:t>0.30</a:t>
+            </a:r>
+          </a:p>
+        </p:txBody>
+      </p:sp>
+      <p:sp>
+        <p:nvSpPr>
+          <p:cNvPr id="24" name="Rectangle 23"/>
+          <p:cNvSpPr/>
+          <p:nvPr/>
+        </p:nvSpPr>
+        <p:spPr>
+          <a:xfrm>
+            <a:off x="533400" y="673100"/>
+            <a:ext cx="381000" cy="292100"/>
+          </a:xfrm>
+          <a:prstGeom prst="rect">
+            <a:avLst/>
+          </a:prstGeom>
+          <a:solidFill>
+            <a:srgbClr val="6085B8"/>
+          </a:solidFill>
+          <a:ln w="6350">
+            <a:solidFill>
+              <a:srgbClr val="FFFFFF"/>
+            </a:solidFill>
+          </a:ln>
+          <a:effectLst/>
+        </p:spPr>
+        <p:style>
+          <a:lnRef idx="1">
+            <a:schemeClr val="accent1"/>
+          </a:lnRef>
+          <a:fillRef idx="3">
+            <a:schemeClr val="accent1"/>
+          </a:fillRef>
+          <a:effectRef idx="2">
+            <a:schemeClr val="accent1"/>
+          </a:effectRef>
+          <a:fontRef idx="minor">
+            <a:schemeClr val="lt1"/>
+          </a:fontRef>
+        </p:style>
+        <p:txBody>
+          <a:bodyPr rtlCol="0" anchor="ctr"/>
+          <a:lstStyle/>
+          <a:p>
+            <a:pPr algn="ctr"/>
+          </a:p>
+        </p:txBody>
+      </p:sp>
+      <p:sp>
+        <p:nvSpPr>
+          <p:cNvPr id="25" name="TextBox 24"/>
+          <p:cNvSpPr txBox="1"/>
+          <p:nvPr/>
+        </p:nvSpPr>
+        <p:spPr>
+          <a:xfrm>
+            <a:off x="-800100" y="760602"/>
+            <a:ext cx="3048000" cy="140208"/>
+          </a:xfrm>
+          <a:prstGeom prst="rect">
+            <a:avLst/>
+          </a:prstGeom>
+          <a:noFill/>
+        </p:spPr>
+        <p:txBody>
+          <a:bodyPr wrap="none" lIns="0" rIns="0" tIns="0" bIns="0" anchor="ctr">
+            <a:spAutoFit/>
+          </a:bodyPr>
+          <a:lstStyle/>
+          <a:p>
+            <a:pPr algn="ctr"/>
+            <a:r>
+              <a:rPr sz="459" b="0" i="0">
+                <a:solidFill>
+                  <a:srgbClr val="FFFFFF"/>
+                </a:solidFill>
+                <a:latin typeface="Helvetica"/>
+              </a:rPr>
+              <a:t>0.31</a:t>
+            </a:r>
+          </a:p>
+        </p:txBody>
+      </p:sp>
+      <p:sp>
+        <p:nvSpPr>
+          <p:cNvPr id="26" name="Rectangle 25"/>
+          <p:cNvSpPr/>
+          <p:nvPr/>
+        </p:nvSpPr>
+        <p:spPr>
+          <a:xfrm>
+            <a:off x="533400" y="965200"/>
+            <a:ext cx="381000" cy="292100"/>
+          </a:xfrm>
+          <a:prstGeom prst="rect">
+            <a:avLst/>
+          </a:prstGeom>
+          <a:solidFill>
+            <a:srgbClr val="82A1CA"/>
+          </a:solidFill>
+          <a:ln w="6350">
+            <a:solidFill>
+              <a:srgbClr val="FFFFFF"/>
+            </a:solidFill>
+          </a:ln>
+          <a:effectLst/>
+        </p:spPr>
+        <p:style>
+          <a:lnRef idx="1">
+            <a:schemeClr val="accent1"/>
+          </a:lnRef>
+          <a:fillRef idx="3">
+            <a:schemeClr val="accent1"/>
+          </a:fillRef>
+          <a:effectRef idx="2">
+            <a:schemeClr val="accent1"/>
+          </a:effectRef>
+          <a:fontRef idx="minor">
+            <a:schemeClr val="lt1"/>
+          </a:fontRef>
+        </p:style>
+        <p:txBody>
+          <a:bodyPr rtlCol="0" anchor="ctr"/>
+          <a:lstStyle/>
+          <a:p>
+            <a:pPr algn="ctr"/>
+          </a:p>
+        </p:txBody>
+      </p:sp>
+      <p:sp>
+        <p:nvSpPr>
+          <p:cNvPr id="27" name="TextBox 26"/>
+          <p:cNvSpPr txBox="1"/>
+          <p:nvPr/>
+        </p:nvSpPr>
+        <p:spPr>
+          <a:xfrm>
+            <a:off x="-800100" y="1052703"/>
+            <a:ext cx="3048000" cy="140208"/>
+          </a:xfrm>
+          <a:prstGeom prst="rect">
+            <a:avLst/>
+          </a:prstGeom>
+          <a:noFill/>
+        </p:spPr>
+        <p:txBody>
+          <a:bodyPr wrap="none" lIns="0" rIns="0" tIns="0" bIns="0" anchor="ctr">
+            <a:spAutoFit/>
+          </a:bodyPr>
+          <a:lstStyle/>
+          <a:p>
+            <a:pPr algn="ctr"/>
+            <a:r>
+              <a:rPr sz="459" b="0" i="0">
+                <a:solidFill>
+                  <a:srgbClr val="1C1E23"/>
+                </a:solidFill>
+                <a:latin typeface="Helvetica"/>
+              </a:rPr>
+              <a:t>0.23</a:t>
+            </a:r>
+          </a:p>
+        </p:txBody>
+      </p:sp>
+      <p:sp>
+        <p:nvSpPr>
+          <p:cNvPr id="28" name="Rectangle 27"/>
+          <p:cNvSpPr/>
+          <p:nvPr/>
+        </p:nvSpPr>
+        <p:spPr>
+          <a:xfrm>
+            <a:off x="533400" y="1257300"/>
+            <a:ext cx="381000" cy="292100"/>
+          </a:xfrm>
+          <a:prstGeom prst="rect">
+            <a:avLst/>
+          </a:prstGeom>
+          <a:solidFill>
+            <a:srgbClr val="9CB5D7"/>
+          </a:solidFill>
+          <a:ln w="6350">
+            <a:solidFill>
+              <a:srgbClr val="FFFFFF"/>
+            </a:solidFill>
+          </a:ln>
+          <a:effectLst/>
+        </p:spPr>
+        <p:style>
+          <a:lnRef idx="1">
+            <a:schemeClr val="accent1"/>
+          </a:lnRef>
+          <a:fillRef idx="3">
+            <a:schemeClr val="accent1"/>
+          </a:fillRef>
+          <a:effectRef idx="2">
+            <a:schemeClr val="accent1"/>
+          </a:effectRef>
+          <a:fontRef idx="minor">
+            <a:schemeClr val="lt1"/>
+          </a:fontRef>
+        </p:style>
+        <p:txBody>
+          <a:bodyPr rtlCol="0" anchor="ctr"/>
+          <a:lstStyle/>
+          <a:p>
+            <a:pPr algn="ctr"/>
+          </a:p>
+        </p:txBody>
+      </p:sp>
+      <p:sp>
+        <p:nvSpPr>
+          <p:cNvPr id="29" name="TextBox 28"/>
+          <p:cNvSpPr txBox="1"/>
+          <p:nvPr/>
+        </p:nvSpPr>
+        <p:spPr>
+          <a:xfrm>
+            <a:off x="-800100" y="1344803"/>
+            <a:ext cx="3048000" cy="140208"/>
+          </a:xfrm>
+          <a:prstGeom prst="rect">
+            <a:avLst/>
+          </a:prstGeom>
+          <a:noFill/>
+        </p:spPr>
+        <p:txBody>
+          <a:bodyPr wrap="none" lIns="0" rIns="0" tIns="0" bIns="0" anchor="ctr">
+            <a:spAutoFit/>
+          </a:bodyPr>
+          <a:lstStyle/>
+          <a:p>
+            <a:pPr algn="ctr"/>
+            <a:r>
+              <a:rPr sz="459" b="0" i="0">
+                <a:solidFill>
+                  <a:srgbClr val="1C1E23"/>
+                </a:solidFill>
+                <a:latin typeface="Helvetica"/>
+              </a:rPr>
+              <a:t>0.17</a:t>
+            </a:r>
+          </a:p>
+        </p:txBody>
+      </p:sp>
+      <p:sp>
+        <p:nvSpPr>
+          <p:cNvPr id="30" name="Rectangle 29"/>
+          <p:cNvSpPr/>
+          <p:nvPr/>
+        </p:nvSpPr>
+        <p:spPr>
+          <a:xfrm>
+            <a:off x="914400" y="381000"/>
+            <a:ext cx="381000" cy="292100"/>
+          </a:xfrm>
+          <a:prstGeom prst="rect">
+            <a:avLst/>
+          </a:prstGeom>
+          <a:solidFill>
+            <a:srgbClr val="8CA9CF"/>
+          </a:solidFill>
+          <a:ln w="6350">
+            <a:solidFill>
+              <a:srgbClr val="FFFFFF"/>
+            </a:solidFill>
+          </a:ln>
+          <a:effectLst/>
+        </p:spPr>
+        <p:style>
+          <a:lnRef idx="1">
+            <a:schemeClr val="accent1"/>
+          </a:lnRef>
+          <a:fillRef idx="3">
+            <a:schemeClr val="accent1"/>
+          </a:fillRef>
+          <a:effectRef idx="2">
+            <a:schemeClr val="accent1"/>
+          </a:effectRef>
+          <a:fontRef idx="minor">
+            <a:schemeClr val="lt1"/>
+          </a:fontRef>
+        </p:style>
+        <p:txBody>
+          <a:bodyPr rtlCol="0" anchor="ctr"/>
+          <a:lstStyle/>
+          <a:p>
+            <a:pPr algn="ctr"/>
+          </a:p>
+        </p:txBody>
+      </p:sp>
+      <p:sp>
+        <p:nvSpPr>
+          <p:cNvPr id="31" name="TextBox 30"/>
+          <p:cNvSpPr txBox="1"/>
+          <p:nvPr/>
+        </p:nvSpPr>
+        <p:spPr>
+          <a:xfrm>
+            <a:off x="-419100" y="468503"/>
+            <a:ext cx="3048000" cy="140208"/>
+          </a:xfrm>
+          <a:prstGeom prst="rect">
+            <a:avLst/>
+          </a:prstGeom>
+          <a:noFill/>
+        </p:spPr>
+        <p:txBody>
+          <a:bodyPr wrap="none" lIns="0" rIns="0" tIns="0" bIns="0" anchor="ctr">
+            <a:spAutoFit/>
+          </a:bodyPr>
+          <a:lstStyle/>
+          <a:p>
+            <a:pPr algn="ctr"/>
+            <a:r>
+              <a:rPr sz="459" b="0" i="0">
+                <a:solidFill>
+                  <a:srgbClr val="1C1E23"/>
+                </a:solidFill>
+                <a:latin typeface="Helvetica"/>
+              </a:rPr>
+              <a:t>0.20</a:t>
+            </a:r>
+          </a:p>
+        </p:txBody>
+      </p:sp>
+      <p:sp>
+        <p:nvSpPr>
+          <p:cNvPr id="32" name="Rectangle 31"/>
+          <p:cNvSpPr/>
+          <p:nvPr/>
+        </p:nvSpPr>
+        <p:spPr>
+          <a:xfrm>
+            <a:off x="914400" y="673100"/>
+            <a:ext cx="381000" cy="292100"/>
+          </a:xfrm>
+          <a:prstGeom prst="rect">
+            <a:avLst/>
+          </a:prstGeom>
+          <a:solidFill>
+            <a:srgbClr val="426EA9"/>
+          </a:solidFill>
+          <a:ln w="6350">
+            <a:solidFill>
+              <a:srgbClr val="FFFFFF"/>
+            </a:solidFill>
+          </a:ln>
+          <a:effectLst/>
+        </p:spPr>
+        <p:style>
+          <a:lnRef idx="1">
+            <a:schemeClr val="accent1"/>
+          </a:lnRef>
+          <a:fillRef idx="3">
+            <a:schemeClr val="accent1"/>
+          </a:fillRef>
+          <a:effectRef idx="2">
+            <a:schemeClr val="accent1"/>
+          </a:effectRef>
+          <a:fontRef idx="minor">
+            <a:schemeClr val="lt1"/>
+          </a:fontRef>
+        </p:style>
+        <p:txBody>
+          <a:bodyPr rtlCol="0" anchor="ctr"/>
+          <a:lstStyle/>
+          <a:p>
+            <a:pPr algn="ctr"/>
+          </a:p>
+        </p:txBody>
+      </p:sp>
+      <p:sp>
+        <p:nvSpPr>
+          <p:cNvPr id="33" name="TextBox 32"/>
+          <p:cNvSpPr txBox="1"/>
+          <p:nvPr/>
+        </p:nvSpPr>
+        <p:spPr>
+          <a:xfrm>
+            <a:off x="-419100" y="760602"/>
+            <a:ext cx="3048000" cy="140208"/>
+          </a:xfrm>
+          <a:prstGeom prst="rect">
+            <a:avLst/>
+          </a:prstGeom>
+          <a:noFill/>
+        </p:spPr>
+        <p:txBody>
+          <a:bodyPr wrap="none" lIns="0" rIns="0" tIns="0" bIns="0" anchor="ctr">
+            <a:spAutoFit/>
+          </a:bodyPr>
+          <a:lstStyle/>
+          <a:p>
+            <a:pPr algn="ctr"/>
+            <a:r>
+              <a:rPr sz="459" b="0" i="0">
+                <a:solidFill>
+                  <a:srgbClr val="FFFFFF"/>
+                </a:solidFill>
+                <a:latin typeface="Helvetica"/>
+              </a:rPr>
+              <a:t>0.37</a:t>
+            </a:r>
+          </a:p>
+        </p:txBody>
+      </p:sp>
+      <p:sp>
+        <p:nvSpPr>
+          <p:cNvPr id="34" name="Rectangle 33"/>
+          <p:cNvSpPr/>
+          <p:nvPr/>
+        </p:nvSpPr>
+        <p:spPr>
+          <a:xfrm>
+            <a:off x="914400" y="965200"/>
+            <a:ext cx="381000" cy="292100"/>
+          </a:xfrm>
+          <a:prstGeom prst="rect">
+            <a:avLst/>
+          </a:prstGeom>
+          <a:solidFill>
+            <a:srgbClr val="6489BB"/>
+          </a:solidFill>
+          <a:ln w="6350">
+            <a:solidFill>
+              <a:srgbClr val="FFFFFF"/>
+            </a:solidFill>
+          </a:ln>
+          <a:effectLst/>
+        </p:spPr>
+        <p:style>
+          <a:lnRef idx="1">
+            <a:schemeClr val="accent1"/>
+          </a:lnRef>
+          <a:fillRef idx="3">
+            <a:schemeClr val="accent1"/>
+          </a:fillRef>
+          <a:effectRef idx="2">
+            <a:schemeClr val="accent1"/>
+          </a:effectRef>
+          <a:fontRef idx="minor">
+            <a:schemeClr val="lt1"/>
+          </a:fontRef>
+        </p:style>
+        <p:txBody>
+          <a:bodyPr rtlCol="0" anchor="ctr"/>
+          <a:lstStyle/>
+          <a:p>
+            <a:pPr algn="ctr"/>
+          </a:p>
+        </p:txBody>
+      </p:sp>
+      <p:sp>
+        <p:nvSpPr>
+          <p:cNvPr id="35" name="TextBox 34"/>
+          <p:cNvSpPr txBox="1"/>
+          <p:nvPr/>
+        </p:nvSpPr>
+        <p:spPr>
+          <a:xfrm>
+            <a:off x="-419100" y="1052703"/>
+            <a:ext cx="3048000" cy="140208"/>
+          </a:xfrm>
+          <a:prstGeom prst="rect">
+            <a:avLst/>
+          </a:prstGeom>
+          <a:noFill/>
+        </p:spPr>
+        <p:txBody>
+          <a:bodyPr wrap="none" lIns="0" rIns="0" tIns="0" bIns="0" anchor="ctr">
+            <a:spAutoFit/>
+          </a:bodyPr>
+          <a:lstStyle/>
+          <a:p>
+            <a:pPr algn="ctr"/>
+            <a:r>
+              <a:rPr sz="459" b="0" i="0">
+                <a:solidFill>
+                  <a:srgbClr val="FFFFFF"/>
+                </a:solidFill>
+                <a:latin typeface="Helvetica"/>
+              </a:rPr>
+              <a:t>0.30</a:t>
+            </a:r>
+          </a:p>
+        </p:txBody>
+      </p:sp>
+      <p:sp>
+        <p:nvSpPr>
+          <p:cNvPr id="36" name="Rectangle 35"/>
+          <p:cNvSpPr/>
+          <p:nvPr/>
+        </p:nvSpPr>
+        <p:spPr>
+          <a:xfrm>
+            <a:off x="914400" y="1257300"/>
+            <a:ext cx="381000" cy="292100"/>
+          </a:xfrm>
+          <a:prstGeom prst="rect">
+            <a:avLst/>
+          </a:prstGeom>
+          <a:solidFill>
+            <a:srgbClr val="ADC3E0"/>
+          </a:solidFill>
+          <a:ln w="6350">
+            <a:solidFill>
+              <a:srgbClr val="FFFFFF"/>
+            </a:solidFill>
+          </a:ln>
+          <a:effectLst/>
+        </p:spPr>
+        <p:style>
+          <a:lnRef idx="1">
+            <a:schemeClr val="accent1"/>
+          </a:lnRef>
+          <a:fillRef idx="3">
+            <a:schemeClr val="accent1"/>
+          </a:fillRef>
+          <a:effectRef idx="2">
+            <a:schemeClr val="accent1"/>
+          </a:effectRef>
+          <a:fontRef idx="minor">
+            <a:schemeClr val="lt1"/>
+          </a:fontRef>
+        </p:style>
+        <p:txBody>
+          <a:bodyPr rtlCol="0" anchor="ctr"/>
+          <a:lstStyle/>
+          <a:p>
+            <a:pPr algn="ctr"/>
+          </a:p>
+        </p:txBody>
+      </p:sp>
+      <p:sp>
+        <p:nvSpPr>
+          <p:cNvPr id="37" name="TextBox 36"/>
+          <p:cNvSpPr txBox="1"/>
+          <p:nvPr/>
+        </p:nvSpPr>
+        <p:spPr>
+          <a:xfrm>
+            <a:off x="-419100" y="1344803"/>
+            <a:ext cx="3048000" cy="140208"/>
+          </a:xfrm>
+          <a:prstGeom prst="rect">
+            <a:avLst/>
+          </a:prstGeom>
+          <a:noFill/>
+        </p:spPr>
+        <p:txBody>
+          <a:bodyPr wrap="none" lIns="0" rIns="0" tIns="0" bIns="0" anchor="ctr">
+            <a:spAutoFit/>
+          </a:bodyPr>
+          <a:lstStyle/>
+          <a:p>
+            <a:pPr algn="ctr"/>
+            <a:r>
+              <a:rPr sz="459" b="0" i="0">
+                <a:solidFill>
+                  <a:srgbClr val="1C1E23"/>
+                </a:solidFill>
+                <a:latin typeface="Helvetica"/>
+              </a:rPr>
+              <a:t>0.13</a:t>
+            </a:r>
+          </a:p>
+        </p:txBody>
+      </p:sp>
+      <p:sp>
+        <p:nvSpPr>
+          <p:cNvPr id="38" name="Rectangle 37"/>
+          <p:cNvSpPr/>
+          <p:nvPr/>
+        </p:nvSpPr>
+        <p:spPr>
+          <a:xfrm>
+            <a:off x="1295400" y="381000"/>
+            <a:ext cx="381000" cy="292100"/>
+          </a:xfrm>
+          <a:prstGeom prst="rect">
+            <a:avLst/>
+          </a:prstGeom>
+          <a:solidFill>
+            <a:srgbClr val="88A6CD"/>
+          </a:solidFill>
+          <a:ln w="6350">
+            <a:solidFill>
+              <a:srgbClr val="FFFFFF"/>
+            </a:solidFill>
+          </a:ln>
+          <a:effectLst/>
+        </p:spPr>
+        <p:style>
+          <a:lnRef idx="1">
+            <a:schemeClr val="accent1"/>
+          </a:lnRef>
+          <a:fillRef idx="3">
+            <a:schemeClr val="accent1"/>
+          </a:fillRef>
+          <a:effectRef idx="2">
+            <a:schemeClr val="accent1"/>
+          </a:effectRef>
+          <a:fontRef idx="minor">
+            <a:schemeClr val="lt1"/>
+          </a:fontRef>
+        </p:style>
+        <p:txBody>
+          <a:bodyPr rtlCol="0" anchor="ctr"/>
+          <a:lstStyle/>
+          <a:p>
+            <a:pPr algn="ctr"/>
+          </a:p>
+        </p:txBody>
+      </p:sp>
+      <p:sp>
+        <p:nvSpPr>
+          <p:cNvPr id="39" name="TextBox 38"/>
+          <p:cNvSpPr txBox="1"/>
+          <p:nvPr/>
+        </p:nvSpPr>
+        <p:spPr>
+          <a:xfrm>
+            <a:off x="-38100" y="468503"/>
+            <a:ext cx="3048000" cy="140208"/>
+          </a:xfrm>
+          <a:prstGeom prst="rect">
+            <a:avLst/>
+          </a:prstGeom>
+          <a:noFill/>
+        </p:spPr>
+        <p:txBody>
+          <a:bodyPr wrap="none" lIns="0" rIns="0" tIns="0" bIns="0" anchor="ctr">
+            <a:spAutoFit/>
+          </a:bodyPr>
+          <a:lstStyle/>
+          <a:p>
+            <a:pPr algn="ctr"/>
+            <a:r>
+              <a:rPr sz="459" b="0" i="0">
+                <a:solidFill>
+                  <a:srgbClr val="1C1E23"/>
+                </a:solidFill>
+                <a:latin typeface="Helvetica"/>
+              </a:rPr>
+              <a:t>0.21</a:t>
+            </a:r>
+          </a:p>
+        </p:txBody>
+      </p:sp>
+      <p:sp>
+        <p:nvSpPr>
+          <p:cNvPr id="40" name="Rectangle 39"/>
+          <p:cNvSpPr/>
+          <p:nvPr/>
+        </p:nvSpPr>
+        <p:spPr>
+          <a:xfrm>
+            <a:off x="1295400" y="673100"/>
+            <a:ext cx="381000" cy="292100"/>
+          </a:xfrm>
+          <a:prstGeom prst="rect">
+            <a:avLst/>
+          </a:prstGeom>
+          <a:solidFill>
+            <a:srgbClr val="88A5CD"/>
+          </a:solidFill>
+          <a:ln w="6350">
+            <a:solidFill>
+              <a:srgbClr val="FFFFFF"/>
+            </a:solidFill>
+          </a:ln>
+          <a:effectLst/>
+        </p:spPr>
+        <p:style>
+          <a:lnRef idx="1">
+            <a:schemeClr val="accent1"/>
+          </a:lnRef>
+          <a:fillRef idx="3">
+            <a:schemeClr val="accent1"/>
+          </a:fillRef>
+          <a:effectRef idx="2">
+            <a:schemeClr val="accent1"/>
+          </a:effectRef>
+          <a:fontRef idx="minor">
+            <a:schemeClr val="lt1"/>
+          </a:fontRef>
+        </p:style>
+        <p:txBody>
+          <a:bodyPr rtlCol="0" anchor="ctr"/>
+          <a:lstStyle/>
+          <a:p>
+            <a:pPr algn="ctr"/>
+          </a:p>
+        </p:txBody>
+      </p:sp>
+      <p:sp>
+        <p:nvSpPr>
+          <p:cNvPr id="41" name="TextBox 40"/>
+          <p:cNvSpPr txBox="1"/>
+          <p:nvPr/>
+        </p:nvSpPr>
+        <p:spPr>
+          <a:xfrm>
+            <a:off x="-38100" y="760602"/>
+            <a:ext cx="3048000" cy="140208"/>
+          </a:xfrm>
+          <a:prstGeom prst="rect">
+            <a:avLst/>
+          </a:prstGeom>
+          <a:noFill/>
+        </p:spPr>
+        <p:txBody>
+          <a:bodyPr wrap="none" lIns="0" rIns="0" tIns="0" bIns="0" anchor="ctr">
+            <a:spAutoFit/>
+          </a:bodyPr>
+          <a:lstStyle/>
+          <a:p>
+            <a:pPr algn="ctr"/>
+            <a:r>
+              <a:rPr sz="459" b="0" i="0">
+                <a:solidFill>
+                  <a:srgbClr val="1C1E23"/>
+                </a:solidFill>
+                <a:latin typeface="Helvetica"/>
+              </a:rPr>
+              <a:t>0.21</a:t>
+            </a:r>
+          </a:p>
+        </p:txBody>
+      </p:sp>
+      <p:sp>
+        <p:nvSpPr>
+          <p:cNvPr id="42" name="Rectangle 41"/>
+          <p:cNvSpPr/>
+          <p:nvPr/>
+        </p:nvSpPr>
+        <p:spPr>
+          <a:xfrm>
+            <a:off x="1295400" y="965200"/>
+            <a:ext cx="381000" cy="292100"/>
+          </a:xfrm>
+          <a:prstGeom prst="rect">
+            <a:avLst/>
+          </a:prstGeom>
+          <a:solidFill>
+            <a:srgbClr val="577FB4"/>
+          </a:solidFill>
+          <a:ln w="6350">
+            <a:solidFill>
+              <a:srgbClr val="FFFFFF"/>
+            </a:solidFill>
+          </a:ln>
+          <a:effectLst/>
+        </p:spPr>
+        <p:style>
+          <a:lnRef idx="1">
+            <a:schemeClr val="accent1"/>
+          </a:lnRef>
+          <a:fillRef idx="3">
+            <a:schemeClr val="accent1"/>
+          </a:fillRef>
+          <a:effectRef idx="2">
+            <a:schemeClr val="accent1"/>
+          </a:effectRef>
+          <a:fontRef idx="minor">
+            <a:schemeClr val="lt1"/>
+          </a:fontRef>
+        </p:style>
+        <p:txBody>
+          <a:bodyPr rtlCol="0" anchor="ctr"/>
+          <a:lstStyle/>
+          <a:p>
+            <a:pPr algn="ctr"/>
+          </a:p>
+        </p:txBody>
+      </p:sp>
+      <p:sp>
+        <p:nvSpPr>
+          <p:cNvPr id="43" name="TextBox 42"/>
+          <p:cNvSpPr txBox="1"/>
+          <p:nvPr/>
+        </p:nvSpPr>
+        <p:spPr>
+          <a:xfrm>
+            <a:off x="-38100" y="1052703"/>
+            <a:ext cx="3048000" cy="140208"/>
+          </a:xfrm>
+          <a:prstGeom prst="rect">
+            <a:avLst/>
+          </a:prstGeom>
+          <a:noFill/>
+        </p:spPr>
+        <p:txBody>
+          <a:bodyPr wrap="none" lIns="0" rIns="0" tIns="0" bIns="0" anchor="ctr">
+            <a:spAutoFit/>
+          </a:bodyPr>
+          <a:lstStyle/>
+          <a:p>
+            <a:pPr algn="ctr"/>
+            <a:r>
+              <a:rPr sz="459" b="0" i="0">
+                <a:solidFill>
+                  <a:srgbClr val="FFFFFF"/>
+                </a:solidFill>
+                <a:latin typeface="Helvetica"/>
+              </a:rPr>
+              <a:t>0.33</a:t>
+            </a:r>
+          </a:p>
+        </p:txBody>
+      </p:sp>
+      <p:sp>
+        <p:nvSpPr>
+          <p:cNvPr id="44" name="Rectangle 43"/>
+          <p:cNvSpPr/>
+          <p:nvPr/>
+        </p:nvSpPr>
+        <p:spPr>
+          <a:xfrm>
+            <a:off x="1295400" y="1257300"/>
+            <a:ext cx="381000" cy="292100"/>
+          </a:xfrm>
+          <a:prstGeom prst="rect">
+            <a:avLst/>
+          </a:prstGeom>
+          <a:solidFill>
+            <a:srgbClr val="7999C5"/>
+          </a:solidFill>
+          <a:ln w="6350">
+            <a:solidFill>
+              <a:srgbClr val="FFFFFF"/>
+            </a:solidFill>
+          </a:ln>
+          <a:effectLst/>
+        </p:spPr>
+        <p:style>
+          <a:lnRef idx="1">
+            <a:schemeClr val="accent1"/>
+          </a:lnRef>
+          <a:fillRef idx="3">
+            <a:schemeClr val="accent1"/>
+          </a:fillRef>
+          <a:effectRef idx="2">
+            <a:schemeClr val="accent1"/>
+          </a:effectRef>
+          <a:fontRef idx="minor">
+            <a:schemeClr val="lt1"/>
+          </a:fontRef>
+        </p:style>
+        <p:txBody>
+          <a:bodyPr rtlCol="0" anchor="ctr"/>
+          <a:lstStyle/>
+          <a:p>
+            <a:pPr algn="ctr"/>
+          </a:p>
+        </p:txBody>
+      </p:sp>
+      <p:sp>
+        <p:nvSpPr>
+          <p:cNvPr id="45" name="TextBox 44"/>
+          <p:cNvSpPr txBox="1"/>
+          <p:nvPr/>
+        </p:nvSpPr>
+        <p:spPr>
+          <a:xfrm>
+            <a:off x="-38100" y="1344803"/>
+            <a:ext cx="3048000" cy="140208"/>
+          </a:xfrm>
+          <a:prstGeom prst="rect">
+            <a:avLst/>
+          </a:prstGeom>
+          <a:noFill/>
+        </p:spPr>
+        <p:txBody>
+          <a:bodyPr wrap="none" lIns="0" rIns="0" tIns="0" bIns="0" anchor="ctr">
+            <a:spAutoFit/>
+          </a:bodyPr>
+          <a:lstStyle/>
+          <a:p>
+            <a:pPr algn="ctr"/>
+            <a:r>
+              <a:rPr sz="459" b="0" i="0">
+                <a:solidFill>
+                  <a:srgbClr val="1C1E23"/>
+                </a:solidFill>
+                <a:latin typeface="Helvetica"/>
+              </a:rPr>
+              <a:t>0.25</a:t>
+            </a:r>
+          </a:p>
+        </p:txBody>
+      </p:sp>
+      <p:sp>
+        <p:nvSpPr>
+          <p:cNvPr id="46" name="Rectangle 45"/>
+          <p:cNvSpPr/>
+          <p:nvPr/>
+        </p:nvSpPr>
+        <p:spPr>
+          <a:xfrm>
+            <a:off x="1676400" y="381000"/>
+            <a:ext cx="381000" cy="292100"/>
+          </a:xfrm>
+          <a:prstGeom prst="rect">
+            <a:avLst/>
+          </a:prstGeom>
+          <a:solidFill>
+            <a:srgbClr val="688DBD"/>
+          </a:solidFill>
+          <a:ln w="6350">
+            <a:solidFill>
+              <a:srgbClr val="FFFFFF"/>
+            </a:solidFill>
+          </a:ln>
+          <a:effectLst/>
+        </p:spPr>
+        <p:style>
+          <a:lnRef idx="1">
+            <a:schemeClr val="accent1"/>
+          </a:lnRef>
+          <a:fillRef idx="3">
+            <a:schemeClr val="accent1"/>
+          </a:fillRef>
+          <a:effectRef idx="2">
+            <a:schemeClr val="accent1"/>
+          </a:effectRef>
+          <a:fontRef idx="minor">
+            <a:schemeClr val="lt1"/>
+          </a:fontRef>
+        </p:style>
+        <p:txBody>
+          <a:bodyPr rtlCol="0" anchor="ctr"/>
+          <a:lstStyle/>
+          <a:p>
+            <a:pPr algn="ctr"/>
+          </a:p>
+        </p:txBody>
+      </p:sp>
+      <p:sp>
+        <p:nvSpPr>
+          <p:cNvPr id="47" name="TextBox 46"/>
+          <p:cNvSpPr txBox="1"/>
+          <p:nvPr/>
+        </p:nvSpPr>
+        <p:spPr>
+          <a:xfrm>
+            <a:off x="342900" y="468503"/>
+            <a:ext cx="3048000" cy="140208"/>
+          </a:xfrm>
+          <a:prstGeom prst="rect">
+            <a:avLst/>
+          </a:prstGeom>
+          <a:noFill/>
+        </p:spPr>
+        <p:txBody>
+          <a:bodyPr wrap="none" lIns="0" rIns="0" tIns="0" bIns="0" anchor="ctr">
+            <a:spAutoFit/>
+          </a:bodyPr>
+          <a:lstStyle/>
+          <a:p>
+            <a:pPr algn="ctr"/>
+            <a:r>
+              <a:rPr sz="459" b="0" i="0">
+                <a:solidFill>
+                  <a:srgbClr val="FFFFFF"/>
+                </a:solidFill>
+                <a:latin typeface="Helvetica"/>
+              </a:rPr>
+              <a:t>0.29</a:t>
+            </a:r>
+          </a:p>
+        </p:txBody>
+      </p:sp>
+      <p:sp>
+        <p:nvSpPr>
+          <p:cNvPr id="48" name="Rectangle 47"/>
+          <p:cNvSpPr/>
+          <p:nvPr/>
+        </p:nvSpPr>
+        <p:spPr>
+          <a:xfrm>
+            <a:off x="1676400" y="673100"/>
+            <a:ext cx="381000" cy="292100"/>
+          </a:xfrm>
+          <a:prstGeom prst="rect">
+            <a:avLst/>
+          </a:prstGeom>
+          <a:solidFill>
+            <a:srgbClr val="B7CBE5"/>
+          </a:solidFill>
+          <a:ln w="6350">
+            <a:solidFill>
+              <a:srgbClr val="FFFFFF"/>
+            </a:solidFill>
+          </a:ln>
+          <a:effectLst/>
+        </p:spPr>
+        <p:style>
+          <a:lnRef idx="1">
+            <a:schemeClr val="accent1"/>
+          </a:lnRef>
+          <a:fillRef idx="3">
+            <a:schemeClr val="accent1"/>
+          </a:fillRef>
+          <a:effectRef idx="2">
+            <a:schemeClr val="accent1"/>
+          </a:effectRef>
+          <a:fontRef idx="minor">
+            <a:schemeClr val="lt1"/>
+          </a:fontRef>
+        </p:style>
+        <p:txBody>
+          <a:bodyPr rtlCol="0" anchor="ctr"/>
+          <a:lstStyle/>
+          <a:p>
+            <a:pPr algn="ctr"/>
+          </a:p>
+        </p:txBody>
+      </p:sp>
+      <p:sp>
+        <p:nvSpPr>
+          <p:cNvPr id="49" name="TextBox 48"/>
+          <p:cNvSpPr txBox="1"/>
+          <p:nvPr/>
+        </p:nvSpPr>
+        <p:spPr>
+          <a:xfrm>
+            <a:off x="342900" y="760602"/>
+            <a:ext cx="3048000" cy="140208"/>
+          </a:xfrm>
+          <a:prstGeom prst="rect">
+            <a:avLst/>
+          </a:prstGeom>
+          <a:noFill/>
+        </p:spPr>
+        <p:txBody>
+          <a:bodyPr wrap="none" lIns="0" rIns="0" tIns="0" bIns="0" anchor="ctr">
+            <a:spAutoFit/>
+          </a:bodyPr>
+          <a:lstStyle/>
+          <a:p>
+            <a:pPr algn="ctr"/>
+            <a:r>
+              <a:rPr sz="459" b="0" i="0">
+                <a:solidFill>
+                  <a:srgbClr val="1C1E23"/>
+                </a:solidFill>
+                <a:latin typeface="Helvetica"/>
+              </a:rPr>
+              <a:t>0.11</a:t>
+            </a:r>
+          </a:p>
+        </p:txBody>
+      </p:sp>
+      <p:sp>
+        <p:nvSpPr>
+          <p:cNvPr id="50" name="Rectangle 49"/>
+          <p:cNvSpPr/>
+          <p:nvPr/>
+        </p:nvSpPr>
+        <p:spPr>
+          <a:xfrm>
+            <a:off x="1676400" y="965200"/>
+            <a:ext cx="381000" cy="292100"/>
+          </a:xfrm>
+          <a:prstGeom prst="rect">
+            <a:avLst/>
+          </a:prstGeom>
+          <a:solidFill>
+            <a:srgbClr val="A3BBDA"/>
+          </a:solidFill>
+          <a:ln w="6350">
+            <a:solidFill>
+              <a:srgbClr val="FFFFFF"/>
+            </a:solidFill>
+          </a:ln>
+          <a:effectLst/>
+        </p:spPr>
+        <p:style>
+          <a:lnRef idx="1">
+            <a:schemeClr val="accent1"/>
+          </a:lnRef>
+          <a:fillRef idx="3">
+            <a:schemeClr val="accent1"/>
+          </a:fillRef>
+          <a:effectRef idx="2">
+            <a:schemeClr val="accent1"/>
+          </a:effectRef>
+          <a:fontRef idx="minor">
+            <a:schemeClr val="lt1"/>
+          </a:fontRef>
+        </p:style>
+        <p:txBody>
+          <a:bodyPr rtlCol="0" anchor="ctr"/>
+          <a:lstStyle/>
+          <a:p>
+            <a:pPr algn="ctr"/>
+          </a:p>
+        </p:txBody>
+      </p:sp>
+      <p:sp>
+        <p:nvSpPr>
+          <p:cNvPr id="51" name="TextBox 50"/>
+          <p:cNvSpPr txBox="1"/>
+          <p:nvPr/>
+        </p:nvSpPr>
+        <p:spPr>
+          <a:xfrm>
+            <a:off x="342900" y="1052703"/>
+            <a:ext cx="3048000" cy="140208"/>
+          </a:xfrm>
+          <a:prstGeom prst="rect">
+            <a:avLst/>
+          </a:prstGeom>
+          <a:noFill/>
+        </p:spPr>
+        <p:txBody>
+          <a:bodyPr wrap="none" lIns="0" rIns="0" tIns="0" bIns="0" anchor="ctr">
+            <a:spAutoFit/>
+          </a:bodyPr>
+          <a:lstStyle/>
+          <a:p>
+            <a:pPr algn="ctr"/>
+            <a:r>
+              <a:rPr sz="459" b="0" i="0">
+                <a:solidFill>
+                  <a:srgbClr val="1C1E23"/>
+                </a:solidFill>
+                <a:latin typeface="Helvetica"/>
+              </a:rPr>
+              <a:t>0.15</a:t>
+            </a:r>
+          </a:p>
+        </p:txBody>
+      </p:sp>
+      <p:sp>
+        <p:nvSpPr>
+          <p:cNvPr id="52" name="Rectangle 51"/>
+          <p:cNvSpPr/>
+          <p:nvPr/>
+        </p:nvSpPr>
+        <p:spPr>
+          <a:xfrm>
+            <a:off x="1676400" y="1257300"/>
+            <a:ext cx="381000" cy="292100"/>
+          </a:xfrm>
+          <a:prstGeom prst="rect">
+            <a:avLst/>
+          </a:prstGeom>
+          <a:solidFill>
+            <a:srgbClr val="215499"/>
+          </a:solidFill>
+          <a:ln w="6350">
+            <a:solidFill>
+              <a:srgbClr val="FFFFFF"/>
+            </a:solidFill>
+          </a:ln>
+          <a:effectLst/>
+        </p:spPr>
+        <p:style>
+          <a:lnRef idx="1">
+            <a:schemeClr val="accent1"/>
+          </a:lnRef>
+          <a:fillRef idx="3">
+            <a:schemeClr val="accent1"/>
+          </a:fillRef>
+          <a:effectRef idx="2">
+            <a:schemeClr val="accent1"/>
+          </a:effectRef>
+          <a:fontRef idx="minor">
+            <a:schemeClr val="lt1"/>
+          </a:fontRef>
+        </p:style>
+        <p:txBody>
+          <a:bodyPr rtlCol="0" anchor="ctr"/>
+          <a:lstStyle/>
+          <a:p>
+            <a:pPr algn="ctr"/>
+          </a:p>
+        </p:txBody>
+      </p:sp>
+      <p:sp>
+        <p:nvSpPr>
+          <p:cNvPr id="53" name="TextBox 52"/>
+          <p:cNvSpPr txBox="1"/>
+          <p:nvPr/>
+        </p:nvSpPr>
+        <p:spPr>
+          <a:xfrm>
+            <a:off x="342900" y="1344803"/>
+            <a:ext cx="3048000" cy="140208"/>
+          </a:xfrm>
+          <a:prstGeom prst="rect">
+            <a:avLst/>
+          </a:prstGeom>
+          <a:noFill/>
+        </p:spPr>
+        <p:txBody>
+          <a:bodyPr wrap="none" lIns="0" rIns="0" tIns="0" bIns="0" anchor="ctr">
+            <a:spAutoFit/>
+          </a:bodyPr>
+          <a:lstStyle/>
+          <a:p>
+            <a:pPr algn="ctr"/>
+            <a:r>
+              <a:rPr sz="459" b="0" i="0">
+                <a:solidFill>
+                  <a:srgbClr val="FFFFFF"/>
+                </a:solidFill>
+                <a:latin typeface="Helvetica"/>
+              </a:rPr>
+              <a:t>0.46</a:t>
+            </a:r>
+          </a:p>
+        </p:txBody>
+      </p:sp>
       <p:cxnSp>
         <p:nvCxnSpPr>
-          <p:cNvPr id="13" name="Connector 12"/>
+          <p:cNvPr id="54" name="Connector 53"/>
           <p:cNvCxnSpPr/>
           <p:nvPr/>
         </p:nvCxnSpPr>
         <p:spPr>
           <a:xfrm>
-            <a:off x="476250" y="965200"/>
-            <a:ext cx="31750" cy="0"/>
+            <a:off x="533400" y="381000"/>
+            <a:ext cx="1524000" cy="1168400"/>
           </a:xfrm>
           <a:prstGeom prst="line">
             <a:avLst/>
           </a:prstGeom>
-          <a:ln w="7620">
+          <a:ln w="8890">
             <a:solidFill>
               <a:srgbClr val="1C1E23"/>
             </a:solidFill>
+            <a:prstDash val="dash"/>
           </a:ln>
         </p:spPr>
         <p:style>
@@ -3510,338 +5122,13 @@
       </p:cxnSp>
       <p:sp>
         <p:nvSpPr>
-          <p:cNvPr id="14" name="TextBox 13"/>
+          <p:cNvPr id="55" name="TextBox 54"/>
           <p:cNvSpPr txBox="1"/>
           <p:nvPr/>
         </p:nvSpPr>
         <p:spPr>
           <a:xfrm>
-            <a:off x="-1061720" y="896747"/>
-            <a:ext cx="3048000" cy="164592"/>
-          </a:xfrm>
-          <a:prstGeom prst="rect">
-            <a:avLst/>
-          </a:prstGeom>
-          <a:noFill/>
-        </p:spPr>
-        <p:txBody>
-          <a:bodyPr wrap="none" lIns="0" rIns="0" tIns="0" bIns="0" anchor="ctr">
-            <a:spAutoFit/>
-          </a:bodyPr>
-          <a:lstStyle/>
-          <a:p>
-            <a:pPr algn="r"/>
-            <a:r>
-              <a:rPr sz="540" b="0" i="0">
-                <a:solidFill>
-                  <a:srgbClr val="6B727C"/>
-                </a:solidFill>
-                <a:latin typeface="Helvetica"/>
-              </a:rPr>
-              <a:t/>
-            </a:r>
-          </a:p>
-        </p:txBody>
-      </p:sp>
-      <p:cxnSp>
-        <p:nvCxnSpPr>
-          <p:cNvPr id="15" name="Connector 14"/>
-          <p:cNvCxnSpPr/>
-          <p:nvPr/>
-        </p:nvCxnSpPr>
-        <p:spPr>
-          <a:xfrm>
-            <a:off x="476250" y="381000"/>
-            <a:ext cx="31750" cy="0"/>
-          </a:xfrm>
-          <a:prstGeom prst="line">
-            <a:avLst/>
-          </a:prstGeom>
-          <a:ln w="7620">
-            <a:solidFill>
-              <a:srgbClr val="1C1E23"/>
-            </a:solidFill>
-          </a:ln>
-        </p:spPr>
-        <p:style>
-          <a:lnRef idx="2">
-            <a:schemeClr val="accent1"/>
-          </a:lnRef>
-          <a:fillRef idx="0">
-            <a:schemeClr val="accent1"/>
-          </a:fillRef>
-          <a:effectRef idx="1">
-            <a:schemeClr val="accent1"/>
-          </a:effectRef>
-          <a:fontRef idx="minor">
-            <a:schemeClr val="tx1"/>
-          </a:fontRef>
-        </p:style>
-      </p:cxnSp>
-      <p:sp>
-        <p:nvSpPr>
-          <p:cNvPr id="16" name="TextBox 15"/>
-          <p:cNvSpPr txBox="1"/>
-          <p:nvPr/>
-        </p:nvSpPr>
-        <p:spPr>
-          <a:xfrm>
-            <a:off x="-1061720" y="312547"/>
-            <a:ext cx="3048000" cy="164592"/>
-          </a:xfrm>
-          <a:prstGeom prst="rect">
-            <a:avLst/>
-          </a:prstGeom>
-          <a:noFill/>
-        </p:spPr>
-        <p:txBody>
-          <a:bodyPr wrap="none" lIns="0" rIns="0" tIns="0" bIns="0" anchor="ctr">
-            <a:spAutoFit/>
-          </a:bodyPr>
-          <a:lstStyle/>
-          <a:p>
-            <a:pPr algn="r"/>
-            <a:r>
-              <a:rPr sz="540" b="0" i="0">
-                <a:solidFill>
-                  <a:srgbClr val="6B727C"/>
-                </a:solidFill>
-                <a:latin typeface="Helvetica"/>
-              </a:rPr>
-              <a:t>5</a:t>
-            </a:r>
-          </a:p>
-        </p:txBody>
-      </p:sp>
-      <p:sp>
-        <p:nvSpPr>
-          <p:cNvPr id="17" name="TextBox 16"/>
-          <p:cNvSpPr txBox="1"/>
-          <p:nvPr/>
-        </p:nvSpPr>
-        <p:spPr>
-          <a:xfrm>
-            <a:off x="-1054100" y="224917"/>
-            <a:ext cx="3048000" cy="164592"/>
-          </a:xfrm>
-          <a:prstGeom prst="rect">
-            <a:avLst/>
-          </a:prstGeom>
-          <a:noFill/>
-        </p:spPr>
-        <p:txBody>
-          <a:bodyPr wrap="none" lIns="0" rIns="0" tIns="0" bIns="0" anchor="ctr">
-            <a:spAutoFit/>
-          </a:bodyPr>
-          <a:lstStyle/>
-          <a:p>
-            <a:pPr algn="l"/>
-            <a:r>
-              <a:rPr sz="540" b="0" i="0">
-                <a:solidFill>
-                  <a:srgbClr val="1C1E23"/>
-                </a:solidFill>
-                <a:latin typeface="Helvetica"/>
-              </a:rPr>
-              <a:t>forecast utility rank</a:t>
-            </a:r>
-          </a:p>
-        </p:txBody>
-      </p:sp>
-      <p:cxnSp>
-        <p:nvCxnSpPr>
-          <p:cNvPr id="18" name="Connector 17"/>
-          <p:cNvCxnSpPr/>
-          <p:nvPr/>
-        </p:nvCxnSpPr>
-        <p:spPr>
-          <a:xfrm flipV="1">
-            <a:off x="508000" y="381000"/>
-            <a:ext cx="1701800" cy="1168400"/>
-          </a:xfrm>
-          <a:prstGeom prst="line">
-            <a:avLst/>
-          </a:prstGeom>
-          <a:ln w="8890">
-            <a:solidFill>
-              <a:srgbClr val="CCCED3"/>
-            </a:solidFill>
-            <a:prstDash val="dash"/>
-          </a:ln>
-        </p:spPr>
-        <p:style>
-          <a:lnRef idx="2">
-            <a:schemeClr val="accent1"/>
-          </a:lnRef>
-          <a:fillRef idx="0">
-            <a:schemeClr val="accent1"/>
-          </a:fillRef>
-          <a:effectRef idx="1">
-            <a:schemeClr val="accent1"/>
-          </a:effectRef>
-          <a:fontRef idx="minor">
-            <a:schemeClr val="tx1"/>
-          </a:fontRef>
-        </p:style>
-      </p:cxnSp>
-      <p:sp>
-        <p:nvSpPr>
-          <p:cNvPr id="19" name="Rectangle 18"/>
-          <p:cNvSpPr/>
-          <p:nvPr/>
-        </p:nvSpPr>
-        <p:spPr>
-          <a:xfrm>
-            <a:off x="584200" y="685800"/>
-            <a:ext cx="1549400" cy="533400"/>
-          </a:xfrm>
-          <a:prstGeom prst="rect">
-            <a:avLst/>
-          </a:prstGeom>
-          <a:noFill/>
-          <a:ln w="7620">
-            <a:solidFill>
-              <a:srgbClr val="9EA5AD"/>
-            </a:solidFill>
-          </a:ln>
-          <a:effectLst/>
-        </p:spPr>
-        <p:style>
-          <a:lnRef idx="1">
-            <a:schemeClr val="accent1"/>
-          </a:lnRef>
-          <a:fillRef idx="3">
-            <a:schemeClr val="accent1"/>
-          </a:fillRef>
-          <a:effectRef idx="2">
-            <a:schemeClr val="accent1"/>
-          </a:effectRef>
-          <a:fontRef idx="minor">
-            <a:schemeClr val="lt1"/>
-          </a:fontRef>
-        </p:style>
-        <p:txBody>
-          <a:bodyPr rtlCol="0" anchor="ctr"/>
-          <a:lstStyle/>
-          <a:p>
-            <a:pPr algn="ctr"/>
-          </a:p>
-        </p:txBody>
-      </p:sp>
-      <p:sp>
-        <p:nvSpPr>
-          <p:cNvPr id="20" name="TextBox 19"/>
-          <p:cNvSpPr txBox="1"/>
-          <p:nvPr/>
-        </p:nvSpPr>
-        <p:spPr>
-          <a:xfrm>
-            <a:off x="-165100" y="799846"/>
-            <a:ext cx="3048000" cy="158496"/>
-          </a:xfrm>
-          <a:prstGeom prst="rect">
-            <a:avLst/>
-          </a:prstGeom>
-          <a:noFill/>
-        </p:spPr>
-        <p:txBody>
-          <a:bodyPr wrap="none" lIns="0" rIns="0" tIns="0" bIns="0" anchor="ctr">
-            <a:spAutoFit/>
-          </a:bodyPr>
-          <a:lstStyle/>
-          <a:p>
-            <a:pPr algn="ctr"/>
-            <a:r>
-              <a:rPr sz="520" b="0" i="0">
-                <a:solidFill>
-                  <a:srgbClr val="AD2B2B"/>
-                </a:solidFill>
-                <a:latin typeface="Helvetica"/>
-              </a:rPr>
-              <a:t>[FIG-RANK-DISAGREEMENT]</a:t>
-            </a:r>
-          </a:p>
-        </p:txBody>
-      </p:sp>
-      <p:sp>
-        <p:nvSpPr>
-          <p:cNvPr id="21" name="TextBox 20"/>
-          <p:cNvSpPr txBox="1"/>
-          <p:nvPr/>
-        </p:nvSpPr>
-        <p:spPr>
-          <a:xfrm>
-            <a:off x="-165100" y="921004"/>
-            <a:ext cx="3048000" cy="146304"/>
-          </a:xfrm>
-          <a:prstGeom prst="rect">
-            <a:avLst/>
-          </a:prstGeom>
-          <a:noFill/>
-        </p:spPr>
-        <p:txBody>
-          <a:bodyPr wrap="none" lIns="0" rIns="0" tIns="0" bIns="0" anchor="ctr">
-            <a:spAutoFit/>
-          </a:bodyPr>
-          <a:lstStyle/>
-          <a:p>
-            <a:pPr algn="ctr"/>
-            <a:r>
-              <a:rPr sz="480" b="0" i="0">
-                <a:solidFill>
-                  <a:srgbClr val="6B727C"/>
-                </a:solidFill>
-                <a:latin typeface="Helvetica"/>
-              </a:rPr>
-              <a:t>winner agreement and pairwise</a:t>
-            </a:r>
-          </a:p>
-        </p:txBody>
-      </p:sp>
-      <p:sp>
-        <p:nvSpPr>
-          <p:cNvPr id="22" name="TextBox 21"/>
-          <p:cNvSpPr txBox="1"/>
-          <p:nvPr/>
-        </p:nvSpPr>
-        <p:spPr>
-          <a:xfrm>
-            <a:off x="-165100" y="1009904"/>
-            <a:ext cx="3048000" cy="146304"/>
-          </a:xfrm>
-          <a:prstGeom prst="rect">
-            <a:avLst/>
-          </a:prstGeom>
-          <a:noFill/>
-        </p:spPr>
-        <p:txBody>
-          <a:bodyPr wrap="none" lIns="0" rIns="0" tIns="0" bIns="0" anchor="ctr">
-            <a:spAutoFit/>
-          </a:bodyPr>
-          <a:lstStyle/>
-          <a:p>
-            <a:pPr algn="ctr"/>
-            <a:r>
-              <a:rPr sz="480" b="0" i="0">
-                <a:solidFill>
-                  <a:srgbClr val="6B727C"/>
-                </a:solidFill>
-                <a:latin typeface="Helvetica"/>
-              </a:rPr>
-              <a:t>discordance within parents</a:t>
-            </a:r>
-          </a:p>
-        </p:txBody>
-      </p:sp>
-      <p:sp>
-        <p:nvSpPr>
-          <p:cNvPr id="23" name="TextBox 22"/>
-          <p:cNvSpPr txBox="1"/>
-          <p:nvPr/>
-        </p:nvSpPr>
-        <p:spPr>
-          <a:xfrm>
-            <a:off x="-165100" y="1719389"/>
+            <a:off x="-228600" y="1719389"/>
             <a:ext cx="3048000" cy="149352"/>
           </a:xfrm>
           <a:prstGeom prst="rect">
@@ -3863,20 +5150,55 @@
                 </a:solidFill>
                 <a:latin typeface="Helvetica"/>
               </a:rPr>
-              <a:t>reconstruction rank within parent</a:t>
-            </a:r>
-          </a:p>
-        </p:txBody>
-      </p:sp>
-      <p:sp>
-        <p:nvSpPr>
-          <p:cNvPr id="24" name="TextBox 23"/>
+              <a:t>reconstruction rank within episode</a:t>
+            </a:r>
+          </a:p>
+        </p:txBody>
+      </p:sp>
+      <p:sp>
+        <p:nvSpPr>
+          <p:cNvPr id="56" name="TextBox 55"/>
           <p:cNvSpPr txBox="1"/>
           <p:nvPr/>
         </p:nvSpPr>
         <p:spPr>
           <a:xfrm>
-            <a:off x="-165100" y="1820989"/>
+            <a:off x="-228600" y="1833689"/>
+            <a:ext cx="3048000" cy="149352"/>
+          </a:xfrm>
+          <a:prstGeom prst="rect">
+            <a:avLst/>
+          </a:prstGeom>
+          <a:noFill/>
+        </p:spPr>
+        <p:txBody>
+          <a:bodyPr wrap="none" lIns="0" rIns="0" tIns="0" bIns="0" anchor="ctr">
+            <a:spAutoFit/>
+          </a:bodyPr>
+          <a:lstStyle/>
+          <a:p>
+            <a:pPr algn="ctr"/>
+            <a:r>
+              <a:rPr sz="490" b="0" i="0">
+                <a:solidFill>
+                  <a:srgbClr val="1C1E23"/>
+                </a:solidFill>
+                <a:latin typeface="Helvetica"/>
+              </a:rPr>
+              <a:t>diagonal = the two criteria agree; agreement 31%</a:t>
+            </a:r>
+          </a:p>
+        </p:txBody>
+      </p:sp>
+      <p:sp>
+        <p:nvSpPr>
+          <p:cNvPr id="57" name="TextBox 56"/>
+          <p:cNvSpPr txBox="1"/>
+          <p:nvPr/>
+        </p:nvSpPr>
+        <p:spPr>
+          <a:xfrm>
+            <a:off x="-228600" y="1935289"/>
             <a:ext cx="3048000" cy="149352"/>
           </a:xfrm>
           <a:prstGeom prst="rect">
@@ -3898,55 +5220,20 @@
                 </a:solidFill>
                 <a:latin typeface="Helvetica"/>
               </a:rPr>
-              <a:t>a lower reconstruction error does not imply</a:t>
-            </a:r>
-          </a:p>
-        </p:txBody>
-      </p:sp>
-      <p:sp>
-        <p:nvSpPr>
-          <p:cNvPr id="25" name="TextBox 24"/>
+              <a:t>discordant pairs 42%, within-episode rho 0.15</a:t>
+            </a:r>
+          </a:p>
+        </p:txBody>
+      </p:sp>
+      <p:sp>
+        <p:nvSpPr>
+          <p:cNvPr id="58" name="TextBox 57"/>
           <p:cNvSpPr txBox="1"/>
           <p:nvPr/>
         </p:nvSpPr>
         <p:spPr>
           <a:xfrm>
-            <a:off x="-165100" y="1909889"/>
-            <a:ext cx="3048000" cy="149352"/>
-          </a:xfrm>
-          <a:prstGeom prst="rect">
-            <a:avLst/>
-          </a:prstGeom>
-          <a:noFill/>
-        </p:spPr>
-        <p:txBody>
-          <a:bodyPr wrap="none" lIns="0" rIns="0" tIns="0" bIns="0" anchor="ctr">
-            <a:spAutoFit/>
-          </a:bodyPr>
-          <a:lstStyle/>
-          <a:p>
-            <a:pPr algn="ctr"/>
-            <a:r>
-              <a:rPr sz="490" b="0" i="0">
-                <a:solidFill>
-                  <a:srgbClr val="6B727C"/>
-                </a:solidFill>
-                <a:latin typeface="Helvetica"/>
-              </a:rPr>
-              <a:t>a higher realised forecasting utility</a:t>
-            </a:r>
-          </a:p>
-        </p:txBody>
-      </p:sp>
-      <p:sp>
-        <p:nvSpPr>
-          <p:cNvPr id="26" name="TextBox 25"/>
-          <p:cNvSpPr txBox="1"/>
-          <p:nvPr/>
-        </p:nvSpPr>
-        <p:spPr>
-          <a:xfrm>
-            <a:off x="965200" y="11429"/>
+            <a:off x="1016000" y="11429"/>
             <a:ext cx="3048000" cy="182879"/>
           </a:xfrm>
           <a:prstGeom prst="rect">
@@ -3968,21 +5255,21 @@
                 </a:solidFill>
                 <a:latin typeface="Helvetica"/>
               </a:rPr>
-              <a:t>(b) Risk-intervention trade-off</a:t>
+              <a:t>(b) Harm against intervention rate</a:t>
             </a:r>
           </a:p>
         </p:txBody>
       </p:sp>
       <p:cxnSp>
         <p:nvCxnSpPr>
-          <p:cNvPr id="27" name="Connector 26"/>
+          <p:cNvPr id="59" name="Connector 58"/>
           <p:cNvCxnSpPr/>
           <p:nvPr/>
         </p:nvCxnSpPr>
         <p:spPr>
           <a:xfrm>
-            <a:off x="2946400" y="1549400"/>
-            <a:ext cx="1981200" cy="0"/>
+            <a:off x="2997200" y="1549400"/>
+            <a:ext cx="1905000" cy="0"/>
           </a:xfrm>
           <a:prstGeom prst="line">
             <a:avLst/>
@@ -4010,13 +5297,13 @@
       </p:cxnSp>
       <p:cxnSp>
         <p:nvCxnSpPr>
-          <p:cNvPr id="28" name="Connector 27"/>
+          <p:cNvPr id="60" name="Connector 59"/>
           <p:cNvCxnSpPr/>
           <p:nvPr/>
         </p:nvCxnSpPr>
         <p:spPr>
           <a:xfrm>
-            <a:off x="2946400" y="381000"/>
+            <a:off x="2997200" y="381000"/>
             <a:ext cx="0" cy="1168400"/>
           </a:xfrm>
           <a:prstGeom prst="line">
@@ -4045,13 +5332,13 @@
       </p:cxnSp>
       <p:cxnSp>
         <p:nvCxnSpPr>
-          <p:cNvPr id="29" name="Connector 28"/>
+          <p:cNvPr id="61" name="Connector 60"/>
           <p:cNvCxnSpPr/>
           <p:nvPr/>
         </p:nvCxnSpPr>
         <p:spPr>
           <a:xfrm>
-            <a:off x="2946400" y="1549400"/>
+            <a:off x="2997200" y="1549400"/>
             <a:ext cx="0" cy="31750"/>
           </a:xfrm>
           <a:prstGeom prst="line">
@@ -4080,13 +5367,13 @@
       </p:cxnSp>
       <p:sp>
         <p:nvSpPr>
-          <p:cNvPr id="30" name="TextBox 29"/>
+          <p:cNvPr id="62" name="TextBox 61"/>
           <p:cNvSpPr txBox="1"/>
           <p:nvPr/>
         </p:nvSpPr>
         <p:spPr>
           <a:xfrm>
-            <a:off x="1422400" y="1571117"/>
+            <a:off x="1473200" y="1571117"/>
             <a:ext cx="3048000" cy="164592"/>
           </a:xfrm>
           <a:prstGeom prst="rect">
@@ -4115,13 +5402,13 @@
       </p:sp>
       <p:cxnSp>
         <p:nvCxnSpPr>
-          <p:cNvPr id="31" name="Connector 30"/>
+          <p:cNvPr id="63" name="Connector 62"/>
           <p:cNvCxnSpPr/>
           <p:nvPr/>
         </p:nvCxnSpPr>
         <p:spPr>
           <a:xfrm>
-            <a:off x="3937000" y="1549400"/>
+            <a:off x="3949700" y="1549400"/>
             <a:ext cx="0" cy="31750"/>
           </a:xfrm>
           <a:prstGeom prst="line">
@@ -4150,13 +5437,13 @@
       </p:cxnSp>
       <p:sp>
         <p:nvSpPr>
-          <p:cNvPr id="32" name="TextBox 31"/>
+          <p:cNvPr id="64" name="TextBox 63"/>
           <p:cNvSpPr txBox="1"/>
           <p:nvPr/>
         </p:nvSpPr>
         <p:spPr>
           <a:xfrm>
-            <a:off x="2413000" y="1571117"/>
+            <a:off x="2425700" y="1571117"/>
             <a:ext cx="3048000" cy="164592"/>
           </a:xfrm>
           <a:prstGeom prst="rect">
@@ -4185,13 +5472,13 @@
       </p:sp>
       <p:cxnSp>
         <p:nvCxnSpPr>
-          <p:cNvPr id="33" name="Connector 32"/>
+          <p:cNvPr id="65" name="Connector 64"/>
           <p:cNvCxnSpPr/>
           <p:nvPr/>
         </p:nvCxnSpPr>
         <p:spPr>
           <a:xfrm>
-            <a:off x="4927600" y="1549400"/>
+            <a:off x="4902200" y="1549400"/>
             <a:ext cx="0" cy="31750"/>
           </a:xfrm>
           <a:prstGeom prst="line">
@@ -4220,13 +5507,13 @@
       </p:cxnSp>
       <p:sp>
         <p:nvSpPr>
-          <p:cNvPr id="34" name="TextBox 33"/>
+          <p:cNvPr id="66" name="TextBox 65"/>
           <p:cNvSpPr txBox="1"/>
           <p:nvPr/>
         </p:nvSpPr>
         <p:spPr>
           <a:xfrm>
-            <a:off x="3403600" y="1571117"/>
+            <a:off x="3378200" y="1571117"/>
             <a:ext cx="3048000" cy="164592"/>
           </a:xfrm>
           <a:prstGeom prst="rect">
@@ -4255,13 +5542,13 @@
       </p:sp>
       <p:cxnSp>
         <p:nvCxnSpPr>
-          <p:cNvPr id="35" name="Connector 34"/>
+          <p:cNvPr id="67" name="Connector 66"/>
           <p:cNvCxnSpPr/>
           <p:nvPr/>
         </p:nvCxnSpPr>
         <p:spPr>
           <a:xfrm>
-            <a:off x="2914650" y="1549400"/>
+            <a:off x="2965450" y="1549400"/>
             <a:ext cx="31750" cy="0"/>
           </a:xfrm>
           <a:prstGeom prst="line">
@@ -4290,13 +5577,13 @@
       </p:cxnSp>
       <p:sp>
         <p:nvSpPr>
-          <p:cNvPr id="36" name="TextBox 35"/>
+          <p:cNvPr id="68" name="TextBox 67"/>
           <p:cNvSpPr txBox="1"/>
           <p:nvPr/>
         </p:nvSpPr>
         <p:spPr>
           <a:xfrm>
-            <a:off x="1376680" y="1480947"/>
+            <a:off x="1427480" y="1480947"/>
             <a:ext cx="3048000" cy="164592"/>
           </a:xfrm>
           <a:prstGeom prst="rect">
@@ -4318,20 +5605,20 @@
                 </a:solidFill>
                 <a:latin typeface="Helvetica"/>
               </a:rPr>
-              <a:t>0</a:t>
+              <a:t>0.25</a:t>
             </a:r>
           </a:p>
         </p:txBody>
       </p:sp>
       <p:cxnSp>
         <p:nvCxnSpPr>
-          <p:cNvPr id="37" name="Connector 36"/>
+          <p:cNvPr id="69" name="Connector 68"/>
           <p:cNvCxnSpPr/>
           <p:nvPr/>
         </p:nvCxnSpPr>
         <p:spPr>
           <a:xfrm>
-            <a:off x="2914650" y="965200"/>
+            <a:off x="2965450" y="965200"/>
             <a:ext cx="31750" cy="0"/>
           </a:xfrm>
           <a:prstGeom prst="line">
@@ -4360,13 +5647,13 @@
       </p:cxnSp>
       <p:sp>
         <p:nvSpPr>
-          <p:cNvPr id="38" name="TextBox 37"/>
+          <p:cNvPr id="70" name="TextBox 69"/>
           <p:cNvSpPr txBox="1"/>
           <p:nvPr/>
         </p:nvSpPr>
         <p:spPr>
           <a:xfrm>
-            <a:off x="1376680" y="896747"/>
+            <a:off x="1427480" y="896747"/>
             <a:ext cx="3048000" cy="164592"/>
           </a:xfrm>
           <a:prstGeom prst="rect">
@@ -4388,20 +5675,20 @@
                 </a:solidFill>
                 <a:latin typeface="Helvetica"/>
               </a:rPr>
-              <a:t/>
+              <a:t>0.38</a:t>
             </a:r>
           </a:p>
         </p:txBody>
       </p:sp>
       <p:cxnSp>
         <p:nvCxnSpPr>
-          <p:cNvPr id="39" name="Connector 38"/>
+          <p:cNvPr id="71" name="Connector 70"/>
           <p:cNvCxnSpPr/>
           <p:nvPr/>
         </p:nvCxnSpPr>
         <p:spPr>
           <a:xfrm>
-            <a:off x="2914650" y="381000"/>
+            <a:off x="2965450" y="381000"/>
             <a:ext cx="31750" cy="0"/>
           </a:xfrm>
           <a:prstGeom prst="line">
@@ -4430,13 +5717,13 @@
       </p:cxnSp>
       <p:sp>
         <p:nvSpPr>
-          <p:cNvPr id="40" name="TextBox 39"/>
+          <p:cNvPr id="72" name="TextBox 71"/>
           <p:cNvSpPr txBox="1"/>
           <p:nvPr/>
         </p:nvSpPr>
         <p:spPr>
           <a:xfrm>
-            <a:off x="1376680" y="312547"/>
+            <a:off x="1427480" y="312547"/>
             <a:ext cx="3048000" cy="164592"/>
           </a:xfrm>
           <a:prstGeom prst="rect">
@@ -4458,20 +5745,20 @@
                 </a:solidFill>
                 <a:latin typeface="Helvetica"/>
               </a:rPr>
-              <a:t/>
-            </a:r>
-          </a:p>
-        </p:txBody>
-      </p:sp>
-      <p:sp>
-        <p:nvSpPr>
-          <p:cNvPr id="41" name="TextBox 40"/>
+              <a:t>0.50</a:t>
+            </a:r>
+          </a:p>
+        </p:txBody>
+      </p:sp>
+      <p:sp>
+        <p:nvSpPr>
+          <p:cNvPr id="73" name="TextBox 72"/>
           <p:cNvSpPr txBox="1"/>
           <p:nvPr/>
         </p:nvSpPr>
         <p:spPr>
           <a:xfrm>
-            <a:off x="1384300" y="224917"/>
+            <a:off x="1435100" y="224917"/>
             <a:ext cx="3048000" cy="164592"/>
           </a:xfrm>
           <a:prstGeom prst="rect">
@@ -4500,23 +5787,23 @@
       </p:sp>
       <p:sp>
         <p:nvSpPr>
-          <p:cNvPr id="42" name="Rectangle 41"/>
+          <p:cNvPr id="74" name="Rectangle 73"/>
           <p:cNvSpPr/>
           <p:nvPr/>
         </p:nvSpPr>
         <p:spPr>
           <a:xfrm>
-            <a:off x="3048000" y="685800"/>
-            <a:ext cx="1778000" cy="533400"/>
-          </a:xfrm>
-          <a:prstGeom prst="rect">
-            <a:avLst/>
-          </a:prstGeom>
-          <a:noFill/>
-          <a:ln w="7620">
-            <a:solidFill>
-              <a:srgbClr val="9EA5AD"/>
-            </a:solidFill>
+            <a:off x="3566262" y="906291"/>
+            <a:ext cx="27940" cy="27940"/>
+          </a:xfrm>
+          <a:prstGeom prst="rect">
+            <a:avLst/>
+          </a:prstGeom>
+          <a:solidFill>
+            <a:srgbClr val="215499"/>
+          </a:solidFill>
+          <a:ln>
+            <a:noFill/>
           </a:ln>
           <a:effectLst/>
         </p:spPr>
@@ -4544,14 +5831,2124 @@
       </p:sp>
       <p:sp>
         <p:nvSpPr>
-          <p:cNvPr id="43" name="TextBox 42"/>
+          <p:cNvPr id="75" name="Rectangle 74"/>
+          <p:cNvSpPr/>
+          <p:nvPr/>
+        </p:nvSpPr>
+        <p:spPr>
+          <a:xfrm>
+            <a:off x="3620721" y="989393"/>
+            <a:ext cx="27940" cy="27940"/>
+          </a:xfrm>
+          <a:prstGeom prst="rect">
+            <a:avLst/>
+          </a:prstGeom>
+          <a:solidFill>
+            <a:srgbClr val="215499"/>
+          </a:solidFill>
+          <a:ln>
+            <a:noFill/>
+          </a:ln>
+          <a:effectLst/>
+        </p:spPr>
+        <p:style>
+          <a:lnRef idx="1">
+            <a:schemeClr val="accent1"/>
+          </a:lnRef>
+          <a:fillRef idx="3">
+            <a:schemeClr val="accent1"/>
+          </a:fillRef>
+          <a:effectRef idx="2">
+            <a:schemeClr val="accent1"/>
+          </a:effectRef>
+          <a:fontRef idx="minor">
+            <a:schemeClr val="lt1"/>
+          </a:fontRef>
+        </p:style>
+        <p:txBody>
+          <a:bodyPr rtlCol="0" anchor="ctr"/>
+          <a:lstStyle/>
+          <a:p>
+            <a:pPr algn="ctr"/>
+          </a:p>
+        </p:txBody>
+      </p:sp>
+      <p:sp>
+        <p:nvSpPr>
+          <p:cNvPr id="76" name="Rectangle 75"/>
+          <p:cNvSpPr/>
+          <p:nvPr/>
+        </p:nvSpPr>
+        <p:spPr>
+          <a:xfrm>
+            <a:off x="3773420" y="929125"/>
+            <a:ext cx="27940" cy="27940"/>
+          </a:xfrm>
+          <a:prstGeom prst="rect">
+            <a:avLst/>
+          </a:prstGeom>
+          <a:solidFill>
+            <a:srgbClr val="215499"/>
+          </a:solidFill>
+          <a:ln>
+            <a:noFill/>
+          </a:ln>
+          <a:effectLst/>
+        </p:spPr>
+        <p:style>
+          <a:lnRef idx="1">
+            <a:schemeClr val="accent1"/>
+          </a:lnRef>
+          <a:fillRef idx="3">
+            <a:schemeClr val="accent1"/>
+          </a:fillRef>
+          <a:effectRef idx="2">
+            <a:schemeClr val="accent1"/>
+          </a:effectRef>
+          <a:fontRef idx="minor">
+            <a:schemeClr val="lt1"/>
+          </a:fontRef>
+        </p:style>
+        <p:txBody>
+          <a:bodyPr rtlCol="0" anchor="ctr"/>
+          <a:lstStyle/>
+          <a:p>
+            <a:pPr algn="ctr"/>
+          </a:p>
+        </p:txBody>
+      </p:sp>
+      <p:sp>
+        <p:nvSpPr>
+          <p:cNvPr id="77" name="Rectangle 76"/>
+          <p:cNvSpPr/>
+          <p:nvPr/>
+        </p:nvSpPr>
+        <p:spPr>
+          <a:xfrm>
+            <a:off x="3944272" y="896704"/>
+            <a:ext cx="27940" cy="27940"/>
+          </a:xfrm>
+          <a:prstGeom prst="rect">
+            <a:avLst/>
+          </a:prstGeom>
+          <a:solidFill>
+            <a:srgbClr val="215499"/>
+          </a:solidFill>
+          <a:ln>
+            <a:noFill/>
+          </a:ln>
+          <a:effectLst/>
+        </p:spPr>
+        <p:style>
+          <a:lnRef idx="1">
+            <a:schemeClr val="accent1"/>
+          </a:lnRef>
+          <a:fillRef idx="3">
+            <a:schemeClr val="accent1"/>
+          </a:fillRef>
+          <a:effectRef idx="2">
+            <a:schemeClr val="accent1"/>
+          </a:effectRef>
+          <a:fontRef idx="minor">
+            <a:schemeClr val="lt1"/>
+          </a:fontRef>
+        </p:style>
+        <p:txBody>
+          <a:bodyPr rtlCol="0" anchor="ctr"/>
+          <a:lstStyle/>
+          <a:p>
+            <a:pPr algn="ctr"/>
+          </a:p>
+        </p:txBody>
+      </p:sp>
+      <p:sp>
+        <p:nvSpPr>
+          <p:cNvPr id="78" name="Rectangle 77"/>
+          <p:cNvSpPr/>
+          <p:nvPr/>
+        </p:nvSpPr>
+        <p:spPr>
+          <a:xfrm>
+            <a:off x="3993392" y="821545"/>
+            <a:ext cx="27940" cy="27940"/>
+          </a:xfrm>
+          <a:prstGeom prst="rect">
+            <a:avLst/>
+          </a:prstGeom>
+          <a:solidFill>
+            <a:srgbClr val="215499"/>
+          </a:solidFill>
+          <a:ln>
+            <a:noFill/>
+          </a:ln>
+          <a:effectLst/>
+        </p:spPr>
+        <p:style>
+          <a:lnRef idx="1">
+            <a:schemeClr val="accent1"/>
+          </a:lnRef>
+          <a:fillRef idx="3">
+            <a:schemeClr val="accent1"/>
+          </a:fillRef>
+          <a:effectRef idx="2">
+            <a:schemeClr val="accent1"/>
+          </a:effectRef>
+          <a:fontRef idx="minor">
+            <a:schemeClr val="lt1"/>
+          </a:fontRef>
+        </p:style>
+        <p:txBody>
+          <a:bodyPr rtlCol="0" anchor="ctr"/>
+          <a:lstStyle/>
+          <a:p>
+            <a:pPr algn="ctr"/>
+          </a:p>
+        </p:txBody>
+      </p:sp>
+      <p:sp>
+        <p:nvSpPr>
+          <p:cNvPr id="79" name="Rectangle 78"/>
+          <p:cNvSpPr/>
+          <p:nvPr/>
+        </p:nvSpPr>
+        <p:spPr>
+          <a:xfrm>
+            <a:off x="4033969" y="865737"/>
+            <a:ext cx="27940" cy="27940"/>
+          </a:xfrm>
+          <a:prstGeom prst="rect">
+            <a:avLst/>
+          </a:prstGeom>
+          <a:solidFill>
+            <a:srgbClr val="215499"/>
+          </a:solidFill>
+          <a:ln>
+            <a:noFill/>
+          </a:ln>
+          <a:effectLst/>
+        </p:spPr>
+        <p:style>
+          <a:lnRef idx="1">
+            <a:schemeClr val="accent1"/>
+          </a:lnRef>
+          <a:fillRef idx="3">
+            <a:schemeClr val="accent1"/>
+          </a:fillRef>
+          <a:effectRef idx="2">
+            <a:schemeClr val="accent1"/>
+          </a:effectRef>
+          <a:fontRef idx="minor">
+            <a:schemeClr val="lt1"/>
+          </a:fontRef>
+        </p:style>
+        <p:txBody>
+          <a:bodyPr rtlCol="0" anchor="ctr"/>
+          <a:lstStyle/>
+          <a:p>
+            <a:pPr algn="ctr"/>
+          </a:p>
+        </p:txBody>
+      </p:sp>
+      <p:sp>
+        <p:nvSpPr>
+          <p:cNvPr id="80" name="Rectangle 79"/>
+          <p:cNvSpPr/>
+          <p:nvPr/>
+        </p:nvSpPr>
+        <p:spPr>
+          <a:xfrm>
+            <a:off x="4174922" y="894694"/>
+            <a:ext cx="27940" cy="27940"/>
+          </a:xfrm>
+          <a:prstGeom prst="rect">
+            <a:avLst/>
+          </a:prstGeom>
+          <a:solidFill>
+            <a:srgbClr val="215499"/>
+          </a:solidFill>
+          <a:ln>
+            <a:noFill/>
+          </a:ln>
+          <a:effectLst/>
+        </p:spPr>
+        <p:style>
+          <a:lnRef idx="1">
+            <a:schemeClr val="accent1"/>
+          </a:lnRef>
+          <a:fillRef idx="3">
+            <a:schemeClr val="accent1"/>
+          </a:fillRef>
+          <a:effectRef idx="2">
+            <a:schemeClr val="accent1"/>
+          </a:effectRef>
+          <a:fontRef idx="minor">
+            <a:schemeClr val="lt1"/>
+          </a:fontRef>
+        </p:style>
+        <p:txBody>
+          <a:bodyPr rtlCol="0" anchor="ctr"/>
+          <a:lstStyle/>
+          <a:p>
+            <a:pPr algn="ctr"/>
+          </a:p>
+        </p:txBody>
+      </p:sp>
+      <p:sp>
+        <p:nvSpPr>
+          <p:cNvPr id="81" name="Rectangle 80"/>
+          <p:cNvSpPr/>
+          <p:nvPr/>
+        </p:nvSpPr>
+        <p:spPr>
+          <a:xfrm>
+            <a:off x="4251806" y="862714"/>
+            <a:ext cx="27940" cy="27940"/>
+          </a:xfrm>
+          <a:prstGeom prst="rect">
+            <a:avLst/>
+          </a:prstGeom>
+          <a:solidFill>
+            <a:srgbClr val="215499"/>
+          </a:solidFill>
+          <a:ln>
+            <a:noFill/>
+          </a:ln>
+          <a:effectLst/>
+        </p:spPr>
+        <p:style>
+          <a:lnRef idx="1">
+            <a:schemeClr val="accent1"/>
+          </a:lnRef>
+          <a:fillRef idx="3">
+            <a:schemeClr val="accent1"/>
+          </a:fillRef>
+          <a:effectRef idx="2">
+            <a:schemeClr val="accent1"/>
+          </a:effectRef>
+          <a:fontRef idx="minor">
+            <a:schemeClr val="lt1"/>
+          </a:fontRef>
+        </p:style>
+        <p:txBody>
+          <a:bodyPr rtlCol="0" anchor="ctr"/>
+          <a:lstStyle/>
+          <a:p>
+            <a:pPr algn="ctr"/>
+          </a:p>
+        </p:txBody>
+      </p:sp>
+      <p:sp>
+        <p:nvSpPr>
+          <p:cNvPr id="82" name="Rectangle 81"/>
+          <p:cNvSpPr/>
+          <p:nvPr/>
+        </p:nvSpPr>
+        <p:spPr>
+          <a:xfrm>
+            <a:off x="4287044" y="759367"/>
+            <a:ext cx="27940" cy="27940"/>
+          </a:xfrm>
+          <a:prstGeom prst="rect">
+            <a:avLst/>
+          </a:prstGeom>
+          <a:solidFill>
+            <a:srgbClr val="215499"/>
+          </a:solidFill>
+          <a:ln>
+            <a:noFill/>
+          </a:ln>
+          <a:effectLst/>
+        </p:spPr>
+        <p:style>
+          <a:lnRef idx="1">
+            <a:schemeClr val="accent1"/>
+          </a:lnRef>
+          <a:fillRef idx="3">
+            <a:schemeClr val="accent1"/>
+          </a:fillRef>
+          <a:effectRef idx="2">
+            <a:schemeClr val="accent1"/>
+          </a:effectRef>
+          <a:fontRef idx="minor">
+            <a:schemeClr val="lt1"/>
+          </a:fontRef>
+        </p:style>
+        <p:txBody>
+          <a:bodyPr rtlCol="0" anchor="ctr"/>
+          <a:lstStyle/>
+          <a:p>
+            <a:pPr algn="ctr"/>
+          </a:p>
+        </p:txBody>
+      </p:sp>
+      <p:sp>
+        <p:nvSpPr>
+          <p:cNvPr id="83" name="Rectangle 82"/>
+          <p:cNvSpPr/>
+          <p:nvPr/>
+        </p:nvSpPr>
+        <p:spPr>
+          <a:xfrm>
+            <a:off x="4337232" y="864613"/>
+            <a:ext cx="27940" cy="27940"/>
+          </a:xfrm>
+          <a:prstGeom prst="rect">
+            <a:avLst/>
+          </a:prstGeom>
+          <a:solidFill>
+            <a:srgbClr val="215499"/>
+          </a:solidFill>
+          <a:ln>
+            <a:noFill/>
+          </a:ln>
+          <a:effectLst/>
+        </p:spPr>
+        <p:style>
+          <a:lnRef idx="1">
+            <a:schemeClr val="accent1"/>
+          </a:lnRef>
+          <a:fillRef idx="3">
+            <a:schemeClr val="accent1"/>
+          </a:fillRef>
+          <a:effectRef idx="2">
+            <a:schemeClr val="accent1"/>
+          </a:effectRef>
+          <a:fontRef idx="minor">
+            <a:schemeClr val="lt1"/>
+          </a:fontRef>
+        </p:style>
+        <p:txBody>
+          <a:bodyPr rtlCol="0" anchor="ctr"/>
+          <a:lstStyle/>
+          <a:p>
+            <a:pPr algn="ctr"/>
+          </a:p>
+        </p:txBody>
+      </p:sp>
+      <p:sp>
+        <p:nvSpPr>
+          <p:cNvPr id="84" name="Rectangle 83"/>
+          <p:cNvSpPr/>
+          <p:nvPr/>
+        </p:nvSpPr>
+        <p:spPr>
+          <a:xfrm>
+            <a:off x="4379945" y="906566"/>
+            <a:ext cx="27940" cy="27940"/>
+          </a:xfrm>
+          <a:prstGeom prst="rect">
+            <a:avLst/>
+          </a:prstGeom>
+          <a:solidFill>
+            <a:srgbClr val="215499"/>
+          </a:solidFill>
+          <a:ln>
+            <a:noFill/>
+          </a:ln>
+          <a:effectLst/>
+        </p:spPr>
+        <p:style>
+          <a:lnRef idx="1">
+            <a:schemeClr val="accent1"/>
+          </a:lnRef>
+          <a:fillRef idx="3">
+            <a:schemeClr val="accent1"/>
+          </a:fillRef>
+          <a:effectRef idx="2">
+            <a:schemeClr val="accent1"/>
+          </a:effectRef>
+          <a:fontRef idx="minor">
+            <a:schemeClr val="lt1"/>
+          </a:fontRef>
+        </p:style>
+        <p:txBody>
+          <a:bodyPr rtlCol="0" anchor="ctr"/>
+          <a:lstStyle/>
+          <a:p>
+            <a:pPr algn="ctr"/>
+          </a:p>
+        </p:txBody>
+      </p:sp>
+      <p:sp>
+        <p:nvSpPr>
+          <p:cNvPr id="85" name="Rectangle 84"/>
+          <p:cNvSpPr/>
+          <p:nvPr/>
+        </p:nvSpPr>
+        <p:spPr>
+          <a:xfrm>
+            <a:off x="4438675" y="876222"/>
+            <a:ext cx="27940" cy="27940"/>
+          </a:xfrm>
+          <a:prstGeom prst="rect">
+            <a:avLst/>
+          </a:prstGeom>
+          <a:solidFill>
+            <a:srgbClr val="215499"/>
+          </a:solidFill>
+          <a:ln>
+            <a:noFill/>
+          </a:ln>
+          <a:effectLst/>
+        </p:spPr>
+        <p:style>
+          <a:lnRef idx="1">
+            <a:schemeClr val="accent1"/>
+          </a:lnRef>
+          <a:fillRef idx="3">
+            <a:schemeClr val="accent1"/>
+          </a:fillRef>
+          <a:effectRef idx="2">
+            <a:schemeClr val="accent1"/>
+          </a:effectRef>
+          <a:fontRef idx="minor">
+            <a:schemeClr val="lt1"/>
+          </a:fontRef>
+        </p:style>
+        <p:txBody>
+          <a:bodyPr rtlCol="0" anchor="ctr"/>
+          <a:lstStyle/>
+          <a:p>
+            <a:pPr algn="ctr"/>
+          </a:p>
+        </p:txBody>
+      </p:sp>
+      <p:sp>
+        <p:nvSpPr>
+          <p:cNvPr id="86" name="Rectangle 85"/>
+          <p:cNvSpPr/>
+          <p:nvPr/>
+        </p:nvSpPr>
+        <p:spPr>
+          <a:xfrm>
+            <a:off x="4502252" y="730778"/>
+            <a:ext cx="60960" cy="60960"/>
+          </a:xfrm>
+          <a:prstGeom prst="rect">
+            <a:avLst/>
+          </a:prstGeom>
+          <a:solidFill>
+            <a:srgbClr val="215499"/>
+          </a:solidFill>
+          <a:ln w="8890">
+            <a:solidFill>
+              <a:srgbClr val="1C1E23"/>
+            </a:solidFill>
+          </a:ln>
+          <a:effectLst/>
+        </p:spPr>
+        <p:style>
+          <a:lnRef idx="1">
+            <a:schemeClr val="accent1"/>
+          </a:lnRef>
+          <a:fillRef idx="3">
+            <a:schemeClr val="accent1"/>
+          </a:fillRef>
+          <a:effectRef idx="2">
+            <a:schemeClr val="accent1"/>
+          </a:effectRef>
+          <a:fontRef idx="minor">
+            <a:schemeClr val="lt1"/>
+          </a:fontRef>
+        </p:style>
+        <p:txBody>
+          <a:bodyPr rtlCol="0" anchor="ctr"/>
+          <a:lstStyle/>
+          <a:p>
+            <a:pPr algn="ctr"/>
+          </a:p>
+        </p:txBody>
+      </p:sp>
+      <p:sp>
+        <p:nvSpPr>
+          <p:cNvPr id="87" name="Rectangle 86"/>
+          <p:cNvSpPr/>
+          <p:nvPr/>
+        </p:nvSpPr>
+        <p:spPr>
+          <a:xfrm>
+            <a:off x="4556136" y="838197"/>
+            <a:ext cx="27940" cy="27940"/>
+          </a:xfrm>
+          <a:prstGeom prst="rect">
+            <a:avLst/>
+          </a:prstGeom>
+          <a:solidFill>
+            <a:srgbClr val="215499"/>
+          </a:solidFill>
+          <a:ln>
+            <a:noFill/>
+          </a:ln>
+          <a:effectLst/>
+        </p:spPr>
+        <p:style>
+          <a:lnRef idx="1">
+            <a:schemeClr val="accent1"/>
+          </a:lnRef>
+          <a:fillRef idx="3">
+            <a:schemeClr val="accent1"/>
+          </a:fillRef>
+          <a:effectRef idx="2">
+            <a:schemeClr val="accent1"/>
+          </a:effectRef>
+          <a:fontRef idx="minor">
+            <a:schemeClr val="lt1"/>
+          </a:fontRef>
+        </p:style>
+        <p:txBody>
+          <a:bodyPr rtlCol="0" anchor="ctr"/>
+          <a:lstStyle/>
+          <a:p>
+            <a:pPr algn="ctr"/>
+          </a:p>
+        </p:txBody>
+      </p:sp>
+      <p:sp>
+        <p:nvSpPr>
+          <p:cNvPr id="88" name="Rectangle 87"/>
+          <p:cNvSpPr/>
+          <p:nvPr/>
+        </p:nvSpPr>
+        <p:spPr>
+          <a:xfrm>
+            <a:off x="4562543" y="826806"/>
+            <a:ext cx="27940" cy="27940"/>
+          </a:xfrm>
+          <a:prstGeom prst="rect">
+            <a:avLst/>
+          </a:prstGeom>
+          <a:solidFill>
+            <a:srgbClr val="215499"/>
+          </a:solidFill>
+          <a:ln>
+            <a:noFill/>
+          </a:ln>
+          <a:effectLst/>
+        </p:spPr>
+        <p:style>
+          <a:lnRef idx="1">
+            <a:schemeClr val="accent1"/>
+          </a:lnRef>
+          <a:fillRef idx="3">
+            <a:schemeClr val="accent1"/>
+          </a:fillRef>
+          <a:effectRef idx="2">
+            <a:schemeClr val="accent1"/>
+          </a:effectRef>
+          <a:fontRef idx="minor">
+            <a:schemeClr val="lt1"/>
+          </a:fontRef>
+        </p:style>
+        <p:txBody>
+          <a:bodyPr rtlCol="0" anchor="ctr"/>
+          <a:lstStyle/>
+          <a:p>
+            <a:pPr algn="ctr"/>
+          </a:p>
+        </p:txBody>
+      </p:sp>
+      <p:sp>
+        <p:nvSpPr>
+          <p:cNvPr id="89" name="Rectangle 88"/>
+          <p:cNvSpPr/>
+          <p:nvPr/>
+        </p:nvSpPr>
+        <p:spPr>
+          <a:xfrm>
+            <a:off x="4574289" y="821843"/>
+            <a:ext cx="27940" cy="27940"/>
+          </a:xfrm>
+          <a:prstGeom prst="rect">
+            <a:avLst/>
+          </a:prstGeom>
+          <a:solidFill>
+            <a:srgbClr val="215499"/>
+          </a:solidFill>
+          <a:ln>
+            <a:noFill/>
+          </a:ln>
+          <a:effectLst/>
+        </p:spPr>
+        <p:style>
+          <a:lnRef idx="1">
+            <a:schemeClr val="accent1"/>
+          </a:lnRef>
+          <a:fillRef idx="3">
+            <a:schemeClr val="accent1"/>
+          </a:fillRef>
+          <a:effectRef idx="2">
+            <a:schemeClr val="accent1"/>
+          </a:effectRef>
+          <a:fontRef idx="minor">
+            <a:schemeClr val="lt1"/>
+          </a:fontRef>
+        </p:style>
+        <p:txBody>
+          <a:bodyPr rtlCol="0" anchor="ctr"/>
+          <a:lstStyle/>
+          <a:p>
+            <a:pPr algn="ctr"/>
+          </a:p>
+        </p:txBody>
+      </p:sp>
+      <p:sp>
+        <p:nvSpPr>
+          <p:cNvPr id="90" name="Rectangle 89"/>
+          <p:cNvSpPr/>
+          <p:nvPr/>
+        </p:nvSpPr>
+        <p:spPr>
+          <a:xfrm>
+            <a:off x="4035037" y="1361059"/>
+            <a:ext cx="27940" cy="27940"/>
+          </a:xfrm>
+          <a:prstGeom prst="rect">
+            <a:avLst/>
+          </a:prstGeom>
+          <a:solidFill>
+            <a:srgbClr val="AD6B0A"/>
+          </a:solidFill>
+          <a:ln>
+            <a:noFill/>
+          </a:ln>
+          <a:effectLst/>
+        </p:spPr>
+        <p:style>
+          <a:lnRef idx="1">
+            <a:schemeClr val="accent1"/>
+          </a:lnRef>
+          <a:fillRef idx="3">
+            <a:schemeClr val="accent1"/>
+          </a:fillRef>
+          <a:effectRef idx="2">
+            <a:schemeClr val="accent1"/>
+          </a:effectRef>
+          <a:fontRef idx="minor">
+            <a:schemeClr val="lt1"/>
+          </a:fontRef>
+        </p:style>
+        <p:txBody>
+          <a:bodyPr rtlCol="0" anchor="ctr"/>
+          <a:lstStyle/>
+          <a:p>
+            <a:pPr algn="ctr"/>
+          </a:p>
+        </p:txBody>
+      </p:sp>
+      <p:sp>
+        <p:nvSpPr>
+          <p:cNvPr id="91" name="Rectangle 90"/>
+          <p:cNvSpPr/>
+          <p:nvPr/>
+        </p:nvSpPr>
+        <p:spPr>
+          <a:xfrm>
+            <a:off x="4147159" y="1404654"/>
+            <a:ext cx="27940" cy="27940"/>
+          </a:xfrm>
+          <a:prstGeom prst="rect">
+            <a:avLst/>
+          </a:prstGeom>
+          <a:solidFill>
+            <a:srgbClr val="AD6B0A"/>
+          </a:solidFill>
+          <a:ln>
+            <a:noFill/>
+          </a:ln>
+          <a:effectLst/>
+        </p:spPr>
+        <p:style>
+          <a:lnRef idx="1">
+            <a:schemeClr val="accent1"/>
+          </a:lnRef>
+          <a:fillRef idx="3">
+            <a:schemeClr val="accent1"/>
+          </a:fillRef>
+          <a:effectRef idx="2">
+            <a:schemeClr val="accent1"/>
+          </a:effectRef>
+          <a:fontRef idx="minor">
+            <a:schemeClr val="lt1"/>
+          </a:fontRef>
+        </p:style>
+        <p:txBody>
+          <a:bodyPr rtlCol="0" anchor="ctr"/>
+          <a:lstStyle/>
+          <a:p>
+            <a:pPr algn="ctr"/>
+          </a:p>
+        </p:txBody>
+      </p:sp>
+      <p:sp>
+        <p:nvSpPr>
+          <p:cNvPr id="92" name="Rectangle 91"/>
+          <p:cNvSpPr/>
+          <p:nvPr/>
+        </p:nvSpPr>
+        <p:spPr>
+          <a:xfrm>
+            <a:off x="4350046" y="1323657"/>
+            <a:ext cx="27940" cy="27940"/>
+          </a:xfrm>
+          <a:prstGeom prst="rect">
+            <a:avLst/>
+          </a:prstGeom>
+          <a:solidFill>
+            <a:srgbClr val="AD6B0A"/>
+          </a:solidFill>
+          <a:ln>
+            <a:noFill/>
+          </a:ln>
+          <a:effectLst/>
+        </p:spPr>
+        <p:style>
+          <a:lnRef idx="1">
+            <a:schemeClr val="accent1"/>
+          </a:lnRef>
+          <a:fillRef idx="3">
+            <a:schemeClr val="accent1"/>
+          </a:fillRef>
+          <a:effectRef idx="2">
+            <a:schemeClr val="accent1"/>
+          </a:effectRef>
+          <a:fontRef idx="minor">
+            <a:schemeClr val="lt1"/>
+          </a:fontRef>
+        </p:style>
+        <p:txBody>
+          <a:bodyPr rtlCol="0" anchor="ctr"/>
+          <a:lstStyle/>
+          <a:p>
+            <a:pPr algn="ctr"/>
+          </a:p>
+        </p:txBody>
+      </p:sp>
+      <p:sp>
+        <p:nvSpPr>
+          <p:cNvPr id="93" name="Rectangle 92"/>
+          <p:cNvSpPr/>
+          <p:nvPr/>
+        </p:nvSpPr>
+        <p:spPr>
+          <a:xfrm>
+            <a:off x="4404505" y="1218531"/>
+            <a:ext cx="27940" cy="27940"/>
+          </a:xfrm>
+          <a:prstGeom prst="rect">
+            <a:avLst/>
+          </a:prstGeom>
+          <a:solidFill>
+            <a:srgbClr val="AD6B0A"/>
+          </a:solidFill>
+          <a:ln>
+            <a:noFill/>
+          </a:ln>
+          <a:effectLst/>
+        </p:spPr>
+        <p:style>
+          <a:lnRef idx="1">
+            <a:schemeClr val="accent1"/>
+          </a:lnRef>
+          <a:fillRef idx="3">
+            <a:schemeClr val="accent1"/>
+          </a:fillRef>
+          <a:effectRef idx="2">
+            <a:schemeClr val="accent1"/>
+          </a:effectRef>
+          <a:fontRef idx="minor">
+            <a:schemeClr val="lt1"/>
+          </a:fontRef>
+        </p:style>
+        <p:txBody>
+          <a:bodyPr rtlCol="0" anchor="ctr"/>
+          <a:lstStyle/>
+          <a:p>
+            <a:pPr algn="ctr"/>
+          </a:p>
+        </p:txBody>
+      </p:sp>
+      <p:sp>
+        <p:nvSpPr>
+          <p:cNvPr id="94" name="Rectangle 93"/>
+          <p:cNvSpPr/>
+          <p:nvPr/>
+        </p:nvSpPr>
+        <p:spPr>
+          <a:xfrm>
+            <a:off x="4497406" y="1247037"/>
+            <a:ext cx="27940" cy="27940"/>
+          </a:xfrm>
+          <a:prstGeom prst="rect">
+            <a:avLst/>
+          </a:prstGeom>
+          <a:solidFill>
+            <a:srgbClr val="AD6B0A"/>
+          </a:solidFill>
+          <a:ln>
+            <a:noFill/>
+          </a:ln>
+          <a:effectLst/>
+        </p:spPr>
+        <p:style>
+          <a:lnRef idx="1">
+            <a:schemeClr val="accent1"/>
+          </a:lnRef>
+          <a:fillRef idx="3">
+            <a:schemeClr val="accent1"/>
+          </a:fillRef>
+          <a:effectRef idx="2">
+            <a:schemeClr val="accent1"/>
+          </a:effectRef>
+          <a:fontRef idx="minor">
+            <a:schemeClr val="lt1"/>
+          </a:fontRef>
+        </p:style>
+        <p:txBody>
+          <a:bodyPr rtlCol="0" anchor="ctr"/>
+          <a:lstStyle/>
+          <a:p>
+            <a:pPr algn="ctr"/>
+          </a:p>
+        </p:txBody>
+      </p:sp>
+      <p:sp>
+        <p:nvSpPr>
+          <p:cNvPr id="95" name="Rectangle 94"/>
+          <p:cNvSpPr/>
+          <p:nvPr/>
+        </p:nvSpPr>
+        <p:spPr>
+          <a:xfrm>
+            <a:off x="4589238" y="1293049"/>
+            <a:ext cx="27940" cy="27940"/>
+          </a:xfrm>
+          <a:prstGeom prst="rect">
+            <a:avLst/>
+          </a:prstGeom>
+          <a:solidFill>
+            <a:srgbClr val="AD6B0A"/>
+          </a:solidFill>
+          <a:ln>
+            <a:noFill/>
+          </a:ln>
+          <a:effectLst/>
+        </p:spPr>
+        <p:style>
+          <a:lnRef idx="1">
+            <a:schemeClr val="accent1"/>
+          </a:lnRef>
+          <a:fillRef idx="3">
+            <a:schemeClr val="accent1"/>
+          </a:fillRef>
+          <a:effectRef idx="2">
+            <a:schemeClr val="accent1"/>
+          </a:effectRef>
+          <a:fontRef idx="minor">
+            <a:schemeClr val="lt1"/>
+          </a:fontRef>
+        </p:style>
+        <p:txBody>
+          <a:bodyPr rtlCol="0" anchor="ctr"/>
+          <a:lstStyle/>
+          <a:p>
+            <a:pPr algn="ctr"/>
+          </a:p>
+        </p:txBody>
+      </p:sp>
+      <p:sp>
+        <p:nvSpPr>
+          <p:cNvPr id="96" name="Rectangle 95"/>
+          <p:cNvSpPr/>
+          <p:nvPr/>
+        </p:nvSpPr>
+        <p:spPr>
+          <a:xfrm>
+            <a:off x="4618070" y="1128665"/>
+            <a:ext cx="27940" cy="27940"/>
+          </a:xfrm>
+          <a:prstGeom prst="rect">
+            <a:avLst/>
+          </a:prstGeom>
+          <a:solidFill>
+            <a:srgbClr val="AD6B0A"/>
+          </a:solidFill>
+          <a:ln>
+            <a:noFill/>
+          </a:ln>
+          <a:effectLst/>
+        </p:spPr>
+        <p:style>
+          <a:lnRef idx="1">
+            <a:schemeClr val="accent1"/>
+          </a:lnRef>
+          <a:fillRef idx="3">
+            <a:schemeClr val="accent1"/>
+          </a:fillRef>
+          <a:effectRef idx="2">
+            <a:schemeClr val="accent1"/>
+          </a:effectRef>
+          <a:fontRef idx="minor">
+            <a:schemeClr val="lt1"/>
+          </a:fontRef>
+        </p:style>
+        <p:txBody>
+          <a:bodyPr rtlCol="0" anchor="ctr"/>
+          <a:lstStyle/>
+          <a:p>
+            <a:pPr algn="ctr"/>
+          </a:p>
+        </p:txBody>
+      </p:sp>
+      <p:sp>
+        <p:nvSpPr>
+          <p:cNvPr id="97" name="Rectangle 96"/>
+          <p:cNvSpPr/>
+          <p:nvPr/>
+        </p:nvSpPr>
+        <p:spPr>
+          <a:xfrm>
+            <a:off x="4627680" y="1234984"/>
+            <a:ext cx="27940" cy="27940"/>
+          </a:xfrm>
+          <a:prstGeom prst="rect">
+            <a:avLst/>
+          </a:prstGeom>
+          <a:solidFill>
+            <a:srgbClr val="AD6B0A"/>
+          </a:solidFill>
+          <a:ln>
+            <a:noFill/>
+          </a:ln>
+          <a:effectLst/>
+        </p:spPr>
+        <p:style>
+          <a:lnRef idx="1">
+            <a:schemeClr val="accent1"/>
+          </a:lnRef>
+          <a:fillRef idx="3">
+            <a:schemeClr val="accent1"/>
+          </a:fillRef>
+          <a:effectRef idx="2">
+            <a:schemeClr val="accent1"/>
+          </a:effectRef>
+          <a:fontRef idx="minor">
+            <a:schemeClr val="lt1"/>
+          </a:fontRef>
+        </p:style>
+        <p:txBody>
+          <a:bodyPr rtlCol="0" anchor="ctr"/>
+          <a:lstStyle/>
+          <a:p>
+            <a:pPr algn="ctr"/>
+          </a:p>
+        </p:txBody>
+      </p:sp>
+      <p:sp>
+        <p:nvSpPr>
+          <p:cNvPr id="98" name="Rectangle 97"/>
+          <p:cNvSpPr/>
+          <p:nvPr/>
+        </p:nvSpPr>
+        <p:spPr>
+          <a:xfrm>
+            <a:off x="4707767" y="1152715"/>
+            <a:ext cx="27940" cy="27940"/>
+          </a:xfrm>
+          <a:prstGeom prst="rect">
+            <a:avLst/>
+          </a:prstGeom>
+          <a:solidFill>
+            <a:srgbClr val="AD6B0A"/>
+          </a:solidFill>
+          <a:ln>
+            <a:noFill/>
+          </a:ln>
+          <a:effectLst/>
+        </p:spPr>
+        <p:style>
+          <a:lnRef idx="1">
+            <a:schemeClr val="accent1"/>
+          </a:lnRef>
+          <a:fillRef idx="3">
+            <a:schemeClr val="accent1"/>
+          </a:fillRef>
+          <a:effectRef idx="2">
+            <a:schemeClr val="accent1"/>
+          </a:effectRef>
+          <a:fontRef idx="minor">
+            <a:schemeClr val="lt1"/>
+          </a:fontRef>
+        </p:style>
+        <p:txBody>
+          <a:bodyPr rtlCol="0" anchor="ctr"/>
+          <a:lstStyle/>
+          <a:p>
+            <a:pPr algn="ctr"/>
+          </a:p>
+        </p:txBody>
+      </p:sp>
+      <p:sp>
+        <p:nvSpPr>
+          <p:cNvPr id="99" name="Rectangle 98"/>
+          <p:cNvSpPr/>
+          <p:nvPr/>
+        </p:nvSpPr>
+        <p:spPr>
+          <a:xfrm>
+            <a:off x="4748344" y="1089416"/>
+            <a:ext cx="27940" cy="27940"/>
+          </a:xfrm>
+          <a:prstGeom prst="rect">
+            <a:avLst/>
+          </a:prstGeom>
+          <a:solidFill>
+            <a:srgbClr val="AD6B0A"/>
+          </a:solidFill>
+          <a:ln>
+            <a:noFill/>
+          </a:ln>
+          <a:effectLst/>
+        </p:spPr>
+        <p:style>
+          <a:lnRef idx="1">
+            <a:schemeClr val="accent1"/>
+          </a:lnRef>
+          <a:fillRef idx="3">
+            <a:schemeClr val="accent1"/>
+          </a:fillRef>
+          <a:effectRef idx="2">
+            <a:schemeClr val="accent1"/>
+          </a:effectRef>
+          <a:fontRef idx="minor">
+            <a:schemeClr val="lt1"/>
+          </a:fontRef>
+        </p:style>
+        <p:txBody>
+          <a:bodyPr rtlCol="0" anchor="ctr"/>
+          <a:lstStyle/>
+          <a:p>
+            <a:pPr algn="ctr"/>
+          </a:p>
+        </p:txBody>
+      </p:sp>
+      <p:sp>
+        <p:nvSpPr>
+          <p:cNvPr id="100" name="Rectangle 99"/>
+          <p:cNvSpPr/>
+          <p:nvPr/>
+        </p:nvSpPr>
+        <p:spPr>
+          <a:xfrm>
+            <a:off x="4756887" y="1237878"/>
+            <a:ext cx="27940" cy="27940"/>
+          </a:xfrm>
+          <a:prstGeom prst="rect">
+            <a:avLst/>
+          </a:prstGeom>
+          <a:solidFill>
+            <a:srgbClr val="AD6B0A"/>
+          </a:solidFill>
+          <a:ln>
+            <a:noFill/>
+          </a:ln>
+          <a:effectLst/>
+        </p:spPr>
+        <p:style>
+          <a:lnRef idx="1">
+            <a:schemeClr val="accent1"/>
+          </a:lnRef>
+          <a:fillRef idx="3">
+            <a:schemeClr val="accent1"/>
+          </a:fillRef>
+          <a:effectRef idx="2">
+            <a:schemeClr val="accent1"/>
+          </a:effectRef>
+          <a:fontRef idx="minor">
+            <a:schemeClr val="lt1"/>
+          </a:fontRef>
+        </p:style>
+        <p:txBody>
+          <a:bodyPr rtlCol="0" anchor="ctr"/>
+          <a:lstStyle/>
+          <a:p>
+            <a:pPr algn="ctr"/>
+          </a:p>
+        </p:txBody>
+      </p:sp>
+      <p:sp>
+        <p:nvSpPr>
+          <p:cNvPr id="101" name="Rectangle 100"/>
+          <p:cNvSpPr/>
+          <p:nvPr/>
+        </p:nvSpPr>
+        <p:spPr>
+          <a:xfrm>
+            <a:off x="4779311" y="1183937"/>
+            <a:ext cx="27940" cy="27940"/>
+          </a:xfrm>
+          <a:prstGeom prst="rect">
+            <a:avLst/>
+          </a:prstGeom>
+          <a:solidFill>
+            <a:srgbClr val="AD6B0A"/>
+          </a:solidFill>
+          <a:ln>
+            <a:noFill/>
+          </a:ln>
+          <a:effectLst/>
+        </p:spPr>
+        <p:style>
+          <a:lnRef idx="1">
+            <a:schemeClr val="accent1"/>
+          </a:lnRef>
+          <a:fillRef idx="3">
+            <a:schemeClr val="accent1"/>
+          </a:fillRef>
+          <a:effectRef idx="2">
+            <a:schemeClr val="accent1"/>
+          </a:effectRef>
+          <a:fontRef idx="minor">
+            <a:schemeClr val="lt1"/>
+          </a:fontRef>
+        </p:style>
+        <p:txBody>
+          <a:bodyPr rtlCol="0" anchor="ctr"/>
+          <a:lstStyle/>
+          <a:p>
+            <a:pPr algn="ctr"/>
+          </a:p>
+        </p:txBody>
+      </p:sp>
+      <p:sp>
+        <p:nvSpPr>
+          <p:cNvPr id="102" name="Rectangle 101"/>
+          <p:cNvSpPr/>
+          <p:nvPr/>
+        </p:nvSpPr>
+        <p:spPr>
+          <a:xfrm>
+            <a:off x="4813482" y="1130511"/>
+            <a:ext cx="27940" cy="27940"/>
+          </a:xfrm>
+          <a:prstGeom prst="rect">
+            <a:avLst/>
+          </a:prstGeom>
+          <a:solidFill>
+            <a:srgbClr val="AD6B0A"/>
+          </a:solidFill>
+          <a:ln>
+            <a:noFill/>
+          </a:ln>
+          <a:effectLst/>
+        </p:spPr>
+        <p:style>
+          <a:lnRef idx="1">
+            <a:schemeClr val="accent1"/>
+          </a:lnRef>
+          <a:fillRef idx="3">
+            <a:schemeClr val="accent1"/>
+          </a:fillRef>
+          <a:effectRef idx="2">
+            <a:schemeClr val="accent1"/>
+          </a:effectRef>
+          <a:fontRef idx="minor">
+            <a:schemeClr val="lt1"/>
+          </a:fontRef>
+        </p:style>
+        <p:txBody>
+          <a:bodyPr rtlCol="0" anchor="ctr"/>
+          <a:lstStyle/>
+          <a:p>
+            <a:pPr algn="ctr"/>
+          </a:p>
+        </p:txBody>
+      </p:sp>
+      <p:sp>
+        <p:nvSpPr>
+          <p:cNvPr id="103" name="Rectangle 102"/>
+          <p:cNvSpPr/>
+          <p:nvPr/>
+        </p:nvSpPr>
+        <p:spPr>
+          <a:xfrm>
+            <a:off x="4819889" y="1198496"/>
+            <a:ext cx="27940" cy="27940"/>
+          </a:xfrm>
+          <a:prstGeom prst="rect">
+            <a:avLst/>
+          </a:prstGeom>
+          <a:solidFill>
+            <a:srgbClr val="AD6B0A"/>
+          </a:solidFill>
+          <a:ln>
+            <a:noFill/>
+          </a:ln>
+          <a:effectLst/>
+        </p:spPr>
+        <p:style>
+          <a:lnRef idx="1">
+            <a:schemeClr val="accent1"/>
+          </a:lnRef>
+          <a:fillRef idx="3">
+            <a:schemeClr val="accent1"/>
+          </a:fillRef>
+          <a:effectRef idx="2">
+            <a:schemeClr val="accent1"/>
+          </a:effectRef>
+          <a:fontRef idx="minor">
+            <a:schemeClr val="lt1"/>
+          </a:fontRef>
+        </p:style>
+        <p:txBody>
+          <a:bodyPr rtlCol="0" anchor="ctr"/>
+          <a:lstStyle/>
+          <a:p>
+            <a:pPr algn="ctr"/>
+          </a:p>
+        </p:txBody>
+      </p:sp>
+      <p:sp>
+        <p:nvSpPr>
+          <p:cNvPr id="104" name="Rectangle 103"/>
+          <p:cNvSpPr/>
+          <p:nvPr/>
+        </p:nvSpPr>
+        <p:spPr>
+          <a:xfrm>
+            <a:off x="4843381" y="1155800"/>
+            <a:ext cx="27940" cy="27940"/>
+          </a:xfrm>
+          <a:prstGeom prst="rect">
+            <a:avLst/>
+          </a:prstGeom>
+          <a:solidFill>
+            <a:srgbClr val="AD6B0A"/>
+          </a:solidFill>
+          <a:ln>
+            <a:noFill/>
+          </a:ln>
+          <a:effectLst/>
+        </p:spPr>
+        <p:style>
+          <a:lnRef idx="1">
+            <a:schemeClr val="accent1"/>
+          </a:lnRef>
+          <a:fillRef idx="3">
+            <a:schemeClr val="accent1"/>
+          </a:fillRef>
+          <a:effectRef idx="2">
+            <a:schemeClr val="accent1"/>
+          </a:effectRef>
+          <a:fontRef idx="minor">
+            <a:schemeClr val="lt1"/>
+          </a:fontRef>
+        </p:style>
+        <p:txBody>
+          <a:bodyPr rtlCol="0" anchor="ctr"/>
+          <a:lstStyle/>
+          <a:p>
+            <a:pPr algn="ctr"/>
+          </a:p>
+        </p:txBody>
+      </p:sp>
+      <p:sp>
+        <p:nvSpPr>
+          <p:cNvPr id="105" name="Rectangle 104"/>
+          <p:cNvSpPr/>
+          <p:nvPr/>
+        </p:nvSpPr>
+        <p:spPr>
+          <a:xfrm>
+            <a:off x="4841820" y="1170263"/>
+            <a:ext cx="60960" cy="60960"/>
+          </a:xfrm>
+          <a:prstGeom prst="rect">
+            <a:avLst/>
+          </a:prstGeom>
+          <a:solidFill>
+            <a:srgbClr val="AD6B0A"/>
+          </a:solidFill>
+          <a:ln w="8890">
+            <a:solidFill>
+              <a:srgbClr val="1C1E23"/>
+            </a:solidFill>
+          </a:ln>
+          <a:effectLst/>
+        </p:spPr>
+        <p:style>
+          <a:lnRef idx="1">
+            <a:schemeClr val="accent1"/>
+          </a:lnRef>
+          <a:fillRef idx="3">
+            <a:schemeClr val="accent1"/>
+          </a:fillRef>
+          <a:effectRef idx="2">
+            <a:schemeClr val="accent1"/>
+          </a:effectRef>
+          <a:fontRef idx="minor">
+            <a:schemeClr val="lt1"/>
+          </a:fontRef>
+        </p:style>
+        <p:txBody>
+          <a:bodyPr rtlCol="0" anchor="ctr"/>
+          <a:lstStyle/>
+          <a:p>
+            <a:pPr algn="ctr"/>
+          </a:p>
+        </p:txBody>
+      </p:sp>
+      <p:sp>
+        <p:nvSpPr>
+          <p:cNvPr id="106" name="Rectangle 105"/>
+          <p:cNvSpPr/>
+          <p:nvPr/>
+        </p:nvSpPr>
+        <p:spPr>
+          <a:xfrm>
+            <a:off x="3516074" y="961766"/>
+            <a:ext cx="27940" cy="27940"/>
+          </a:xfrm>
+          <a:prstGeom prst="rect">
+            <a:avLst/>
+          </a:prstGeom>
+          <a:solidFill>
+            <a:srgbClr val="19704F"/>
+          </a:solidFill>
+          <a:ln>
+            <a:noFill/>
+          </a:ln>
+          <a:effectLst/>
+        </p:spPr>
+        <p:style>
+          <a:lnRef idx="1">
+            <a:schemeClr val="accent1"/>
+          </a:lnRef>
+          <a:fillRef idx="3">
+            <a:schemeClr val="accent1"/>
+          </a:fillRef>
+          <a:effectRef idx="2">
+            <a:schemeClr val="accent1"/>
+          </a:effectRef>
+          <a:fontRef idx="minor">
+            <a:schemeClr val="lt1"/>
+          </a:fontRef>
+        </p:style>
+        <p:txBody>
+          <a:bodyPr rtlCol="0" anchor="ctr"/>
+          <a:lstStyle/>
+          <a:p>
+            <a:pPr algn="ctr"/>
+          </a:p>
+        </p:txBody>
+      </p:sp>
+      <p:sp>
+        <p:nvSpPr>
+          <p:cNvPr id="107" name="Rectangle 106"/>
+          <p:cNvSpPr/>
+          <p:nvPr/>
+        </p:nvSpPr>
+        <p:spPr>
+          <a:xfrm>
+            <a:off x="3522481" y="917681"/>
+            <a:ext cx="27940" cy="27940"/>
+          </a:xfrm>
+          <a:prstGeom prst="rect">
+            <a:avLst/>
+          </a:prstGeom>
+          <a:solidFill>
+            <a:srgbClr val="19704F"/>
+          </a:solidFill>
+          <a:ln>
+            <a:noFill/>
+          </a:ln>
+          <a:effectLst/>
+        </p:spPr>
+        <p:style>
+          <a:lnRef idx="1">
+            <a:schemeClr val="accent1"/>
+          </a:lnRef>
+          <a:fillRef idx="3">
+            <a:schemeClr val="accent1"/>
+          </a:fillRef>
+          <a:effectRef idx="2">
+            <a:schemeClr val="accent1"/>
+          </a:effectRef>
+          <a:fontRef idx="minor">
+            <a:schemeClr val="lt1"/>
+          </a:fontRef>
+        </p:style>
+        <p:txBody>
+          <a:bodyPr rtlCol="0" anchor="ctr"/>
+          <a:lstStyle/>
+          <a:p>
+            <a:pPr algn="ctr"/>
+          </a:p>
+        </p:txBody>
+      </p:sp>
+      <p:sp>
+        <p:nvSpPr>
+          <p:cNvPr id="108" name="Rectangle 107"/>
+          <p:cNvSpPr/>
+          <p:nvPr/>
+        </p:nvSpPr>
+        <p:spPr>
+          <a:xfrm>
+            <a:off x="3654891" y="1084044"/>
+            <a:ext cx="27940" cy="27940"/>
+          </a:xfrm>
+          <a:prstGeom prst="rect">
+            <a:avLst/>
+          </a:prstGeom>
+          <a:solidFill>
+            <a:srgbClr val="19704F"/>
+          </a:solidFill>
+          <a:ln>
+            <a:noFill/>
+          </a:ln>
+          <a:effectLst/>
+        </p:spPr>
+        <p:style>
+          <a:lnRef idx="1">
+            <a:schemeClr val="accent1"/>
+          </a:lnRef>
+          <a:fillRef idx="3">
+            <a:schemeClr val="accent1"/>
+          </a:fillRef>
+          <a:effectRef idx="2">
+            <a:schemeClr val="accent1"/>
+          </a:effectRef>
+          <a:fontRef idx="minor">
+            <a:schemeClr val="lt1"/>
+          </a:fontRef>
+        </p:style>
+        <p:txBody>
+          <a:bodyPr rtlCol="0" anchor="ctr"/>
+          <a:lstStyle/>
+          <a:p>
+            <a:pPr algn="ctr"/>
+          </a:p>
+        </p:txBody>
+      </p:sp>
+      <p:sp>
+        <p:nvSpPr>
+          <p:cNvPr id="109" name="Rectangle 108"/>
+          <p:cNvSpPr/>
+          <p:nvPr/>
+        </p:nvSpPr>
+        <p:spPr>
+          <a:xfrm>
+            <a:off x="3709351" y="1102434"/>
+            <a:ext cx="27940" cy="27940"/>
+          </a:xfrm>
+          <a:prstGeom prst="rect">
+            <a:avLst/>
+          </a:prstGeom>
+          <a:solidFill>
+            <a:srgbClr val="19704F"/>
+          </a:solidFill>
+          <a:ln>
+            <a:noFill/>
+          </a:ln>
+          <a:effectLst/>
+        </p:spPr>
+        <p:style>
+          <a:lnRef idx="1">
+            <a:schemeClr val="accent1"/>
+          </a:lnRef>
+          <a:fillRef idx="3">
+            <a:schemeClr val="accent1"/>
+          </a:fillRef>
+          <a:effectRef idx="2">
+            <a:schemeClr val="accent1"/>
+          </a:effectRef>
+          <a:fontRef idx="minor">
+            <a:schemeClr val="lt1"/>
+          </a:fontRef>
+        </p:style>
+        <p:txBody>
+          <a:bodyPr rtlCol="0" anchor="ctr"/>
+          <a:lstStyle/>
+          <a:p>
+            <a:pPr algn="ctr"/>
+          </a:p>
+        </p:txBody>
+      </p:sp>
+      <p:sp>
+        <p:nvSpPr>
+          <p:cNvPr id="110" name="Rectangle 109"/>
+          <p:cNvSpPr/>
+          <p:nvPr/>
+        </p:nvSpPr>
+        <p:spPr>
+          <a:xfrm>
+            <a:off x="3918644" y="825853"/>
+            <a:ext cx="27940" cy="27940"/>
+          </a:xfrm>
+          <a:prstGeom prst="rect">
+            <a:avLst/>
+          </a:prstGeom>
+          <a:solidFill>
+            <a:srgbClr val="19704F"/>
+          </a:solidFill>
+          <a:ln>
+            <a:noFill/>
+          </a:ln>
+          <a:effectLst/>
+        </p:spPr>
+        <p:style>
+          <a:lnRef idx="1">
+            <a:schemeClr val="accent1"/>
+          </a:lnRef>
+          <a:fillRef idx="3">
+            <a:schemeClr val="accent1"/>
+          </a:fillRef>
+          <a:effectRef idx="2">
+            <a:schemeClr val="accent1"/>
+          </a:effectRef>
+          <a:fontRef idx="minor">
+            <a:schemeClr val="lt1"/>
+          </a:fontRef>
+        </p:style>
+        <p:txBody>
+          <a:bodyPr rtlCol="0" anchor="ctr"/>
+          <a:lstStyle/>
+          <a:p>
+            <a:pPr algn="ctr"/>
+          </a:p>
+        </p:txBody>
+      </p:sp>
+      <p:sp>
+        <p:nvSpPr>
+          <p:cNvPr id="111" name="Rectangle 110"/>
+          <p:cNvSpPr/>
+          <p:nvPr/>
+        </p:nvSpPr>
+        <p:spPr>
+          <a:xfrm>
+            <a:off x="3936797" y="845903"/>
+            <a:ext cx="27940" cy="27940"/>
+          </a:xfrm>
+          <a:prstGeom prst="rect">
+            <a:avLst/>
+          </a:prstGeom>
+          <a:solidFill>
+            <a:srgbClr val="19704F"/>
+          </a:solidFill>
+          <a:ln>
+            <a:noFill/>
+          </a:ln>
+          <a:effectLst/>
+        </p:spPr>
+        <p:style>
+          <a:lnRef idx="1">
+            <a:schemeClr val="accent1"/>
+          </a:lnRef>
+          <a:fillRef idx="3">
+            <a:schemeClr val="accent1"/>
+          </a:fillRef>
+          <a:effectRef idx="2">
+            <a:schemeClr val="accent1"/>
+          </a:effectRef>
+          <a:fontRef idx="minor">
+            <a:schemeClr val="lt1"/>
+          </a:fontRef>
+        </p:style>
+        <p:txBody>
+          <a:bodyPr rtlCol="0" anchor="ctr"/>
+          <a:lstStyle/>
+          <a:p>
+            <a:pPr algn="ctr"/>
+          </a:p>
+        </p:txBody>
+      </p:sp>
+      <p:sp>
+        <p:nvSpPr>
+          <p:cNvPr id="112" name="Rectangle 111"/>
+          <p:cNvSpPr/>
+          <p:nvPr/>
+        </p:nvSpPr>
+        <p:spPr>
+          <a:xfrm>
+            <a:off x="3986985" y="879137"/>
+            <a:ext cx="27940" cy="27940"/>
+          </a:xfrm>
+          <a:prstGeom prst="rect">
+            <a:avLst/>
+          </a:prstGeom>
+          <a:solidFill>
+            <a:srgbClr val="19704F"/>
+          </a:solidFill>
+          <a:ln>
+            <a:noFill/>
+          </a:ln>
+          <a:effectLst/>
+        </p:spPr>
+        <p:style>
+          <a:lnRef idx="1">
+            <a:schemeClr val="accent1"/>
+          </a:lnRef>
+          <a:fillRef idx="3">
+            <a:schemeClr val="accent1"/>
+          </a:fillRef>
+          <a:effectRef idx="2">
+            <a:schemeClr val="accent1"/>
+          </a:effectRef>
+          <a:fontRef idx="minor">
+            <a:schemeClr val="lt1"/>
+          </a:fontRef>
+        </p:style>
+        <p:txBody>
+          <a:bodyPr rtlCol="0" anchor="ctr"/>
+          <a:lstStyle/>
+          <a:p>
+            <a:pPr algn="ctr"/>
+          </a:p>
+        </p:txBody>
+      </p:sp>
+      <p:sp>
+        <p:nvSpPr>
+          <p:cNvPr id="113" name="Rectangle 112"/>
+          <p:cNvSpPr/>
+          <p:nvPr/>
+        </p:nvSpPr>
+        <p:spPr>
+          <a:xfrm>
+            <a:off x="4008342" y="975571"/>
+            <a:ext cx="27940" cy="27940"/>
+          </a:xfrm>
+          <a:prstGeom prst="rect">
+            <a:avLst/>
+          </a:prstGeom>
+          <a:solidFill>
+            <a:srgbClr val="19704F"/>
+          </a:solidFill>
+          <a:ln>
+            <a:noFill/>
+          </a:ln>
+          <a:effectLst/>
+        </p:spPr>
+        <p:style>
+          <a:lnRef idx="1">
+            <a:schemeClr val="accent1"/>
+          </a:lnRef>
+          <a:fillRef idx="3">
+            <a:schemeClr val="accent1"/>
+          </a:fillRef>
+          <a:effectRef idx="2">
+            <a:schemeClr val="accent1"/>
+          </a:effectRef>
+          <a:fontRef idx="minor">
+            <a:schemeClr val="lt1"/>
+          </a:fontRef>
+        </p:style>
+        <p:txBody>
+          <a:bodyPr rtlCol="0" anchor="ctr"/>
+          <a:lstStyle/>
+          <a:p>
+            <a:pPr algn="ctr"/>
+          </a:p>
+        </p:txBody>
+      </p:sp>
+      <p:sp>
+        <p:nvSpPr>
+          <p:cNvPr id="114" name="Rectangle 113"/>
+          <p:cNvSpPr/>
+          <p:nvPr/>
+        </p:nvSpPr>
+        <p:spPr>
+          <a:xfrm>
+            <a:off x="4205889" y="797654"/>
+            <a:ext cx="27940" cy="27940"/>
+          </a:xfrm>
+          <a:prstGeom prst="rect">
+            <a:avLst/>
+          </a:prstGeom>
+          <a:solidFill>
+            <a:srgbClr val="19704F"/>
+          </a:solidFill>
+          <a:ln>
+            <a:noFill/>
+          </a:ln>
+          <a:effectLst/>
+        </p:spPr>
+        <p:style>
+          <a:lnRef idx="1">
+            <a:schemeClr val="accent1"/>
+          </a:lnRef>
+          <a:fillRef idx="3">
+            <a:schemeClr val="accent1"/>
+          </a:fillRef>
+          <a:effectRef idx="2">
+            <a:schemeClr val="accent1"/>
+          </a:effectRef>
+          <a:fontRef idx="minor">
+            <a:schemeClr val="lt1"/>
+          </a:fontRef>
+        </p:style>
+        <p:txBody>
+          <a:bodyPr rtlCol="0" anchor="ctr"/>
+          <a:lstStyle/>
+          <a:p>
+            <a:pPr algn="ctr"/>
+          </a:p>
+        </p:txBody>
+      </p:sp>
+      <p:sp>
+        <p:nvSpPr>
+          <p:cNvPr id="115" name="Rectangle 114"/>
+          <p:cNvSpPr/>
+          <p:nvPr/>
+        </p:nvSpPr>
+        <p:spPr>
+          <a:xfrm>
+            <a:off x="4222974" y="876255"/>
+            <a:ext cx="27940" cy="27940"/>
+          </a:xfrm>
+          <a:prstGeom prst="rect">
+            <a:avLst/>
+          </a:prstGeom>
+          <a:solidFill>
+            <a:srgbClr val="19704F"/>
+          </a:solidFill>
+          <a:ln>
+            <a:noFill/>
+          </a:ln>
+          <a:effectLst/>
+        </p:spPr>
+        <p:style>
+          <a:lnRef idx="1">
+            <a:schemeClr val="accent1"/>
+          </a:lnRef>
+          <a:fillRef idx="3">
+            <a:schemeClr val="accent1"/>
+          </a:fillRef>
+          <a:effectRef idx="2">
+            <a:schemeClr val="accent1"/>
+          </a:effectRef>
+          <a:fontRef idx="minor">
+            <a:schemeClr val="lt1"/>
+          </a:fontRef>
+        </p:style>
+        <p:txBody>
+          <a:bodyPr rtlCol="0" anchor="ctr"/>
+          <a:lstStyle/>
+          <a:p>
+            <a:pPr algn="ctr"/>
+          </a:p>
+        </p:txBody>
+      </p:sp>
+      <p:sp>
+        <p:nvSpPr>
+          <p:cNvPr id="116" name="Rectangle 115"/>
+          <p:cNvSpPr/>
+          <p:nvPr/>
+        </p:nvSpPr>
+        <p:spPr>
+          <a:xfrm>
+            <a:off x="4246467" y="862834"/>
+            <a:ext cx="27940" cy="27940"/>
+          </a:xfrm>
+          <a:prstGeom prst="rect">
+            <a:avLst/>
+          </a:prstGeom>
+          <a:solidFill>
+            <a:srgbClr val="19704F"/>
+          </a:solidFill>
+          <a:ln>
+            <a:noFill/>
+          </a:ln>
+          <a:effectLst/>
+        </p:spPr>
+        <p:style>
+          <a:lnRef idx="1">
+            <a:schemeClr val="accent1"/>
+          </a:lnRef>
+          <a:fillRef idx="3">
+            <a:schemeClr val="accent1"/>
+          </a:fillRef>
+          <a:effectRef idx="2">
+            <a:schemeClr val="accent1"/>
+          </a:effectRef>
+          <a:fontRef idx="minor">
+            <a:schemeClr val="lt1"/>
+          </a:fontRef>
+        </p:style>
+        <p:txBody>
+          <a:bodyPr rtlCol="0" anchor="ctr"/>
+          <a:lstStyle/>
+          <a:p>
+            <a:pPr algn="ctr"/>
+          </a:p>
+        </p:txBody>
+      </p:sp>
+      <p:sp>
+        <p:nvSpPr>
+          <p:cNvPr id="117" name="Rectangle 116"/>
+          <p:cNvSpPr/>
+          <p:nvPr/>
+        </p:nvSpPr>
+        <p:spPr>
+          <a:xfrm>
+            <a:off x="4249670" y="883253"/>
+            <a:ext cx="27940" cy="27940"/>
+          </a:xfrm>
+          <a:prstGeom prst="rect">
+            <a:avLst/>
+          </a:prstGeom>
+          <a:solidFill>
+            <a:srgbClr val="19704F"/>
+          </a:solidFill>
+          <a:ln>
+            <a:noFill/>
+          </a:ln>
+          <a:effectLst/>
+        </p:spPr>
+        <p:style>
+          <a:lnRef idx="1">
+            <a:schemeClr val="accent1"/>
+          </a:lnRef>
+          <a:fillRef idx="3">
+            <a:schemeClr val="accent1"/>
+          </a:fillRef>
+          <a:effectRef idx="2">
+            <a:schemeClr val="accent1"/>
+          </a:effectRef>
+          <a:fontRef idx="minor">
+            <a:schemeClr val="lt1"/>
+          </a:fontRef>
+        </p:style>
+        <p:txBody>
+          <a:bodyPr rtlCol="0" anchor="ctr"/>
+          <a:lstStyle/>
+          <a:p>
+            <a:pPr algn="ctr"/>
+          </a:p>
+        </p:txBody>
+      </p:sp>
+      <p:sp>
+        <p:nvSpPr>
+          <p:cNvPr id="118" name="Rectangle 117"/>
+          <p:cNvSpPr/>
+          <p:nvPr/>
+        </p:nvSpPr>
+        <p:spPr>
+          <a:xfrm>
+            <a:off x="4416826" y="815126"/>
+            <a:ext cx="60960" cy="60960"/>
+          </a:xfrm>
+          <a:prstGeom prst="rect">
+            <a:avLst/>
+          </a:prstGeom>
+          <a:solidFill>
+            <a:srgbClr val="19704F"/>
+          </a:solidFill>
+          <a:ln w="8890">
+            <a:solidFill>
+              <a:srgbClr val="1C1E23"/>
+            </a:solidFill>
+          </a:ln>
+          <a:effectLst/>
+        </p:spPr>
+        <p:style>
+          <a:lnRef idx="1">
+            <a:schemeClr val="accent1"/>
+          </a:lnRef>
+          <a:fillRef idx="3">
+            <a:schemeClr val="accent1"/>
+          </a:fillRef>
+          <a:effectRef idx="2">
+            <a:schemeClr val="accent1"/>
+          </a:effectRef>
+          <a:fontRef idx="minor">
+            <a:schemeClr val="lt1"/>
+          </a:fontRef>
+        </p:style>
+        <p:txBody>
+          <a:bodyPr rtlCol="0" anchor="ctr"/>
+          <a:lstStyle/>
+          <a:p>
+            <a:pPr algn="ctr"/>
+          </a:p>
+        </p:txBody>
+      </p:sp>
+      <p:sp>
+        <p:nvSpPr>
+          <p:cNvPr id="119" name="Rectangle 118"/>
+          <p:cNvSpPr/>
+          <p:nvPr/>
+        </p:nvSpPr>
+        <p:spPr>
+          <a:xfrm>
+            <a:off x="4445082" y="716952"/>
+            <a:ext cx="27940" cy="27940"/>
+          </a:xfrm>
+          <a:prstGeom prst="rect">
+            <a:avLst/>
+          </a:prstGeom>
+          <a:solidFill>
+            <a:srgbClr val="19704F"/>
+          </a:solidFill>
+          <a:ln>
+            <a:noFill/>
+          </a:ln>
+          <a:effectLst/>
+        </p:spPr>
+        <p:style>
+          <a:lnRef idx="1">
+            <a:schemeClr val="accent1"/>
+          </a:lnRef>
+          <a:fillRef idx="3">
+            <a:schemeClr val="accent1"/>
+          </a:fillRef>
+          <a:effectRef idx="2">
+            <a:schemeClr val="accent1"/>
+          </a:effectRef>
+          <a:fontRef idx="minor">
+            <a:schemeClr val="lt1"/>
+          </a:fontRef>
+        </p:style>
+        <p:txBody>
+          <a:bodyPr rtlCol="0" anchor="ctr"/>
+          <a:lstStyle/>
+          <a:p>
+            <a:pPr algn="ctr"/>
+          </a:p>
+        </p:txBody>
+      </p:sp>
+      <p:sp>
+        <p:nvSpPr>
+          <p:cNvPr id="120" name="Rectangle 119"/>
+          <p:cNvSpPr/>
+          <p:nvPr/>
+        </p:nvSpPr>
+        <p:spPr>
+          <a:xfrm>
+            <a:off x="4449353" y="804435"/>
+            <a:ext cx="27940" cy="27940"/>
+          </a:xfrm>
+          <a:prstGeom prst="rect">
+            <a:avLst/>
+          </a:prstGeom>
+          <a:solidFill>
+            <a:srgbClr val="19704F"/>
+          </a:solidFill>
+          <a:ln>
+            <a:noFill/>
+          </a:ln>
+          <a:effectLst/>
+        </p:spPr>
+        <p:style>
+          <a:lnRef idx="1">
+            <a:schemeClr val="accent1"/>
+          </a:lnRef>
+          <a:fillRef idx="3">
+            <a:schemeClr val="accent1"/>
+          </a:fillRef>
+          <a:effectRef idx="2">
+            <a:schemeClr val="accent1"/>
+          </a:effectRef>
+          <a:fontRef idx="minor">
+            <a:schemeClr val="lt1"/>
+          </a:fontRef>
+        </p:style>
+        <p:txBody>
+          <a:bodyPr rtlCol="0" anchor="ctr"/>
+          <a:lstStyle/>
+          <a:p>
+            <a:pPr algn="ctr"/>
+          </a:p>
+        </p:txBody>
+      </p:sp>
+      <p:sp>
+        <p:nvSpPr>
+          <p:cNvPr id="121" name="Rectangle 120"/>
+          <p:cNvSpPr/>
+          <p:nvPr/>
+        </p:nvSpPr>
+        <p:spPr>
+          <a:xfrm>
+            <a:off x="4460032" y="818169"/>
+            <a:ext cx="27940" cy="27940"/>
+          </a:xfrm>
+          <a:prstGeom prst="rect">
+            <a:avLst/>
+          </a:prstGeom>
+          <a:solidFill>
+            <a:srgbClr val="19704F"/>
+          </a:solidFill>
+          <a:ln>
+            <a:noFill/>
+          </a:ln>
+          <a:effectLst/>
+        </p:spPr>
+        <p:style>
+          <a:lnRef idx="1">
+            <a:schemeClr val="accent1"/>
+          </a:lnRef>
+          <a:fillRef idx="3">
+            <a:schemeClr val="accent1"/>
+          </a:fillRef>
+          <a:effectRef idx="2">
+            <a:schemeClr val="accent1"/>
+          </a:effectRef>
+          <a:fontRef idx="minor">
+            <a:schemeClr val="lt1"/>
+          </a:fontRef>
+        </p:style>
+        <p:txBody>
+          <a:bodyPr rtlCol="0" anchor="ctr"/>
+          <a:lstStyle/>
+          <a:p>
+            <a:pPr algn="ctr"/>
+          </a:p>
+        </p:txBody>
+      </p:sp>
+      <p:cxnSp>
+        <p:nvCxnSpPr>
+          <p:cNvPr id="122" name="Connector 121"/>
+          <p:cNvCxnSpPr/>
+          <p:nvPr/>
+        </p:nvCxnSpPr>
+        <p:spPr>
+          <a:xfrm>
+            <a:off x="2997200" y="761734"/>
+            <a:ext cx="1905000" cy="0"/>
+          </a:xfrm>
+          <a:prstGeom prst="line">
+            <a:avLst/>
+          </a:prstGeom>
+          <a:ln w="8890">
+            <a:solidFill>
+              <a:srgbClr val="AD2B2B"/>
+            </a:solidFill>
+            <a:prstDash val="dash"/>
+          </a:ln>
+        </p:spPr>
+        <p:style>
+          <a:lnRef idx="2">
+            <a:schemeClr val="accent1"/>
+          </a:lnRef>
+          <a:fillRef idx="0">
+            <a:schemeClr val="accent1"/>
+          </a:fillRef>
+          <a:effectRef idx="1">
+            <a:schemeClr val="accent1"/>
+          </a:effectRef>
+          <a:fontRef idx="minor">
+            <a:schemeClr val="tx1"/>
+          </a:fontRef>
+        </p:style>
+      </p:cxnSp>
+      <p:sp>
+        <p:nvSpPr>
+          <p:cNvPr id="123" name="TextBox 122"/>
           <p:cNvSpPr txBox="1"/>
           <p:nvPr/>
         </p:nvSpPr>
         <p:spPr>
           <a:xfrm>
-            <a:off x="2413000" y="799846"/>
-            <a:ext cx="3048000" cy="158496"/>
+            <a:off x="3352800" y="644767"/>
+            <a:ext cx="3048000" cy="140208"/>
           </a:xfrm>
           <a:prstGeom prst="rect">
             <a:avLst/>
@@ -4564,28 +7961,72 @@
           </a:bodyPr>
           <a:lstStyle/>
           <a:p>
-            <a:pPr algn="ctr"/>
-            <a:r>
-              <a:rPr sz="520" b="0" i="0">
+            <a:pPr algn="r"/>
+            <a:r>
+              <a:rPr sz="459" b="0" i="0">
                 <a:solidFill>
                   <a:srgbClr val="AD2B2B"/>
                 </a:solidFill>
                 <a:latin typeface="Helvetica"/>
               </a:rPr>
-              <a:t>[FIG-RISK-INTERVENTION]</a:t>
-            </a:r>
-          </a:p>
-        </p:txBody>
-      </p:sp>
-      <p:sp>
-        <p:nvSpPr>
-          <p:cNvPr id="44" name="TextBox 43"/>
+              <a:t>harm cap</a:t>
+            </a:r>
+          </a:p>
+        </p:txBody>
+      </p:sp>
+      <p:sp>
+        <p:nvSpPr>
+          <p:cNvPr id="124" name="Rectangle 123"/>
+          <p:cNvSpPr/>
+          <p:nvPr/>
+        </p:nvSpPr>
+        <p:spPr>
+          <a:xfrm>
+            <a:off x="3048000" y="431800"/>
+            <a:ext cx="50800" cy="50800"/>
+          </a:xfrm>
+          <a:prstGeom prst="rect">
+            <a:avLst/>
+          </a:prstGeom>
+          <a:solidFill>
+            <a:srgbClr val="215499"/>
+          </a:solidFill>
+          <a:ln>
+            <a:noFill/>
+          </a:ln>
+          <a:effectLst/>
+        </p:spPr>
+        <p:style>
+          <a:lnRef idx="1">
+            <a:schemeClr val="accent1"/>
+          </a:lnRef>
+          <a:fillRef idx="3">
+            <a:schemeClr val="accent1"/>
+          </a:fillRef>
+          <a:effectRef idx="2">
+            <a:schemeClr val="accent1"/>
+          </a:effectRef>
+          <a:fontRef idx="minor">
+            <a:schemeClr val="lt1"/>
+          </a:fontRef>
+        </p:style>
+        <p:txBody>
+          <a:bodyPr rtlCol="0" anchor="ctr"/>
+          <a:lstStyle/>
+          <a:p>
+            <a:pPr algn="ctr"/>
+          </a:p>
+        </p:txBody>
+      </p:sp>
+      <p:sp>
+        <p:nvSpPr>
+          <p:cNvPr id="125" name="TextBox 124"/>
           <p:cNvSpPr txBox="1"/>
           <p:nvPr/>
         </p:nvSpPr>
         <p:spPr>
           <a:xfrm>
-            <a:off x="2413000" y="921004"/>
+            <a:off x="1600200" y="400304"/>
             <a:ext cx="3048000" cy="146304"/>
           </a:xfrm>
           <a:prstGeom prst="rect">
@@ -4599,7 +8040,7 @@
           </a:bodyPr>
           <a:lstStyle/>
           <a:p>
-            <a:pPr algn="ctr"/>
+            <a:pPr algn="l"/>
             <a:r>
               <a:rPr sz="480" b="0" i="0">
                 <a:solidFill>
@@ -4607,20 +8048,64 @@
                 </a:solidFill>
                 <a:latin typeface="Helvetica"/>
               </a:rPr>
-              <a:t>harm against intervention rate for</a:t>
-            </a:r>
-          </a:p>
-        </p:txBody>
-      </p:sp>
-      <p:sp>
-        <p:nvSpPr>
-          <p:cNvPr id="45" name="TextBox 44"/>
+              <a:t>Bolt</a:t>
+            </a:r>
+          </a:p>
+        </p:txBody>
+      </p:sp>
+      <p:sp>
+        <p:nvSpPr>
+          <p:cNvPr id="126" name="Rectangle 125"/>
+          <p:cNvSpPr/>
+          <p:nvPr/>
+        </p:nvSpPr>
+        <p:spPr>
+          <a:xfrm>
+            <a:off x="3632200" y="431800"/>
+            <a:ext cx="50800" cy="50800"/>
+          </a:xfrm>
+          <a:prstGeom prst="rect">
+            <a:avLst/>
+          </a:prstGeom>
+          <a:solidFill>
+            <a:srgbClr val="AD6B0A"/>
+          </a:solidFill>
+          <a:ln>
+            <a:noFill/>
+          </a:ln>
+          <a:effectLst/>
+        </p:spPr>
+        <p:style>
+          <a:lnRef idx="1">
+            <a:schemeClr val="accent1"/>
+          </a:lnRef>
+          <a:fillRef idx="3">
+            <a:schemeClr val="accent1"/>
+          </a:fillRef>
+          <a:effectRef idx="2">
+            <a:schemeClr val="accent1"/>
+          </a:effectRef>
+          <a:fontRef idx="minor">
+            <a:schemeClr val="lt1"/>
+          </a:fontRef>
+        </p:style>
+        <p:txBody>
+          <a:bodyPr rtlCol="0" anchor="ctr"/>
+          <a:lstStyle/>
+          <a:p>
+            <a:pPr algn="ctr"/>
+          </a:p>
+        </p:txBody>
+      </p:sp>
+      <p:sp>
+        <p:nvSpPr>
+          <p:cNvPr id="127" name="TextBox 126"/>
           <p:cNvSpPr txBox="1"/>
           <p:nvPr/>
         </p:nvSpPr>
         <p:spPr>
           <a:xfrm>
-            <a:off x="2413000" y="1009904"/>
+            <a:off x="2184400" y="400304"/>
             <a:ext cx="3048000" cy="146304"/>
           </a:xfrm>
           <a:prstGeom prst="rect">
@@ -4634,7 +8119,7 @@
           </a:bodyPr>
           <a:lstStyle/>
           <a:p>
-            <a:pPr algn="ctr"/>
+            <a:pPr algn="l"/>
             <a:r>
               <a:rPr sz="480" b="0" i="0">
                 <a:solidFill>
@@ -4642,20 +8127,99 @@
                 </a:solidFill>
                 <a:latin typeface="Helvetica"/>
               </a:rPr>
-              <a:t>the default operating point</a:t>
-            </a:r>
-          </a:p>
-        </p:txBody>
-      </p:sp>
-      <p:sp>
-        <p:nvSpPr>
-          <p:cNvPr id="46" name="TextBox 45"/>
+              <a:t>TimesFM</a:t>
+            </a:r>
+          </a:p>
+        </p:txBody>
+      </p:sp>
+      <p:sp>
+        <p:nvSpPr>
+          <p:cNvPr id="128" name="Rectangle 127"/>
+          <p:cNvSpPr/>
+          <p:nvPr/>
+        </p:nvSpPr>
+        <p:spPr>
+          <a:xfrm>
+            <a:off x="4216400" y="431800"/>
+            <a:ext cx="50800" cy="50800"/>
+          </a:xfrm>
+          <a:prstGeom prst="rect">
+            <a:avLst/>
+          </a:prstGeom>
+          <a:solidFill>
+            <a:srgbClr val="19704F"/>
+          </a:solidFill>
+          <a:ln>
+            <a:noFill/>
+          </a:ln>
+          <a:effectLst/>
+        </p:spPr>
+        <p:style>
+          <a:lnRef idx="1">
+            <a:schemeClr val="accent1"/>
+          </a:lnRef>
+          <a:fillRef idx="3">
+            <a:schemeClr val="accent1"/>
+          </a:fillRef>
+          <a:effectRef idx="2">
+            <a:schemeClr val="accent1"/>
+          </a:effectRef>
+          <a:fontRef idx="minor">
+            <a:schemeClr val="lt1"/>
+          </a:fontRef>
+        </p:style>
+        <p:txBody>
+          <a:bodyPr rtlCol="0" anchor="ctr"/>
+          <a:lstStyle/>
+          <a:p>
+            <a:pPr algn="ctr"/>
+          </a:p>
+        </p:txBody>
+      </p:sp>
+      <p:sp>
+        <p:nvSpPr>
+          <p:cNvPr id="129" name="TextBox 128"/>
           <p:cNvSpPr txBox="1"/>
           <p:nvPr/>
         </p:nvSpPr>
         <p:spPr>
           <a:xfrm>
-            <a:off x="2413000" y="1719389"/>
+            <a:off x="2768600" y="400304"/>
+            <a:ext cx="3048000" cy="146304"/>
+          </a:xfrm>
+          <a:prstGeom prst="rect">
+            <a:avLst/>
+          </a:prstGeom>
+          <a:noFill/>
+        </p:spPr>
+        <p:txBody>
+          <a:bodyPr wrap="none" lIns="0" rIns="0" tIns="0" bIns="0" anchor="ctr">
+            <a:spAutoFit/>
+          </a:bodyPr>
+          <a:lstStyle/>
+          <a:p>
+            <a:pPr algn="l"/>
+            <a:r>
+              <a:rPr sz="480" b="0" i="0">
+                <a:solidFill>
+                  <a:srgbClr val="6B727C"/>
+                </a:solidFill>
+                <a:latin typeface="Helvetica"/>
+              </a:rPr>
+              <a:t>Chronos-2</a:t>
+            </a:r>
+          </a:p>
+        </p:txBody>
+      </p:sp>
+      <p:sp>
+        <p:nvSpPr>
+          <p:cNvPr id="130" name="TextBox 129"/>
+          <p:cNvSpPr txBox="1"/>
+          <p:nvPr/>
+        </p:nvSpPr>
+        <p:spPr>
+          <a:xfrm>
+            <a:off x="2425700" y="1719389"/>
             <a:ext cx="3048000" cy="149352"/>
           </a:xfrm>
           <a:prstGeom prst="rect">
@@ -4684,13 +8248,13 @@
       </p:sp>
       <p:sp>
         <p:nvSpPr>
-          <p:cNvPr id="47" name="TextBox 46"/>
+          <p:cNvPr id="131" name="TextBox 130"/>
           <p:cNvSpPr txBox="1"/>
           <p:nvPr/>
         </p:nvSpPr>
         <p:spPr>
           <a:xfrm>
-            <a:off x="2413000" y="1820989"/>
+            <a:off x="2425700" y="1833689"/>
             <a:ext cx="3048000" cy="149352"/>
           </a:xfrm>
           <a:prstGeom prst="rect">
@@ -4712,20 +8276,20 @@
                 </a:solidFill>
                 <a:latin typeface="Helvetica"/>
               </a:rPr>
-              <a:t>a low harmful rate is only meaningful</a:t>
-            </a:r>
-          </a:p>
-        </p:txBody>
-      </p:sp>
-      <p:sp>
-        <p:nvSpPr>
-          <p:cNvPr id="48" name="TextBox 47"/>
+              <a:t>one point per neighbourhood size and penalty strength</a:t>
+            </a:r>
+          </a:p>
+        </p:txBody>
+      </p:sp>
+      <p:sp>
+        <p:nvSpPr>
+          <p:cNvPr id="132" name="TextBox 131"/>
           <p:cNvSpPr txBox="1"/>
           <p:nvPr/>
         </p:nvSpPr>
         <p:spPr>
           <a:xfrm>
-            <a:off x="2413000" y="1909889"/>
+            <a:off x="2425700" y="1935289"/>
             <a:ext cx="3048000" cy="149352"/>
           </a:xfrm>
           <a:prstGeom prst="rect">
@@ -4747,20 +8311,20 @@
                 </a:solidFill>
                 <a:latin typeface="Helvetica"/>
               </a:rPr>
-              <a:t>together with the intervention rate</a:t>
-            </a:r>
-          </a:p>
-        </p:txBody>
-      </p:sp>
-      <p:sp>
-        <p:nvSpPr>
-          <p:cNvPr id="49" name="TextBox 48"/>
+              <a:t>large marker = the point the cross-validation selected</a:t>
+            </a:r>
+          </a:p>
+        </p:txBody>
+      </p:sp>
+      <p:sp>
+        <p:nvSpPr>
+          <p:cNvPr id="133" name="TextBox 132"/>
           <p:cNvSpPr txBox="1"/>
           <p:nvPr/>
         </p:nvSpPr>
         <p:spPr>
           <a:xfrm>
-            <a:off x="990600" y="2098675"/>
+            <a:off x="990600" y="2149475"/>
             <a:ext cx="3048000" cy="152400"/>
           </a:xfrm>
           <a:prstGeom prst="rect">
@@ -4782,7 +8346,7 @@
                 </a:solidFill>
                 <a:latin typeface="Helvetica"/>
               </a:rPr>
-              <a:t>The decision is worth making because reconstruction quality and forecasting utility disagree, and it has to be selective because intervening more often raises harm.</a:t>
+              <a:t>The two criteria agree barely more often than chance, and moving along the penalty grid trades intervention rate against accuracy at a nearly fixed harmful rate.</a:t>
             </a:r>
           </a:p>
         </p:txBody>

--- a/latex/figure/fig3_why_selective.pptx
+++ b/latex/figure/fig3_why_selective.pptx
@@ -3803,7 +3803,7 @@
             <a:avLst/>
           </a:prstGeom>
           <a:solidFill>
-            <a:srgbClr val="6288BA"/>
+            <a:srgbClr val="89A6CD"/>
           </a:solidFill>
           <a:ln w="6350">
             <a:solidFill>
@@ -3860,11 +3860,11 @@
             <a:r>
               <a:rPr sz="459" b="0" i="0">
                 <a:solidFill>
-                  <a:srgbClr val="FFFFFF"/>
+                  <a:srgbClr val="1C1E23"/>
                 </a:solidFill>
                 <a:latin typeface="Helvetica"/>
               </a:rPr>
-              <a:t>0.30</a:t>
+              <a:t>0.21</a:t>
             </a:r>
           </a:p>
         </p:txBody>
@@ -3884,7 +3884,7 @@
             <a:avLst/>
           </a:prstGeom>
           <a:solidFill>
-            <a:srgbClr val="6085B8"/>
+            <a:srgbClr val="7294C2"/>
           </a:solidFill>
           <a:ln w="6350">
             <a:solidFill>
@@ -3941,11 +3941,11 @@
             <a:r>
               <a:rPr sz="459" b="0" i="0">
                 <a:solidFill>
-                  <a:srgbClr val="FFFFFF"/>
+                  <a:srgbClr val="1C1E23"/>
                 </a:solidFill>
                 <a:latin typeface="Helvetica"/>
               </a:rPr>
-              <a:t>0.31</a:t>
+              <a:t>0.26</a:t>
             </a:r>
           </a:p>
         </p:txBody>
@@ -3965,7 +3965,7 @@
             <a:avLst/>
           </a:prstGeom>
           <a:solidFill>
-            <a:srgbClr val="82A1CA"/>
+            <a:srgbClr val="809FC9"/>
           </a:solidFill>
           <a:ln w="6350">
             <a:solidFill>
@@ -4046,7 +4046,7 @@
             <a:avLst/>
           </a:prstGeom>
           <a:solidFill>
-            <a:srgbClr val="9CB5D7"/>
+            <a:srgbClr val="9AB4D6"/>
           </a:solidFill>
           <a:ln w="6350">
             <a:solidFill>
@@ -4120,14 +4120,14 @@
         </p:nvSpPr>
         <p:spPr>
           <a:xfrm>
-            <a:off x="914400" y="381000"/>
+            <a:off x="533400" y="1549400"/>
             <a:ext cx="381000" cy="292100"/>
           </a:xfrm>
           <a:prstGeom prst="rect">
             <a:avLst/>
           </a:prstGeom>
           <a:solidFill>
-            <a:srgbClr val="8CA9CF"/>
+            <a:srgbClr val="B0C5E1"/>
           </a:solidFill>
           <a:ln w="6350">
             <a:solidFill>
@@ -4166,7 +4166,574 @@
         </p:nvSpPr>
         <p:spPr>
           <a:xfrm>
+            <a:off x="-800100" y="1636902"/>
+            <a:ext cx="3048000" cy="140208"/>
+          </a:xfrm>
+          <a:prstGeom prst="rect">
+            <a:avLst/>
+          </a:prstGeom>
+          <a:noFill/>
+        </p:spPr>
+        <p:txBody>
+          <a:bodyPr wrap="none" lIns="0" rIns="0" tIns="0" bIns="0" anchor="ctr">
+            <a:spAutoFit/>
+          </a:bodyPr>
+          <a:lstStyle/>
+          <a:p>
+            <a:pPr algn="ctr"/>
+            <a:r>
+              <a:rPr sz="459" b="0" i="0">
+                <a:solidFill>
+                  <a:srgbClr val="1C1E23"/>
+                </a:solidFill>
+                <a:latin typeface="Helvetica"/>
+              </a:rPr>
+              <a:t>0.12</a:t>
+            </a:r>
+          </a:p>
+        </p:txBody>
+      </p:sp>
+      <p:sp>
+        <p:nvSpPr>
+          <p:cNvPr id="32" name="Rectangle 31"/>
+          <p:cNvSpPr/>
+          <p:nvPr/>
+        </p:nvSpPr>
+        <p:spPr>
+          <a:xfrm>
+            <a:off x="914400" y="381000"/>
+            <a:ext cx="381000" cy="292100"/>
+          </a:xfrm>
+          <a:prstGeom prst="rect">
+            <a:avLst/>
+          </a:prstGeom>
+          <a:solidFill>
+            <a:srgbClr val="9BB4D6"/>
+          </a:solidFill>
+          <a:ln w="6350">
+            <a:solidFill>
+              <a:srgbClr val="FFFFFF"/>
+            </a:solidFill>
+          </a:ln>
+          <a:effectLst/>
+        </p:spPr>
+        <p:style>
+          <a:lnRef idx="1">
+            <a:schemeClr val="accent1"/>
+          </a:lnRef>
+          <a:fillRef idx="3">
+            <a:schemeClr val="accent1"/>
+          </a:fillRef>
+          <a:effectRef idx="2">
+            <a:schemeClr val="accent1"/>
+          </a:effectRef>
+          <a:fontRef idx="minor">
+            <a:schemeClr val="lt1"/>
+          </a:fontRef>
+        </p:style>
+        <p:txBody>
+          <a:bodyPr rtlCol="0" anchor="ctr"/>
+          <a:lstStyle/>
+          <a:p>
+            <a:pPr algn="ctr"/>
+          </a:p>
+        </p:txBody>
+      </p:sp>
+      <p:sp>
+        <p:nvSpPr>
+          <p:cNvPr id="33" name="TextBox 32"/>
+          <p:cNvSpPr txBox="1"/>
+          <p:nvPr/>
+        </p:nvSpPr>
+        <p:spPr>
+          <a:xfrm>
             <a:off x="-419100" y="468503"/>
+            <a:ext cx="3048000" cy="140208"/>
+          </a:xfrm>
+          <a:prstGeom prst="rect">
+            <a:avLst/>
+          </a:prstGeom>
+          <a:noFill/>
+        </p:spPr>
+        <p:txBody>
+          <a:bodyPr wrap="none" lIns="0" rIns="0" tIns="0" bIns="0" anchor="ctr">
+            <a:spAutoFit/>
+          </a:bodyPr>
+          <a:lstStyle/>
+          <a:p>
+            <a:pPr algn="ctr"/>
+            <a:r>
+              <a:rPr sz="459" b="0" i="0">
+                <a:solidFill>
+                  <a:srgbClr val="1C1E23"/>
+                </a:solidFill>
+                <a:latin typeface="Helvetica"/>
+              </a:rPr>
+              <a:t>0.17</a:t>
+            </a:r>
+          </a:p>
+        </p:txBody>
+      </p:sp>
+      <p:sp>
+        <p:nvSpPr>
+          <p:cNvPr id="34" name="Rectangle 33"/>
+          <p:cNvSpPr/>
+          <p:nvPr/>
+        </p:nvSpPr>
+        <p:spPr>
+          <a:xfrm>
+            <a:off x="914400" y="673100"/>
+            <a:ext cx="381000" cy="292100"/>
+          </a:xfrm>
+          <a:prstGeom prst="rect">
+            <a:avLst/>
+          </a:prstGeom>
+          <a:solidFill>
+            <a:srgbClr val="7194C1"/>
+          </a:solidFill>
+          <a:ln w="6350">
+            <a:solidFill>
+              <a:srgbClr val="FFFFFF"/>
+            </a:solidFill>
+          </a:ln>
+          <a:effectLst/>
+        </p:spPr>
+        <p:style>
+          <a:lnRef idx="1">
+            <a:schemeClr val="accent1"/>
+          </a:lnRef>
+          <a:fillRef idx="3">
+            <a:schemeClr val="accent1"/>
+          </a:fillRef>
+          <a:effectRef idx="2">
+            <a:schemeClr val="accent1"/>
+          </a:effectRef>
+          <a:fontRef idx="minor">
+            <a:schemeClr val="lt1"/>
+          </a:fontRef>
+        </p:style>
+        <p:txBody>
+          <a:bodyPr rtlCol="0" anchor="ctr"/>
+          <a:lstStyle/>
+          <a:p>
+            <a:pPr algn="ctr"/>
+          </a:p>
+        </p:txBody>
+      </p:sp>
+      <p:sp>
+        <p:nvSpPr>
+          <p:cNvPr id="35" name="TextBox 34"/>
+          <p:cNvSpPr txBox="1"/>
+          <p:nvPr/>
+        </p:nvSpPr>
+        <p:spPr>
+          <a:xfrm>
+            <a:off x="-419100" y="760602"/>
+            <a:ext cx="3048000" cy="140208"/>
+          </a:xfrm>
+          <a:prstGeom prst="rect">
+            <a:avLst/>
+          </a:prstGeom>
+          <a:noFill/>
+        </p:spPr>
+        <p:txBody>
+          <a:bodyPr wrap="none" lIns="0" rIns="0" tIns="0" bIns="0" anchor="ctr">
+            <a:spAutoFit/>
+          </a:bodyPr>
+          <a:lstStyle/>
+          <a:p>
+            <a:pPr algn="ctr"/>
+            <a:r>
+              <a:rPr sz="459" b="0" i="0">
+                <a:solidFill>
+                  <a:srgbClr val="1C1E23"/>
+                </a:solidFill>
+                <a:latin typeface="Helvetica"/>
+              </a:rPr>
+              <a:t>0.26</a:t>
+            </a:r>
+          </a:p>
+        </p:txBody>
+      </p:sp>
+      <p:sp>
+        <p:nvSpPr>
+          <p:cNvPr id="36" name="Rectangle 35"/>
+          <p:cNvSpPr/>
+          <p:nvPr/>
+        </p:nvSpPr>
+        <p:spPr>
+          <a:xfrm>
+            <a:off x="914400" y="965200"/>
+            <a:ext cx="381000" cy="292100"/>
+          </a:xfrm>
+          <a:prstGeom prst="rect">
+            <a:avLst/>
+          </a:prstGeom>
+          <a:solidFill>
+            <a:srgbClr val="6A8EBE"/>
+          </a:solidFill>
+          <a:ln w="6350">
+            <a:solidFill>
+              <a:srgbClr val="FFFFFF"/>
+            </a:solidFill>
+          </a:ln>
+          <a:effectLst/>
+        </p:spPr>
+        <p:style>
+          <a:lnRef idx="1">
+            <a:schemeClr val="accent1"/>
+          </a:lnRef>
+          <a:fillRef idx="3">
+            <a:schemeClr val="accent1"/>
+          </a:fillRef>
+          <a:effectRef idx="2">
+            <a:schemeClr val="accent1"/>
+          </a:effectRef>
+          <a:fontRef idx="minor">
+            <a:schemeClr val="lt1"/>
+          </a:fontRef>
+        </p:style>
+        <p:txBody>
+          <a:bodyPr rtlCol="0" anchor="ctr"/>
+          <a:lstStyle/>
+          <a:p>
+            <a:pPr algn="ctr"/>
+          </a:p>
+        </p:txBody>
+      </p:sp>
+      <p:sp>
+        <p:nvSpPr>
+          <p:cNvPr id="37" name="TextBox 36"/>
+          <p:cNvSpPr txBox="1"/>
+          <p:nvPr/>
+        </p:nvSpPr>
+        <p:spPr>
+          <a:xfrm>
+            <a:off x="-419100" y="1052703"/>
+            <a:ext cx="3048000" cy="140208"/>
+          </a:xfrm>
+          <a:prstGeom prst="rect">
+            <a:avLst/>
+          </a:prstGeom>
+          <a:noFill/>
+        </p:spPr>
+        <p:txBody>
+          <a:bodyPr wrap="none" lIns="0" rIns="0" tIns="0" bIns="0" anchor="ctr">
+            <a:spAutoFit/>
+          </a:bodyPr>
+          <a:lstStyle/>
+          <a:p>
+            <a:pPr algn="ctr"/>
+            <a:r>
+              <a:rPr sz="459" b="0" i="0">
+                <a:solidFill>
+                  <a:srgbClr val="FFFFFF"/>
+                </a:solidFill>
+                <a:latin typeface="Helvetica"/>
+              </a:rPr>
+              <a:t>0.28</a:t>
+            </a:r>
+          </a:p>
+        </p:txBody>
+      </p:sp>
+      <p:sp>
+        <p:nvSpPr>
+          <p:cNvPr id="38" name="Rectangle 37"/>
+          <p:cNvSpPr/>
+          <p:nvPr/>
+        </p:nvSpPr>
+        <p:spPr>
+          <a:xfrm>
+            <a:off x="914400" y="1257300"/>
+            <a:ext cx="381000" cy="292100"/>
+          </a:xfrm>
+          <a:prstGeom prst="rect">
+            <a:avLst/>
+          </a:prstGeom>
+          <a:solidFill>
+            <a:srgbClr val="91ACD1"/>
+          </a:solidFill>
+          <a:ln w="6350">
+            <a:solidFill>
+              <a:srgbClr val="FFFFFF"/>
+            </a:solidFill>
+          </a:ln>
+          <a:effectLst/>
+        </p:spPr>
+        <p:style>
+          <a:lnRef idx="1">
+            <a:schemeClr val="accent1"/>
+          </a:lnRef>
+          <a:fillRef idx="3">
+            <a:schemeClr val="accent1"/>
+          </a:fillRef>
+          <a:effectRef idx="2">
+            <a:schemeClr val="accent1"/>
+          </a:effectRef>
+          <a:fontRef idx="minor">
+            <a:schemeClr val="lt1"/>
+          </a:fontRef>
+        </p:style>
+        <p:txBody>
+          <a:bodyPr rtlCol="0" anchor="ctr"/>
+          <a:lstStyle/>
+          <a:p>
+            <a:pPr algn="ctr"/>
+          </a:p>
+        </p:txBody>
+      </p:sp>
+      <p:sp>
+        <p:nvSpPr>
+          <p:cNvPr id="39" name="TextBox 38"/>
+          <p:cNvSpPr txBox="1"/>
+          <p:nvPr/>
+        </p:nvSpPr>
+        <p:spPr>
+          <a:xfrm>
+            <a:off x="-419100" y="1344803"/>
+            <a:ext cx="3048000" cy="140208"/>
+          </a:xfrm>
+          <a:prstGeom prst="rect">
+            <a:avLst/>
+          </a:prstGeom>
+          <a:noFill/>
+        </p:spPr>
+        <p:txBody>
+          <a:bodyPr wrap="none" lIns="0" rIns="0" tIns="0" bIns="0" anchor="ctr">
+            <a:spAutoFit/>
+          </a:bodyPr>
+          <a:lstStyle/>
+          <a:p>
+            <a:pPr algn="ctr"/>
+            <a:r>
+              <a:rPr sz="459" b="0" i="0">
+                <a:solidFill>
+                  <a:srgbClr val="1C1E23"/>
+                </a:solidFill>
+                <a:latin typeface="Helvetica"/>
+              </a:rPr>
+              <a:t>0.19</a:t>
+            </a:r>
+          </a:p>
+        </p:txBody>
+      </p:sp>
+      <p:sp>
+        <p:nvSpPr>
+          <p:cNvPr id="40" name="Rectangle 39"/>
+          <p:cNvSpPr/>
+          <p:nvPr/>
+        </p:nvSpPr>
+        <p:spPr>
+          <a:xfrm>
+            <a:off x="914400" y="1549400"/>
+            <a:ext cx="381000" cy="292100"/>
+          </a:xfrm>
+          <a:prstGeom prst="rect">
+            <a:avLst/>
+          </a:prstGeom>
+          <a:solidFill>
+            <a:srgbClr val="BED0E8"/>
+          </a:solidFill>
+          <a:ln w="6350">
+            <a:solidFill>
+              <a:srgbClr val="FFFFFF"/>
+            </a:solidFill>
+          </a:ln>
+          <a:effectLst/>
+        </p:spPr>
+        <p:style>
+          <a:lnRef idx="1">
+            <a:schemeClr val="accent1"/>
+          </a:lnRef>
+          <a:fillRef idx="3">
+            <a:schemeClr val="accent1"/>
+          </a:fillRef>
+          <a:effectRef idx="2">
+            <a:schemeClr val="accent1"/>
+          </a:effectRef>
+          <a:fontRef idx="minor">
+            <a:schemeClr val="lt1"/>
+          </a:fontRef>
+        </p:style>
+        <p:txBody>
+          <a:bodyPr rtlCol="0" anchor="ctr"/>
+          <a:lstStyle/>
+          <a:p>
+            <a:pPr algn="ctr"/>
+          </a:p>
+        </p:txBody>
+      </p:sp>
+      <p:sp>
+        <p:nvSpPr>
+          <p:cNvPr id="41" name="TextBox 40"/>
+          <p:cNvSpPr txBox="1"/>
+          <p:nvPr/>
+        </p:nvSpPr>
+        <p:spPr>
+          <a:xfrm>
+            <a:off x="-419100" y="1636902"/>
+            <a:ext cx="3048000" cy="140208"/>
+          </a:xfrm>
+          <a:prstGeom prst="rect">
+            <a:avLst/>
+          </a:prstGeom>
+          <a:noFill/>
+        </p:spPr>
+        <p:txBody>
+          <a:bodyPr wrap="none" lIns="0" rIns="0" tIns="0" bIns="0" anchor="ctr">
+            <a:spAutoFit/>
+          </a:bodyPr>
+          <a:lstStyle/>
+          <a:p>
+            <a:pPr algn="ctr"/>
+            <a:r>
+              <a:rPr sz="459" b="0" i="0">
+                <a:solidFill>
+                  <a:srgbClr val="1C1E23"/>
+                </a:solidFill>
+                <a:latin typeface="Helvetica"/>
+              </a:rPr>
+              <a:t>0.09</a:t>
+            </a:r>
+          </a:p>
+        </p:txBody>
+      </p:sp>
+      <p:sp>
+        <p:nvSpPr>
+          <p:cNvPr id="42" name="Rectangle 41"/>
+          <p:cNvSpPr/>
+          <p:nvPr/>
+        </p:nvSpPr>
+        <p:spPr>
+          <a:xfrm>
+            <a:off x="1295400" y="381000"/>
+            <a:ext cx="381000" cy="292100"/>
+          </a:xfrm>
+          <a:prstGeom prst="rect">
+            <a:avLst/>
+          </a:prstGeom>
+          <a:solidFill>
+            <a:srgbClr val="A0B8D9"/>
+          </a:solidFill>
+          <a:ln w="6350">
+            <a:solidFill>
+              <a:srgbClr val="FFFFFF"/>
+            </a:solidFill>
+          </a:ln>
+          <a:effectLst/>
+        </p:spPr>
+        <p:style>
+          <a:lnRef idx="1">
+            <a:schemeClr val="accent1"/>
+          </a:lnRef>
+          <a:fillRef idx="3">
+            <a:schemeClr val="accent1"/>
+          </a:fillRef>
+          <a:effectRef idx="2">
+            <a:schemeClr val="accent1"/>
+          </a:effectRef>
+          <a:fontRef idx="minor">
+            <a:schemeClr val="lt1"/>
+          </a:fontRef>
+        </p:style>
+        <p:txBody>
+          <a:bodyPr rtlCol="0" anchor="ctr"/>
+          <a:lstStyle/>
+          <a:p>
+            <a:pPr algn="ctr"/>
+          </a:p>
+        </p:txBody>
+      </p:sp>
+      <p:sp>
+        <p:nvSpPr>
+          <p:cNvPr id="43" name="TextBox 42"/>
+          <p:cNvSpPr txBox="1"/>
+          <p:nvPr/>
+        </p:nvSpPr>
+        <p:spPr>
+          <a:xfrm>
+            <a:off x="-38100" y="468503"/>
+            <a:ext cx="3048000" cy="140208"/>
+          </a:xfrm>
+          <a:prstGeom prst="rect">
+            <a:avLst/>
+          </a:prstGeom>
+          <a:noFill/>
+        </p:spPr>
+        <p:txBody>
+          <a:bodyPr wrap="none" lIns="0" rIns="0" tIns="0" bIns="0" anchor="ctr">
+            <a:spAutoFit/>
+          </a:bodyPr>
+          <a:lstStyle/>
+          <a:p>
+            <a:pPr algn="ctr"/>
+            <a:r>
+              <a:rPr sz="459" b="0" i="0">
+                <a:solidFill>
+                  <a:srgbClr val="1C1E23"/>
+                </a:solidFill>
+                <a:latin typeface="Helvetica"/>
+              </a:rPr>
+              <a:t>0.16</a:t>
+            </a:r>
+          </a:p>
+        </p:txBody>
+      </p:sp>
+      <p:sp>
+        <p:nvSpPr>
+          <p:cNvPr id="44" name="Rectangle 43"/>
+          <p:cNvSpPr/>
+          <p:nvPr/>
+        </p:nvSpPr>
+        <p:spPr>
+          <a:xfrm>
+            <a:off x="1295400" y="673100"/>
+            <a:ext cx="381000" cy="292100"/>
+          </a:xfrm>
+          <a:prstGeom prst="rect">
+            <a:avLst/>
+          </a:prstGeom>
+          <a:solidFill>
+            <a:srgbClr val="8DAAD0"/>
+          </a:solidFill>
+          <a:ln w="6350">
+            <a:solidFill>
+              <a:srgbClr val="FFFFFF"/>
+            </a:solidFill>
+          </a:ln>
+          <a:effectLst/>
+        </p:spPr>
+        <p:style>
+          <a:lnRef idx="1">
+            <a:schemeClr val="accent1"/>
+          </a:lnRef>
+          <a:fillRef idx="3">
+            <a:schemeClr val="accent1"/>
+          </a:fillRef>
+          <a:effectRef idx="2">
+            <a:schemeClr val="accent1"/>
+          </a:effectRef>
+          <a:fontRef idx="minor">
+            <a:schemeClr val="lt1"/>
+          </a:fontRef>
+        </p:style>
+        <p:txBody>
+          <a:bodyPr rtlCol="0" anchor="ctr"/>
+          <a:lstStyle/>
+          <a:p>
+            <a:pPr algn="ctr"/>
+          </a:p>
+        </p:txBody>
+      </p:sp>
+      <p:sp>
+        <p:nvSpPr>
+          <p:cNvPr id="45" name="TextBox 44"/>
+          <p:cNvSpPr txBox="1"/>
+          <p:nvPr/>
+        </p:nvSpPr>
+        <p:spPr>
+          <a:xfrm>
+            <a:off x="-38100" y="760602"/>
             <a:ext cx="3048000" cy="140208"/>
           </a:xfrm>
           <a:prstGeom prst="rect">
@@ -4195,20 +4762,20 @@
       </p:sp>
       <p:sp>
         <p:nvSpPr>
-          <p:cNvPr id="32" name="Rectangle 31"/>
+          <p:cNvPr id="46" name="Rectangle 45"/>
           <p:cNvSpPr/>
           <p:nvPr/>
         </p:nvSpPr>
         <p:spPr>
           <a:xfrm>
-            <a:off x="914400" y="673100"/>
+            <a:off x="1295400" y="965200"/>
             <a:ext cx="381000" cy="292100"/>
           </a:xfrm>
           <a:prstGeom prst="rect">
             <a:avLst/>
           </a:prstGeom>
           <a:solidFill>
-            <a:srgbClr val="426EA9"/>
+            <a:srgbClr val="698DBD"/>
           </a:solidFill>
           <a:ln w="6350">
             <a:solidFill>
@@ -4241,13 +4808,13 @@
       </p:sp>
       <p:sp>
         <p:nvSpPr>
-          <p:cNvPr id="33" name="TextBox 32"/>
+          <p:cNvPr id="47" name="TextBox 46"/>
           <p:cNvSpPr txBox="1"/>
           <p:nvPr/>
         </p:nvSpPr>
         <p:spPr>
           <a:xfrm>
-            <a:off x="-419100" y="760602"/>
+            <a:off x="-38100" y="1052703"/>
             <a:ext cx="3048000" cy="140208"/>
           </a:xfrm>
           <a:prstGeom prst="rect">
@@ -4269,27 +4836,27 @@
                 </a:solidFill>
                 <a:latin typeface="Helvetica"/>
               </a:rPr>
-              <a:t>0.37</a:t>
-            </a:r>
-          </a:p>
-        </p:txBody>
-      </p:sp>
-      <p:sp>
-        <p:nvSpPr>
-          <p:cNvPr id="34" name="Rectangle 33"/>
+              <a:t>0.28</a:t>
+            </a:r>
+          </a:p>
+        </p:txBody>
+      </p:sp>
+      <p:sp>
+        <p:nvSpPr>
+          <p:cNvPr id="48" name="Rectangle 47"/>
           <p:cNvSpPr/>
           <p:nvPr/>
         </p:nvSpPr>
         <p:spPr>
           <a:xfrm>
-            <a:off x="914400" y="965200"/>
+            <a:off x="1295400" y="1257300"/>
             <a:ext cx="381000" cy="292100"/>
           </a:xfrm>
           <a:prstGeom prst="rect">
             <a:avLst/>
           </a:prstGeom>
           <a:solidFill>
-            <a:srgbClr val="6489BB"/>
+            <a:srgbClr val="82A1CA"/>
           </a:solidFill>
           <a:ln w="6350">
             <a:solidFill>
@@ -4322,13 +4889,13 @@
       </p:sp>
       <p:sp>
         <p:nvSpPr>
-          <p:cNvPr id="35" name="TextBox 34"/>
+          <p:cNvPr id="49" name="TextBox 48"/>
           <p:cNvSpPr txBox="1"/>
           <p:nvPr/>
         </p:nvSpPr>
         <p:spPr>
           <a:xfrm>
-            <a:off x="-419100" y="1052703"/>
+            <a:off x="-38100" y="1344803"/>
             <a:ext cx="3048000" cy="140208"/>
           </a:xfrm>
           <a:prstGeom prst="rect">
@@ -4346,31 +4913,31 @@
             <a:r>
               <a:rPr sz="459" b="0" i="0">
                 <a:solidFill>
-                  <a:srgbClr val="FFFFFF"/>
+                  <a:srgbClr val="1C1E23"/>
                 </a:solidFill>
                 <a:latin typeface="Helvetica"/>
               </a:rPr>
-              <a:t>0.30</a:t>
-            </a:r>
-          </a:p>
-        </p:txBody>
-      </p:sp>
-      <p:sp>
-        <p:nvSpPr>
-          <p:cNvPr id="36" name="Rectangle 35"/>
+              <a:t>0.23</a:t>
+            </a:r>
+          </a:p>
+        </p:txBody>
+      </p:sp>
+      <p:sp>
+        <p:nvSpPr>
+          <p:cNvPr id="50" name="Rectangle 49"/>
           <p:cNvSpPr/>
           <p:nvPr/>
         </p:nvSpPr>
         <p:spPr>
           <a:xfrm>
-            <a:off x="914400" y="1257300"/>
+            <a:off x="1295400" y="1549400"/>
             <a:ext cx="381000" cy="292100"/>
           </a:xfrm>
           <a:prstGeom prst="rect">
             <a:avLst/>
           </a:prstGeom>
           <a:solidFill>
-            <a:srgbClr val="ADC3E0"/>
+            <a:srgbClr val="ACC2DF"/>
           </a:solidFill>
           <a:ln w="6350">
             <a:solidFill>
@@ -4403,13 +4970,13 @@
       </p:sp>
       <p:sp>
         <p:nvSpPr>
-          <p:cNvPr id="37" name="TextBox 36"/>
+          <p:cNvPr id="51" name="TextBox 50"/>
           <p:cNvSpPr txBox="1"/>
           <p:nvPr/>
         </p:nvSpPr>
         <p:spPr>
           <a:xfrm>
-            <a:off x="-419100" y="1344803"/>
+            <a:off x="-38100" y="1636902"/>
             <a:ext cx="3048000" cy="140208"/>
           </a:xfrm>
           <a:prstGeom prst="rect">
@@ -4438,20 +5005,20 @@
       </p:sp>
       <p:sp>
         <p:nvSpPr>
-          <p:cNvPr id="38" name="Rectangle 37"/>
+          <p:cNvPr id="52" name="Rectangle 51"/>
           <p:cNvSpPr/>
           <p:nvPr/>
         </p:nvSpPr>
         <p:spPr>
           <a:xfrm>
-            <a:off x="1295400" y="381000"/>
+            <a:off x="1676400" y="381000"/>
             <a:ext cx="381000" cy="292100"/>
           </a:xfrm>
           <a:prstGeom prst="rect">
             <a:avLst/>
           </a:prstGeom>
           <a:solidFill>
-            <a:srgbClr val="88A6CD"/>
+            <a:srgbClr val="89A7CE"/>
           </a:solidFill>
           <a:ln w="6350">
             <a:solidFill>
@@ -4484,13 +5051,13 @@
       </p:sp>
       <p:sp>
         <p:nvSpPr>
-          <p:cNvPr id="39" name="TextBox 38"/>
+          <p:cNvPr id="53" name="TextBox 52"/>
           <p:cNvSpPr txBox="1"/>
           <p:nvPr/>
         </p:nvSpPr>
         <p:spPr>
           <a:xfrm>
-            <a:off x="-38100" y="468503"/>
+            <a:off x="342900" y="468503"/>
             <a:ext cx="3048000" cy="140208"/>
           </a:xfrm>
           <a:prstGeom prst="rect">
@@ -4519,20 +5086,20 @@
       </p:sp>
       <p:sp>
         <p:nvSpPr>
-          <p:cNvPr id="40" name="Rectangle 39"/>
+          <p:cNvPr id="54" name="Rectangle 53"/>
           <p:cNvSpPr/>
           <p:nvPr/>
         </p:nvSpPr>
         <p:spPr>
           <a:xfrm>
-            <a:off x="1295400" y="673100"/>
+            <a:off x="1676400" y="673100"/>
             <a:ext cx="381000" cy="292100"/>
           </a:xfrm>
           <a:prstGeom prst="rect">
             <a:avLst/>
           </a:prstGeom>
           <a:solidFill>
-            <a:srgbClr val="88A5CD"/>
+            <a:srgbClr val="9FB8D9"/>
           </a:solidFill>
           <a:ln w="6350">
             <a:solidFill>
@@ -4565,13 +5132,13 @@
       </p:sp>
       <p:sp>
         <p:nvSpPr>
-          <p:cNvPr id="41" name="TextBox 40"/>
+          <p:cNvPr id="55" name="TextBox 54"/>
           <p:cNvSpPr txBox="1"/>
           <p:nvPr/>
         </p:nvSpPr>
         <p:spPr>
           <a:xfrm>
-            <a:off x="-38100" y="760602"/>
+            <a:off x="342900" y="760602"/>
             <a:ext cx="3048000" cy="140208"/>
           </a:xfrm>
           <a:prstGeom prst="rect">
@@ -4593,27 +5160,27 @@
                 </a:solidFill>
                 <a:latin typeface="Helvetica"/>
               </a:rPr>
-              <a:t>0.21</a:t>
-            </a:r>
-          </a:p>
-        </p:txBody>
-      </p:sp>
-      <p:sp>
-        <p:nvSpPr>
-          <p:cNvPr id="42" name="Rectangle 41"/>
+              <a:t>0.16</a:t>
+            </a:r>
+          </a:p>
+        </p:txBody>
+      </p:sp>
+      <p:sp>
+        <p:nvSpPr>
+          <p:cNvPr id="56" name="Rectangle 55"/>
           <p:cNvSpPr/>
           <p:nvPr/>
         </p:nvSpPr>
         <p:spPr>
           <a:xfrm>
-            <a:off x="1295400" y="965200"/>
+            <a:off x="1676400" y="965200"/>
             <a:ext cx="381000" cy="292100"/>
           </a:xfrm>
           <a:prstGeom prst="rect">
             <a:avLst/>
           </a:prstGeom>
           <a:solidFill>
-            <a:srgbClr val="577FB4"/>
+            <a:srgbClr val="ADC3E0"/>
           </a:solidFill>
           <a:ln w="6350">
             <a:solidFill>
@@ -4646,13 +5213,94 @@
       </p:sp>
       <p:sp>
         <p:nvSpPr>
-          <p:cNvPr id="43" name="TextBox 42"/>
+          <p:cNvPr id="57" name="TextBox 56"/>
           <p:cNvSpPr txBox="1"/>
           <p:nvPr/>
         </p:nvSpPr>
         <p:spPr>
           <a:xfrm>
-            <a:off x="-38100" y="1052703"/>
+            <a:off x="342900" y="1052703"/>
+            <a:ext cx="3048000" cy="140208"/>
+          </a:xfrm>
+          <a:prstGeom prst="rect">
+            <a:avLst/>
+          </a:prstGeom>
+          <a:noFill/>
+        </p:spPr>
+        <p:txBody>
+          <a:bodyPr wrap="none" lIns="0" rIns="0" tIns="0" bIns="0" anchor="ctr">
+            <a:spAutoFit/>
+          </a:bodyPr>
+          <a:lstStyle/>
+          <a:p>
+            <a:pPr algn="ctr"/>
+            <a:r>
+              <a:rPr sz="459" b="0" i="0">
+                <a:solidFill>
+                  <a:srgbClr val="1C1E23"/>
+                </a:solidFill>
+                <a:latin typeface="Helvetica"/>
+              </a:rPr>
+              <a:t>0.13</a:t>
+            </a:r>
+          </a:p>
+        </p:txBody>
+      </p:sp>
+      <p:sp>
+        <p:nvSpPr>
+          <p:cNvPr id="58" name="Rectangle 57"/>
+          <p:cNvSpPr/>
+          <p:nvPr/>
+        </p:nvSpPr>
+        <p:spPr>
+          <a:xfrm>
+            <a:off x="1676400" y="1257300"/>
+            <a:ext cx="381000" cy="292100"/>
+          </a:xfrm>
+          <a:prstGeom prst="rect">
+            <a:avLst/>
+          </a:prstGeom>
+          <a:solidFill>
+            <a:srgbClr val="6A8EBE"/>
+          </a:solidFill>
+          <a:ln w="6350">
+            <a:solidFill>
+              <a:srgbClr val="FFFFFF"/>
+            </a:solidFill>
+          </a:ln>
+          <a:effectLst/>
+        </p:spPr>
+        <p:style>
+          <a:lnRef idx="1">
+            <a:schemeClr val="accent1"/>
+          </a:lnRef>
+          <a:fillRef idx="3">
+            <a:schemeClr val="accent1"/>
+          </a:fillRef>
+          <a:effectRef idx="2">
+            <a:schemeClr val="accent1"/>
+          </a:effectRef>
+          <a:fontRef idx="minor">
+            <a:schemeClr val="lt1"/>
+          </a:fontRef>
+        </p:style>
+        <p:txBody>
+          <a:bodyPr rtlCol="0" anchor="ctr"/>
+          <a:lstStyle/>
+          <a:p>
+            <a:pPr algn="ctr"/>
+          </a:p>
+        </p:txBody>
+      </p:sp>
+      <p:sp>
+        <p:nvSpPr>
+          <p:cNvPr id="59" name="TextBox 58"/>
+          <p:cNvSpPr txBox="1"/>
+          <p:nvPr/>
+        </p:nvSpPr>
+        <p:spPr>
+          <a:xfrm>
+            <a:off x="342900" y="1344803"/>
             <a:ext cx="3048000" cy="140208"/>
           </a:xfrm>
           <a:prstGeom prst="rect">
@@ -4674,27 +5322,27 @@
                 </a:solidFill>
                 <a:latin typeface="Helvetica"/>
               </a:rPr>
-              <a:t>0.33</a:t>
-            </a:r>
-          </a:p>
-        </p:txBody>
-      </p:sp>
-      <p:sp>
-        <p:nvSpPr>
-          <p:cNvPr id="44" name="Rectangle 43"/>
+              <a:t>0.28</a:t>
+            </a:r>
+          </a:p>
+        </p:txBody>
+      </p:sp>
+      <p:sp>
+        <p:nvSpPr>
+          <p:cNvPr id="60" name="Rectangle 59"/>
           <p:cNvSpPr/>
           <p:nvPr/>
         </p:nvSpPr>
         <p:spPr>
           <a:xfrm>
-            <a:off x="1295400" y="1257300"/>
+            <a:off x="1676400" y="1549400"/>
             <a:ext cx="381000" cy="292100"/>
           </a:xfrm>
           <a:prstGeom prst="rect">
             <a:avLst/>
           </a:prstGeom>
           <a:solidFill>
-            <a:srgbClr val="7999C5"/>
+            <a:srgbClr val="85A3CB"/>
           </a:solidFill>
           <a:ln w="6350">
             <a:solidFill>
@@ -4727,13 +5375,94 @@
       </p:sp>
       <p:sp>
         <p:nvSpPr>
-          <p:cNvPr id="45" name="TextBox 44"/>
+          <p:cNvPr id="61" name="TextBox 60"/>
           <p:cNvSpPr txBox="1"/>
           <p:nvPr/>
         </p:nvSpPr>
         <p:spPr>
           <a:xfrm>
-            <a:off x="-38100" y="1344803"/>
+            <a:off x="342900" y="1636902"/>
+            <a:ext cx="3048000" cy="140208"/>
+          </a:xfrm>
+          <a:prstGeom prst="rect">
+            <a:avLst/>
+          </a:prstGeom>
+          <a:noFill/>
+        </p:spPr>
+        <p:txBody>
+          <a:bodyPr wrap="none" lIns="0" rIns="0" tIns="0" bIns="0" anchor="ctr">
+            <a:spAutoFit/>
+          </a:bodyPr>
+          <a:lstStyle/>
+          <a:p>
+            <a:pPr algn="ctr"/>
+            <a:r>
+              <a:rPr sz="459" b="0" i="0">
+                <a:solidFill>
+                  <a:srgbClr val="1C1E23"/>
+                </a:solidFill>
+                <a:latin typeface="Helvetica"/>
+              </a:rPr>
+              <a:t>0.22</a:t>
+            </a:r>
+          </a:p>
+        </p:txBody>
+      </p:sp>
+      <p:sp>
+        <p:nvSpPr>
+          <p:cNvPr id="62" name="Rectangle 61"/>
+          <p:cNvSpPr/>
+          <p:nvPr/>
+        </p:nvSpPr>
+        <p:spPr>
+          <a:xfrm>
+            <a:off x="2057400" y="381000"/>
+            <a:ext cx="381000" cy="292100"/>
+          </a:xfrm>
+          <a:prstGeom prst="rect">
+            <a:avLst/>
+          </a:prstGeom>
+          <a:solidFill>
+            <a:srgbClr val="7899C5"/>
+          </a:solidFill>
+          <a:ln w="6350">
+            <a:solidFill>
+              <a:srgbClr val="FFFFFF"/>
+            </a:solidFill>
+          </a:ln>
+          <a:effectLst/>
+        </p:spPr>
+        <p:style>
+          <a:lnRef idx="1">
+            <a:schemeClr val="accent1"/>
+          </a:lnRef>
+          <a:fillRef idx="3">
+            <a:schemeClr val="accent1"/>
+          </a:fillRef>
+          <a:effectRef idx="2">
+            <a:schemeClr val="accent1"/>
+          </a:effectRef>
+          <a:fontRef idx="minor">
+            <a:schemeClr val="lt1"/>
+          </a:fontRef>
+        </p:style>
+        <p:txBody>
+          <a:bodyPr rtlCol="0" anchor="ctr"/>
+          <a:lstStyle/>
+          <a:p>
+            <a:pPr algn="ctr"/>
+          </a:p>
+        </p:txBody>
+      </p:sp>
+      <p:sp>
+        <p:nvSpPr>
+          <p:cNvPr id="63" name="TextBox 62"/>
+          <p:cNvSpPr txBox="1"/>
+          <p:nvPr/>
+        </p:nvSpPr>
+        <p:spPr>
+          <a:xfrm>
+            <a:off x="723900" y="468503"/>
             <a:ext cx="3048000" cy="140208"/>
           </a:xfrm>
           <a:prstGeom prst="rect">
@@ -4762,20 +5491,20 @@
       </p:sp>
       <p:sp>
         <p:nvSpPr>
-          <p:cNvPr id="46" name="Rectangle 45"/>
+          <p:cNvPr id="64" name="Rectangle 63"/>
           <p:cNvSpPr/>
           <p:nvPr/>
         </p:nvSpPr>
         <p:spPr>
           <a:xfrm>
-            <a:off x="1676400" y="381000"/>
+            <a:off x="2057400" y="673100"/>
             <a:ext cx="381000" cy="292100"/>
           </a:xfrm>
           <a:prstGeom prst="rect">
             <a:avLst/>
           </a:prstGeom>
           <a:solidFill>
-            <a:srgbClr val="688DBD"/>
+            <a:srgbClr val="B5C9E4"/>
           </a:solidFill>
           <a:ln w="6350">
             <a:solidFill>
@@ -4808,94 +5537,13 @@
       </p:sp>
       <p:sp>
         <p:nvSpPr>
-          <p:cNvPr id="47" name="TextBox 46"/>
+          <p:cNvPr id="65" name="TextBox 64"/>
           <p:cNvSpPr txBox="1"/>
           <p:nvPr/>
         </p:nvSpPr>
         <p:spPr>
           <a:xfrm>
-            <a:off x="342900" y="468503"/>
-            <a:ext cx="3048000" cy="140208"/>
-          </a:xfrm>
-          <a:prstGeom prst="rect">
-            <a:avLst/>
-          </a:prstGeom>
-          <a:noFill/>
-        </p:spPr>
-        <p:txBody>
-          <a:bodyPr wrap="none" lIns="0" rIns="0" tIns="0" bIns="0" anchor="ctr">
-            <a:spAutoFit/>
-          </a:bodyPr>
-          <a:lstStyle/>
-          <a:p>
-            <a:pPr algn="ctr"/>
-            <a:r>
-              <a:rPr sz="459" b="0" i="0">
-                <a:solidFill>
-                  <a:srgbClr val="FFFFFF"/>
-                </a:solidFill>
-                <a:latin typeface="Helvetica"/>
-              </a:rPr>
-              <a:t>0.29</a:t>
-            </a:r>
-          </a:p>
-        </p:txBody>
-      </p:sp>
-      <p:sp>
-        <p:nvSpPr>
-          <p:cNvPr id="48" name="Rectangle 47"/>
-          <p:cNvSpPr/>
-          <p:nvPr/>
-        </p:nvSpPr>
-        <p:spPr>
-          <a:xfrm>
-            <a:off x="1676400" y="673100"/>
-            <a:ext cx="381000" cy="292100"/>
-          </a:xfrm>
-          <a:prstGeom prst="rect">
-            <a:avLst/>
-          </a:prstGeom>
-          <a:solidFill>
-            <a:srgbClr val="B7CBE5"/>
-          </a:solidFill>
-          <a:ln w="6350">
-            <a:solidFill>
-              <a:srgbClr val="FFFFFF"/>
-            </a:solidFill>
-          </a:ln>
-          <a:effectLst/>
-        </p:spPr>
-        <p:style>
-          <a:lnRef idx="1">
-            <a:schemeClr val="accent1"/>
-          </a:lnRef>
-          <a:fillRef idx="3">
-            <a:schemeClr val="accent1"/>
-          </a:fillRef>
-          <a:effectRef idx="2">
-            <a:schemeClr val="accent1"/>
-          </a:effectRef>
-          <a:fontRef idx="minor">
-            <a:schemeClr val="lt1"/>
-          </a:fontRef>
-        </p:style>
-        <p:txBody>
-          <a:bodyPr rtlCol="0" anchor="ctr"/>
-          <a:lstStyle/>
-          <a:p>
-            <a:pPr algn="ctr"/>
-          </a:p>
-        </p:txBody>
-      </p:sp>
-      <p:sp>
-        <p:nvSpPr>
-          <p:cNvPr id="49" name="TextBox 48"/>
-          <p:cNvSpPr txBox="1"/>
-          <p:nvPr/>
-        </p:nvSpPr>
-        <p:spPr>
-          <a:xfrm>
-            <a:off x="342900" y="760602"/>
+            <a:off x="723900" y="760602"/>
             <a:ext cx="3048000" cy="140208"/>
           </a:xfrm>
           <a:prstGeom prst="rect">
@@ -4924,20 +5572,20 @@
       </p:sp>
       <p:sp>
         <p:nvSpPr>
-          <p:cNvPr id="50" name="Rectangle 49"/>
+          <p:cNvPr id="66" name="Rectangle 65"/>
           <p:cNvSpPr/>
           <p:nvPr/>
         </p:nvSpPr>
         <p:spPr>
           <a:xfrm>
-            <a:off x="1676400" y="965200"/>
+            <a:off x="2057400" y="965200"/>
             <a:ext cx="381000" cy="292100"/>
           </a:xfrm>
           <a:prstGeom prst="rect">
             <a:avLst/>
           </a:prstGeom>
           <a:solidFill>
-            <a:srgbClr val="A3BBDA"/>
+            <a:srgbClr val="C4D5EB"/>
           </a:solidFill>
           <a:ln w="6350">
             <a:solidFill>
@@ -4970,13 +5618,13 @@
       </p:sp>
       <p:sp>
         <p:nvSpPr>
-          <p:cNvPr id="51" name="TextBox 50"/>
+          <p:cNvPr id="67" name="TextBox 66"/>
           <p:cNvSpPr txBox="1"/>
           <p:nvPr/>
         </p:nvSpPr>
         <p:spPr>
           <a:xfrm>
-            <a:off x="342900" y="1052703"/>
+            <a:off x="723900" y="1052703"/>
             <a:ext cx="3048000" cy="140208"/>
           </a:xfrm>
           <a:prstGeom prst="rect">
@@ -4998,27 +5646,27 @@
                 </a:solidFill>
                 <a:latin typeface="Helvetica"/>
               </a:rPr>
-              <a:t>0.15</a:t>
-            </a:r>
-          </a:p>
-        </p:txBody>
-      </p:sp>
-      <p:sp>
-        <p:nvSpPr>
-          <p:cNvPr id="52" name="Rectangle 51"/>
+              <a:t>0.08</a:t>
+            </a:r>
+          </a:p>
+        </p:txBody>
+      </p:sp>
+      <p:sp>
+        <p:nvSpPr>
+          <p:cNvPr id="68" name="Rectangle 67"/>
           <p:cNvSpPr/>
           <p:nvPr/>
         </p:nvSpPr>
         <p:spPr>
           <a:xfrm>
-            <a:off x="1676400" y="1257300"/>
+            <a:off x="2057400" y="1257300"/>
             <a:ext cx="381000" cy="292100"/>
           </a:xfrm>
           <a:prstGeom prst="rect">
             <a:avLst/>
           </a:prstGeom>
           <a:solidFill>
-            <a:srgbClr val="215499"/>
+            <a:srgbClr val="ADC3E0"/>
           </a:solidFill>
           <a:ln w="6350">
             <a:solidFill>
@@ -5051,13 +5699,94 @@
       </p:sp>
       <p:sp>
         <p:nvSpPr>
-          <p:cNvPr id="53" name="TextBox 52"/>
+          <p:cNvPr id="69" name="TextBox 68"/>
           <p:cNvSpPr txBox="1"/>
           <p:nvPr/>
         </p:nvSpPr>
         <p:spPr>
           <a:xfrm>
-            <a:off x="342900" y="1344803"/>
+            <a:off x="723900" y="1344803"/>
+            <a:ext cx="3048000" cy="140208"/>
+          </a:xfrm>
+          <a:prstGeom prst="rect">
+            <a:avLst/>
+          </a:prstGeom>
+          <a:noFill/>
+        </p:spPr>
+        <p:txBody>
+          <a:bodyPr wrap="none" lIns="0" rIns="0" tIns="0" bIns="0" anchor="ctr">
+            <a:spAutoFit/>
+          </a:bodyPr>
+          <a:lstStyle/>
+          <a:p>
+            <a:pPr algn="ctr"/>
+            <a:r>
+              <a:rPr sz="459" b="0" i="0">
+                <a:solidFill>
+                  <a:srgbClr val="1C1E23"/>
+                </a:solidFill>
+                <a:latin typeface="Helvetica"/>
+              </a:rPr>
+              <a:t>0.13</a:t>
+            </a:r>
+          </a:p>
+        </p:txBody>
+      </p:sp>
+      <p:sp>
+        <p:nvSpPr>
+          <p:cNvPr id="70" name="Rectangle 69"/>
+          <p:cNvSpPr/>
+          <p:nvPr/>
+        </p:nvSpPr>
+        <p:spPr>
+          <a:xfrm>
+            <a:off x="2057400" y="1549400"/>
+            <a:ext cx="381000" cy="292100"/>
+          </a:xfrm>
+          <a:prstGeom prst="rect">
+            <a:avLst/>
+          </a:prstGeom>
+          <a:solidFill>
+            <a:srgbClr val="27599C"/>
+          </a:solidFill>
+          <a:ln w="6350">
+            <a:solidFill>
+              <a:srgbClr val="FFFFFF"/>
+            </a:solidFill>
+          </a:ln>
+          <a:effectLst/>
+        </p:spPr>
+        <p:style>
+          <a:lnRef idx="1">
+            <a:schemeClr val="accent1"/>
+          </a:lnRef>
+          <a:fillRef idx="3">
+            <a:schemeClr val="accent1"/>
+          </a:fillRef>
+          <a:effectRef idx="2">
+            <a:schemeClr val="accent1"/>
+          </a:effectRef>
+          <a:fontRef idx="minor">
+            <a:schemeClr val="lt1"/>
+          </a:fontRef>
+        </p:style>
+        <p:txBody>
+          <a:bodyPr rtlCol="0" anchor="ctr"/>
+          <a:lstStyle/>
+          <a:p>
+            <a:pPr algn="ctr"/>
+          </a:p>
+        </p:txBody>
+      </p:sp>
+      <p:sp>
+        <p:nvSpPr>
+          <p:cNvPr id="71" name="TextBox 70"/>
+          <p:cNvSpPr txBox="1"/>
+          <p:nvPr/>
+        </p:nvSpPr>
+        <p:spPr>
+          <a:xfrm>
+            <a:off x="723900" y="1636902"/>
             <a:ext cx="3048000" cy="140208"/>
           </a:xfrm>
           <a:prstGeom prst="rect">
@@ -5079,14 +5808,14 @@
                 </a:solidFill>
                 <a:latin typeface="Helvetica"/>
               </a:rPr>
-              <a:t>0.46</a:t>
+              <a:t>0.44</a:t>
             </a:r>
           </a:p>
         </p:txBody>
       </p:sp>
       <p:cxnSp>
         <p:nvCxnSpPr>
-          <p:cNvPr id="54" name="Connector 53"/>
+          <p:cNvPr id="72" name="Connector 71"/>
           <p:cNvCxnSpPr/>
           <p:nvPr/>
         </p:nvCxnSpPr>
@@ -5122,7 +5851,7 @@
       </p:cxnSp>
       <p:sp>
         <p:nvSpPr>
-          <p:cNvPr id="55" name="TextBox 54"/>
+          <p:cNvPr id="73" name="TextBox 72"/>
           <p:cNvSpPr txBox="1"/>
           <p:nvPr/>
         </p:nvSpPr>
@@ -5157,7 +5886,7 @@
       </p:sp>
       <p:sp>
         <p:nvSpPr>
-          <p:cNvPr id="56" name="TextBox 55"/>
+          <p:cNvPr id="74" name="TextBox 73"/>
           <p:cNvSpPr txBox="1"/>
           <p:nvPr/>
         </p:nvSpPr>
@@ -5185,14 +5914,14 @@
                 </a:solidFill>
                 <a:latin typeface="Helvetica"/>
               </a:rPr>
-              <a:t>diagonal = the two criteria agree; agreement 31%</a:t>
-            </a:r>
-          </a:p>
-        </p:txBody>
-      </p:sp>
-      <p:sp>
-        <p:nvSpPr>
-          <p:cNvPr id="57" name="TextBox 56"/>
+              <a:t>diagonal = the two criteria agree; agreement 22%</a:t>
+            </a:r>
+          </a:p>
+        </p:txBody>
+      </p:sp>
+      <p:sp>
+        <p:nvSpPr>
+          <p:cNvPr id="75" name="TextBox 74"/>
           <p:cNvSpPr txBox="1"/>
           <p:nvPr/>
         </p:nvSpPr>
@@ -5220,14 +5949,14 @@
                 </a:solidFill>
                 <a:latin typeface="Helvetica"/>
               </a:rPr>
-              <a:t>discordant pairs 42%, within-episode rho 0.15</a:t>
-            </a:r>
-          </a:p>
-        </p:txBody>
-      </p:sp>
-      <p:sp>
-        <p:nvSpPr>
-          <p:cNvPr id="58" name="TextBox 57"/>
+              <a:t>discordant pairs 43%, within-episode rho 0.15</a:t>
+            </a:r>
+          </a:p>
+        </p:txBody>
+      </p:sp>
+      <p:sp>
+        <p:nvSpPr>
+          <p:cNvPr id="76" name="TextBox 75"/>
           <p:cNvSpPr txBox="1"/>
           <p:nvPr/>
         </p:nvSpPr>
@@ -5262,7 +5991,7 @@
       </p:sp>
       <p:cxnSp>
         <p:nvCxnSpPr>
-          <p:cNvPr id="59" name="Connector 58"/>
+          <p:cNvPr id="77" name="Connector 76"/>
           <p:cNvCxnSpPr/>
           <p:nvPr/>
         </p:nvCxnSpPr>
@@ -5297,7 +6026,7 @@
       </p:cxnSp>
       <p:cxnSp>
         <p:nvCxnSpPr>
-          <p:cNvPr id="60" name="Connector 59"/>
+          <p:cNvPr id="78" name="Connector 77"/>
           <p:cNvCxnSpPr/>
           <p:nvPr/>
         </p:nvCxnSpPr>
@@ -5332,7 +6061,7 @@
       </p:cxnSp>
       <p:cxnSp>
         <p:nvCxnSpPr>
-          <p:cNvPr id="61" name="Connector 60"/>
+          <p:cNvPr id="79" name="Connector 78"/>
           <p:cNvCxnSpPr/>
           <p:nvPr/>
         </p:nvCxnSpPr>
@@ -5367,7 +6096,7 @@
       </p:cxnSp>
       <p:sp>
         <p:nvSpPr>
-          <p:cNvPr id="62" name="TextBox 61"/>
+          <p:cNvPr id="80" name="TextBox 79"/>
           <p:cNvSpPr txBox="1"/>
           <p:nvPr/>
         </p:nvSpPr>
@@ -5402,7 +6131,7 @@
       </p:sp>
       <p:cxnSp>
         <p:nvCxnSpPr>
-          <p:cNvPr id="63" name="Connector 62"/>
+          <p:cNvPr id="81" name="Connector 80"/>
           <p:cNvCxnSpPr/>
           <p:nvPr/>
         </p:nvCxnSpPr>
@@ -5437,7 +6166,7 @@
       </p:cxnSp>
       <p:sp>
         <p:nvSpPr>
-          <p:cNvPr id="64" name="TextBox 63"/>
+          <p:cNvPr id="82" name="TextBox 81"/>
           <p:cNvSpPr txBox="1"/>
           <p:nvPr/>
         </p:nvSpPr>
@@ -5472,7 +6201,7 @@
       </p:sp>
       <p:cxnSp>
         <p:nvCxnSpPr>
-          <p:cNvPr id="65" name="Connector 64"/>
+          <p:cNvPr id="83" name="Connector 82"/>
           <p:cNvCxnSpPr/>
           <p:nvPr/>
         </p:nvCxnSpPr>
@@ -5507,7 +6236,7 @@
       </p:cxnSp>
       <p:sp>
         <p:nvSpPr>
-          <p:cNvPr id="66" name="TextBox 65"/>
+          <p:cNvPr id="84" name="TextBox 83"/>
           <p:cNvSpPr txBox="1"/>
           <p:nvPr/>
         </p:nvSpPr>
@@ -5542,7 +6271,7 @@
       </p:sp>
       <p:cxnSp>
         <p:nvCxnSpPr>
-          <p:cNvPr id="67" name="Connector 66"/>
+          <p:cNvPr id="85" name="Connector 84"/>
           <p:cNvCxnSpPr/>
           <p:nvPr/>
         </p:nvCxnSpPr>
@@ -5577,7 +6306,7 @@
       </p:cxnSp>
       <p:sp>
         <p:nvSpPr>
-          <p:cNvPr id="68" name="TextBox 67"/>
+          <p:cNvPr id="86" name="TextBox 85"/>
           <p:cNvSpPr txBox="1"/>
           <p:nvPr/>
         </p:nvSpPr>
@@ -5612,7 +6341,7 @@
       </p:sp>
       <p:cxnSp>
         <p:nvCxnSpPr>
-          <p:cNvPr id="69" name="Connector 68"/>
+          <p:cNvPr id="87" name="Connector 86"/>
           <p:cNvCxnSpPr/>
           <p:nvPr/>
         </p:nvCxnSpPr>
@@ -5647,7 +6376,7 @@
       </p:cxnSp>
       <p:sp>
         <p:nvSpPr>
-          <p:cNvPr id="70" name="TextBox 69"/>
+          <p:cNvPr id="88" name="TextBox 87"/>
           <p:cNvSpPr txBox="1"/>
           <p:nvPr/>
         </p:nvSpPr>
@@ -5682,7 +6411,7 @@
       </p:sp>
       <p:cxnSp>
         <p:nvCxnSpPr>
-          <p:cNvPr id="71" name="Connector 70"/>
+          <p:cNvPr id="89" name="Connector 88"/>
           <p:cNvCxnSpPr/>
           <p:nvPr/>
         </p:nvCxnSpPr>
@@ -5717,7 +6446,7 @@
       </p:cxnSp>
       <p:sp>
         <p:nvSpPr>
-          <p:cNvPr id="72" name="TextBox 71"/>
+          <p:cNvPr id="90" name="TextBox 89"/>
           <p:cNvSpPr txBox="1"/>
           <p:nvPr/>
         </p:nvSpPr>
@@ -5752,7 +6481,7 @@
       </p:sp>
       <p:sp>
         <p:nvSpPr>
-          <p:cNvPr id="73" name="TextBox 72"/>
+          <p:cNvPr id="91" name="TextBox 90"/>
           <p:cNvSpPr txBox="1"/>
           <p:nvPr/>
         </p:nvSpPr>
@@ -5787,7 +6516,7 @@
       </p:sp>
       <p:sp>
         <p:nvSpPr>
-          <p:cNvPr id="74" name="Rectangle 73"/>
+          <p:cNvPr id="92" name="Rectangle 91"/>
           <p:cNvSpPr/>
           <p:nvPr/>
         </p:nvSpPr>
@@ -5831,7 +6560,7 @@
       </p:sp>
       <p:sp>
         <p:nvSpPr>
-          <p:cNvPr id="75" name="Rectangle 74"/>
+          <p:cNvPr id="93" name="Rectangle 92"/>
           <p:cNvSpPr/>
           <p:nvPr/>
         </p:nvSpPr>
@@ -5875,7 +6604,7 @@
       </p:sp>
       <p:sp>
         <p:nvSpPr>
-          <p:cNvPr id="76" name="Rectangle 75"/>
+          <p:cNvPr id="94" name="Rectangle 93"/>
           <p:cNvSpPr/>
           <p:nvPr/>
         </p:nvSpPr>
@@ -5919,7 +6648,7 @@
       </p:sp>
       <p:sp>
         <p:nvSpPr>
-          <p:cNvPr id="77" name="Rectangle 76"/>
+          <p:cNvPr id="95" name="Rectangle 94"/>
           <p:cNvSpPr/>
           <p:nvPr/>
         </p:nvSpPr>
@@ -5963,7 +6692,7 @@
       </p:sp>
       <p:sp>
         <p:nvSpPr>
-          <p:cNvPr id="78" name="Rectangle 77"/>
+          <p:cNvPr id="96" name="Rectangle 95"/>
           <p:cNvSpPr/>
           <p:nvPr/>
         </p:nvSpPr>
@@ -6007,7 +6736,7 @@
       </p:sp>
       <p:sp>
         <p:nvSpPr>
-          <p:cNvPr id="79" name="Rectangle 78"/>
+          <p:cNvPr id="97" name="Rectangle 96"/>
           <p:cNvSpPr/>
           <p:nvPr/>
         </p:nvSpPr>
@@ -6051,7 +6780,7 @@
       </p:sp>
       <p:sp>
         <p:nvSpPr>
-          <p:cNvPr id="80" name="Rectangle 79"/>
+          <p:cNvPr id="98" name="Rectangle 97"/>
           <p:cNvSpPr/>
           <p:nvPr/>
         </p:nvSpPr>
@@ -6095,7 +6824,7 @@
       </p:sp>
       <p:sp>
         <p:nvSpPr>
-          <p:cNvPr id="81" name="Rectangle 80"/>
+          <p:cNvPr id="99" name="Rectangle 98"/>
           <p:cNvSpPr/>
           <p:nvPr/>
         </p:nvSpPr>
@@ -6139,7 +6868,7 @@
       </p:sp>
       <p:sp>
         <p:nvSpPr>
-          <p:cNvPr id="82" name="Rectangle 81"/>
+          <p:cNvPr id="100" name="Rectangle 99"/>
           <p:cNvSpPr/>
           <p:nvPr/>
         </p:nvSpPr>
@@ -6183,7 +6912,7 @@
       </p:sp>
       <p:sp>
         <p:nvSpPr>
-          <p:cNvPr id="83" name="Rectangle 82"/>
+          <p:cNvPr id="101" name="Rectangle 100"/>
           <p:cNvSpPr/>
           <p:nvPr/>
         </p:nvSpPr>
@@ -6227,7 +6956,7 @@
       </p:sp>
       <p:sp>
         <p:nvSpPr>
-          <p:cNvPr id="84" name="Rectangle 83"/>
+          <p:cNvPr id="102" name="Rectangle 101"/>
           <p:cNvSpPr/>
           <p:nvPr/>
         </p:nvSpPr>
@@ -6271,7 +7000,7 @@
       </p:sp>
       <p:sp>
         <p:nvSpPr>
-          <p:cNvPr id="85" name="Rectangle 84"/>
+          <p:cNvPr id="103" name="Rectangle 102"/>
           <p:cNvSpPr/>
           <p:nvPr/>
         </p:nvSpPr>
@@ -6315,7 +7044,7 @@
       </p:sp>
       <p:sp>
         <p:nvSpPr>
-          <p:cNvPr id="86" name="Rectangle 85"/>
+          <p:cNvPr id="104" name="Rectangle 103"/>
           <p:cNvSpPr/>
           <p:nvPr/>
         </p:nvSpPr>
@@ -6361,7 +7090,7 @@
       </p:sp>
       <p:sp>
         <p:nvSpPr>
-          <p:cNvPr id="87" name="Rectangle 86"/>
+          <p:cNvPr id="105" name="Rectangle 104"/>
           <p:cNvSpPr/>
           <p:nvPr/>
         </p:nvSpPr>
@@ -6405,7 +7134,7 @@
       </p:sp>
       <p:sp>
         <p:nvSpPr>
-          <p:cNvPr id="88" name="Rectangle 87"/>
+          <p:cNvPr id="106" name="Rectangle 105"/>
           <p:cNvSpPr/>
           <p:nvPr/>
         </p:nvSpPr>
@@ -6449,7 +7178,7 @@
       </p:sp>
       <p:sp>
         <p:nvSpPr>
-          <p:cNvPr id="89" name="Rectangle 88"/>
+          <p:cNvPr id="107" name="Rectangle 106"/>
           <p:cNvSpPr/>
           <p:nvPr/>
         </p:nvSpPr>
@@ -6493,7 +7222,7 @@
       </p:sp>
       <p:sp>
         <p:nvSpPr>
-          <p:cNvPr id="90" name="Rectangle 89"/>
+          <p:cNvPr id="108" name="Rectangle 107"/>
           <p:cNvSpPr/>
           <p:nvPr/>
         </p:nvSpPr>
@@ -6537,7 +7266,7 @@
       </p:sp>
       <p:sp>
         <p:nvSpPr>
-          <p:cNvPr id="91" name="Rectangle 90"/>
+          <p:cNvPr id="109" name="Rectangle 108"/>
           <p:cNvSpPr/>
           <p:nvPr/>
         </p:nvSpPr>
@@ -6581,7 +7310,7 @@
       </p:sp>
       <p:sp>
         <p:nvSpPr>
-          <p:cNvPr id="92" name="Rectangle 91"/>
+          <p:cNvPr id="110" name="Rectangle 109"/>
           <p:cNvSpPr/>
           <p:nvPr/>
         </p:nvSpPr>
@@ -6625,7 +7354,7 @@
       </p:sp>
       <p:sp>
         <p:nvSpPr>
-          <p:cNvPr id="93" name="Rectangle 92"/>
+          <p:cNvPr id="111" name="Rectangle 110"/>
           <p:cNvSpPr/>
           <p:nvPr/>
         </p:nvSpPr>
@@ -6669,7 +7398,7 @@
       </p:sp>
       <p:sp>
         <p:nvSpPr>
-          <p:cNvPr id="94" name="Rectangle 93"/>
+          <p:cNvPr id="112" name="Rectangle 111"/>
           <p:cNvSpPr/>
           <p:nvPr/>
         </p:nvSpPr>
@@ -6713,7 +7442,7 @@
       </p:sp>
       <p:sp>
         <p:nvSpPr>
-          <p:cNvPr id="95" name="Rectangle 94"/>
+          <p:cNvPr id="113" name="Rectangle 112"/>
           <p:cNvSpPr/>
           <p:nvPr/>
         </p:nvSpPr>
@@ -6757,7 +7486,7 @@
       </p:sp>
       <p:sp>
         <p:nvSpPr>
-          <p:cNvPr id="96" name="Rectangle 95"/>
+          <p:cNvPr id="114" name="Rectangle 113"/>
           <p:cNvSpPr/>
           <p:nvPr/>
         </p:nvSpPr>
@@ -6801,7 +7530,7 @@
       </p:sp>
       <p:sp>
         <p:nvSpPr>
-          <p:cNvPr id="97" name="Rectangle 96"/>
+          <p:cNvPr id="115" name="Rectangle 114"/>
           <p:cNvSpPr/>
           <p:nvPr/>
         </p:nvSpPr>
@@ -6845,7 +7574,7 @@
       </p:sp>
       <p:sp>
         <p:nvSpPr>
-          <p:cNvPr id="98" name="Rectangle 97"/>
+          <p:cNvPr id="116" name="Rectangle 115"/>
           <p:cNvSpPr/>
           <p:nvPr/>
         </p:nvSpPr>
@@ -6889,7 +7618,7 @@
       </p:sp>
       <p:sp>
         <p:nvSpPr>
-          <p:cNvPr id="99" name="Rectangle 98"/>
+          <p:cNvPr id="117" name="Rectangle 116"/>
           <p:cNvSpPr/>
           <p:nvPr/>
         </p:nvSpPr>
@@ -6933,7 +7662,7 @@
       </p:sp>
       <p:sp>
         <p:nvSpPr>
-          <p:cNvPr id="100" name="Rectangle 99"/>
+          <p:cNvPr id="118" name="Rectangle 117"/>
           <p:cNvSpPr/>
           <p:nvPr/>
         </p:nvSpPr>
@@ -6977,7 +7706,7 @@
       </p:sp>
       <p:sp>
         <p:nvSpPr>
-          <p:cNvPr id="101" name="Rectangle 100"/>
+          <p:cNvPr id="119" name="Rectangle 118"/>
           <p:cNvSpPr/>
           <p:nvPr/>
         </p:nvSpPr>
@@ -7021,7 +7750,7 @@
       </p:sp>
       <p:sp>
         <p:nvSpPr>
-          <p:cNvPr id="102" name="Rectangle 101"/>
+          <p:cNvPr id="120" name="Rectangle 119"/>
           <p:cNvSpPr/>
           <p:nvPr/>
         </p:nvSpPr>
@@ -7065,7 +7794,7 @@
       </p:sp>
       <p:sp>
         <p:nvSpPr>
-          <p:cNvPr id="103" name="Rectangle 102"/>
+          <p:cNvPr id="121" name="Rectangle 120"/>
           <p:cNvSpPr/>
           <p:nvPr/>
         </p:nvSpPr>
@@ -7109,7 +7838,7 @@
       </p:sp>
       <p:sp>
         <p:nvSpPr>
-          <p:cNvPr id="104" name="Rectangle 103"/>
+          <p:cNvPr id="122" name="Rectangle 121"/>
           <p:cNvSpPr/>
           <p:nvPr/>
         </p:nvSpPr>
@@ -7153,7 +7882,7 @@
       </p:sp>
       <p:sp>
         <p:nvSpPr>
-          <p:cNvPr id="105" name="Rectangle 104"/>
+          <p:cNvPr id="123" name="Rectangle 122"/>
           <p:cNvSpPr/>
           <p:nvPr/>
         </p:nvSpPr>
@@ -7199,7 +7928,7 @@
       </p:sp>
       <p:sp>
         <p:nvSpPr>
-          <p:cNvPr id="106" name="Rectangle 105"/>
+          <p:cNvPr id="124" name="Rectangle 123"/>
           <p:cNvSpPr/>
           <p:nvPr/>
         </p:nvSpPr>
@@ -7243,7 +7972,7 @@
       </p:sp>
       <p:sp>
         <p:nvSpPr>
-          <p:cNvPr id="107" name="Rectangle 106"/>
+          <p:cNvPr id="125" name="Rectangle 124"/>
           <p:cNvSpPr/>
           <p:nvPr/>
         </p:nvSpPr>
@@ -7287,7 +8016,7 @@
       </p:sp>
       <p:sp>
         <p:nvSpPr>
-          <p:cNvPr id="108" name="Rectangle 107"/>
+          <p:cNvPr id="126" name="Rectangle 125"/>
           <p:cNvSpPr/>
           <p:nvPr/>
         </p:nvSpPr>
@@ -7331,7 +8060,7 @@
       </p:sp>
       <p:sp>
         <p:nvSpPr>
-          <p:cNvPr id="109" name="Rectangle 108"/>
+          <p:cNvPr id="127" name="Rectangle 126"/>
           <p:cNvSpPr/>
           <p:nvPr/>
         </p:nvSpPr>
@@ -7375,7 +8104,7 @@
       </p:sp>
       <p:sp>
         <p:nvSpPr>
-          <p:cNvPr id="110" name="Rectangle 109"/>
+          <p:cNvPr id="128" name="Rectangle 127"/>
           <p:cNvSpPr/>
           <p:nvPr/>
         </p:nvSpPr>
@@ -7419,7 +8148,7 @@
       </p:sp>
       <p:sp>
         <p:nvSpPr>
-          <p:cNvPr id="111" name="Rectangle 110"/>
+          <p:cNvPr id="129" name="Rectangle 128"/>
           <p:cNvSpPr/>
           <p:nvPr/>
         </p:nvSpPr>
@@ -7463,7 +8192,7 @@
       </p:sp>
       <p:sp>
         <p:nvSpPr>
-          <p:cNvPr id="112" name="Rectangle 111"/>
+          <p:cNvPr id="130" name="Rectangle 129"/>
           <p:cNvSpPr/>
           <p:nvPr/>
         </p:nvSpPr>
@@ -7507,7 +8236,7 @@
       </p:sp>
       <p:sp>
         <p:nvSpPr>
-          <p:cNvPr id="113" name="Rectangle 112"/>
+          <p:cNvPr id="131" name="Rectangle 130"/>
           <p:cNvSpPr/>
           <p:nvPr/>
         </p:nvSpPr>
@@ -7551,7 +8280,7 @@
       </p:sp>
       <p:sp>
         <p:nvSpPr>
-          <p:cNvPr id="114" name="Rectangle 113"/>
+          <p:cNvPr id="132" name="Rectangle 131"/>
           <p:cNvSpPr/>
           <p:nvPr/>
         </p:nvSpPr>
@@ -7595,7 +8324,7 @@
       </p:sp>
       <p:sp>
         <p:nvSpPr>
-          <p:cNvPr id="115" name="Rectangle 114"/>
+          <p:cNvPr id="133" name="Rectangle 132"/>
           <p:cNvSpPr/>
           <p:nvPr/>
         </p:nvSpPr>
@@ -7639,7 +8368,7 @@
       </p:sp>
       <p:sp>
         <p:nvSpPr>
-          <p:cNvPr id="116" name="Rectangle 115"/>
+          <p:cNvPr id="134" name="Rectangle 133"/>
           <p:cNvSpPr/>
           <p:nvPr/>
         </p:nvSpPr>
@@ -7683,7 +8412,7 @@
       </p:sp>
       <p:sp>
         <p:nvSpPr>
-          <p:cNvPr id="117" name="Rectangle 116"/>
+          <p:cNvPr id="135" name="Rectangle 134"/>
           <p:cNvSpPr/>
           <p:nvPr/>
         </p:nvSpPr>
@@ -7727,7 +8456,7 @@
       </p:sp>
       <p:sp>
         <p:nvSpPr>
-          <p:cNvPr id="118" name="Rectangle 117"/>
+          <p:cNvPr id="136" name="Rectangle 135"/>
           <p:cNvSpPr/>
           <p:nvPr/>
         </p:nvSpPr>
@@ -7773,7 +8502,7 @@
       </p:sp>
       <p:sp>
         <p:nvSpPr>
-          <p:cNvPr id="119" name="Rectangle 118"/>
+          <p:cNvPr id="137" name="Rectangle 136"/>
           <p:cNvSpPr/>
           <p:nvPr/>
         </p:nvSpPr>
@@ -7817,7 +8546,7 @@
       </p:sp>
       <p:sp>
         <p:nvSpPr>
-          <p:cNvPr id="120" name="Rectangle 119"/>
+          <p:cNvPr id="138" name="Rectangle 137"/>
           <p:cNvSpPr/>
           <p:nvPr/>
         </p:nvSpPr>
@@ -7861,7 +8590,7 @@
       </p:sp>
       <p:sp>
         <p:nvSpPr>
-          <p:cNvPr id="121" name="Rectangle 120"/>
+          <p:cNvPr id="139" name="Rectangle 138"/>
           <p:cNvSpPr/>
           <p:nvPr/>
         </p:nvSpPr>
@@ -7905,7 +8634,7 @@
       </p:sp>
       <p:cxnSp>
         <p:nvCxnSpPr>
-          <p:cNvPr id="122" name="Connector 121"/>
+          <p:cNvPr id="140" name="Connector 139"/>
           <p:cNvCxnSpPr/>
           <p:nvPr/>
         </p:nvCxnSpPr>
@@ -7941,7 +8670,7 @@
       </p:cxnSp>
       <p:sp>
         <p:nvSpPr>
-          <p:cNvPr id="123" name="TextBox 122"/>
+          <p:cNvPr id="141" name="TextBox 140"/>
           <p:cNvSpPr txBox="1"/>
           <p:nvPr/>
         </p:nvSpPr>
@@ -7976,7 +8705,7 @@
       </p:sp>
       <p:sp>
         <p:nvSpPr>
-          <p:cNvPr id="124" name="Rectangle 123"/>
+          <p:cNvPr id="142" name="Rectangle 141"/>
           <p:cNvSpPr/>
           <p:nvPr/>
         </p:nvSpPr>
@@ -8020,7 +8749,7 @@
       </p:sp>
       <p:sp>
         <p:nvSpPr>
-          <p:cNvPr id="125" name="TextBox 124"/>
+          <p:cNvPr id="143" name="TextBox 142"/>
           <p:cNvSpPr txBox="1"/>
           <p:nvPr/>
         </p:nvSpPr>
@@ -8055,7 +8784,7 @@
       </p:sp>
       <p:sp>
         <p:nvSpPr>
-          <p:cNvPr id="126" name="Rectangle 125"/>
+          <p:cNvPr id="144" name="Rectangle 143"/>
           <p:cNvSpPr/>
           <p:nvPr/>
         </p:nvSpPr>
@@ -8099,7 +8828,7 @@
       </p:sp>
       <p:sp>
         <p:nvSpPr>
-          <p:cNvPr id="127" name="TextBox 126"/>
+          <p:cNvPr id="145" name="TextBox 144"/>
           <p:cNvSpPr txBox="1"/>
           <p:nvPr/>
         </p:nvSpPr>
@@ -8134,7 +8863,7 @@
       </p:sp>
       <p:sp>
         <p:nvSpPr>
-          <p:cNvPr id="128" name="Rectangle 127"/>
+          <p:cNvPr id="146" name="Rectangle 145"/>
           <p:cNvSpPr/>
           <p:nvPr/>
         </p:nvSpPr>
@@ -8178,7 +8907,7 @@
       </p:sp>
       <p:sp>
         <p:nvSpPr>
-          <p:cNvPr id="129" name="TextBox 128"/>
+          <p:cNvPr id="147" name="TextBox 146"/>
           <p:cNvSpPr txBox="1"/>
           <p:nvPr/>
         </p:nvSpPr>
@@ -8213,7 +8942,7 @@
       </p:sp>
       <p:sp>
         <p:nvSpPr>
-          <p:cNvPr id="130" name="TextBox 129"/>
+          <p:cNvPr id="148" name="TextBox 147"/>
           <p:cNvSpPr txBox="1"/>
           <p:nvPr/>
         </p:nvSpPr>
@@ -8248,7 +8977,7 @@
       </p:sp>
       <p:sp>
         <p:nvSpPr>
-          <p:cNvPr id="131" name="TextBox 130"/>
+          <p:cNvPr id="149" name="TextBox 148"/>
           <p:cNvSpPr txBox="1"/>
           <p:nvPr/>
         </p:nvSpPr>
@@ -8283,7 +9012,7 @@
       </p:sp>
       <p:sp>
         <p:nvSpPr>
-          <p:cNvPr id="132" name="TextBox 131"/>
+          <p:cNvPr id="150" name="TextBox 149"/>
           <p:cNvSpPr txBox="1"/>
           <p:nvPr/>
         </p:nvSpPr>
@@ -8318,7 +9047,7 @@
       </p:sp>
       <p:sp>
         <p:nvSpPr>
-          <p:cNvPr id="133" name="TextBox 132"/>
+          <p:cNvPr id="151" name="TextBox 150"/>
           <p:cNvSpPr txBox="1"/>
           <p:nvPr/>
         </p:nvSpPr>

--- a/latex/figure/fig3_why_selective.pptx
+++ b/latex/figure/fig3_why_selective.pptx
@@ -3201,7 +3201,7 @@
         </p:nvCxnSpPr>
         <p:spPr>
           <a:xfrm>
-            <a:off x="723900" y="1549400"/>
+            <a:off x="685800" y="1549400"/>
             <a:ext cx="0" cy="31750"/>
           </a:xfrm>
           <a:prstGeom prst="line">
@@ -3236,7 +3236,7 @@
         </p:nvSpPr>
         <p:spPr>
           <a:xfrm>
-            <a:off x="-800100" y="1571117"/>
+            <a:off x="-838200" y="1571117"/>
             <a:ext cx="3048000" cy="164592"/>
           </a:xfrm>
           <a:prstGeom prst="rect">
@@ -3271,7 +3271,7 @@
         </p:nvCxnSpPr>
         <p:spPr>
           <a:xfrm>
-            <a:off x="1104900" y="1549400"/>
+            <a:off x="990600" y="1549400"/>
             <a:ext cx="0" cy="31750"/>
           </a:xfrm>
           <a:prstGeom prst="line">
@@ -3306,7 +3306,7 @@
         </p:nvSpPr>
         <p:spPr>
           <a:xfrm>
-            <a:off x="-419100" y="1571117"/>
+            <a:off x="-533400" y="1571117"/>
             <a:ext cx="3048000" cy="164592"/>
           </a:xfrm>
           <a:prstGeom prst="rect">
@@ -3341,7 +3341,7 @@
         </p:nvCxnSpPr>
         <p:spPr>
           <a:xfrm>
-            <a:off x="1485900" y="1549400"/>
+            <a:off x="1295400" y="1549400"/>
             <a:ext cx="0" cy="31750"/>
           </a:xfrm>
           <a:prstGeom prst="line">
@@ -3376,7 +3376,7 @@
         </p:nvSpPr>
         <p:spPr>
           <a:xfrm>
-            <a:off x="-38100" y="1571117"/>
+            <a:off x="-228600" y="1571117"/>
             <a:ext cx="3048000" cy="164592"/>
           </a:xfrm>
           <a:prstGeom prst="rect">
@@ -3411,7 +3411,7 @@
         </p:nvCxnSpPr>
         <p:spPr>
           <a:xfrm>
-            <a:off x="1866900" y="1549400"/>
+            <a:off x="1600200" y="1549400"/>
             <a:ext cx="0" cy="31750"/>
           </a:xfrm>
           <a:prstGeom prst="line">
@@ -3446,7 +3446,7 @@
         </p:nvSpPr>
         <p:spPr>
           <a:xfrm>
-            <a:off x="342900" y="1571117"/>
+            <a:off x="76200" y="1571117"/>
             <a:ext cx="3048000" cy="164592"/>
           </a:xfrm>
           <a:prstGeom prst="rect">
@@ -3481,8 +3481,8 @@
         </p:nvCxnSpPr>
         <p:spPr>
           <a:xfrm>
-            <a:off x="501650" y="1403350"/>
-            <a:ext cx="31750" cy="0"/>
+            <a:off x="1905000" y="1549400"/>
+            <a:ext cx="0" cy="31750"/>
           </a:xfrm>
           <a:prstGeom prst="line">
             <a:avLst/>
@@ -3516,7 +3516,147 @@
         </p:nvSpPr>
         <p:spPr>
           <a:xfrm>
-            <a:off x="-1036319" y="1334897"/>
+            <a:off x="381000" y="1571117"/>
+            <a:ext cx="3048000" cy="164592"/>
+          </a:xfrm>
+          <a:prstGeom prst="rect">
+            <a:avLst/>
+          </a:prstGeom>
+          <a:noFill/>
+        </p:spPr>
+        <p:txBody>
+          <a:bodyPr wrap="none" lIns="0" rIns="0" tIns="0" bIns="0" anchor="ctr">
+            <a:spAutoFit/>
+          </a:bodyPr>
+          <a:lstStyle/>
+          <a:p>
+            <a:pPr algn="ctr"/>
+            <a:r>
+              <a:rPr sz="540" b="0" i="0">
+                <a:solidFill>
+                  <a:srgbClr val="6B727C"/>
+                </a:solidFill>
+                <a:latin typeface="Helvetica"/>
+              </a:rPr>
+              <a:t>5</a:t>
+            </a:r>
+          </a:p>
+        </p:txBody>
+      </p:sp>
+      <p:cxnSp>
+        <p:nvCxnSpPr>
+          <p:cNvPr id="15" name="Connector 14"/>
+          <p:cNvCxnSpPr/>
+          <p:nvPr/>
+        </p:nvCxnSpPr>
+        <p:spPr>
+          <a:xfrm>
+            <a:off x="501650" y="1432560"/>
+            <a:ext cx="31750" cy="0"/>
+          </a:xfrm>
+          <a:prstGeom prst="line">
+            <a:avLst/>
+          </a:prstGeom>
+          <a:ln w="7620">
+            <a:solidFill>
+              <a:srgbClr val="1C1E23"/>
+            </a:solidFill>
+          </a:ln>
+        </p:spPr>
+        <p:style>
+          <a:lnRef idx="2">
+            <a:schemeClr val="accent1"/>
+          </a:lnRef>
+          <a:fillRef idx="0">
+            <a:schemeClr val="accent1"/>
+          </a:fillRef>
+          <a:effectRef idx="1">
+            <a:schemeClr val="accent1"/>
+          </a:effectRef>
+          <a:fontRef idx="minor">
+            <a:schemeClr val="tx1"/>
+          </a:fontRef>
+        </p:style>
+      </p:cxnSp>
+      <p:sp>
+        <p:nvSpPr>
+          <p:cNvPr id="16" name="TextBox 15"/>
+          <p:cNvSpPr txBox="1"/>
+          <p:nvPr/>
+        </p:nvSpPr>
+        <p:spPr>
+          <a:xfrm>
+            <a:off x="-1036319" y="1364107"/>
+            <a:ext cx="3048000" cy="164592"/>
+          </a:xfrm>
+          <a:prstGeom prst="rect">
+            <a:avLst/>
+          </a:prstGeom>
+          <a:noFill/>
+        </p:spPr>
+        <p:txBody>
+          <a:bodyPr wrap="none" lIns="0" rIns="0" tIns="0" bIns="0" anchor="ctr">
+            <a:spAutoFit/>
+          </a:bodyPr>
+          <a:lstStyle/>
+          <a:p>
+            <a:pPr algn="r"/>
+            <a:r>
+              <a:rPr sz="540" b="0" i="0">
+                <a:solidFill>
+                  <a:srgbClr val="6B727C"/>
+                </a:solidFill>
+                <a:latin typeface="Helvetica"/>
+              </a:rPr>
+              <a:t>5</a:t>
+            </a:r>
+          </a:p>
+        </p:txBody>
+      </p:sp>
+      <p:cxnSp>
+        <p:nvCxnSpPr>
+          <p:cNvPr id="17" name="Connector 16"/>
+          <p:cNvCxnSpPr/>
+          <p:nvPr/>
+        </p:nvCxnSpPr>
+        <p:spPr>
+          <a:xfrm>
+            <a:off x="501650" y="1198880"/>
+            <a:ext cx="31750" cy="0"/>
+          </a:xfrm>
+          <a:prstGeom prst="line">
+            <a:avLst/>
+          </a:prstGeom>
+          <a:ln w="7620">
+            <a:solidFill>
+              <a:srgbClr val="1C1E23"/>
+            </a:solidFill>
+          </a:ln>
+        </p:spPr>
+        <p:style>
+          <a:lnRef idx="2">
+            <a:schemeClr val="accent1"/>
+          </a:lnRef>
+          <a:fillRef idx="0">
+            <a:schemeClr val="accent1"/>
+          </a:fillRef>
+          <a:effectRef idx="1">
+            <a:schemeClr val="accent1"/>
+          </a:effectRef>
+          <a:fontRef idx="minor">
+            <a:schemeClr val="tx1"/>
+          </a:fontRef>
+        </p:style>
+      </p:cxnSp>
+      <p:sp>
+        <p:nvSpPr>
+          <p:cNvPr id="18" name="TextBox 17"/>
+          <p:cNvSpPr txBox="1"/>
+          <p:nvPr/>
+        </p:nvSpPr>
+        <p:spPr>
+          <a:xfrm>
+            <a:off x="-1036319" y="1130427"/>
             <a:ext cx="3048000" cy="164592"/>
           </a:xfrm>
           <a:prstGeom prst="rect">
@@ -3545,13 +3685,13 @@
       </p:sp>
       <p:cxnSp>
         <p:nvCxnSpPr>
-          <p:cNvPr id="15" name="Connector 14"/>
+          <p:cNvPr id="19" name="Connector 18"/>
           <p:cNvCxnSpPr/>
           <p:nvPr/>
         </p:nvCxnSpPr>
         <p:spPr>
           <a:xfrm>
-            <a:off x="501650" y="1111250"/>
+            <a:off x="501650" y="965200"/>
             <a:ext cx="31750" cy="0"/>
           </a:xfrm>
           <a:prstGeom prst="line">
@@ -3580,13 +3720,13 @@
       </p:cxnSp>
       <p:sp>
         <p:nvSpPr>
-          <p:cNvPr id="16" name="TextBox 15"/>
+          <p:cNvPr id="20" name="TextBox 19"/>
           <p:cNvSpPr txBox="1"/>
           <p:nvPr/>
         </p:nvSpPr>
         <p:spPr>
           <a:xfrm>
-            <a:off x="-1036319" y="1042797"/>
+            <a:off x="-1036319" y="896747"/>
             <a:ext cx="3048000" cy="164592"/>
           </a:xfrm>
           <a:prstGeom prst="rect">
@@ -3615,13 +3755,13 @@
       </p:sp>
       <p:cxnSp>
         <p:nvCxnSpPr>
-          <p:cNvPr id="17" name="Connector 16"/>
+          <p:cNvPr id="21" name="Connector 20"/>
           <p:cNvCxnSpPr/>
           <p:nvPr/>
         </p:nvCxnSpPr>
         <p:spPr>
           <a:xfrm>
-            <a:off x="501650" y="819150"/>
+            <a:off x="501650" y="731519"/>
             <a:ext cx="31750" cy="0"/>
           </a:xfrm>
           <a:prstGeom prst="line">
@@ -3650,13 +3790,13 @@
       </p:cxnSp>
       <p:sp>
         <p:nvSpPr>
-          <p:cNvPr id="18" name="TextBox 17"/>
+          <p:cNvPr id="22" name="TextBox 21"/>
           <p:cNvSpPr txBox="1"/>
           <p:nvPr/>
         </p:nvSpPr>
         <p:spPr>
           <a:xfrm>
-            <a:off x="-1036319" y="750697"/>
+            <a:off x="-1036319" y="663066"/>
             <a:ext cx="3048000" cy="164592"/>
           </a:xfrm>
           <a:prstGeom prst="rect">
@@ -3685,13 +3825,13 @@
       </p:sp>
       <p:cxnSp>
         <p:nvCxnSpPr>
-          <p:cNvPr id="19" name="Connector 18"/>
+          <p:cNvPr id="23" name="Connector 22"/>
           <p:cNvCxnSpPr/>
           <p:nvPr/>
         </p:nvCxnSpPr>
         <p:spPr>
           <a:xfrm>
-            <a:off x="501650" y="527050"/>
+            <a:off x="501650" y="497840"/>
             <a:ext cx="31750" cy="0"/>
           </a:xfrm>
           <a:prstGeom prst="line">
@@ -3720,13 +3860,13 @@
       </p:cxnSp>
       <p:sp>
         <p:nvSpPr>
-          <p:cNvPr id="20" name="TextBox 19"/>
+          <p:cNvPr id="24" name="TextBox 23"/>
           <p:cNvSpPr txBox="1"/>
           <p:nvPr/>
         </p:nvSpPr>
         <p:spPr>
           <a:xfrm>
-            <a:off x="-1036319" y="458597"/>
+            <a:off x="-1036319" y="429387"/>
             <a:ext cx="3048000" cy="164592"/>
           </a:xfrm>
           <a:prstGeom prst="rect">
@@ -3755,7 +3895,7 @@
       </p:sp>
       <p:sp>
         <p:nvSpPr>
-          <p:cNvPr id="21" name="TextBox 20"/>
+          <p:cNvPr id="25" name="TextBox 24"/>
           <p:cNvSpPr txBox="1"/>
           <p:nvPr/>
         </p:nvSpPr>
@@ -3790,20 +3930,66 @@
       </p:sp>
       <p:sp>
         <p:nvSpPr>
-          <p:cNvPr id="22" name="Rectangle 21"/>
+          <p:cNvPr id="26" name="Rectangle 25"/>
           <p:cNvSpPr/>
           <p:nvPr/>
         </p:nvSpPr>
         <p:spPr>
           <a:xfrm>
             <a:off x="533400" y="381000"/>
-            <a:ext cx="381000" cy="292100"/>
+            <a:ext cx="304800" cy="233679"/>
           </a:xfrm>
           <a:prstGeom prst="rect">
             <a:avLst/>
           </a:prstGeom>
           <a:solidFill>
             <a:srgbClr val="89A6CD"/>
+          </a:solidFill>
+          <a:ln w="11430">
+            <a:solidFill>
+              <a:srgbClr val="1C1E23"/>
+            </a:solidFill>
+          </a:ln>
+          <a:effectLst/>
+        </p:spPr>
+        <p:style>
+          <a:lnRef idx="1">
+            <a:schemeClr val="accent1"/>
+          </a:lnRef>
+          <a:fillRef idx="3">
+            <a:schemeClr val="accent1"/>
+          </a:fillRef>
+          <a:effectRef idx="2">
+            <a:schemeClr val="accent1"/>
+          </a:effectRef>
+          <a:fontRef idx="minor">
+            <a:schemeClr val="lt1"/>
+          </a:fontRef>
+        </p:style>
+        <p:txBody>
+          <a:bodyPr rtlCol="0" anchor="ctr"/>
+          <a:lstStyle/>
+          <a:p>
+            <a:pPr algn="ctr"/>
+          </a:p>
+        </p:txBody>
+      </p:sp>
+      <p:sp>
+        <p:nvSpPr>
+          <p:cNvPr id="27" name="Rectangle 26"/>
+          <p:cNvSpPr/>
+          <p:nvPr/>
+        </p:nvSpPr>
+        <p:spPr>
+          <a:xfrm>
+            <a:off x="533400" y="614680"/>
+            <a:ext cx="304800" cy="233679"/>
+          </a:xfrm>
+          <a:prstGeom prst="rect">
+            <a:avLst/>
+          </a:prstGeom>
+          <a:solidFill>
+            <a:srgbClr val="7294C2"/>
           </a:solidFill>
           <a:ln w="6350">
             <a:solidFill>
@@ -3836,14 +4022,1072 @@
       </p:sp>
       <p:sp>
         <p:nvSpPr>
-          <p:cNvPr id="23" name="TextBox 22"/>
+          <p:cNvPr id="28" name="Rectangle 27"/>
+          <p:cNvSpPr/>
+          <p:nvPr/>
+        </p:nvSpPr>
+        <p:spPr>
+          <a:xfrm>
+            <a:off x="533400" y="848360"/>
+            <a:ext cx="304800" cy="233679"/>
+          </a:xfrm>
+          <a:prstGeom prst="rect">
+            <a:avLst/>
+          </a:prstGeom>
+          <a:solidFill>
+            <a:srgbClr val="809FC9"/>
+          </a:solidFill>
+          <a:ln w="6350">
+            <a:solidFill>
+              <a:srgbClr val="FFFFFF"/>
+            </a:solidFill>
+          </a:ln>
+          <a:effectLst/>
+        </p:spPr>
+        <p:style>
+          <a:lnRef idx="1">
+            <a:schemeClr val="accent1"/>
+          </a:lnRef>
+          <a:fillRef idx="3">
+            <a:schemeClr val="accent1"/>
+          </a:fillRef>
+          <a:effectRef idx="2">
+            <a:schemeClr val="accent1"/>
+          </a:effectRef>
+          <a:fontRef idx="minor">
+            <a:schemeClr val="lt1"/>
+          </a:fontRef>
+        </p:style>
+        <p:txBody>
+          <a:bodyPr rtlCol="0" anchor="ctr"/>
+          <a:lstStyle/>
+          <a:p>
+            <a:pPr algn="ctr"/>
+          </a:p>
+        </p:txBody>
+      </p:sp>
+      <p:sp>
+        <p:nvSpPr>
+          <p:cNvPr id="29" name="Rectangle 28"/>
+          <p:cNvSpPr/>
+          <p:nvPr/>
+        </p:nvSpPr>
+        <p:spPr>
+          <a:xfrm>
+            <a:off x="533400" y="1082039"/>
+            <a:ext cx="304800" cy="233679"/>
+          </a:xfrm>
+          <a:prstGeom prst="rect">
+            <a:avLst/>
+          </a:prstGeom>
+          <a:solidFill>
+            <a:srgbClr val="9AB4D6"/>
+          </a:solidFill>
+          <a:ln w="6350">
+            <a:solidFill>
+              <a:srgbClr val="FFFFFF"/>
+            </a:solidFill>
+          </a:ln>
+          <a:effectLst/>
+        </p:spPr>
+        <p:style>
+          <a:lnRef idx="1">
+            <a:schemeClr val="accent1"/>
+          </a:lnRef>
+          <a:fillRef idx="3">
+            <a:schemeClr val="accent1"/>
+          </a:fillRef>
+          <a:effectRef idx="2">
+            <a:schemeClr val="accent1"/>
+          </a:effectRef>
+          <a:fontRef idx="minor">
+            <a:schemeClr val="lt1"/>
+          </a:fontRef>
+        </p:style>
+        <p:txBody>
+          <a:bodyPr rtlCol="0" anchor="ctr"/>
+          <a:lstStyle/>
+          <a:p>
+            <a:pPr algn="ctr"/>
+          </a:p>
+        </p:txBody>
+      </p:sp>
+      <p:sp>
+        <p:nvSpPr>
+          <p:cNvPr id="30" name="Rectangle 29"/>
+          <p:cNvSpPr/>
+          <p:nvPr/>
+        </p:nvSpPr>
+        <p:spPr>
+          <a:xfrm>
+            <a:off x="533400" y="1315720"/>
+            <a:ext cx="304800" cy="233679"/>
+          </a:xfrm>
+          <a:prstGeom prst="rect">
+            <a:avLst/>
+          </a:prstGeom>
+          <a:solidFill>
+            <a:srgbClr val="B0C5E1"/>
+          </a:solidFill>
+          <a:ln w="6350">
+            <a:solidFill>
+              <a:srgbClr val="FFFFFF"/>
+            </a:solidFill>
+          </a:ln>
+          <a:effectLst/>
+        </p:spPr>
+        <p:style>
+          <a:lnRef idx="1">
+            <a:schemeClr val="accent1"/>
+          </a:lnRef>
+          <a:fillRef idx="3">
+            <a:schemeClr val="accent1"/>
+          </a:fillRef>
+          <a:effectRef idx="2">
+            <a:schemeClr val="accent1"/>
+          </a:effectRef>
+          <a:fontRef idx="minor">
+            <a:schemeClr val="lt1"/>
+          </a:fontRef>
+        </p:style>
+        <p:txBody>
+          <a:bodyPr rtlCol="0" anchor="ctr"/>
+          <a:lstStyle/>
+          <a:p>
+            <a:pPr algn="ctr"/>
+          </a:p>
+        </p:txBody>
+      </p:sp>
+      <p:sp>
+        <p:nvSpPr>
+          <p:cNvPr id="31" name="Rectangle 30"/>
+          <p:cNvSpPr/>
+          <p:nvPr/>
+        </p:nvSpPr>
+        <p:spPr>
+          <a:xfrm>
+            <a:off x="838200" y="381000"/>
+            <a:ext cx="304800" cy="233679"/>
+          </a:xfrm>
+          <a:prstGeom prst="rect">
+            <a:avLst/>
+          </a:prstGeom>
+          <a:solidFill>
+            <a:srgbClr val="9BB4D6"/>
+          </a:solidFill>
+          <a:ln w="6350">
+            <a:solidFill>
+              <a:srgbClr val="FFFFFF"/>
+            </a:solidFill>
+          </a:ln>
+          <a:effectLst/>
+        </p:spPr>
+        <p:style>
+          <a:lnRef idx="1">
+            <a:schemeClr val="accent1"/>
+          </a:lnRef>
+          <a:fillRef idx="3">
+            <a:schemeClr val="accent1"/>
+          </a:fillRef>
+          <a:effectRef idx="2">
+            <a:schemeClr val="accent1"/>
+          </a:effectRef>
+          <a:fontRef idx="minor">
+            <a:schemeClr val="lt1"/>
+          </a:fontRef>
+        </p:style>
+        <p:txBody>
+          <a:bodyPr rtlCol="0" anchor="ctr"/>
+          <a:lstStyle/>
+          <a:p>
+            <a:pPr algn="ctr"/>
+          </a:p>
+        </p:txBody>
+      </p:sp>
+      <p:sp>
+        <p:nvSpPr>
+          <p:cNvPr id="32" name="Rectangle 31"/>
+          <p:cNvSpPr/>
+          <p:nvPr/>
+        </p:nvSpPr>
+        <p:spPr>
+          <a:xfrm>
+            <a:off x="838200" y="614680"/>
+            <a:ext cx="304800" cy="233679"/>
+          </a:xfrm>
+          <a:prstGeom prst="rect">
+            <a:avLst/>
+          </a:prstGeom>
+          <a:solidFill>
+            <a:srgbClr val="7194C1"/>
+          </a:solidFill>
+          <a:ln w="11430">
+            <a:solidFill>
+              <a:srgbClr val="1C1E23"/>
+            </a:solidFill>
+          </a:ln>
+          <a:effectLst/>
+        </p:spPr>
+        <p:style>
+          <a:lnRef idx="1">
+            <a:schemeClr val="accent1"/>
+          </a:lnRef>
+          <a:fillRef idx="3">
+            <a:schemeClr val="accent1"/>
+          </a:fillRef>
+          <a:effectRef idx="2">
+            <a:schemeClr val="accent1"/>
+          </a:effectRef>
+          <a:fontRef idx="minor">
+            <a:schemeClr val="lt1"/>
+          </a:fontRef>
+        </p:style>
+        <p:txBody>
+          <a:bodyPr rtlCol="0" anchor="ctr"/>
+          <a:lstStyle/>
+          <a:p>
+            <a:pPr algn="ctr"/>
+          </a:p>
+        </p:txBody>
+      </p:sp>
+      <p:sp>
+        <p:nvSpPr>
+          <p:cNvPr id="33" name="Rectangle 32"/>
+          <p:cNvSpPr/>
+          <p:nvPr/>
+        </p:nvSpPr>
+        <p:spPr>
+          <a:xfrm>
+            <a:off x="838200" y="848360"/>
+            <a:ext cx="304800" cy="233679"/>
+          </a:xfrm>
+          <a:prstGeom prst="rect">
+            <a:avLst/>
+          </a:prstGeom>
+          <a:solidFill>
+            <a:srgbClr val="6A8EBE"/>
+          </a:solidFill>
+          <a:ln w="6350">
+            <a:solidFill>
+              <a:srgbClr val="FFFFFF"/>
+            </a:solidFill>
+          </a:ln>
+          <a:effectLst/>
+        </p:spPr>
+        <p:style>
+          <a:lnRef idx="1">
+            <a:schemeClr val="accent1"/>
+          </a:lnRef>
+          <a:fillRef idx="3">
+            <a:schemeClr val="accent1"/>
+          </a:fillRef>
+          <a:effectRef idx="2">
+            <a:schemeClr val="accent1"/>
+          </a:effectRef>
+          <a:fontRef idx="minor">
+            <a:schemeClr val="lt1"/>
+          </a:fontRef>
+        </p:style>
+        <p:txBody>
+          <a:bodyPr rtlCol="0" anchor="ctr"/>
+          <a:lstStyle/>
+          <a:p>
+            <a:pPr algn="ctr"/>
+          </a:p>
+        </p:txBody>
+      </p:sp>
+      <p:sp>
+        <p:nvSpPr>
+          <p:cNvPr id="34" name="Rectangle 33"/>
+          <p:cNvSpPr/>
+          <p:nvPr/>
+        </p:nvSpPr>
+        <p:spPr>
+          <a:xfrm>
+            <a:off x="838200" y="1082039"/>
+            <a:ext cx="304800" cy="233679"/>
+          </a:xfrm>
+          <a:prstGeom prst="rect">
+            <a:avLst/>
+          </a:prstGeom>
+          <a:solidFill>
+            <a:srgbClr val="91ACD1"/>
+          </a:solidFill>
+          <a:ln w="6350">
+            <a:solidFill>
+              <a:srgbClr val="FFFFFF"/>
+            </a:solidFill>
+          </a:ln>
+          <a:effectLst/>
+        </p:spPr>
+        <p:style>
+          <a:lnRef idx="1">
+            <a:schemeClr val="accent1"/>
+          </a:lnRef>
+          <a:fillRef idx="3">
+            <a:schemeClr val="accent1"/>
+          </a:fillRef>
+          <a:effectRef idx="2">
+            <a:schemeClr val="accent1"/>
+          </a:effectRef>
+          <a:fontRef idx="minor">
+            <a:schemeClr val="lt1"/>
+          </a:fontRef>
+        </p:style>
+        <p:txBody>
+          <a:bodyPr rtlCol="0" anchor="ctr"/>
+          <a:lstStyle/>
+          <a:p>
+            <a:pPr algn="ctr"/>
+          </a:p>
+        </p:txBody>
+      </p:sp>
+      <p:sp>
+        <p:nvSpPr>
+          <p:cNvPr id="35" name="Rectangle 34"/>
+          <p:cNvSpPr/>
+          <p:nvPr/>
+        </p:nvSpPr>
+        <p:spPr>
+          <a:xfrm>
+            <a:off x="838200" y="1315720"/>
+            <a:ext cx="304800" cy="233679"/>
+          </a:xfrm>
+          <a:prstGeom prst="rect">
+            <a:avLst/>
+          </a:prstGeom>
+          <a:solidFill>
+            <a:srgbClr val="BED0E8"/>
+          </a:solidFill>
+          <a:ln w="6350">
+            <a:solidFill>
+              <a:srgbClr val="FFFFFF"/>
+            </a:solidFill>
+          </a:ln>
+          <a:effectLst/>
+        </p:spPr>
+        <p:style>
+          <a:lnRef idx="1">
+            <a:schemeClr val="accent1"/>
+          </a:lnRef>
+          <a:fillRef idx="3">
+            <a:schemeClr val="accent1"/>
+          </a:fillRef>
+          <a:effectRef idx="2">
+            <a:schemeClr val="accent1"/>
+          </a:effectRef>
+          <a:fontRef idx="minor">
+            <a:schemeClr val="lt1"/>
+          </a:fontRef>
+        </p:style>
+        <p:txBody>
+          <a:bodyPr rtlCol="0" anchor="ctr"/>
+          <a:lstStyle/>
+          <a:p>
+            <a:pPr algn="ctr"/>
+          </a:p>
+        </p:txBody>
+      </p:sp>
+      <p:sp>
+        <p:nvSpPr>
+          <p:cNvPr id="36" name="Rectangle 35"/>
+          <p:cNvSpPr/>
+          <p:nvPr/>
+        </p:nvSpPr>
+        <p:spPr>
+          <a:xfrm>
+            <a:off x="1143000" y="381000"/>
+            <a:ext cx="304800" cy="233679"/>
+          </a:xfrm>
+          <a:prstGeom prst="rect">
+            <a:avLst/>
+          </a:prstGeom>
+          <a:solidFill>
+            <a:srgbClr val="A0B8D9"/>
+          </a:solidFill>
+          <a:ln w="6350">
+            <a:solidFill>
+              <a:srgbClr val="FFFFFF"/>
+            </a:solidFill>
+          </a:ln>
+          <a:effectLst/>
+        </p:spPr>
+        <p:style>
+          <a:lnRef idx="1">
+            <a:schemeClr val="accent1"/>
+          </a:lnRef>
+          <a:fillRef idx="3">
+            <a:schemeClr val="accent1"/>
+          </a:fillRef>
+          <a:effectRef idx="2">
+            <a:schemeClr val="accent1"/>
+          </a:effectRef>
+          <a:fontRef idx="minor">
+            <a:schemeClr val="lt1"/>
+          </a:fontRef>
+        </p:style>
+        <p:txBody>
+          <a:bodyPr rtlCol="0" anchor="ctr"/>
+          <a:lstStyle/>
+          <a:p>
+            <a:pPr algn="ctr"/>
+          </a:p>
+        </p:txBody>
+      </p:sp>
+      <p:sp>
+        <p:nvSpPr>
+          <p:cNvPr id="37" name="Rectangle 36"/>
+          <p:cNvSpPr/>
+          <p:nvPr/>
+        </p:nvSpPr>
+        <p:spPr>
+          <a:xfrm>
+            <a:off x="1143000" y="614680"/>
+            <a:ext cx="304800" cy="233679"/>
+          </a:xfrm>
+          <a:prstGeom prst="rect">
+            <a:avLst/>
+          </a:prstGeom>
+          <a:solidFill>
+            <a:srgbClr val="8DAAD0"/>
+          </a:solidFill>
+          <a:ln w="6350">
+            <a:solidFill>
+              <a:srgbClr val="FFFFFF"/>
+            </a:solidFill>
+          </a:ln>
+          <a:effectLst/>
+        </p:spPr>
+        <p:style>
+          <a:lnRef idx="1">
+            <a:schemeClr val="accent1"/>
+          </a:lnRef>
+          <a:fillRef idx="3">
+            <a:schemeClr val="accent1"/>
+          </a:fillRef>
+          <a:effectRef idx="2">
+            <a:schemeClr val="accent1"/>
+          </a:effectRef>
+          <a:fontRef idx="minor">
+            <a:schemeClr val="lt1"/>
+          </a:fontRef>
+        </p:style>
+        <p:txBody>
+          <a:bodyPr rtlCol="0" anchor="ctr"/>
+          <a:lstStyle/>
+          <a:p>
+            <a:pPr algn="ctr"/>
+          </a:p>
+        </p:txBody>
+      </p:sp>
+      <p:sp>
+        <p:nvSpPr>
+          <p:cNvPr id="38" name="Rectangle 37"/>
+          <p:cNvSpPr/>
+          <p:nvPr/>
+        </p:nvSpPr>
+        <p:spPr>
+          <a:xfrm>
+            <a:off x="1143000" y="848360"/>
+            <a:ext cx="304800" cy="233679"/>
+          </a:xfrm>
+          <a:prstGeom prst="rect">
+            <a:avLst/>
+          </a:prstGeom>
+          <a:solidFill>
+            <a:srgbClr val="698DBD"/>
+          </a:solidFill>
+          <a:ln w="11430">
+            <a:solidFill>
+              <a:srgbClr val="1C1E23"/>
+            </a:solidFill>
+          </a:ln>
+          <a:effectLst/>
+        </p:spPr>
+        <p:style>
+          <a:lnRef idx="1">
+            <a:schemeClr val="accent1"/>
+          </a:lnRef>
+          <a:fillRef idx="3">
+            <a:schemeClr val="accent1"/>
+          </a:fillRef>
+          <a:effectRef idx="2">
+            <a:schemeClr val="accent1"/>
+          </a:effectRef>
+          <a:fontRef idx="minor">
+            <a:schemeClr val="lt1"/>
+          </a:fontRef>
+        </p:style>
+        <p:txBody>
+          <a:bodyPr rtlCol="0" anchor="ctr"/>
+          <a:lstStyle/>
+          <a:p>
+            <a:pPr algn="ctr"/>
+          </a:p>
+        </p:txBody>
+      </p:sp>
+      <p:sp>
+        <p:nvSpPr>
+          <p:cNvPr id="39" name="Rectangle 38"/>
+          <p:cNvSpPr/>
+          <p:nvPr/>
+        </p:nvSpPr>
+        <p:spPr>
+          <a:xfrm>
+            <a:off x="1143000" y="1082039"/>
+            <a:ext cx="304800" cy="233679"/>
+          </a:xfrm>
+          <a:prstGeom prst="rect">
+            <a:avLst/>
+          </a:prstGeom>
+          <a:solidFill>
+            <a:srgbClr val="82A1CA"/>
+          </a:solidFill>
+          <a:ln w="6350">
+            <a:solidFill>
+              <a:srgbClr val="FFFFFF"/>
+            </a:solidFill>
+          </a:ln>
+          <a:effectLst/>
+        </p:spPr>
+        <p:style>
+          <a:lnRef idx="1">
+            <a:schemeClr val="accent1"/>
+          </a:lnRef>
+          <a:fillRef idx="3">
+            <a:schemeClr val="accent1"/>
+          </a:fillRef>
+          <a:effectRef idx="2">
+            <a:schemeClr val="accent1"/>
+          </a:effectRef>
+          <a:fontRef idx="minor">
+            <a:schemeClr val="lt1"/>
+          </a:fontRef>
+        </p:style>
+        <p:txBody>
+          <a:bodyPr rtlCol="0" anchor="ctr"/>
+          <a:lstStyle/>
+          <a:p>
+            <a:pPr algn="ctr"/>
+          </a:p>
+        </p:txBody>
+      </p:sp>
+      <p:sp>
+        <p:nvSpPr>
+          <p:cNvPr id="40" name="Rectangle 39"/>
+          <p:cNvSpPr/>
+          <p:nvPr/>
+        </p:nvSpPr>
+        <p:spPr>
+          <a:xfrm>
+            <a:off x="1143000" y="1315720"/>
+            <a:ext cx="304800" cy="233679"/>
+          </a:xfrm>
+          <a:prstGeom prst="rect">
+            <a:avLst/>
+          </a:prstGeom>
+          <a:solidFill>
+            <a:srgbClr val="ACC2DF"/>
+          </a:solidFill>
+          <a:ln w="6350">
+            <a:solidFill>
+              <a:srgbClr val="FFFFFF"/>
+            </a:solidFill>
+          </a:ln>
+          <a:effectLst/>
+        </p:spPr>
+        <p:style>
+          <a:lnRef idx="1">
+            <a:schemeClr val="accent1"/>
+          </a:lnRef>
+          <a:fillRef idx="3">
+            <a:schemeClr val="accent1"/>
+          </a:fillRef>
+          <a:effectRef idx="2">
+            <a:schemeClr val="accent1"/>
+          </a:effectRef>
+          <a:fontRef idx="minor">
+            <a:schemeClr val="lt1"/>
+          </a:fontRef>
+        </p:style>
+        <p:txBody>
+          <a:bodyPr rtlCol="0" anchor="ctr"/>
+          <a:lstStyle/>
+          <a:p>
+            <a:pPr algn="ctr"/>
+          </a:p>
+        </p:txBody>
+      </p:sp>
+      <p:sp>
+        <p:nvSpPr>
+          <p:cNvPr id="41" name="Rectangle 40"/>
+          <p:cNvSpPr/>
+          <p:nvPr/>
+        </p:nvSpPr>
+        <p:spPr>
+          <a:xfrm>
+            <a:off x="1447800" y="381000"/>
+            <a:ext cx="304800" cy="233679"/>
+          </a:xfrm>
+          <a:prstGeom prst="rect">
+            <a:avLst/>
+          </a:prstGeom>
+          <a:solidFill>
+            <a:srgbClr val="89A7CE"/>
+          </a:solidFill>
+          <a:ln w="6350">
+            <a:solidFill>
+              <a:srgbClr val="FFFFFF"/>
+            </a:solidFill>
+          </a:ln>
+          <a:effectLst/>
+        </p:spPr>
+        <p:style>
+          <a:lnRef idx="1">
+            <a:schemeClr val="accent1"/>
+          </a:lnRef>
+          <a:fillRef idx="3">
+            <a:schemeClr val="accent1"/>
+          </a:fillRef>
+          <a:effectRef idx="2">
+            <a:schemeClr val="accent1"/>
+          </a:effectRef>
+          <a:fontRef idx="minor">
+            <a:schemeClr val="lt1"/>
+          </a:fontRef>
+        </p:style>
+        <p:txBody>
+          <a:bodyPr rtlCol="0" anchor="ctr"/>
+          <a:lstStyle/>
+          <a:p>
+            <a:pPr algn="ctr"/>
+          </a:p>
+        </p:txBody>
+      </p:sp>
+      <p:sp>
+        <p:nvSpPr>
+          <p:cNvPr id="42" name="Rectangle 41"/>
+          <p:cNvSpPr/>
+          <p:nvPr/>
+        </p:nvSpPr>
+        <p:spPr>
+          <a:xfrm>
+            <a:off x="1447800" y="614680"/>
+            <a:ext cx="304800" cy="233679"/>
+          </a:xfrm>
+          <a:prstGeom prst="rect">
+            <a:avLst/>
+          </a:prstGeom>
+          <a:solidFill>
+            <a:srgbClr val="9FB8D9"/>
+          </a:solidFill>
+          <a:ln w="6350">
+            <a:solidFill>
+              <a:srgbClr val="FFFFFF"/>
+            </a:solidFill>
+          </a:ln>
+          <a:effectLst/>
+        </p:spPr>
+        <p:style>
+          <a:lnRef idx="1">
+            <a:schemeClr val="accent1"/>
+          </a:lnRef>
+          <a:fillRef idx="3">
+            <a:schemeClr val="accent1"/>
+          </a:fillRef>
+          <a:effectRef idx="2">
+            <a:schemeClr val="accent1"/>
+          </a:effectRef>
+          <a:fontRef idx="minor">
+            <a:schemeClr val="lt1"/>
+          </a:fontRef>
+        </p:style>
+        <p:txBody>
+          <a:bodyPr rtlCol="0" anchor="ctr"/>
+          <a:lstStyle/>
+          <a:p>
+            <a:pPr algn="ctr"/>
+          </a:p>
+        </p:txBody>
+      </p:sp>
+      <p:sp>
+        <p:nvSpPr>
+          <p:cNvPr id="43" name="Rectangle 42"/>
+          <p:cNvSpPr/>
+          <p:nvPr/>
+        </p:nvSpPr>
+        <p:spPr>
+          <a:xfrm>
+            <a:off x="1447800" y="848360"/>
+            <a:ext cx="304800" cy="233679"/>
+          </a:xfrm>
+          <a:prstGeom prst="rect">
+            <a:avLst/>
+          </a:prstGeom>
+          <a:solidFill>
+            <a:srgbClr val="ADC3E0"/>
+          </a:solidFill>
+          <a:ln w="6350">
+            <a:solidFill>
+              <a:srgbClr val="FFFFFF"/>
+            </a:solidFill>
+          </a:ln>
+          <a:effectLst/>
+        </p:spPr>
+        <p:style>
+          <a:lnRef idx="1">
+            <a:schemeClr val="accent1"/>
+          </a:lnRef>
+          <a:fillRef idx="3">
+            <a:schemeClr val="accent1"/>
+          </a:fillRef>
+          <a:effectRef idx="2">
+            <a:schemeClr val="accent1"/>
+          </a:effectRef>
+          <a:fontRef idx="minor">
+            <a:schemeClr val="lt1"/>
+          </a:fontRef>
+        </p:style>
+        <p:txBody>
+          <a:bodyPr rtlCol="0" anchor="ctr"/>
+          <a:lstStyle/>
+          <a:p>
+            <a:pPr algn="ctr"/>
+          </a:p>
+        </p:txBody>
+      </p:sp>
+      <p:sp>
+        <p:nvSpPr>
+          <p:cNvPr id="44" name="Rectangle 43"/>
+          <p:cNvSpPr/>
+          <p:nvPr/>
+        </p:nvSpPr>
+        <p:spPr>
+          <a:xfrm>
+            <a:off x="1447800" y="1082039"/>
+            <a:ext cx="304800" cy="233679"/>
+          </a:xfrm>
+          <a:prstGeom prst="rect">
+            <a:avLst/>
+          </a:prstGeom>
+          <a:solidFill>
+            <a:srgbClr val="6A8EBE"/>
+          </a:solidFill>
+          <a:ln w="11430">
+            <a:solidFill>
+              <a:srgbClr val="1C1E23"/>
+            </a:solidFill>
+          </a:ln>
+          <a:effectLst/>
+        </p:spPr>
+        <p:style>
+          <a:lnRef idx="1">
+            <a:schemeClr val="accent1"/>
+          </a:lnRef>
+          <a:fillRef idx="3">
+            <a:schemeClr val="accent1"/>
+          </a:fillRef>
+          <a:effectRef idx="2">
+            <a:schemeClr val="accent1"/>
+          </a:effectRef>
+          <a:fontRef idx="minor">
+            <a:schemeClr val="lt1"/>
+          </a:fontRef>
+        </p:style>
+        <p:txBody>
+          <a:bodyPr rtlCol="0" anchor="ctr"/>
+          <a:lstStyle/>
+          <a:p>
+            <a:pPr algn="ctr"/>
+          </a:p>
+        </p:txBody>
+      </p:sp>
+      <p:sp>
+        <p:nvSpPr>
+          <p:cNvPr id="45" name="Rectangle 44"/>
+          <p:cNvSpPr/>
+          <p:nvPr/>
+        </p:nvSpPr>
+        <p:spPr>
+          <a:xfrm>
+            <a:off x="1447800" y="1315720"/>
+            <a:ext cx="304800" cy="233679"/>
+          </a:xfrm>
+          <a:prstGeom prst="rect">
+            <a:avLst/>
+          </a:prstGeom>
+          <a:solidFill>
+            <a:srgbClr val="85A3CB"/>
+          </a:solidFill>
+          <a:ln w="6350">
+            <a:solidFill>
+              <a:srgbClr val="FFFFFF"/>
+            </a:solidFill>
+          </a:ln>
+          <a:effectLst/>
+        </p:spPr>
+        <p:style>
+          <a:lnRef idx="1">
+            <a:schemeClr val="accent1"/>
+          </a:lnRef>
+          <a:fillRef idx="3">
+            <a:schemeClr val="accent1"/>
+          </a:fillRef>
+          <a:effectRef idx="2">
+            <a:schemeClr val="accent1"/>
+          </a:effectRef>
+          <a:fontRef idx="minor">
+            <a:schemeClr val="lt1"/>
+          </a:fontRef>
+        </p:style>
+        <p:txBody>
+          <a:bodyPr rtlCol="0" anchor="ctr"/>
+          <a:lstStyle/>
+          <a:p>
+            <a:pPr algn="ctr"/>
+          </a:p>
+        </p:txBody>
+      </p:sp>
+      <p:sp>
+        <p:nvSpPr>
+          <p:cNvPr id="46" name="Rectangle 45"/>
+          <p:cNvSpPr/>
+          <p:nvPr/>
+        </p:nvSpPr>
+        <p:spPr>
+          <a:xfrm>
+            <a:off x="1752600" y="381000"/>
+            <a:ext cx="304800" cy="233679"/>
+          </a:xfrm>
+          <a:prstGeom prst="rect">
+            <a:avLst/>
+          </a:prstGeom>
+          <a:solidFill>
+            <a:srgbClr val="7899C5"/>
+          </a:solidFill>
+          <a:ln w="6350">
+            <a:solidFill>
+              <a:srgbClr val="FFFFFF"/>
+            </a:solidFill>
+          </a:ln>
+          <a:effectLst/>
+        </p:spPr>
+        <p:style>
+          <a:lnRef idx="1">
+            <a:schemeClr val="accent1"/>
+          </a:lnRef>
+          <a:fillRef idx="3">
+            <a:schemeClr val="accent1"/>
+          </a:fillRef>
+          <a:effectRef idx="2">
+            <a:schemeClr val="accent1"/>
+          </a:effectRef>
+          <a:fontRef idx="minor">
+            <a:schemeClr val="lt1"/>
+          </a:fontRef>
+        </p:style>
+        <p:txBody>
+          <a:bodyPr rtlCol="0" anchor="ctr"/>
+          <a:lstStyle/>
+          <a:p>
+            <a:pPr algn="ctr"/>
+          </a:p>
+        </p:txBody>
+      </p:sp>
+      <p:sp>
+        <p:nvSpPr>
+          <p:cNvPr id="47" name="Rectangle 46"/>
+          <p:cNvSpPr/>
+          <p:nvPr/>
+        </p:nvSpPr>
+        <p:spPr>
+          <a:xfrm>
+            <a:off x="1752600" y="614680"/>
+            <a:ext cx="304800" cy="233679"/>
+          </a:xfrm>
+          <a:prstGeom prst="rect">
+            <a:avLst/>
+          </a:prstGeom>
+          <a:solidFill>
+            <a:srgbClr val="B5C9E4"/>
+          </a:solidFill>
+          <a:ln w="6350">
+            <a:solidFill>
+              <a:srgbClr val="FFFFFF"/>
+            </a:solidFill>
+          </a:ln>
+          <a:effectLst/>
+        </p:spPr>
+        <p:style>
+          <a:lnRef idx="1">
+            <a:schemeClr val="accent1"/>
+          </a:lnRef>
+          <a:fillRef idx="3">
+            <a:schemeClr val="accent1"/>
+          </a:fillRef>
+          <a:effectRef idx="2">
+            <a:schemeClr val="accent1"/>
+          </a:effectRef>
+          <a:fontRef idx="minor">
+            <a:schemeClr val="lt1"/>
+          </a:fontRef>
+        </p:style>
+        <p:txBody>
+          <a:bodyPr rtlCol="0" anchor="ctr"/>
+          <a:lstStyle/>
+          <a:p>
+            <a:pPr algn="ctr"/>
+          </a:p>
+        </p:txBody>
+      </p:sp>
+      <p:sp>
+        <p:nvSpPr>
+          <p:cNvPr id="48" name="Rectangle 47"/>
+          <p:cNvSpPr/>
+          <p:nvPr/>
+        </p:nvSpPr>
+        <p:spPr>
+          <a:xfrm>
+            <a:off x="1752600" y="848360"/>
+            <a:ext cx="304800" cy="233679"/>
+          </a:xfrm>
+          <a:prstGeom prst="rect">
+            <a:avLst/>
+          </a:prstGeom>
+          <a:solidFill>
+            <a:srgbClr val="C4D5EB"/>
+          </a:solidFill>
+          <a:ln w="6350">
+            <a:solidFill>
+              <a:srgbClr val="FFFFFF"/>
+            </a:solidFill>
+          </a:ln>
+          <a:effectLst/>
+        </p:spPr>
+        <p:style>
+          <a:lnRef idx="1">
+            <a:schemeClr val="accent1"/>
+          </a:lnRef>
+          <a:fillRef idx="3">
+            <a:schemeClr val="accent1"/>
+          </a:fillRef>
+          <a:effectRef idx="2">
+            <a:schemeClr val="accent1"/>
+          </a:effectRef>
+          <a:fontRef idx="minor">
+            <a:schemeClr val="lt1"/>
+          </a:fontRef>
+        </p:style>
+        <p:txBody>
+          <a:bodyPr rtlCol="0" anchor="ctr"/>
+          <a:lstStyle/>
+          <a:p>
+            <a:pPr algn="ctr"/>
+          </a:p>
+        </p:txBody>
+      </p:sp>
+      <p:sp>
+        <p:nvSpPr>
+          <p:cNvPr id="49" name="Rectangle 48"/>
+          <p:cNvSpPr/>
+          <p:nvPr/>
+        </p:nvSpPr>
+        <p:spPr>
+          <a:xfrm>
+            <a:off x="1752600" y="1082039"/>
+            <a:ext cx="304800" cy="233679"/>
+          </a:xfrm>
+          <a:prstGeom prst="rect">
+            <a:avLst/>
+          </a:prstGeom>
+          <a:solidFill>
+            <a:srgbClr val="ADC3E0"/>
+          </a:solidFill>
+          <a:ln w="6350">
+            <a:solidFill>
+              <a:srgbClr val="FFFFFF"/>
+            </a:solidFill>
+          </a:ln>
+          <a:effectLst/>
+        </p:spPr>
+        <p:style>
+          <a:lnRef idx="1">
+            <a:schemeClr val="accent1"/>
+          </a:lnRef>
+          <a:fillRef idx="3">
+            <a:schemeClr val="accent1"/>
+          </a:fillRef>
+          <a:effectRef idx="2">
+            <a:schemeClr val="accent1"/>
+          </a:effectRef>
+          <a:fontRef idx="minor">
+            <a:schemeClr val="lt1"/>
+          </a:fontRef>
+        </p:style>
+        <p:txBody>
+          <a:bodyPr rtlCol="0" anchor="ctr"/>
+          <a:lstStyle/>
+          <a:p>
+            <a:pPr algn="ctr"/>
+          </a:p>
+        </p:txBody>
+      </p:sp>
+      <p:sp>
+        <p:nvSpPr>
+          <p:cNvPr id="50" name="Rectangle 49"/>
+          <p:cNvSpPr/>
+          <p:nvPr/>
+        </p:nvSpPr>
+        <p:spPr>
+          <a:xfrm>
+            <a:off x="1752600" y="1315720"/>
+            <a:ext cx="304800" cy="233679"/>
+          </a:xfrm>
+          <a:prstGeom prst="rect">
+            <a:avLst/>
+          </a:prstGeom>
+          <a:solidFill>
+            <a:srgbClr val="27599C"/>
+          </a:solidFill>
+          <a:ln w="11430">
+            <a:solidFill>
+              <a:srgbClr val="1C1E23"/>
+            </a:solidFill>
+          </a:ln>
+          <a:effectLst/>
+        </p:spPr>
+        <p:style>
+          <a:lnRef idx="1">
+            <a:schemeClr val="accent1"/>
+          </a:lnRef>
+          <a:fillRef idx="3">
+            <a:schemeClr val="accent1"/>
+          </a:fillRef>
+          <a:effectRef idx="2">
+            <a:schemeClr val="accent1"/>
+          </a:effectRef>
+          <a:fontRef idx="minor">
+            <a:schemeClr val="lt1"/>
+          </a:fontRef>
+        </p:style>
+        <p:txBody>
+          <a:bodyPr rtlCol="0" anchor="ctr"/>
+          <a:lstStyle/>
+          <a:p>
+            <a:pPr algn="ctr"/>
+          </a:p>
+        </p:txBody>
+      </p:sp>
+      <p:sp>
+        <p:nvSpPr>
+          <p:cNvPr id="51" name="TextBox 50"/>
           <p:cNvSpPr txBox="1"/>
           <p:nvPr/>
         </p:nvSpPr>
         <p:spPr>
           <a:xfrm>
-            <a:off x="-800100" y="468503"/>
-            <a:ext cx="3048000" cy="140208"/>
+            <a:off x="-838200" y="443611"/>
+            <a:ext cx="3048000" cy="128016"/>
           </a:xfrm>
           <a:prstGeom prst="rect">
             <a:avLst/>
@@ -3858,7 +5102,7 @@
           <a:p>
             <a:pPr algn="ctr"/>
             <a:r>
-              <a:rPr sz="459" b="0" i="0">
+              <a:rPr sz="420" b="0" i="0">
                 <a:solidFill>
                   <a:srgbClr val="1C1E23"/>
                 </a:solidFill>
@@ -3871,60 +5115,14 @@
       </p:sp>
       <p:sp>
         <p:nvSpPr>
-          <p:cNvPr id="24" name="Rectangle 23"/>
-          <p:cNvSpPr/>
-          <p:nvPr/>
-        </p:nvSpPr>
-        <p:spPr>
-          <a:xfrm>
-            <a:off x="533400" y="673100"/>
-            <a:ext cx="381000" cy="292100"/>
-          </a:xfrm>
-          <a:prstGeom prst="rect">
-            <a:avLst/>
-          </a:prstGeom>
-          <a:solidFill>
-            <a:srgbClr val="7294C2"/>
-          </a:solidFill>
-          <a:ln w="6350">
-            <a:solidFill>
-              <a:srgbClr val="FFFFFF"/>
-            </a:solidFill>
-          </a:ln>
-          <a:effectLst/>
-        </p:spPr>
-        <p:style>
-          <a:lnRef idx="1">
-            <a:schemeClr val="accent1"/>
-          </a:lnRef>
-          <a:fillRef idx="3">
-            <a:schemeClr val="accent1"/>
-          </a:fillRef>
-          <a:effectRef idx="2">
-            <a:schemeClr val="accent1"/>
-          </a:effectRef>
-          <a:fontRef idx="minor">
-            <a:schemeClr val="lt1"/>
-          </a:fontRef>
-        </p:style>
-        <p:txBody>
-          <a:bodyPr rtlCol="0" anchor="ctr"/>
-          <a:lstStyle/>
-          <a:p>
-            <a:pPr algn="ctr"/>
-          </a:p>
-        </p:txBody>
-      </p:sp>
-      <p:sp>
-        <p:nvSpPr>
-          <p:cNvPr id="25" name="TextBox 24"/>
+          <p:cNvPr id="52" name="TextBox 51"/>
           <p:cNvSpPr txBox="1"/>
           <p:nvPr/>
         </p:nvSpPr>
         <p:spPr>
           <a:xfrm>
-            <a:off x="-800100" y="760602"/>
-            <a:ext cx="3048000" cy="140208"/>
+            <a:off x="-838200" y="677290"/>
+            <a:ext cx="3048000" cy="128016"/>
           </a:xfrm>
           <a:prstGeom prst="rect">
             <a:avLst/>
@@ -3939,7 +5137,7 @@
           <a:p>
             <a:pPr algn="ctr"/>
             <a:r>
-              <a:rPr sz="459" b="0" i="0">
+              <a:rPr sz="420" b="0" i="0">
                 <a:solidFill>
                   <a:srgbClr val="1C1E23"/>
                 </a:solidFill>
@@ -3952,60 +5150,14 @@
       </p:sp>
       <p:sp>
         <p:nvSpPr>
-          <p:cNvPr id="26" name="Rectangle 25"/>
-          <p:cNvSpPr/>
-          <p:nvPr/>
-        </p:nvSpPr>
-        <p:spPr>
-          <a:xfrm>
-            <a:off x="533400" y="965200"/>
-            <a:ext cx="381000" cy="292100"/>
-          </a:xfrm>
-          <a:prstGeom prst="rect">
-            <a:avLst/>
-          </a:prstGeom>
-          <a:solidFill>
-            <a:srgbClr val="809FC9"/>
-          </a:solidFill>
-          <a:ln w="6350">
-            <a:solidFill>
-              <a:srgbClr val="FFFFFF"/>
-            </a:solidFill>
-          </a:ln>
-          <a:effectLst/>
-        </p:spPr>
-        <p:style>
-          <a:lnRef idx="1">
-            <a:schemeClr val="accent1"/>
-          </a:lnRef>
-          <a:fillRef idx="3">
-            <a:schemeClr val="accent1"/>
-          </a:fillRef>
-          <a:effectRef idx="2">
-            <a:schemeClr val="accent1"/>
-          </a:effectRef>
-          <a:fontRef idx="minor">
-            <a:schemeClr val="lt1"/>
-          </a:fontRef>
-        </p:style>
-        <p:txBody>
-          <a:bodyPr rtlCol="0" anchor="ctr"/>
-          <a:lstStyle/>
-          <a:p>
-            <a:pPr algn="ctr"/>
-          </a:p>
-        </p:txBody>
-      </p:sp>
-      <p:sp>
-        <p:nvSpPr>
-          <p:cNvPr id="27" name="TextBox 26"/>
+          <p:cNvPr id="53" name="TextBox 52"/>
           <p:cNvSpPr txBox="1"/>
           <p:nvPr/>
         </p:nvSpPr>
         <p:spPr>
           <a:xfrm>
-            <a:off x="-800100" y="1052703"/>
-            <a:ext cx="3048000" cy="140208"/>
+            <a:off x="-838200" y="910971"/>
+            <a:ext cx="3048000" cy="128016"/>
           </a:xfrm>
           <a:prstGeom prst="rect">
             <a:avLst/>
@@ -4020,7 +5172,7 @@
           <a:p>
             <a:pPr algn="ctr"/>
             <a:r>
-              <a:rPr sz="459" b="0" i="0">
+              <a:rPr sz="420" b="0" i="0">
                 <a:solidFill>
                   <a:srgbClr val="1C1E23"/>
                 </a:solidFill>
@@ -4033,60 +5185,14 @@
       </p:sp>
       <p:sp>
         <p:nvSpPr>
-          <p:cNvPr id="28" name="Rectangle 27"/>
-          <p:cNvSpPr/>
-          <p:nvPr/>
-        </p:nvSpPr>
-        <p:spPr>
-          <a:xfrm>
-            <a:off x="533400" y="1257300"/>
-            <a:ext cx="381000" cy="292100"/>
-          </a:xfrm>
-          <a:prstGeom prst="rect">
-            <a:avLst/>
-          </a:prstGeom>
-          <a:solidFill>
-            <a:srgbClr val="9AB4D6"/>
-          </a:solidFill>
-          <a:ln w="6350">
-            <a:solidFill>
-              <a:srgbClr val="FFFFFF"/>
-            </a:solidFill>
-          </a:ln>
-          <a:effectLst/>
-        </p:spPr>
-        <p:style>
-          <a:lnRef idx="1">
-            <a:schemeClr val="accent1"/>
-          </a:lnRef>
-          <a:fillRef idx="3">
-            <a:schemeClr val="accent1"/>
-          </a:fillRef>
-          <a:effectRef idx="2">
-            <a:schemeClr val="accent1"/>
-          </a:effectRef>
-          <a:fontRef idx="minor">
-            <a:schemeClr val="lt1"/>
-          </a:fontRef>
-        </p:style>
-        <p:txBody>
-          <a:bodyPr rtlCol="0" anchor="ctr"/>
-          <a:lstStyle/>
-          <a:p>
-            <a:pPr algn="ctr"/>
-          </a:p>
-        </p:txBody>
-      </p:sp>
-      <p:sp>
-        <p:nvSpPr>
-          <p:cNvPr id="29" name="TextBox 28"/>
+          <p:cNvPr id="54" name="TextBox 53"/>
           <p:cNvSpPr txBox="1"/>
           <p:nvPr/>
         </p:nvSpPr>
         <p:spPr>
           <a:xfrm>
-            <a:off x="-800100" y="1344803"/>
-            <a:ext cx="3048000" cy="140208"/>
+            <a:off x="-838200" y="1144651"/>
+            <a:ext cx="3048000" cy="128016"/>
           </a:xfrm>
           <a:prstGeom prst="rect">
             <a:avLst/>
@@ -4101,7 +5207,7 @@
           <a:p>
             <a:pPr algn="ctr"/>
             <a:r>
-              <a:rPr sz="459" b="0" i="0">
+              <a:rPr sz="420" b="0" i="0">
                 <a:solidFill>
                   <a:srgbClr val="1C1E23"/>
                 </a:solidFill>
@@ -4114,60 +5220,14 @@
       </p:sp>
       <p:sp>
         <p:nvSpPr>
-          <p:cNvPr id="30" name="Rectangle 29"/>
-          <p:cNvSpPr/>
-          <p:nvPr/>
-        </p:nvSpPr>
-        <p:spPr>
-          <a:xfrm>
-            <a:off x="533400" y="1549400"/>
-            <a:ext cx="381000" cy="292100"/>
-          </a:xfrm>
-          <a:prstGeom prst="rect">
-            <a:avLst/>
-          </a:prstGeom>
-          <a:solidFill>
-            <a:srgbClr val="B0C5E1"/>
-          </a:solidFill>
-          <a:ln w="6350">
-            <a:solidFill>
-              <a:srgbClr val="FFFFFF"/>
-            </a:solidFill>
-          </a:ln>
-          <a:effectLst/>
-        </p:spPr>
-        <p:style>
-          <a:lnRef idx="1">
-            <a:schemeClr val="accent1"/>
-          </a:lnRef>
-          <a:fillRef idx="3">
-            <a:schemeClr val="accent1"/>
-          </a:fillRef>
-          <a:effectRef idx="2">
-            <a:schemeClr val="accent1"/>
-          </a:effectRef>
-          <a:fontRef idx="minor">
-            <a:schemeClr val="lt1"/>
-          </a:fontRef>
-        </p:style>
-        <p:txBody>
-          <a:bodyPr rtlCol="0" anchor="ctr"/>
-          <a:lstStyle/>
-          <a:p>
-            <a:pPr algn="ctr"/>
-          </a:p>
-        </p:txBody>
-      </p:sp>
-      <p:sp>
-        <p:nvSpPr>
-          <p:cNvPr id="31" name="TextBox 30"/>
+          <p:cNvPr id="55" name="TextBox 54"/>
           <p:cNvSpPr txBox="1"/>
           <p:nvPr/>
         </p:nvSpPr>
         <p:spPr>
           <a:xfrm>
-            <a:off x="-800100" y="1636902"/>
-            <a:ext cx="3048000" cy="140208"/>
+            <a:off x="-838200" y="1378331"/>
+            <a:ext cx="3048000" cy="128016"/>
           </a:xfrm>
           <a:prstGeom prst="rect">
             <a:avLst/>
@@ -4182,7 +5242,7 @@
           <a:p>
             <a:pPr algn="ctr"/>
             <a:r>
-              <a:rPr sz="459" b="0" i="0">
+              <a:rPr sz="420" b="0" i="0">
                 <a:solidFill>
                   <a:srgbClr val="1C1E23"/>
                 </a:solidFill>
@@ -4195,60 +5255,14 @@
       </p:sp>
       <p:sp>
         <p:nvSpPr>
-          <p:cNvPr id="32" name="Rectangle 31"/>
-          <p:cNvSpPr/>
-          <p:nvPr/>
-        </p:nvSpPr>
-        <p:spPr>
-          <a:xfrm>
-            <a:off x="914400" y="381000"/>
-            <a:ext cx="381000" cy="292100"/>
-          </a:xfrm>
-          <a:prstGeom prst="rect">
-            <a:avLst/>
-          </a:prstGeom>
-          <a:solidFill>
-            <a:srgbClr val="9BB4D6"/>
-          </a:solidFill>
-          <a:ln w="6350">
-            <a:solidFill>
-              <a:srgbClr val="FFFFFF"/>
-            </a:solidFill>
-          </a:ln>
-          <a:effectLst/>
-        </p:spPr>
-        <p:style>
-          <a:lnRef idx="1">
-            <a:schemeClr val="accent1"/>
-          </a:lnRef>
-          <a:fillRef idx="3">
-            <a:schemeClr val="accent1"/>
-          </a:fillRef>
-          <a:effectRef idx="2">
-            <a:schemeClr val="accent1"/>
-          </a:effectRef>
-          <a:fontRef idx="minor">
-            <a:schemeClr val="lt1"/>
-          </a:fontRef>
-        </p:style>
-        <p:txBody>
-          <a:bodyPr rtlCol="0" anchor="ctr"/>
-          <a:lstStyle/>
-          <a:p>
-            <a:pPr algn="ctr"/>
-          </a:p>
-        </p:txBody>
-      </p:sp>
-      <p:sp>
-        <p:nvSpPr>
-          <p:cNvPr id="33" name="TextBox 32"/>
+          <p:cNvPr id="56" name="TextBox 55"/>
           <p:cNvSpPr txBox="1"/>
           <p:nvPr/>
         </p:nvSpPr>
         <p:spPr>
           <a:xfrm>
-            <a:off x="-419100" y="468503"/>
-            <a:ext cx="3048000" cy="140208"/>
+            <a:off x="-533400" y="443611"/>
+            <a:ext cx="3048000" cy="128016"/>
           </a:xfrm>
           <a:prstGeom prst="rect">
             <a:avLst/>
@@ -4263,7 +5277,7 @@
           <a:p>
             <a:pPr algn="ctr"/>
             <a:r>
-              <a:rPr sz="459" b="0" i="0">
+              <a:rPr sz="420" b="0" i="0">
                 <a:solidFill>
                   <a:srgbClr val="1C1E23"/>
                 </a:solidFill>
@@ -4276,60 +5290,14 @@
       </p:sp>
       <p:sp>
         <p:nvSpPr>
-          <p:cNvPr id="34" name="Rectangle 33"/>
-          <p:cNvSpPr/>
-          <p:nvPr/>
-        </p:nvSpPr>
-        <p:spPr>
-          <a:xfrm>
-            <a:off x="914400" y="673100"/>
-            <a:ext cx="381000" cy="292100"/>
-          </a:xfrm>
-          <a:prstGeom prst="rect">
-            <a:avLst/>
-          </a:prstGeom>
-          <a:solidFill>
-            <a:srgbClr val="7194C1"/>
-          </a:solidFill>
-          <a:ln w="6350">
-            <a:solidFill>
-              <a:srgbClr val="FFFFFF"/>
-            </a:solidFill>
-          </a:ln>
-          <a:effectLst/>
-        </p:spPr>
-        <p:style>
-          <a:lnRef idx="1">
-            <a:schemeClr val="accent1"/>
-          </a:lnRef>
-          <a:fillRef idx="3">
-            <a:schemeClr val="accent1"/>
-          </a:fillRef>
-          <a:effectRef idx="2">
-            <a:schemeClr val="accent1"/>
-          </a:effectRef>
-          <a:fontRef idx="minor">
-            <a:schemeClr val="lt1"/>
-          </a:fontRef>
-        </p:style>
-        <p:txBody>
-          <a:bodyPr rtlCol="0" anchor="ctr"/>
-          <a:lstStyle/>
-          <a:p>
-            <a:pPr algn="ctr"/>
-          </a:p>
-        </p:txBody>
-      </p:sp>
-      <p:sp>
-        <p:nvSpPr>
-          <p:cNvPr id="35" name="TextBox 34"/>
+          <p:cNvPr id="57" name="TextBox 56"/>
           <p:cNvSpPr txBox="1"/>
           <p:nvPr/>
         </p:nvSpPr>
         <p:spPr>
           <a:xfrm>
-            <a:off x="-419100" y="760602"/>
-            <a:ext cx="3048000" cy="140208"/>
+            <a:off x="-533400" y="677290"/>
+            <a:ext cx="3048000" cy="128016"/>
           </a:xfrm>
           <a:prstGeom prst="rect">
             <a:avLst/>
@@ -4344,7 +5312,7 @@
           <a:p>
             <a:pPr algn="ctr"/>
             <a:r>
-              <a:rPr sz="459" b="0" i="0">
+              <a:rPr sz="420" b="0" i="0">
                 <a:solidFill>
                   <a:srgbClr val="1C1E23"/>
                 </a:solidFill>
@@ -4357,60 +5325,14 @@
       </p:sp>
       <p:sp>
         <p:nvSpPr>
-          <p:cNvPr id="36" name="Rectangle 35"/>
-          <p:cNvSpPr/>
-          <p:nvPr/>
-        </p:nvSpPr>
-        <p:spPr>
-          <a:xfrm>
-            <a:off x="914400" y="965200"/>
-            <a:ext cx="381000" cy="292100"/>
-          </a:xfrm>
-          <a:prstGeom prst="rect">
-            <a:avLst/>
-          </a:prstGeom>
-          <a:solidFill>
-            <a:srgbClr val="6A8EBE"/>
-          </a:solidFill>
-          <a:ln w="6350">
-            <a:solidFill>
-              <a:srgbClr val="FFFFFF"/>
-            </a:solidFill>
-          </a:ln>
-          <a:effectLst/>
-        </p:spPr>
-        <p:style>
-          <a:lnRef idx="1">
-            <a:schemeClr val="accent1"/>
-          </a:lnRef>
-          <a:fillRef idx="3">
-            <a:schemeClr val="accent1"/>
-          </a:fillRef>
-          <a:effectRef idx="2">
-            <a:schemeClr val="accent1"/>
-          </a:effectRef>
-          <a:fontRef idx="minor">
-            <a:schemeClr val="lt1"/>
-          </a:fontRef>
-        </p:style>
-        <p:txBody>
-          <a:bodyPr rtlCol="0" anchor="ctr"/>
-          <a:lstStyle/>
-          <a:p>
-            <a:pPr algn="ctr"/>
-          </a:p>
-        </p:txBody>
-      </p:sp>
-      <p:sp>
-        <p:nvSpPr>
-          <p:cNvPr id="37" name="TextBox 36"/>
+          <p:cNvPr id="58" name="TextBox 57"/>
           <p:cNvSpPr txBox="1"/>
           <p:nvPr/>
         </p:nvSpPr>
         <p:spPr>
           <a:xfrm>
-            <a:off x="-419100" y="1052703"/>
-            <a:ext cx="3048000" cy="140208"/>
+            <a:off x="-533400" y="910971"/>
+            <a:ext cx="3048000" cy="128016"/>
           </a:xfrm>
           <a:prstGeom prst="rect">
             <a:avLst/>
@@ -4425,7 +5347,7 @@
           <a:p>
             <a:pPr algn="ctr"/>
             <a:r>
-              <a:rPr sz="459" b="0" i="0">
+              <a:rPr sz="420" b="0" i="0">
                 <a:solidFill>
                   <a:srgbClr val="FFFFFF"/>
                 </a:solidFill>
@@ -4438,60 +5360,14 @@
       </p:sp>
       <p:sp>
         <p:nvSpPr>
-          <p:cNvPr id="38" name="Rectangle 37"/>
-          <p:cNvSpPr/>
-          <p:nvPr/>
-        </p:nvSpPr>
-        <p:spPr>
-          <a:xfrm>
-            <a:off x="914400" y="1257300"/>
-            <a:ext cx="381000" cy="292100"/>
-          </a:xfrm>
-          <a:prstGeom prst="rect">
-            <a:avLst/>
-          </a:prstGeom>
-          <a:solidFill>
-            <a:srgbClr val="91ACD1"/>
-          </a:solidFill>
-          <a:ln w="6350">
-            <a:solidFill>
-              <a:srgbClr val="FFFFFF"/>
-            </a:solidFill>
-          </a:ln>
-          <a:effectLst/>
-        </p:spPr>
-        <p:style>
-          <a:lnRef idx="1">
-            <a:schemeClr val="accent1"/>
-          </a:lnRef>
-          <a:fillRef idx="3">
-            <a:schemeClr val="accent1"/>
-          </a:fillRef>
-          <a:effectRef idx="2">
-            <a:schemeClr val="accent1"/>
-          </a:effectRef>
-          <a:fontRef idx="minor">
-            <a:schemeClr val="lt1"/>
-          </a:fontRef>
-        </p:style>
-        <p:txBody>
-          <a:bodyPr rtlCol="0" anchor="ctr"/>
-          <a:lstStyle/>
-          <a:p>
-            <a:pPr algn="ctr"/>
-          </a:p>
-        </p:txBody>
-      </p:sp>
-      <p:sp>
-        <p:nvSpPr>
-          <p:cNvPr id="39" name="TextBox 38"/>
+          <p:cNvPr id="59" name="TextBox 58"/>
           <p:cNvSpPr txBox="1"/>
           <p:nvPr/>
         </p:nvSpPr>
         <p:spPr>
           <a:xfrm>
-            <a:off x="-419100" y="1344803"/>
-            <a:ext cx="3048000" cy="140208"/>
+            <a:off x="-533400" y="1144651"/>
+            <a:ext cx="3048000" cy="128016"/>
           </a:xfrm>
           <a:prstGeom prst="rect">
             <a:avLst/>
@@ -4506,7 +5382,7 @@
           <a:p>
             <a:pPr algn="ctr"/>
             <a:r>
-              <a:rPr sz="459" b="0" i="0">
+              <a:rPr sz="420" b="0" i="0">
                 <a:solidFill>
                   <a:srgbClr val="1C1E23"/>
                 </a:solidFill>
@@ -4519,60 +5395,14 @@
       </p:sp>
       <p:sp>
         <p:nvSpPr>
-          <p:cNvPr id="40" name="Rectangle 39"/>
-          <p:cNvSpPr/>
-          <p:nvPr/>
-        </p:nvSpPr>
-        <p:spPr>
-          <a:xfrm>
-            <a:off x="914400" y="1549400"/>
-            <a:ext cx="381000" cy="292100"/>
-          </a:xfrm>
-          <a:prstGeom prst="rect">
-            <a:avLst/>
-          </a:prstGeom>
-          <a:solidFill>
-            <a:srgbClr val="BED0E8"/>
-          </a:solidFill>
-          <a:ln w="6350">
-            <a:solidFill>
-              <a:srgbClr val="FFFFFF"/>
-            </a:solidFill>
-          </a:ln>
-          <a:effectLst/>
-        </p:spPr>
-        <p:style>
-          <a:lnRef idx="1">
-            <a:schemeClr val="accent1"/>
-          </a:lnRef>
-          <a:fillRef idx="3">
-            <a:schemeClr val="accent1"/>
-          </a:fillRef>
-          <a:effectRef idx="2">
-            <a:schemeClr val="accent1"/>
-          </a:effectRef>
-          <a:fontRef idx="minor">
-            <a:schemeClr val="lt1"/>
-          </a:fontRef>
-        </p:style>
-        <p:txBody>
-          <a:bodyPr rtlCol="0" anchor="ctr"/>
-          <a:lstStyle/>
-          <a:p>
-            <a:pPr algn="ctr"/>
-          </a:p>
-        </p:txBody>
-      </p:sp>
-      <p:sp>
-        <p:nvSpPr>
-          <p:cNvPr id="41" name="TextBox 40"/>
+          <p:cNvPr id="60" name="TextBox 59"/>
           <p:cNvSpPr txBox="1"/>
           <p:nvPr/>
         </p:nvSpPr>
         <p:spPr>
           <a:xfrm>
-            <a:off x="-419100" y="1636902"/>
-            <a:ext cx="3048000" cy="140208"/>
+            <a:off x="-533400" y="1378331"/>
+            <a:ext cx="3048000" cy="128016"/>
           </a:xfrm>
           <a:prstGeom prst="rect">
             <a:avLst/>
@@ -4587,7 +5417,7 @@
           <a:p>
             <a:pPr algn="ctr"/>
             <a:r>
-              <a:rPr sz="459" b="0" i="0">
+              <a:rPr sz="420" b="0" i="0">
                 <a:solidFill>
                   <a:srgbClr val="1C1E23"/>
                 </a:solidFill>
@@ -4600,60 +5430,14 @@
       </p:sp>
       <p:sp>
         <p:nvSpPr>
-          <p:cNvPr id="42" name="Rectangle 41"/>
-          <p:cNvSpPr/>
-          <p:nvPr/>
-        </p:nvSpPr>
-        <p:spPr>
-          <a:xfrm>
-            <a:off x="1295400" y="381000"/>
-            <a:ext cx="381000" cy="292100"/>
-          </a:xfrm>
-          <a:prstGeom prst="rect">
-            <a:avLst/>
-          </a:prstGeom>
-          <a:solidFill>
-            <a:srgbClr val="A0B8D9"/>
-          </a:solidFill>
-          <a:ln w="6350">
-            <a:solidFill>
-              <a:srgbClr val="FFFFFF"/>
-            </a:solidFill>
-          </a:ln>
-          <a:effectLst/>
-        </p:spPr>
-        <p:style>
-          <a:lnRef idx="1">
-            <a:schemeClr val="accent1"/>
-          </a:lnRef>
-          <a:fillRef idx="3">
-            <a:schemeClr val="accent1"/>
-          </a:fillRef>
-          <a:effectRef idx="2">
-            <a:schemeClr val="accent1"/>
-          </a:effectRef>
-          <a:fontRef idx="minor">
-            <a:schemeClr val="lt1"/>
-          </a:fontRef>
-        </p:style>
-        <p:txBody>
-          <a:bodyPr rtlCol="0" anchor="ctr"/>
-          <a:lstStyle/>
-          <a:p>
-            <a:pPr algn="ctr"/>
-          </a:p>
-        </p:txBody>
-      </p:sp>
-      <p:sp>
-        <p:nvSpPr>
-          <p:cNvPr id="43" name="TextBox 42"/>
+          <p:cNvPr id="61" name="TextBox 60"/>
           <p:cNvSpPr txBox="1"/>
           <p:nvPr/>
         </p:nvSpPr>
         <p:spPr>
           <a:xfrm>
-            <a:off x="-38100" y="468503"/>
-            <a:ext cx="3048000" cy="140208"/>
+            <a:off x="-228600" y="443611"/>
+            <a:ext cx="3048000" cy="128016"/>
           </a:xfrm>
           <a:prstGeom prst="rect">
             <a:avLst/>
@@ -4668,7 +5452,7 @@
           <a:p>
             <a:pPr algn="ctr"/>
             <a:r>
-              <a:rPr sz="459" b="0" i="0">
+              <a:rPr sz="420" b="0" i="0">
                 <a:solidFill>
                   <a:srgbClr val="1C1E23"/>
                 </a:solidFill>
@@ -4681,60 +5465,14 @@
       </p:sp>
       <p:sp>
         <p:nvSpPr>
-          <p:cNvPr id="44" name="Rectangle 43"/>
-          <p:cNvSpPr/>
-          <p:nvPr/>
-        </p:nvSpPr>
-        <p:spPr>
-          <a:xfrm>
-            <a:off x="1295400" y="673100"/>
-            <a:ext cx="381000" cy="292100"/>
-          </a:xfrm>
-          <a:prstGeom prst="rect">
-            <a:avLst/>
-          </a:prstGeom>
-          <a:solidFill>
-            <a:srgbClr val="8DAAD0"/>
-          </a:solidFill>
-          <a:ln w="6350">
-            <a:solidFill>
-              <a:srgbClr val="FFFFFF"/>
-            </a:solidFill>
-          </a:ln>
-          <a:effectLst/>
-        </p:spPr>
-        <p:style>
-          <a:lnRef idx="1">
-            <a:schemeClr val="accent1"/>
-          </a:lnRef>
-          <a:fillRef idx="3">
-            <a:schemeClr val="accent1"/>
-          </a:fillRef>
-          <a:effectRef idx="2">
-            <a:schemeClr val="accent1"/>
-          </a:effectRef>
-          <a:fontRef idx="minor">
-            <a:schemeClr val="lt1"/>
-          </a:fontRef>
-        </p:style>
-        <p:txBody>
-          <a:bodyPr rtlCol="0" anchor="ctr"/>
-          <a:lstStyle/>
-          <a:p>
-            <a:pPr algn="ctr"/>
-          </a:p>
-        </p:txBody>
-      </p:sp>
-      <p:sp>
-        <p:nvSpPr>
-          <p:cNvPr id="45" name="TextBox 44"/>
+          <p:cNvPr id="62" name="TextBox 61"/>
           <p:cNvSpPr txBox="1"/>
           <p:nvPr/>
         </p:nvSpPr>
         <p:spPr>
           <a:xfrm>
-            <a:off x="-38100" y="760602"/>
-            <a:ext cx="3048000" cy="140208"/>
+            <a:off x="-228600" y="677290"/>
+            <a:ext cx="3048000" cy="128016"/>
           </a:xfrm>
           <a:prstGeom prst="rect">
             <a:avLst/>
@@ -4749,7 +5487,7 @@
           <a:p>
             <a:pPr algn="ctr"/>
             <a:r>
-              <a:rPr sz="459" b="0" i="0">
+              <a:rPr sz="420" b="0" i="0">
                 <a:solidFill>
                   <a:srgbClr val="1C1E23"/>
                 </a:solidFill>
@@ -4762,60 +5500,14 @@
       </p:sp>
       <p:sp>
         <p:nvSpPr>
-          <p:cNvPr id="46" name="Rectangle 45"/>
-          <p:cNvSpPr/>
-          <p:nvPr/>
-        </p:nvSpPr>
-        <p:spPr>
-          <a:xfrm>
-            <a:off x="1295400" y="965200"/>
-            <a:ext cx="381000" cy="292100"/>
-          </a:xfrm>
-          <a:prstGeom prst="rect">
-            <a:avLst/>
-          </a:prstGeom>
-          <a:solidFill>
-            <a:srgbClr val="698DBD"/>
-          </a:solidFill>
-          <a:ln w="6350">
-            <a:solidFill>
-              <a:srgbClr val="FFFFFF"/>
-            </a:solidFill>
-          </a:ln>
-          <a:effectLst/>
-        </p:spPr>
-        <p:style>
-          <a:lnRef idx="1">
-            <a:schemeClr val="accent1"/>
-          </a:lnRef>
-          <a:fillRef idx="3">
-            <a:schemeClr val="accent1"/>
-          </a:fillRef>
-          <a:effectRef idx="2">
-            <a:schemeClr val="accent1"/>
-          </a:effectRef>
-          <a:fontRef idx="minor">
-            <a:schemeClr val="lt1"/>
-          </a:fontRef>
-        </p:style>
-        <p:txBody>
-          <a:bodyPr rtlCol="0" anchor="ctr"/>
-          <a:lstStyle/>
-          <a:p>
-            <a:pPr algn="ctr"/>
-          </a:p>
-        </p:txBody>
-      </p:sp>
-      <p:sp>
-        <p:nvSpPr>
-          <p:cNvPr id="47" name="TextBox 46"/>
+          <p:cNvPr id="63" name="TextBox 62"/>
           <p:cNvSpPr txBox="1"/>
           <p:nvPr/>
         </p:nvSpPr>
         <p:spPr>
           <a:xfrm>
-            <a:off x="-38100" y="1052703"/>
-            <a:ext cx="3048000" cy="140208"/>
+            <a:off x="-228600" y="910971"/>
+            <a:ext cx="3048000" cy="128016"/>
           </a:xfrm>
           <a:prstGeom prst="rect">
             <a:avLst/>
@@ -4830,7 +5522,7 @@
           <a:p>
             <a:pPr algn="ctr"/>
             <a:r>
-              <a:rPr sz="459" b="0" i="0">
+              <a:rPr sz="420" b="0" i="0">
                 <a:solidFill>
                   <a:srgbClr val="FFFFFF"/>
                 </a:solidFill>
@@ -4843,60 +5535,14 @@
       </p:sp>
       <p:sp>
         <p:nvSpPr>
-          <p:cNvPr id="48" name="Rectangle 47"/>
-          <p:cNvSpPr/>
-          <p:nvPr/>
-        </p:nvSpPr>
-        <p:spPr>
-          <a:xfrm>
-            <a:off x="1295400" y="1257300"/>
-            <a:ext cx="381000" cy="292100"/>
-          </a:xfrm>
-          <a:prstGeom prst="rect">
-            <a:avLst/>
-          </a:prstGeom>
-          <a:solidFill>
-            <a:srgbClr val="82A1CA"/>
-          </a:solidFill>
-          <a:ln w="6350">
-            <a:solidFill>
-              <a:srgbClr val="FFFFFF"/>
-            </a:solidFill>
-          </a:ln>
-          <a:effectLst/>
-        </p:spPr>
-        <p:style>
-          <a:lnRef idx="1">
-            <a:schemeClr val="accent1"/>
-          </a:lnRef>
-          <a:fillRef idx="3">
-            <a:schemeClr val="accent1"/>
-          </a:fillRef>
-          <a:effectRef idx="2">
-            <a:schemeClr val="accent1"/>
-          </a:effectRef>
-          <a:fontRef idx="minor">
-            <a:schemeClr val="lt1"/>
-          </a:fontRef>
-        </p:style>
-        <p:txBody>
-          <a:bodyPr rtlCol="0" anchor="ctr"/>
-          <a:lstStyle/>
-          <a:p>
-            <a:pPr algn="ctr"/>
-          </a:p>
-        </p:txBody>
-      </p:sp>
-      <p:sp>
-        <p:nvSpPr>
-          <p:cNvPr id="49" name="TextBox 48"/>
+          <p:cNvPr id="64" name="TextBox 63"/>
           <p:cNvSpPr txBox="1"/>
           <p:nvPr/>
         </p:nvSpPr>
         <p:spPr>
           <a:xfrm>
-            <a:off x="-38100" y="1344803"/>
-            <a:ext cx="3048000" cy="140208"/>
+            <a:off x="-228600" y="1144651"/>
+            <a:ext cx="3048000" cy="128016"/>
           </a:xfrm>
           <a:prstGeom prst="rect">
             <a:avLst/>
@@ -4911,7 +5557,7 @@
           <a:p>
             <a:pPr algn="ctr"/>
             <a:r>
-              <a:rPr sz="459" b="0" i="0">
+              <a:rPr sz="420" b="0" i="0">
                 <a:solidFill>
                   <a:srgbClr val="1C1E23"/>
                 </a:solidFill>
@@ -4924,60 +5570,14 @@
       </p:sp>
       <p:sp>
         <p:nvSpPr>
-          <p:cNvPr id="50" name="Rectangle 49"/>
-          <p:cNvSpPr/>
-          <p:nvPr/>
-        </p:nvSpPr>
-        <p:spPr>
-          <a:xfrm>
-            <a:off x="1295400" y="1549400"/>
-            <a:ext cx="381000" cy="292100"/>
-          </a:xfrm>
-          <a:prstGeom prst="rect">
-            <a:avLst/>
-          </a:prstGeom>
-          <a:solidFill>
-            <a:srgbClr val="ACC2DF"/>
-          </a:solidFill>
-          <a:ln w="6350">
-            <a:solidFill>
-              <a:srgbClr val="FFFFFF"/>
-            </a:solidFill>
-          </a:ln>
-          <a:effectLst/>
-        </p:spPr>
-        <p:style>
-          <a:lnRef idx="1">
-            <a:schemeClr val="accent1"/>
-          </a:lnRef>
-          <a:fillRef idx="3">
-            <a:schemeClr val="accent1"/>
-          </a:fillRef>
-          <a:effectRef idx="2">
-            <a:schemeClr val="accent1"/>
-          </a:effectRef>
-          <a:fontRef idx="minor">
-            <a:schemeClr val="lt1"/>
-          </a:fontRef>
-        </p:style>
-        <p:txBody>
-          <a:bodyPr rtlCol="0" anchor="ctr"/>
-          <a:lstStyle/>
-          <a:p>
-            <a:pPr algn="ctr"/>
-          </a:p>
-        </p:txBody>
-      </p:sp>
-      <p:sp>
-        <p:nvSpPr>
-          <p:cNvPr id="51" name="TextBox 50"/>
+          <p:cNvPr id="65" name="TextBox 64"/>
           <p:cNvSpPr txBox="1"/>
           <p:nvPr/>
         </p:nvSpPr>
         <p:spPr>
           <a:xfrm>
-            <a:off x="-38100" y="1636902"/>
-            <a:ext cx="3048000" cy="140208"/>
+            <a:off x="-228600" y="1378331"/>
+            <a:ext cx="3048000" cy="128016"/>
           </a:xfrm>
           <a:prstGeom prst="rect">
             <a:avLst/>
@@ -4992,7 +5592,7 @@
           <a:p>
             <a:pPr algn="ctr"/>
             <a:r>
-              <a:rPr sz="459" b="0" i="0">
+              <a:rPr sz="420" b="0" i="0">
                 <a:solidFill>
                   <a:srgbClr val="1C1E23"/>
                 </a:solidFill>
@@ -5005,60 +5605,14 @@
       </p:sp>
       <p:sp>
         <p:nvSpPr>
-          <p:cNvPr id="52" name="Rectangle 51"/>
-          <p:cNvSpPr/>
-          <p:nvPr/>
-        </p:nvSpPr>
-        <p:spPr>
-          <a:xfrm>
-            <a:off x="1676400" y="381000"/>
-            <a:ext cx="381000" cy="292100"/>
-          </a:xfrm>
-          <a:prstGeom prst="rect">
-            <a:avLst/>
-          </a:prstGeom>
-          <a:solidFill>
-            <a:srgbClr val="89A7CE"/>
-          </a:solidFill>
-          <a:ln w="6350">
-            <a:solidFill>
-              <a:srgbClr val="FFFFFF"/>
-            </a:solidFill>
-          </a:ln>
-          <a:effectLst/>
-        </p:spPr>
-        <p:style>
-          <a:lnRef idx="1">
-            <a:schemeClr val="accent1"/>
-          </a:lnRef>
-          <a:fillRef idx="3">
-            <a:schemeClr val="accent1"/>
-          </a:fillRef>
-          <a:effectRef idx="2">
-            <a:schemeClr val="accent1"/>
-          </a:effectRef>
-          <a:fontRef idx="minor">
-            <a:schemeClr val="lt1"/>
-          </a:fontRef>
-        </p:style>
-        <p:txBody>
-          <a:bodyPr rtlCol="0" anchor="ctr"/>
-          <a:lstStyle/>
-          <a:p>
-            <a:pPr algn="ctr"/>
-          </a:p>
-        </p:txBody>
-      </p:sp>
-      <p:sp>
-        <p:nvSpPr>
-          <p:cNvPr id="53" name="TextBox 52"/>
+          <p:cNvPr id="66" name="TextBox 65"/>
           <p:cNvSpPr txBox="1"/>
           <p:nvPr/>
         </p:nvSpPr>
         <p:spPr>
           <a:xfrm>
-            <a:off x="342900" y="468503"/>
-            <a:ext cx="3048000" cy="140208"/>
+            <a:off x="76200" y="443611"/>
+            <a:ext cx="3048000" cy="128016"/>
           </a:xfrm>
           <a:prstGeom prst="rect">
             <a:avLst/>
@@ -5073,7 +5627,7 @@
           <a:p>
             <a:pPr algn="ctr"/>
             <a:r>
-              <a:rPr sz="459" b="0" i="0">
+              <a:rPr sz="420" b="0" i="0">
                 <a:solidFill>
                   <a:srgbClr val="1C1E23"/>
                 </a:solidFill>
@@ -5086,60 +5640,14 @@
       </p:sp>
       <p:sp>
         <p:nvSpPr>
-          <p:cNvPr id="54" name="Rectangle 53"/>
-          <p:cNvSpPr/>
-          <p:nvPr/>
-        </p:nvSpPr>
-        <p:spPr>
-          <a:xfrm>
-            <a:off x="1676400" y="673100"/>
-            <a:ext cx="381000" cy="292100"/>
-          </a:xfrm>
-          <a:prstGeom prst="rect">
-            <a:avLst/>
-          </a:prstGeom>
-          <a:solidFill>
-            <a:srgbClr val="9FB8D9"/>
-          </a:solidFill>
-          <a:ln w="6350">
-            <a:solidFill>
-              <a:srgbClr val="FFFFFF"/>
-            </a:solidFill>
-          </a:ln>
-          <a:effectLst/>
-        </p:spPr>
-        <p:style>
-          <a:lnRef idx="1">
-            <a:schemeClr val="accent1"/>
-          </a:lnRef>
-          <a:fillRef idx="3">
-            <a:schemeClr val="accent1"/>
-          </a:fillRef>
-          <a:effectRef idx="2">
-            <a:schemeClr val="accent1"/>
-          </a:effectRef>
-          <a:fontRef idx="minor">
-            <a:schemeClr val="lt1"/>
-          </a:fontRef>
-        </p:style>
-        <p:txBody>
-          <a:bodyPr rtlCol="0" anchor="ctr"/>
-          <a:lstStyle/>
-          <a:p>
-            <a:pPr algn="ctr"/>
-          </a:p>
-        </p:txBody>
-      </p:sp>
-      <p:sp>
-        <p:nvSpPr>
-          <p:cNvPr id="55" name="TextBox 54"/>
+          <p:cNvPr id="67" name="TextBox 66"/>
           <p:cNvSpPr txBox="1"/>
           <p:nvPr/>
         </p:nvSpPr>
         <p:spPr>
           <a:xfrm>
-            <a:off x="342900" y="760602"/>
-            <a:ext cx="3048000" cy="140208"/>
+            <a:off x="76200" y="677290"/>
+            <a:ext cx="3048000" cy="128016"/>
           </a:xfrm>
           <a:prstGeom prst="rect">
             <a:avLst/>
@@ -5154,7 +5662,7 @@
           <a:p>
             <a:pPr algn="ctr"/>
             <a:r>
-              <a:rPr sz="459" b="0" i="0">
+              <a:rPr sz="420" b="0" i="0">
                 <a:solidFill>
                   <a:srgbClr val="1C1E23"/>
                 </a:solidFill>
@@ -5167,60 +5675,14 @@
       </p:sp>
       <p:sp>
         <p:nvSpPr>
-          <p:cNvPr id="56" name="Rectangle 55"/>
-          <p:cNvSpPr/>
-          <p:nvPr/>
-        </p:nvSpPr>
-        <p:spPr>
-          <a:xfrm>
-            <a:off x="1676400" y="965200"/>
-            <a:ext cx="381000" cy="292100"/>
-          </a:xfrm>
-          <a:prstGeom prst="rect">
-            <a:avLst/>
-          </a:prstGeom>
-          <a:solidFill>
-            <a:srgbClr val="ADC3E0"/>
-          </a:solidFill>
-          <a:ln w="6350">
-            <a:solidFill>
-              <a:srgbClr val="FFFFFF"/>
-            </a:solidFill>
-          </a:ln>
-          <a:effectLst/>
-        </p:spPr>
-        <p:style>
-          <a:lnRef idx="1">
-            <a:schemeClr val="accent1"/>
-          </a:lnRef>
-          <a:fillRef idx="3">
-            <a:schemeClr val="accent1"/>
-          </a:fillRef>
-          <a:effectRef idx="2">
-            <a:schemeClr val="accent1"/>
-          </a:effectRef>
-          <a:fontRef idx="minor">
-            <a:schemeClr val="lt1"/>
-          </a:fontRef>
-        </p:style>
-        <p:txBody>
-          <a:bodyPr rtlCol="0" anchor="ctr"/>
-          <a:lstStyle/>
-          <a:p>
-            <a:pPr algn="ctr"/>
-          </a:p>
-        </p:txBody>
-      </p:sp>
-      <p:sp>
-        <p:nvSpPr>
-          <p:cNvPr id="57" name="TextBox 56"/>
+          <p:cNvPr id="68" name="TextBox 67"/>
           <p:cNvSpPr txBox="1"/>
           <p:nvPr/>
         </p:nvSpPr>
         <p:spPr>
           <a:xfrm>
-            <a:off x="342900" y="1052703"/>
-            <a:ext cx="3048000" cy="140208"/>
+            <a:off x="76200" y="910971"/>
+            <a:ext cx="3048000" cy="128016"/>
           </a:xfrm>
           <a:prstGeom prst="rect">
             <a:avLst/>
@@ -5235,7 +5697,7 @@
           <a:p>
             <a:pPr algn="ctr"/>
             <a:r>
-              <a:rPr sz="459" b="0" i="0">
+              <a:rPr sz="420" b="0" i="0">
                 <a:solidFill>
                   <a:srgbClr val="1C1E23"/>
                 </a:solidFill>
@@ -5248,60 +5710,14 @@
       </p:sp>
       <p:sp>
         <p:nvSpPr>
-          <p:cNvPr id="58" name="Rectangle 57"/>
-          <p:cNvSpPr/>
-          <p:nvPr/>
-        </p:nvSpPr>
-        <p:spPr>
-          <a:xfrm>
-            <a:off x="1676400" y="1257300"/>
-            <a:ext cx="381000" cy="292100"/>
-          </a:xfrm>
-          <a:prstGeom prst="rect">
-            <a:avLst/>
-          </a:prstGeom>
-          <a:solidFill>
-            <a:srgbClr val="6A8EBE"/>
-          </a:solidFill>
-          <a:ln w="6350">
-            <a:solidFill>
-              <a:srgbClr val="FFFFFF"/>
-            </a:solidFill>
-          </a:ln>
-          <a:effectLst/>
-        </p:spPr>
-        <p:style>
-          <a:lnRef idx="1">
-            <a:schemeClr val="accent1"/>
-          </a:lnRef>
-          <a:fillRef idx="3">
-            <a:schemeClr val="accent1"/>
-          </a:fillRef>
-          <a:effectRef idx="2">
-            <a:schemeClr val="accent1"/>
-          </a:effectRef>
-          <a:fontRef idx="minor">
-            <a:schemeClr val="lt1"/>
-          </a:fontRef>
-        </p:style>
-        <p:txBody>
-          <a:bodyPr rtlCol="0" anchor="ctr"/>
-          <a:lstStyle/>
-          <a:p>
-            <a:pPr algn="ctr"/>
-          </a:p>
-        </p:txBody>
-      </p:sp>
-      <p:sp>
-        <p:nvSpPr>
-          <p:cNvPr id="59" name="TextBox 58"/>
+          <p:cNvPr id="69" name="TextBox 68"/>
           <p:cNvSpPr txBox="1"/>
           <p:nvPr/>
         </p:nvSpPr>
         <p:spPr>
           <a:xfrm>
-            <a:off x="342900" y="1344803"/>
-            <a:ext cx="3048000" cy="140208"/>
+            <a:off x="76200" y="1144651"/>
+            <a:ext cx="3048000" cy="128016"/>
           </a:xfrm>
           <a:prstGeom prst="rect">
             <a:avLst/>
@@ -5316,7 +5732,7 @@
           <a:p>
             <a:pPr algn="ctr"/>
             <a:r>
-              <a:rPr sz="459" b="0" i="0">
+              <a:rPr sz="420" b="0" i="0">
                 <a:solidFill>
                   <a:srgbClr val="FFFFFF"/>
                 </a:solidFill>
@@ -5329,60 +5745,14 @@
       </p:sp>
       <p:sp>
         <p:nvSpPr>
-          <p:cNvPr id="60" name="Rectangle 59"/>
-          <p:cNvSpPr/>
-          <p:nvPr/>
-        </p:nvSpPr>
-        <p:spPr>
-          <a:xfrm>
-            <a:off x="1676400" y="1549400"/>
-            <a:ext cx="381000" cy="292100"/>
-          </a:xfrm>
-          <a:prstGeom prst="rect">
-            <a:avLst/>
-          </a:prstGeom>
-          <a:solidFill>
-            <a:srgbClr val="85A3CB"/>
-          </a:solidFill>
-          <a:ln w="6350">
-            <a:solidFill>
-              <a:srgbClr val="FFFFFF"/>
-            </a:solidFill>
-          </a:ln>
-          <a:effectLst/>
-        </p:spPr>
-        <p:style>
-          <a:lnRef idx="1">
-            <a:schemeClr val="accent1"/>
-          </a:lnRef>
-          <a:fillRef idx="3">
-            <a:schemeClr val="accent1"/>
-          </a:fillRef>
-          <a:effectRef idx="2">
-            <a:schemeClr val="accent1"/>
-          </a:effectRef>
-          <a:fontRef idx="minor">
-            <a:schemeClr val="lt1"/>
-          </a:fontRef>
-        </p:style>
-        <p:txBody>
-          <a:bodyPr rtlCol="0" anchor="ctr"/>
-          <a:lstStyle/>
-          <a:p>
-            <a:pPr algn="ctr"/>
-          </a:p>
-        </p:txBody>
-      </p:sp>
-      <p:sp>
-        <p:nvSpPr>
-          <p:cNvPr id="61" name="TextBox 60"/>
+          <p:cNvPr id="70" name="TextBox 69"/>
           <p:cNvSpPr txBox="1"/>
           <p:nvPr/>
         </p:nvSpPr>
         <p:spPr>
           <a:xfrm>
-            <a:off x="342900" y="1636902"/>
-            <a:ext cx="3048000" cy="140208"/>
+            <a:off x="76200" y="1378331"/>
+            <a:ext cx="3048000" cy="128016"/>
           </a:xfrm>
           <a:prstGeom prst="rect">
             <a:avLst/>
@@ -5397,7 +5767,7 @@
           <a:p>
             <a:pPr algn="ctr"/>
             <a:r>
-              <a:rPr sz="459" b="0" i="0">
+              <a:rPr sz="420" b="0" i="0">
                 <a:solidFill>
                   <a:srgbClr val="1C1E23"/>
                 </a:solidFill>
@@ -5410,60 +5780,14 @@
       </p:sp>
       <p:sp>
         <p:nvSpPr>
-          <p:cNvPr id="62" name="Rectangle 61"/>
-          <p:cNvSpPr/>
-          <p:nvPr/>
-        </p:nvSpPr>
-        <p:spPr>
-          <a:xfrm>
-            <a:off x="2057400" y="381000"/>
-            <a:ext cx="381000" cy="292100"/>
-          </a:xfrm>
-          <a:prstGeom prst="rect">
-            <a:avLst/>
-          </a:prstGeom>
-          <a:solidFill>
-            <a:srgbClr val="7899C5"/>
-          </a:solidFill>
-          <a:ln w="6350">
-            <a:solidFill>
-              <a:srgbClr val="FFFFFF"/>
-            </a:solidFill>
-          </a:ln>
-          <a:effectLst/>
-        </p:spPr>
-        <p:style>
-          <a:lnRef idx="1">
-            <a:schemeClr val="accent1"/>
-          </a:lnRef>
-          <a:fillRef idx="3">
-            <a:schemeClr val="accent1"/>
-          </a:fillRef>
-          <a:effectRef idx="2">
-            <a:schemeClr val="accent1"/>
-          </a:effectRef>
-          <a:fontRef idx="minor">
-            <a:schemeClr val="lt1"/>
-          </a:fontRef>
-        </p:style>
-        <p:txBody>
-          <a:bodyPr rtlCol="0" anchor="ctr"/>
-          <a:lstStyle/>
-          <a:p>
-            <a:pPr algn="ctr"/>
-          </a:p>
-        </p:txBody>
-      </p:sp>
-      <p:sp>
-        <p:nvSpPr>
-          <p:cNvPr id="63" name="TextBox 62"/>
+          <p:cNvPr id="71" name="TextBox 70"/>
           <p:cNvSpPr txBox="1"/>
           <p:nvPr/>
         </p:nvSpPr>
         <p:spPr>
           <a:xfrm>
-            <a:off x="723900" y="468503"/>
-            <a:ext cx="3048000" cy="140208"/>
+            <a:off x="381000" y="443611"/>
+            <a:ext cx="3048000" cy="128016"/>
           </a:xfrm>
           <a:prstGeom prst="rect">
             <a:avLst/>
@@ -5478,7 +5802,7 @@
           <a:p>
             <a:pPr algn="ctr"/>
             <a:r>
-              <a:rPr sz="459" b="0" i="0">
+              <a:rPr sz="420" b="0" i="0">
                 <a:solidFill>
                   <a:srgbClr val="1C1E23"/>
                 </a:solidFill>
@@ -5491,60 +5815,14 @@
       </p:sp>
       <p:sp>
         <p:nvSpPr>
-          <p:cNvPr id="64" name="Rectangle 63"/>
-          <p:cNvSpPr/>
-          <p:nvPr/>
-        </p:nvSpPr>
-        <p:spPr>
-          <a:xfrm>
-            <a:off x="2057400" y="673100"/>
-            <a:ext cx="381000" cy="292100"/>
-          </a:xfrm>
-          <a:prstGeom prst="rect">
-            <a:avLst/>
-          </a:prstGeom>
-          <a:solidFill>
-            <a:srgbClr val="B5C9E4"/>
-          </a:solidFill>
-          <a:ln w="6350">
-            <a:solidFill>
-              <a:srgbClr val="FFFFFF"/>
-            </a:solidFill>
-          </a:ln>
-          <a:effectLst/>
-        </p:spPr>
-        <p:style>
-          <a:lnRef idx="1">
-            <a:schemeClr val="accent1"/>
-          </a:lnRef>
-          <a:fillRef idx="3">
-            <a:schemeClr val="accent1"/>
-          </a:fillRef>
-          <a:effectRef idx="2">
-            <a:schemeClr val="accent1"/>
-          </a:effectRef>
-          <a:fontRef idx="minor">
-            <a:schemeClr val="lt1"/>
-          </a:fontRef>
-        </p:style>
-        <p:txBody>
-          <a:bodyPr rtlCol="0" anchor="ctr"/>
-          <a:lstStyle/>
-          <a:p>
-            <a:pPr algn="ctr"/>
-          </a:p>
-        </p:txBody>
-      </p:sp>
-      <p:sp>
-        <p:nvSpPr>
-          <p:cNvPr id="65" name="TextBox 64"/>
+          <p:cNvPr id="72" name="TextBox 71"/>
           <p:cNvSpPr txBox="1"/>
           <p:nvPr/>
         </p:nvSpPr>
         <p:spPr>
           <a:xfrm>
-            <a:off x="723900" y="760602"/>
-            <a:ext cx="3048000" cy="140208"/>
+            <a:off x="381000" y="677290"/>
+            <a:ext cx="3048000" cy="128016"/>
           </a:xfrm>
           <a:prstGeom prst="rect">
             <a:avLst/>
@@ -5559,7 +5837,7 @@
           <a:p>
             <a:pPr algn="ctr"/>
             <a:r>
-              <a:rPr sz="459" b="0" i="0">
+              <a:rPr sz="420" b="0" i="0">
                 <a:solidFill>
                   <a:srgbClr val="1C1E23"/>
                 </a:solidFill>
@@ -5572,60 +5850,14 @@
       </p:sp>
       <p:sp>
         <p:nvSpPr>
-          <p:cNvPr id="66" name="Rectangle 65"/>
-          <p:cNvSpPr/>
-          <p:nvPr/>
-        </p:nvSpPr>
-        <p:spPr>
-          <a:xfrm>
-            <a:off x="2057400" y="965200"/>
-            <a:ext cx="381000" cy="292100"/>
-          </a:xfrm>
-          <a:prstGeom prst="rect">
-            <a:avLst/>
-          </a:prstGeom>
-          <a:solidFill>
-            <a:srgbClr val="C4D5EB"/>
-          </a:solidFill>
-          <a:ln w="6350">
-            <a:solidFill>
-              <a:srgbClr val="FFFFFF"/>
-            </a:solidFill>
-          </a:ln>
-          <a:effectLst/>
-        </p:spPr>
-        <p:style>
-          <a:lnRef idx="1">
-            <a:schemeClr val="accent1"/>
-          </a:lnRef>
-          <a:fillRef idx="3">
-            <a:schemeClr val="accent1"/>
-          </a:fillRef>
-          <a:effectRef idx="2">
-            <a:schemeClr val="accent1"/>
-          </a:effectRef>
-          <a:fontRef idx="minor">
-            <a:schemeClr val="lt1"/>
-          </a:fontRef>
-        </p:style>
-        <p:txBody>
-          <a:bodyPr rtlCol="0" anchor="ctr"/>
-          <a:lstStyle/>
-          <a:p>
-            <a:pPr algn="ctr"/>
-          </a:p>
-        </p:txBody>
-      </p:sp>
-      <p:sp>
-        <p:nvSpPr>
-          <p:cNvPr id="67" name="TextBox 66"/>
+          <p:cNvPr id="73" name="TextBox 72"/>
           <p:cNvSpPr txBox="1"/>
           <p:nvPr/>
         </p:nvSpPr>
         <p:spPr>
           <a:xfrm>
-            <a:off x="723900" y="1052703"/>
-            <a:ext cx="3048000" cy="140208"/>
+            <a:off x="381000" y="910971"/>
+            <a:ext cx="3048000" cy="128016"/>
           </a:xfrm>
           <a:prstGeom prst="rect">
             <a:avLst/>
@@ -5640,7 +5872,7 @@
           <a:p>
             <a:pPr algn="ctr"/>
             <a:r>
-              <a:rPr sz="459" b="0" i="0">
+              <a:rPr sz="420" b="0" i="0">
                 <a:solidFill>
                   <a:srgbClr val="1C1E23"/>
                 </a:solidFill>
@@ -5653,60 +5885,14 @@
       </p:sp>
       <p:sp>
         <p:nvSpPr>
-          <p:cNvPr id="68" name="Rectangle 67"/>
-          <p:cNvSpPr/>
-          <p:nvPr/>
-        </p:nvSpPr>
-        <p:spPr>
-          <a:xfrm>
-            <a:off x="2057400" y="1257300"/>
-            <a:ext cx="381000" cy="292100"/>
-          </a:xfrm>
-          <a:prstGeom prst="rect">
-            <a:avLst/>
-          </a:prstGeom>
-          <a:solidFill>
-            <a:srgbClr val="ADC3E0"/>
-          </a:solidFill>
-          <a:ln w="6350">
-            <a:solidFill>
-              <a:srgbClr val="FFFFFF"/>
-            </a:solidFill>
-          </a:ln>
-          <a:effectLst/>
-        </p:spPr>
-        <p:style>
-          <a:lnRef idx="1">
-            <a:schemeClr val="accent1"/>
-          </a:lnRef>
-          <a:fillRef idx="3">
-            <a:schemeClr val="accent1"/>
-          </a:fillRef>
-          <a:effectRef idx="2">
-            <a:schemeClr val="accent1"/>
-          </a:effectRef>
-          <a:fontRef idx="minor">
-            <a:schemeClr val="lt1"/>
-          </a:fontRef>
-        </p:style>
-        <p:txBody>
-          <a:bodyPr rtlCol="0" anchor="ctr"/>
-          <a:lstStyle/>
-          <a:p>
-            <a:pPr algn="ctr"/>
-          </a:p>
-        </p:txBody>
-      </p:sp>
-      <p:sp>
-        <p:nvSpPr>
-          <p:cNvPr id="69" name="TextBox 68"/>
+          <p:cNvPr id="74" name="TextBox 73"/>
           <p:cNvSpPr txBox="1"/>
           <p:nvPr/>
         </p:nvSpPr>
         <p:spPr>
           <a:xfrm>
-            <a:off x="723900" y="1344803"/>
-            <a:ext cx="3048000" cy="140208"/>
+            <a:off x="381000" y="1144651"/>
+            <a:ext cx="3048000" cy="128016"/>
           </a:xfrm>
           <a:prstGeom prst="rect">
             <a:avLst/>
@@ -5721,7 +5907,7 @@
           <a:p>
             <a:pPr algn="ctr"/>
             <a:r>
-              <a:rPr sz="459" b="0" i="0">
+              <a:rPr sz="420" b="0" i="0">
                 <a:solidFill>
                   <a:srgbClr val="1C1E23"/>
                 </a:solidFill>
@@ -5734,60 +5920,14 @@
       </p:sp>
       <p:sp>
         <p:nvSpPr>
-          <p:cNvPr id="70" name="Rectangle 69"/>
-          <p:cNvSpPr/>
-          <p:nvPr/>
-        </p:nvSpPr>
-        <p:spPr>
-          <a:xfrm>
-            <a:off x="2057400" y="1549400"/>
-            <a:ext cx="381000" cy="292100"/>
-          </a:xfrm>
-          <a:prstGeom prst="rect">
-            <a:avLst/>
-          </a:prstGeom>
-          <a:solidFill>
-            <a:srgbClr val="27599C"/>
-          </a:solidFill>
-          <a:ln w="6350">
-            <a:solidFill>
-              <a:srgbClr val="FFFFFF"/>
-            </a:solidFill>
-          </a:ln>
-          <a:effectLst/>
-        </p:spPr>
-        <p:style>
-          <a:lnRef idx="1">
-            <a:schemeClr val="accent1"/>
-          </a:lnRef>
-          <a:fillRef idx="3">
-            <a:schemeClr val="accent1"/>
-          </a:fillRef>
-          <a:effectRef idx="2">
-            <a:schemeClr val="accent1"/>
-          </a:effectRef>
-          <a:fontRef idx="minor">
-            <a:schemeClr val="lt1"/>
-          </a:fontRef>
-        </p:style>
-        <p:txBody>
-          <a:bodyPr rtlCol="0" anchor="ctr"/>
-          <a:lstStyle/>
-          <a:p>
-            <a:pPr algn="ctr"/>
-          </a:p>
-        </p:txBody>
-      </p:sp>
-      <p:sp>
-        <p:nvSpPr>
-          <p:cNvPr id="71" name="TextBox 70"/>
+          <p:cNvPr id="75" name="TextBox 74"/>
           <p:cNvSpPr txBox="1"/>
           <p:nvPr/>
         </p:nvSpPr>
         <p:spPr>
           <a:xfrm>
-            <a:off x="723900" y="1636902"/>
-            <a:ext cx="3048000" cy="140208"/>
+            <a:off x="381000" y="1378331"/>
+            <a:ext cx="3048000" cy="128016"/>
           </a:xfrm>
           <a:prstGeom prst="rect">
             <a:avLst/>
@@ -5802,7 +5942,7 @@
           <a:p>
             <a:pPr algn="ctr"/>
             <a:r>
-              <a:rPr sz="459" b="0" i="0">
+              <a:rPr sz="420" b="0" i="0">
                 <a:solidFill>
                   <a:srgbClr val="FFFFFF"/>
                 </a:solidFill>
@@ -5813,45 +5953,9 @@
           </a:p>
         </p:txBody>
       </p:sp>
-      <p:cxnSp>
-        <p:nvCxnSpPr>
-          <p:cNvPr id="72" name="Connector 71"/>
-          <p:cNvCxnSpPr/>
-          <p:nvPr/>
-        </p:nvCxnSpPr>
-        <p:spPr>
-          <a:xfrm>
-            <a:off x="533400" y="381000"/>
-            <a:ext cx="1524000" cy="1168400"/>
-          </a:xfrm>
-          <a:prstGeom prst="line">
-            <a:avLst/>
-          </a:prstGeom>
-          <a:ln w="8890">
-            <a:solidFill>
-              <a:srgbClr val="1C1E23"/>
-            </a:solidFill>
-            <a:prstDash val="dash"/>
-          </a:ln>
-        </p:spPr>
-        <p:style>
-          <a:lnRef idx="2">
-            <a:schemeClr val="accent1"/>
-          </a:lnRef>
-          <a:fillRef idx="0">
-            <a:schemeClr val="accent1"/>
-          </a:fillRef>
-          <a:effectRef idx="1">
-            <a:schemeClr val="accent1"/>
-          </a:effectRef>
-          <a:fontRef idx="minor">
-            <a:schemeClr val="tx1"/>
-          </a:fontRef>
-        </p:style>
-      </p:cxnSp>
-      <p:sp>
-        <p:nvSpPr>
-          <p:cNvPr id="73" name="TextBox 72"/>
+      <p:sp>
+        <p:nvSpPr>
+          <p:cNvPr id="76" name="TextBox 75"/>
           <p:cNvSpPr txBox="1"/>
           <p:nvPr/>
         </p:nvSpPr>
@@ -5886,7 +5990,7 @@
       </p:sp>
       <p:sp>
         <p:nvSpPr>
-          <p:cNvPr id="74" name="TextBox 73"/>
+          <p:cNvPr id="77" name="TextBox 76"/>
           <p:cNvSpPr txBox="1"/>
           <p:nvPr/>
         </p:nvSpPr>
@@ -5914,14 +6018,14 @@
                 </a:solidFill>
                 <a:latin typeface="Helvetica"/>
               </a:rPr>
-              <a:t>diagonal = the two criteria agree; agreement 22%</a:t>
-            </a:r>
-          </a:p>
-        </p:txBody>
-      </p:sp>
-      <p:sp>
-        <p:nvSpPr>
-          <p:cNvPr id="75" name="TextBox 74"/>
+              <a:t>outlined cells = the two criteria agree; agreement 22%</a:t>
+            </a:r>
+          </a:p>
+        </p:txBody>
+      </p:sp>
+      <p:sp>
+        <p:nvSpPr>
+          <p:cNvPr id="78" name="TextBox 77"/>
           <p:cNvSpPr txBox="1"/>
           <p:nvPr/>
         </p:nvSpPr>
@@ -5956,7 +6060,7 @@
       </p:sp>
       <p:sp>
         <p:nvSpPr>
-          <p:cNvPr id="76" name="TextBox 75"/>
+          <p:cNvPr id="79" name="TextBox 78"/>
           <p:cNvSpPr txBox="1"/>
           <p:nvPr/>
         </p:nvSpPr>
@@ -5991,7 +6095,7 @@
       </p:sp>
       <p:cxnSp>
         <p:nvCxnSpPr>
-          <p:cNvPr id="77" name="Connector 76"/>
+          <p:cNvPr id="80" name="Connector 79"/>
           <p:cNvCxnSpPr/>
           <p:nvPr/>
         </p:nvCxnSpPr>
@@ -6026,7 +6130,7 @@
       </p:cxnSp>
       <p:cxnSp>
         <p:nvCxnSpPr>
-          <p:cNvPr id="78" name="Connector 77"/>
+          <p:cNvPr id="81" name="Connector 80"/>
           <p:cNvCxnSpPr/>
           <p:nvPr/>
         </p:nvCxnSpPr>
@@ -6061,7 +6165,7 @@
       </p:cxnSp>
       <p:cxnSp>
         <p:nvCxnSpPr>
-          <p:cNvPr id="79" name="Connector 78"/>
+          <p:cNvPr id="82" name="Connector 81"/>
           <p:cNvCxnSpPr/>
           <p:nvPr/>
         </p:nvCxnSpPr>
@@ -6096,7 +6200,7 @@
       </p:cxnSp>
       <p:sp>
         <p:nvSpPr>
-          <p:cNvPr id="80" name="TextBox 79"/>
+          <p:cNvPr id="83" name="TextBox 82"/>
           <p:cNvSpPr txBox="1"/>
           <p:nvPr/>
         </p:nvSpPr>
@@ -6131,7 +6235,7 @@
       </p:sp>
       <p:cxnSp>
         <p:nvCxnSpPr>
-          <p:cNvPr id="81" name="Connector 80"/>
+          <p:cNvPr id="84" name="Connector 83"/>
           <p:cNvCxnSpPr/>
           <p:nvPr/>
         </p:nvCxnSpPr>
@@ -6166,7 +6270,7 @@
       </p:cxnSp>
       <p:sp>
         <p:nvSpPr>
-          <p:cNvPr id="82" name="TextBox 81"/>
+          <p:cNvPr id="85" name="TextBox 84"/>
           <p:cNvSpPr txBox="1"/>
           <p:nvPr/>
         </p:nvSpPr>
@@ -6201,7 +6305,7 @@
       </p:sp>
       <p:cxnSp>
         <p:nvCxnSpPr>
-          <p:cNvPr id="83" name="Connector 82"/>
+          <p:cNvPr id="86" name="Connector 85"/>
           <p:cNvCxnSpPr/>
           <p:nvPr/>
         </p:nvCxnSpPr>
@@ -6236,7 +6340,7 @@
       </p:cxnSp>
       <p:sp>
         <p:nvSpPr>
-          <p:cNvPr id="84" name="TextBox 83"/>
+          <p:cNvPr id="87" name="TextBox 86"/>
           <p:cNvSpPr txBox="1"/>
           <p:nvPr/>
         </p:nvSpPr>
@@ -6271,7 +6375,7 @@
       </p:sp>
       <p:cxnSp>
         <p:nvCxnSpPr>
-          <p:cNvPr id="85" name="Connector 84"/>
+          <p:cNvPr id="88" name="Connector 87"/>
           <p:cNvCxnSpPr/>
           <p:nvPr/>
         </p:nvCxnSpPr>
@@ -6306,7 +6410,7 @@
       </p:cxnSp>
       <p:sp>
         <p:nvSpPr>
-          <p:cNvPr id="86" name="TextBox 85"/>
+          <p:cNvPr id="89" name="TextBox 88"/>
           <p:cNvSpPr txBox="1"/>
           <p:nvPr/>
         </p:nvSpPr>
@@ -6341,7 +6445,7 @@
       </p:sp>
       <p:cxnSp>
         <p:nvCxnSpPr>
-          <p:cNvPr id="87" name="Connector 86"/>
+          <p:cNvPr id="90" name="Connector 89"/>
           <p:cNvCxnSpPr/>
           <p:nvPr/>
         </p:nvCxnSpPr>
@@ -6376,7 +6480,7 @@
       </p:cxnSp>
       <p:sp>
         <p:nvSpPr>
-          <p:cNvPr id="88" name="TextBox 87"/>
+          <p:cNvPr id="91" name="TextBox 90"/>
           <p:cNvSpPr txBox="1"/>
           <p:nvPr/>
         </p:nvSpPr>
@@ -6411,7 +6515,7 @@
       </p:sp>
       <p:cxnSp>
         <p:nvCxnSpPr>
-          <p:cNvPr id="89" name="Connector 88"/>
+          <p:cNvPr id="92" name="Connector 91"/>
           <p:cNvCxnSpPr/>
           <p:nvPr/>
         </p:nvCxnSpPr>
@@ -6446,7 +6550,7 @@
       </p:cxnSp>
       <p:sp>
         <p:nvSpPr>
-          <p:cNvPr id="90" name="TextBox 89"/>
+          <p:cNvPr id="93" name="TextBox 92"/>
           <p:cNvSpPr txBox="1"/>
           <p:nvPr/>
         </p:nvSpPr>
@@ -6481,7 +6585,7 @@
       </p:sp>
       <p:sp>
         <p:nvSpPr>
-          <p:cNvPr id="91" name="TextBox 90"/>
+          <p:cNvPr id="94" name="TextBox 93"/>
           <p:cNvSpPr txBox="1"/>
           <p:nvPr/>
         </p:nvSpPr>
@@ -6516,7 +6620,7 @@
       </p:sp>
       <p:sp>
         <p:nvSpPr>
-          <p:cNvPr id="92" name="Rectangle 91"/>
+          <p:cNvPr id="95" name="Rectangle 94"/>
           <p:cNvSpPr/>
           <p:nvPr/>
         </p:nvSpPr>
@@ -6560,7 +6664,7 @@
       </p:sp>
       <p:sp>
         <p:nvSpPr>
-          <p:cNvPr id="93" name="Rectangle 92"/>
+          <p:cNvPr id="96" name="Rectangle 95"/>
           <p:cNvSpPr/>
           <p:nvPr/>
         </p:nvSpPr>
@@ -6604,7 +6708,7 @@
       </p:sp>
       <p:sp>
         <p:nvSpPr>
-          <p:cNvPr id="94" name="Rectangle 93"/>
+          <p:cNvPr id="97" name="Rectangle 96"/>
           <p:cNvSpPr/>
           <p:nvPr/>
         </p:nvSpPr>
@@ -6648,7 +6752,7 @@
       </p:sp>
       <p:sp>
         <p:nvSpPr>
-          <p:cNvPr id="95" name="Rectangle 94"/>
+          <p:cNvPr id="98" name="Rectangle 97"/>
           <p:cNvSpPr/>
           <p:nvPr/>
         </p:nvSpPr>
@@ -6692,7 +6796,7 @@
       </p:sp>
       <p:sp>
         <p:nvSpPr>
-          <p:cNvPr id="96" name="Rectangle 95"/>
+          <p:cNvPr id="99" name="Rectangle 98"/>
           <p:cNvSpPr/>
           <p:nvPr/>
         </p:nvSpPr>
@@ -6736,7 +6840,7 @@
       </p:sp>
       <p:sp>
         <p:nvSpPr>
-          <p:cNvPr id="97" name="Rectangle 96"/>
+          <p:cNvPr id="100" name="Rectangle 99"/>
           <p:cNvSpPr/>
           <p:nvPr/>
         </p:nvSpPr>
@@ -6780,7 +6884,7 @@
       </p:sp>
       <p:sp>
         <p:nvSpPr>
-          <p:cNvPr id="98" name="Rectangle 97"/>
+          <p:cNvPr id="101" name="Rectangle 100"/>
           <p:cNvSpPr/>
           <p:nvPr/>
         </p:nvSpPr>
@@ -6824,7 +6928,7 @@
       </p:sp>
       <p:sp>
         <p:nvSpPr>
-          <p:cNvPr id="99" name="Rectangle 98"/>
+          <p:cNvPr id="102" name="Rectangle 101"/>
           <p:cNvSpPr/>
           <p:nvPr/>
         </p:nvSpPr>
@@ -6868,7 +6972,7 @@
       </p:sp>
       <p:sp>
         <p:nvSpPr>
-          <p:cNvPr id="100" name="Rectangle 99"/>
+          <p:cNvPr id="103" name="Rectangle 102"/>
           <p:cNvSpPr/>
           <p:nvPr/>
         </p:nvSpPr>
@@ -6912,7 +7016,7 @@
       </p:sp>
       <p:sp>
         <p:nvSpPr>
-          <p:cNvPr id="101" name="Rectangle 100"/>
+          <p:cNvPr id="104" name="Rectangle 103"/>
           <p:cNvSpPr/>
           <p:nvPr/>
         </p:nvSpPr>
@@ -6956,7 +7060,7 @@
       </p:sp>
       <p:sp>
         <p:nvSpPr>
-          <p:cNvPr id="102" name="Rectangle 101"/>
+          <p:cNvPr id="105" name="Rectangle 104"/>
           <p:cNvSpPr/>
           <p:nvPr/>
         </p:nvSpPr>
@@ -7000,7 +7104,7 @@
       </p:sp>
       <p:sp>
         <p:nvSpPr>
-          <p:cNvPr id="103" name="Rectangle 102"/>
+          <p:cNvPr id="106" name="Rectangle 105"/>
           <p:cNvSpPr/>
           <p:nvPr/>
         </p:nvSpPr>
@@ -7044,7 +7148,7 @@
       </p:sp>
       <p:sp>
         <p:nvSpPr>
-          <p:cNvPr id="104" name="Rectangle 103"/>
+          <p:cNvPr id="107" name="Rectangle 106"/>
           <p:cNvSpPr/>
           <p:nvPr/>
         </p:nvSpPr>
@@ -7090,7 +7194,7 @@
       </p:sp>
       <p:sp>
         <p:nvSpPr>
-          <p:cNvPr id="105" name="Rectangle 104"/>
+          <p:cNvPr id="108" name="Rectangle 107"/>
           <p:cNvSpPr/>
           <p:nvPr/>
         </p:nvSpPr>
@@ -7134,7 +7238,7 @@
       </p:sp>
       <p:sp>
         <p:nvSpPr>
-          <p:cNvPr id="106" name="Rectangle 105"/>
+          <p:cNvPr id="109" name="Rectangle 108"/>
           <p:cNvSpPr/>
           <p:nvPr/>
         </p:nvSpPr>
@@ -7178,7 +7282,7 @@
       </p:sp>
       <p:sp>
         <p:nvSpPr>
-          <p:cNvPr id="107" name="Rectangle 106"/>
+          <p:cNvPr id="110" name="Rectangle 109"/>
           <p:cNvSpPr/>
           <p:nvPr/>
         </p:nvSpPr>
@@ -7222,7 +7326,7 @@
       </p:sp>
       <p:sp>
         <p:nvSpPr>
-          <p:cNvPr id="108" name="Rectangle 107"/>
+          <p:cNvPr id="111" name="Rectangle 110"/>
           <p:cNvSpPr/>
           <p:nvPr/>
         </p:nvSpPr>
@@ -7266,7 +7370,7 @@
       </p:sp>
       <p:sp>
         <p:nvSpPr>
-          <p:cNvPr id="109" name="Rectangle 108"/>
+          <p:cNvPr id="112" name="Rectangle 111"/>
           <p:cNvSpPr/>
           <p:nvPr/>
         </p:nvSpPr>
@@ -7310,7 +7414,7 @@
       </p:sp>
       <p:sp>
         <p:nvSpPr>
-          <p:cNvPr id="110" name="Rectangle 109"/>
+          <p:cNvPr id="113" name="Rectangle 112"/>
           <p:cNvSpPr/>
           <p:nvPr/>
         </p:nvSpPr>
@@ -7354,7 +7458,7 @@
       </p:sp>
       <p:sp>
         <p:nvSpPr>
-          <p:cNvPr id="111" name="Rectangle 110"/>
+          <p:cNvPr id="114" name="Rectangle 113"/>
           <p:cNvSpPr/>
           <p:nvPr/>
         </p:nvSpPr>
@@ -7398,7 +7502,7 @@
       </p:sp>
       <p:sp>
         <p:nvSpPr>
-          <p:cNvPr id="112" name="Rectangle 111"/>
+          <p:cNvPr id="115" name="Rectangle 114"/>
           <p:cNvSpPr/>
           <p:nvPr/>
         </p:nvSpPr>
@@ -7442,7 +7546,7 @@
       </p:sp>
       <p:sp>
         <p:nvSpPr>
-          <p:cNvPr id="113" name="Rectangle 112"/>
+          <p:cNvPr id="116" name="Rectangle 115"/>
           <p:cNvSpPr/>
           <p:nvPr/>
         </p:nvSpPr>
@@ -7486,7 +7590,7 @@
       </p:sp>
       <p:sp>
         <p:nvSpPr>
-          <p:cNvPr id="114" name="Rectangle 113"/>
+          <p:cNvPr id="117" name="Rectangle 116"/>
           <p:cNvSpPr/>
           <p:nvPr/>
         </p:nvSpPr>
@@ -7530,7 +7634,7 @@
       </p:sp>
       <p:sp>
         <p:nvSpPr>
-          <p:cNvPr id="115" name="Rectangle 114"/>
+          <p:cNvPr id="118" name="Rectangle 117"/>
           <p:cNvSpPr/>
           <p:nvPr/>
         </p:nvSpPr>
@@ -7574,7 +7678,7 @@
       </p:sp>
       <p:sp>
         <p:nvSpPr>
-          <p:cNvPr id="116" name="Rectangle 115"/>
+          <p:cNvPr id="119" name="Rectangle 118"/>
           <p:cNvSpPr/>
           <p:nvPr/>
         </p:nvSpPr>
@@ -7618,7 +7722,7 @@
       </p:sp>
       <p:sp>
         <p:nvSpPr>
-          <p:cNvPr id="117" name="Rectangle 116"/>
+          <p:cNvPr id="120" name="Rectangle 119"/>
           <p:cNvSpPr/>
           <p:nvPr/>
         </p:nvSpPr>
@@ -7662,7 +7766,7 @@
       </p:sp>
       <p:sp>
         <p:nvSpPr>
-          <p:cNvPr id="118" name="Rectangle 117"/>
+          <p:cNvPr id="121" name="Rectangle 120"/>
           <p:cNvSpPr/>
           <p:nvPr/>
         </p:nvSpPr>
@@ -7706,7 +7810,7 @@
       </p:sp>
       <p:sp>
         <p:nvSpPr>
-          <p:cNvPr id="119" name="Rectangle 118"/>
+          <p:cNvPr id="122" name="Rectangle 121"/>
           <p:cNvSpPr/>
           <p:nvPr/>
         </p:nvSpPr>
@@ -7750,7 +7854,7 @@
       </p:sp>
       <p:sp>
         <p:nvSpPr>
-          <p:cNvPr id="120" name="Rectangle 119"/>
+          <p:cNvPr id="123" name="Rectangle 122"/>
           <p:cNvSpPr/>
           <p:nvPr/>
         </p:nvSpPr>
@@ -7794,7 +7898,7 @@
       </p:sp>
       <p:sp>
         <p:nvSpPr>
-          <p:cNvPr id="121" name="Rectangle 120"/>
+          <p:cNvPr id="124" name="Rectangle 123"/>
           <p:cNvSpPr/>
           <p:nvPr/>
         </p:nvSpPr>
@@ -7838,7 +7942,7 @@
       </p:sp>
       <p:sp>
         <p:nvSpPr>
-          <p:cNvPr id="122" name="Rectangle 121"/>
+          <p:cNvPr id="125" name="Rectangle 124"/>
           <p:cNvSpPr/>
           <p:nvPr/>
         </p:nvSpPr>
@@ -7882,7 +7986,7 @@
       </p:sp>
       <p:sp>
         <p:nvSpPr>
-          <p:cNvPr id="123" name="Rectangle 122"/>
+          <p:cNvPr id="126" name="Rectangle 125"/>
           <p:cNvSpPr/>
           <p:nvPr/>
         </p:nvSpPr>
@@ -7928,7 +8032,7 @@
       </p:sp>
       <p:sp>
         <p:nvSpPr>
-          <p:cNvPr id="124" name="Rectangle 123"/>
+          <p:cNvPr id="127" name="Rectangle 126"/>
           <p:cNvSpPr/>
           <p:nvPr/>
         </p:nvSpPr>
@@ -7972,7 +8076,7 @@
       </p:sp>
       <p:sp>
         <p:nvSpPr>
-          <p:cNvPr id="125" name="Rectangle 124"/>
+          <p:cNvPr id="128" name="Rectangle 127"/>
           <p:cNvSpPr/>
           <p:nvPr/>
         </p:nvSpPr>
@@ -8016,7 +8120,7 @@
       </p:sp>
       <p:sp>
         <p:nvSpPr>
-          <p:cNvPr id="126" name="Rectangle 125"/>
+          <p:cNvPr id="129" name="Rectangle 128"/>
           <p:cNvSpPr/>
           <p:nvPr/>
         </p:nvSpPr>
@@ -8060,7 +8164,7 @@
       </p:sp>
       <p:sp>
         <p:nvSpPr>
-          <p:cNvPr id="127" name="Rectangle 126"/>
+          <p:cNvPr id="130" name="Rectangle 129"/>
           <p:cNvSpPr/>
           <p:nvPr/>
         </p:nvSpPr>
@@ -8104,7 +8208,7 @@
       </p:sp>
       <p:sp>
         <p:nvSpPr>
-          <p:cNvPr id="128" name="Rectangle 127"/>
+          <p:cNvPr id="131" name="Rectangle 130"/>
           <p:cNvSpPr/>
           <p:nvPr/>
         </p:nvSpPr>
@@ -8148,7 +8252,7 @@
       </p:sp>
       <p:sp>
         <p:nvSpPr>
-          <p:cNvPr id="129" name="Rectangle 128"/>
+          <p:cNvPr id="132" name="Rectangle 131"/>
           <p:cNvSpPr/>
           <p:nvPr/>
         </p:nvSpPr>
@@ -8192,7 +8296,7 @@
       </p:sp>
       <p:sp>
         <p:nvSpPr>
-          <p:cNvPr id="130" name="Rectangle 129"/>
+          <p:cNvPr id="133" name="Rectangle 132"/>
           <p:cNvSpPr/>
           <p:nvPr/>
         </p:nvSpPr>
@@ -8236,7 +8340,7 @@
       </p:sp>
       <p:sp>
         <p:nvSpPr>
-          <p:cNvPr id="131" name="Rectangle 130"/>
+          <p:cNvPr id="134" name="Rectangle 133"/>
           <p:cNvSpPr/>
           <p:nvPr/>
         </p:nvSpPr>
@@ -8280,7 +8384,7 @@
       </p:sp>
       <p:sp>
         <p:nvSpPr>
-          <p:cNvPr id="132" name="Rectangle 131"/>
+          <p:cNvPr id="135" name="Rectangle 134"/>
           <p:cNvSpPr/>
           <p:nvPr/>
         </p:nvSpPr>
@@ -8324,7 +8428,7 @@
       </p:sp>
       <p:sp>
         <p:nvSpPr>
-          <p:cNvPr id="133" name="Rectangle 132"/>
+          <p:cNvPr id="136" name="Rectangle 135"/>
           <p:cNvSpPr/>
           <p:nvPr/>
         </p:nvSpPr>
@@ -8368,7 +8472,7 @@
       </p:sp>
       <p:sp>
         <p:nvSpPr>
-          <p:cNvPr id="134" name="Rectangle 133"/>
+          <p:cNvPr id="137" name="Rectangle 136"/>
           <p:cNvSpPr/>
           <p:nvPr/>
         </p:nvSpPr>
@@ -8412,7 +8516,7 @@
       </p:sp>
       <p:sp>
         <p:nvSpPr>
-          <p:cNvPr id="135" name="Rectangle 134"/>
+          <p:cNvPr id="138" name="Rectangle 137"/>
           <p:cNvSpPr/>
           <p:nvPr/>
         </p:nvSpPr>
@@ -8456,7 +8560,7 @@
       </p:sp>
       <p:sp>
         <p:nvSpPr>
-          <p:cNvPr id="136" name="Rectangle 135"/>
+          <p:cNvPr id="139" name="Rectangle 138"/>
           <p:cNvSpPr/>
           <p:nvPr/>
         </p:nvSpPr>
@@ -8502,7 +8606,7 @@
       </p:sp>
       <p:sp>
         <p:nvSpPr>
-          <p:cNvPr id="137" name="Rectangle 136"/>
+          <p:cNvPr id="140" name="Rectangle 139"/>
           <p:cNvSpPr/>
           <p:nvPr/>
         </p:nvSpPr>
@@ -8546,7 +8650,7 @@
       </p:sp>
       <p:sp>
         <p:nvSpPr>
-          <p:cNvPr id="138" name="Rectangle 137"/>
+          <p:cNvPr id="141" name="Rectangle 140"/>
           <p:cNvSpPr/>
           <p:nvPr/>
         </p:nvSpPr>
@@ -8590,7 +8694,7 @@
       </p:sp>
       <p:sp>
         <p:nvSpPr>
-          <p:cNvPr id="139" name="Rectangle 138"/>
+          <p:cNvPr id="142" name="Rectangle 141"/>
           <p:cNvSpPr/>
           <p:nvPr/>
         </p:nvSpPr>
@@ -8634,7 +8738,7 @@
       </p:sp>
       <p:cxnSp>
         <p:nvCxnSpPr>
-          <p:cNvPr id="140" name="Connector 139"/>
+          <p:cNvPr id="143" name="Connector 142"/>
           <p:cNvCxnSpPr/>
           <p:nvPr/>
         </p:nvCxnSpPr>
@@ -8670,7 +8774,7 @@
       </p:cxnSp>
       <p:sp>
         <p:nvSpPr>
-          <p:cNvPr id="141" name="TextBox 140"/>
+          <p:cNvPr id="144" name="TextBox 143"/>
           <p:cNvSpPr txBox="1"/>
           <p:nvPr/>
         </p:nvSpPr>
@@ -8705,7 +8809,7 @@
       </p:sp>
       <p:sp>
         <p:nvSpPr>
-          <p:cNvPr id="142" name="Rectangle 141"/>
+          <p:cNvPr id="145" name="Rectangle 144"/>
           <p:cNvSpPr/>
           <p:nvPr/>
         </p:nvSpPr>
@@ -8749,7 +8853,7 @@
       </p:sp>
       <p:sp>
         <p:nvSpPr>
-          <p:cNvPr id="143" name="TextBox 142"/>
+          <p:cNvPr id="146" name="TextBox 145"/>
           <p:cNvSpPr txBox="1"/>
           <p:nvPr/>
         </p:nvSpPr>
@@ -8784,7 +8888,7 @@
       </p:sp>
       <p:sp>
         <p:nvSpPr>
-          <p:cNvPr id="144" name="Rectangle 143"/>
+          <p:cNvPr id="147" name="Rectangle 146"/>
           <p:cNvSpPr/>
           <p:nvPr/>
         </p:nvSpPr>
@@ -8828,7 +8932,7 @@
       </p:sp>
       <p:sp>
         <p:nvSpPr>
-          <p:cNvPr id="145" name="TextBox 144"/>
+          <p:cNvPr id="148" name="TextBox 147"/>
           <p:cNvSpPr txBox="1"/>
           <p:nvPr/>
         </p:nvSpPr>
@@ -8863,7 +8967,7 @@
       </p:sp>
       <p:sp>
         <p:nvSpPr>
-          <p:cNvPr id="146" name="Rectangle 145"/>
+          <p:cNvPr id="149" name="Rectangle 148"/>
           <p:cNvSpPr/>
           <p:nvPr/>
         </p:nvSpPr>
@@ -8907,7 +9011,7 @@
       </p:sp>
       <p:sp>
         <p:nvSpPr>
-          <p:cNvPr id="147" name="TextBox 146"/>
+          <p:cNvPr id="150" name="TextBox 149"/>
           <p:cNvSpPr txBox="1"/>
           <p:nvPr/>
         </p:nvSpPr>
@@ -8942,7 +9046,7 @@
       </p:sp>
       <p:sp>
         <p:nvSpPr>
-          <p:cNvPr id="148" name="TextBox 147"/>
+          <p:cNvPr id="151" name="TextBox 150"/>
           <p:cNvSpPr txBox="1"/>
           <p:nvPr/>
         </p:nvSpPr>
@@ -8977,7 +9081,7 @@
       </p:sp>
       <p:sp>
         <p:nvSpPr>
-          <p:cNvPr id="149" name="TextBox 148"/>
+          <p:cNvPr id="152" name="TextBox 151"/>
           <p:cNvSpPr txBox="1"/>
           <p:nvPr/>
         </p:nvSpPr>
@@ -9012,7 +9116,7 @@
       </p:sp>
       <p:sp>
         <p:nvSpPr>
-          <p:cNvPr id="150" name="TextBox 149"/>
+          <p:cNvPr id="153" name="TextBox 152"/>
           <p:cNvSpPr txBox="1"/>
           <p:nvPr/>
         </p:nvSpPr>
@@ -9047,7 +9151,7 @@
       </p:sp>
       <p:sp>
         <p:nvSpPr>
-          <p:cNvPr id="151" name="TextBox 150"/>
+          <p:cNvPr id="154" name="TextBox 153"/>
           <p:cNvSpPr txBox="1"/>
           <p:nvPr/>
         </p:nvSpPr>

--- a/latex/figure/fig3_why_selective.pptx
+++ b/latex/figure/fig3_why_selective.pptx
@@ -6846,6 +6846,50 @@
         </p:nvSpPr>
         <p:spPr>
           <a:xfrm>
+            <a:off x="4023291" y="861260"/>
+            <a:ext cx="27940" cy="27940"/>
+          </a:xfrm>
+          <a:prstGeom prst="rect">
+            <a:avLst/>
+          </a:prstGeom>
+          <a:solidFill>
+            <a:srgbClr val="215499"/>
+          </a:solidFill>
+          <a:ln>
+            <a:noFill/>
+          </a:ln>
+          <a:effectLst/>
+        </p:spPr>
+        <p:style>
+          <a:lnRef idx="1">
+            <a:schemeClr val="accent1"/>
+          </a:lnRef>
+          <a:fillRef idx="3">
+            <a:schemeClr val="accent1"/>
+          </a:fillRef>
+          <a:effectRef idx="2">
+            <a:schemeClr val="accent1"/>
+          </a:effectRef>
+          <a:fontRef idx="minor">
+            <a:schemeClr val="lt1"/>
+          </a:fontRef>
+        </p:style>
+        <p:txBody>
+          <a:bodyPr rtlCol="0" anchor="ctr"/>
+          <a:lstStyle/>
+          <a:p>
+            <a:pPr algn="ctr"/>
+          </a:p>
+        </p:txBody>
+      </p:sp>
+      <p:sp>
+        <p:nvSpPr>
+          <p:cNvPr id="101" name="Rectangle 100"/>
+          <p:cNvSpPr/>
+          <p:nvPr/>
+        </p:nvSpPr>
+        <p:spPr>
+          <a:xfrm>
             <a:off x="4033969" y="865737"/>
             <a:ext cx="27940" cy="27940"/>
           </a:xfrm>
@@ -6884,7 +6928,51 @@
       </p:sp>
       <p:sp>
         <p:nvSpPr>
-          <p:cNvPr id="101" name="Rectangle 100"/>
+          <p:cNvPr id="102" name="Rectangle 101"/>
+          <p:cNvSpPr/>
+          <p:nvPr/>
+        </p:nvSpPr>
+        <p:spPr>
+          <a:xfrm>
+            <a:off x="4099107" y="968560"/>
+            <a:ext cx="27940" cy="27940"/>
+          </a:xfrm>
+          <a:prstGeom prst="rect">
+            <a:avLst/>
+          </a:prstGeom>
+          <a:solidFill>
+            <a:srgbClr val="215499"/>
+          </a:solidFill>
+          <a:ln>
+            <a:noFill/>
+          </a:ln>
+          <a:effectLst/>
+        </p:spPr>
+        <p:style>
+          <a:lnRef idx="1">
+            <a:schemeClr val="accent1"/>
+          </a:lnRef>
+          <a:fillRef idx="3">
+            <a:schemeClr val="accent1"/>
+          </a:fillRef>
+          <a:effectRef idx="2">
+            <a:schemeClr val="accent1"/>
+          </a:effectRef>
+          <a:fontRef idx="minor">
+            <a:schemeClr val="lt1"/>
+          </a:fontRef>
+        </p:style>
+        <p:txBody>
+          <a:bodyPr rtlCol="0" anchor="ctr"/>
+          <a:lstStyle/>
+          <a:p>
+            <a:pPr algn="ctr"/>
+          </a:p>
+        </p:txBody>
+      </p:sp>
+      <p:sp>
+        <p:nvSpPr>
+          <p:cNvPr id="103" name="Rectangle 102"/>
           <p:cNvSpPr/>
           <p:nvPr/>
         </p:nvSpPr>
@@ -6928,7 +7016,7 @@
       </p:sp>
       <p:sp>
         <p:nvSpPr>
-          <p:cNvPr id="102" name="Rectangle 101"/>
+          <p:cNvPr id="104" name="Rectangle 103"/>
           <p:cNvSpPr/>
           <p:nvPr/>
         </p:nvSpPr>
@@ -6972,7 +7060,7 @@
       </p:sp>
       <p:sp>
         <p:nvSpPr>
-          <p:cNvPr id="103" name="Rectangle 102"/>
+          <p:cNvPr id="105" name="Rectangle 104"/>
           <p:cNvSpPr/>
           <p:nvPr/>
         </p:nvSpPr>
@@ -7016,145 +7104,13 @@
       </p:sp>
       <p:sp>
         <p:nvSpPr>
-          <p:cNvPr id="104" name="Rectangle 103"/>
-          <p:cNvSpPr/>
-          <p:nvPr/>
-        </p:nvSpPr>
-        <p:spPr>
-          <a:xfrm>
-            <a:off x="4337232" y="864613"/>
-            <a:ext cx="27940" cy="27940"/>
-          </a:xfrm>
-          <a:prstGeom prst="rect">
-            <a:avLst/>
-          </a:prstGeom>
-          <a:solidFill>
-            <a:srgbClr val="215499"/>
-          </a:solidFill>
-          <a:ln>
-            <a:noFill/>
-          </a:ln>
-          <a:effectLst/>
-        </p:spPr>
-        <p:style>
-          <a:lnRef idx="1">
-            <a:schemeClr val="accent1"/>
-          </a:lnRef>
-          <a:fillRef idx="3">
-            <a:schemeClr val="accent1"/>
-          </a:fillRef>
-          <a:effectRef idx="2">
-            <a:schemeClr val="accent1"/>
-          </a:effectRef>
-          <a:fontRef idx="minor">
-            <a:schemeClr val="lt1"/>
-          </a:fontRef>
-        </p:style>
-        <p:txBody>
-          <a:bodyPr rtlCol="0" anchor="ctr"/>
-          <a:lstStyle/>
-          <a:p>
-            <a:pPr algn="ctr"/>
-          </a:p>
-        </p:txBody>
-      </p:sp>
-      <p:sp>
-        <p:nvSpPr>
-          <p:cNvPr id="105" name="Rectangle 104"/>
-          <p:cNvSpPr/>
-          <p:nvPr/>
-        </p:nvSpPr>
-        <p:spPr>
-          <a:xfrm>
-            <a:off x="4379945" y="906566"/>
-            <a:ext cx="27940" cy="27940"/>
-          </a:xfrm>
-          <a:prstGeom prst="rect">
-            <a:avLst/>
-          </a:prstGeom>
-          <a:solidFill>
-            <a:srgbClr val="215499"/>
-          </a:solidFill>
-          <a:ln>
-            <a:noFill/>
-          </a:ln>
-          <a:effectLst/>
-        </p:spPr>
-        <p:style>
-          <a:lnRef idx="1">
-            <a:schemeClr val="accent1"/>
-          </a:lnRef>
-          <a:fillRef idx="3">
-            <a:schemeClr val="accent1"/>
-          </a:fillRef>
-          <a:effectRef idx="2">
-            <a:schemeClr val="accent1"/>
-          </a:effectRef>
-          <a:fontRef idx="minor">
-            <a:schemeClr val="lt1"/>
-          </a:fontRef>
-        </p:style>
-        <p:txBody>
-          <a:bodyPr rtlCol="0" anchor="ctr"/>
-          <a:lstStyle/>
-          <a:p>
-            <a:pPr algn="ctr"/>
-          </a:p>
-        </p:txBody>
-      </p:sp>
-      <p:sp>
-        <p:nvSpPr>
           <p:cNvPr id="106" name="Rectangle 105"/>
           <p:cNvSpPr/>
           <p:nvPr/>
         </p:nvSpPr>
         <p:spPr>
           <a:xfrm>
-            <a:off x="4438675" y="876222"/>
-            <a:ext cx="27940" cy="27940"/>
-          </a:xfrm>
-          <a:prstGeom prst="rect">
-            <a:avLst/>
-          </a:prstGeom>
-          <a:solidFill>
-            <a:srgbClr val="215499"/>
-          </a:solidFill>
-          <a:ln>
-            <a:noFill/>
-          </a:ln>
-          <a:effectLst/>
-        </p:spPr>
-        <p:style>
-          <a:lnRef idx="1">
-            <a:schemeClr val="accent1"/>
-          </a:lnRef>
-          <a:fillRef idx="3">
-            <a:schemeClr val="accent1"/>
-          </a:fillRef>
-          <a:effectRef idx="2">
-            <a:schemeClr val="accent1"/>
-          </a:effectRef>
-          <a:fontRef idx="minor">
-            <a:schemeClr val="lt1"/>
-          </a:fontRef>
-        </p:style>
-        <p:txBody>
-          <a:bodyPr rtlCol="0" anchor="ctr"/>
-          <a:lstStyle/>
-          <a:p>
-            <a:pPr algn="ctr"/>
-          </a:p>
-        </p:txBody>
-      </p:sp>
-      <p:sp>
-        <p:nvSpPr>
-          <p:cNvPr id="107" name="Rectangle 106"/>
-          <p:cNvSpPr/>
-          <p:nvPr/>
-        </p:nvSpPr>
-        <p:spPr>
-          <a:xfrm>
-            <a:off x="4502252" y="730778"/>
+            <a:off x="4287619" y="843571"/>
             <a:ext cx="60960" cy="60960"/>
           </a:xfrm>
           <a:prstGeom prst="rect">
@@ -7194,12 +7150,276 @@
       </p:sp>
       <p:sp>
         <p:nvSpPr>
+          <p:cNvPr id="107" name="Rectangle 106"/>
+          <p:cNvSpPr/>
+          <p:nvPr/>
+        </p:nvSpPr>
+        <p:spPr>
+          <a:xfrm>
+            <a:off x="4337232" y="864613"/>
+            <a:ext cx="27940" cy="27940"/>
+          </a:xfrm>
+          <a:prstGeom prst="rect">
+            <a:avLst/>
+          </a:prstGeom>
+          <a:solidFill>
+            <a:srgbClr val="215499"/>
+          </a:solidFill>
+          <a:ln>
+            <a:noFill/>
+          </a:ln>
+          <a:effectLst/>
+        </p:spPr>
+        <p:style>
+          <a:lnRef idx="1">
+            <a:schemeClr val="accent1"/>
+          </a:lnRef>
+          <a:fillRef idx="3">
+            <a:schemeClr val="accent1"/>
+          </a:fillRef>
+          <a:effectRef idx="2">
+            <a:schemeClr val="accent1"/>
+          </a:effectRef>
+          <a:fontRef idx="minor">
+            <a:schemeClr val="lt1"/>
+          </a:fontRef>
+        </p:style>
+        <p:txBody>
+          <a:bodyPr rtlCol="0" anchor="ctr"/>
+          <a:lstStyle/>
+          <a:p>
+            <a:pPr algn="ctr"/>
+          </a:p>
+        </p:txBody>
+      </p:sp>
+      <p:sp>
+        <p:nvSpPr>
           <p:cNvPr id="108" name="Rectangle 107"/>
           <p:cNvSpPr/>
           <p:nvPr/>
         </p:nvSpPr>
         <p:spPr>
           <a:xfrm>
+            <a:off x="4379945" y="906566"/>
+            <a:ext cx="27940" cy="27940"/>
+          </a:xfrm>
+          <a:prstGeom prst="rect">
+            <a:avLst/>
+          </a:prstGeom>
+          <a:solidFill>
+            <a:srgbClr val="215499"/>
+          </a:solidFill>
+          <a:ln>
+            <a:noFill/>
+          </a:ln>
+          <a:effectLst/>
+        </p:spPr>
+        <p:style>
+          <a:lnRef idx="1">
+            <a:schemeClr val="accent1"/>
+          </a:lnRef>
+          <a:fillRef idx="3">
+            <a:schemeClr val="accent1"/>
+          </a:fillRef>
+          <a:effectRef idx="2">
+            <a:schemeClr val="accent1"/>
+          </a:effectRef>
+          <a:fontRef idx="minor">
+            <a:schemeClr val="lt1"/>
+          </a:fontRef>
+        </p:style>
+        <p:txBody>
+          <a:bodyPr rtlCol="0" anchor="ctr"/>
+          <a:lstStyle/>
+          <a:p>
+            <a:pPr algn="ctr"/>
+          </a:p>
+        </p:txBody>
+      </p:sp>
+      <p:sp>
+        <p:nvSpPr>
+          <p:cNvPr id="109" name="Rectangle 108"/>
+          <p:cNvSpPr/>
+          <p:nvPr/>
+        </p:nvSpPr>
+        <p:spPr>
+          <a:xfrm>
+            <a:off x="4383148" y="885724"/>
+            <a:ext cx="27940" cy="27940"/>
+          </a:xfrm>
+          <a:prstGeom prst="rect">
+            <a:avLst/>
+          </a:prstGeom>
+          <a:solidFill>
+            <a:srgbClr val="215499"/>
+          </a:solidFill>
+          <a:ln>
+            <a:noFill/>
+          </a:ln>
+          <a:effectLst/>
+        </p:spPr>
+        <p:style>
+          <a:lnRef idx="1">
+            <a:schemeClr val="accent1"/>
+          </a:lnRef>
+          <a:fillRef idx="3">
+            <a:schemeClr val="accent1"/>
+          </a:fillRef>
+          <a:effectRef idx="2">
+            <a:schemeClr val="accent1"/>
+          </a:effectRef>
+          <a:fontRef idx="minor">
+            <a:schemeClr val="lt1"/>
+          </a:fontRef>
+        </p:style>
+        <p:txBody>
+          <a:bodyPr rtlCol="0" anchor="ctr"/>
+          <a:lstStyle/>
+          <a:p>
+            <a:pPr algn="ctr"/>
+          </a:p>
+        </p:txBody>
+      </p:sp>
+      <p:sp>
+        <p:nvSpPr>
+          <p:cNvPr id="110" name="Rectangle 109"/>
+          <p:cNvSpPr/>
+          <p:nvPr/>
+        </p:nvSpPr>
+        <p:spPr>
+          <a:xfrm>
+            <a:off x="4438675" y="876222"/>
+            <a:ext cx="27940" cy="27940"/>
+          </a:xfrm>
+          <a:prstGeom prst="rect">
+            <a:avLst/>
+          </a:prstGeom>
+          <a:solidFill>
+            <a:srgbClr val="215499"/>
+          </a:solidFill>
+          <a:ln>
+            <a:noFill/>
+          </a:ln>
+          <a:effectLst/>
+        </p:spPr>
+        <p:style>
+          <a:lnRef idx="1">
+            <a:schemeClr val="accent1"/>
+          </a:lnRef>
+          <a:fillRef idx="3">
+            <a:schemeClr val="accent1"/>
+          </a:fillRef>
+          <a:effectRef idx="2">
+            <a:schemeClr val="accent1"/>
+          </a:effectRef>
+          <a:fontRef idx="minor">
+            <a:schemeClr val="lt1"/>
+          </a:fontRef>
+        </p:style>
+        <p:txBody>
+          <a:bodyPr rtlCol="0" anchor="ctr"/>
+          <a:lstStyle/>
+          <a:p>
+            <a:pPr algn="ctr"/>
+          </a:p>
+        </p:txBody>
+      </p:sp>
+      <p:sp>
+        <p:nvSpPr>
+          <p:cNvPr id="111" name="Rectangle 110"/>
+          <p:cNvSpPr/>
+          <p:nvPr/>
+        </p:nvSpPr>
+        <p:spPr>
+          <a:xfrm>
+            <a:off x="4492066" y="808590"/>
+            <a:ext cx="27940" cy="27940"/>
+          </a:xfrm>
+          <a:prstGeom prst="rect">
+            <a:avLst/>
+          </a:prstGeom>
+          <a:solidFill>
+            <a:srgbClr val="215499"/>
+          </a:solidFill>
+          <a:ln>
+            <a:noFill/>
+          </a:ln>
+          <a:effectLst/>
+        </p:spPr>
+        <p:style>
+          <a:lnRef idx="1">
+            <a:schemeClr val="accent1"/>
+          </a:lnRef>
+          <a:fillRef idx="3">
+            <a:schemeClr val="accent1"/>
+          </a:fillRef>
+          <a:effectRef idx="2">
+            <a:schemeClr val="accent1"/>
+          </a:effectRef>
+          <a:fontRef idx="minor">
+            <a:schemeClr val="lt1"/>
+          </a:fontRef>
+        </p:style>
+        <p:txBody>
+          <a:bodyPr rtlCol="0" anchor="ctr"/>
+          <a:lstStyle/>
+          <a:p>
+            <a:pPr algn="ctr"/>
+          </a:p>
+        </p:txBody>
+      </p:sp>
+      <p:sp>
+        <p:nvSpPr>
+          <p:cNvPr id="112" name="Rectangle 111"/>
+          <p:cNvSpPr/>
+          <p:nvPr/>
+        </p:nvSpPr>
+        <p:spPr>
+          <a:xfrm>
+            <a:off x="4518762" y="747288"/>
+            <a:ext cx="27940" cy="27940"/>
+          </a:xfrm>
+          <a:prstGeom prst="rect">
+            <a:avLst/>
+          </a:prstGeom>
+          <a:solidFill>
+            <a:srgbClr val="215499"/>
+          </a:solidFill>
+          <a:ln>
+            <a:noFill/>
+          </a:ln>
+          <a:effectLst/>
+        </p:spPr>
+        <p:style>
+          <a:lnRef idx="1">
+            <a:schemeClr val="accent1"/>
+          </a:lnRef>
+          <a:fillRef idx="3">
+            <a:schemeClr val="accent1"/>
+          </a:fillRef>
+          <a:effectRef idx="2">
+            <a:schemeClr val="accent1"/>
+          </a:effectRef>
+          <a:fontRef idx="minor">
+            <a:schemeClr val="lt1"/>
+          </a:fontRef>
+        </p:style>
+        <p:txBody>
+          <a:bodyPr rtlCol="0" anchor="ctr"/>
+          <a:lstStyle/>
+          <a:p>
+            <a:pPr algn="ctr"/>
+          </a:p>
+        </p:txBody>
+      </p:sp>
+      <p:sp>
+        <p:nvSpPr>
+          <p:cNvPr id="113" name="Rectangle 112"/>
+          <p:cNvSpPr/>
+          <p:nvPr/>
+        </p:nvSpPr>
+        <p:spPr>
+          <a:xfrm>
             <a:off x="4556136" y="838197"/>
             <a:ext cx="27940" cy="27940"/>
           </a:xfrm>
@@ -7238,7 +7458,7 @@
       </p:sp>
       <p:sp>
         <p:nvSpPr>
-          <p:cNvPr id="109" name="Rectangle 108"/>
+          <p:cNvPr id="114" name="Rectangle 113"/>
           <p:cNvSpPr/>
           <p:nvPr/>
         </p:nvSpPr>
@@ -7282,7 +7502,7 @@
       </p:sp>
       <p:sp>
         <p:nvSpPr>
-          <p:cNvPr id="110" name="Rectangle 109"/>
+          <p:cNvPr id="115" name="Rectangle 114"/>
           <p:cNvSpPr/>
           <p:nvPr/>
         </p:nvSpPr>
@@ -7326,7 +7546,139 @@
       </p:sp>
       <p:sp>
         <p:nvSpPr>
-          <p:cNvPr id="111" name="Rectangle 110"/>
+          <p:cNvPr id="116" name="Rectangle 115"/>
+          <p:cNvSpPr/>
+          <p:nvPr/>
+        </p:nvSpPr>
+        <p:spPr>
+          <a:xfrm>
+            <a:off x="4583899" y="864320"/>
+            <a:ext cx="27940" cy="27940"/>
+          </a:xfrm>
+          <a:prstGeom prst="rect">
+            <a:avLst/>
+          </a:prstGeom>
+          <a:solidFill>
+            <a:srgbClr val="215499"/>
+          </a:solidFill>
+          <a:ln>
+            <a:noFill/>
+          </a:ln>
+          <a:effectLst/>
+        </p:spPr>
+        <p:style>
+          <a:lnRef idx="1">
+            <a:schemeClr val="accent1"/>
+          </a:lnRef>
+          <a:fillRef idx="3">
+            <a:schemeClr val="accent1"/>
+          </a:fillRef>
+          <a:effectRef idx="2">
+            <a:schemeClr val="accent1"/>
+          </a:effectRef>
+          <a:fontRef idx="minor">
+            <a:schemeClr val="lt1"/>
+          </a:fontRef>
+        </p:style>
+        <p:txBody>
+          <a:bodyPr rtlCol="0" anchor="ctr"/>
+          <a:lstStyle/>
+          <a:p>
+            <a:pPr algn="ctr"/>
+          </a:p>
+        </p:txBody>
+      </p:sp>
+      <p:sp>
+        <p:nvSpPr>
+          <p:cNvPr id="117" name="Rectangle 116"/>
+          <p:cNvSpPr/>
+          <p:nvPr/>
+        </p:nvSpPr>
+        <p:spPr>
+          <a:xfrm>
+            <a:off x="4615934" y="775091"/>
+            <a:ext cx="27940" cy="27940"/>
+          </a:xfrm>
+          <a:prstGeom prst="rect">
+            <a:avLst/>
+          </a:prstGeom>
+          <a:solidFill>
+            <a:srgbClr val="215499"/>
+          </a:solidFill>
+          <a:ln>
+            <a:noFill/>
+          </a:ln>
+          <a:effectLst/>
+        </p:spPr>
+        <p:style>
+          <a:lnRef idx="1">
+            <a:schemeClr val="accent1"/>
+          </a:lnRef>
+          <a:fillRef idx="3">
+            <a:schemeClr val="accent1"/>
+          </a:fillRef>
+          <a:effectRef idx="2">
+            <a:schemeClr val="accent1"/>
+          </a:effectRef>
+          <a:fontRef idx="minor">
+            <a:schemeClr val="lt1"/>
+          </a:fontRef>
+        </p:style>
+        <p:txBody>
+          <a:bodyPr rtlCol="0" anchor="ctr"/>
+          <a:lstStyle/>
+          <a:p>
+            <a:pPr algn="ctr"/>
+          </a:p>
+        </p:txBody>
+      </p:sp>
+      <p:sp>
+        <p:nvSpPr>
+          <p:cNvPr id="118" name="Rectangle 117"/>
+          <p:cNvSpPr/>
+          <p:nvPr/>
+        </p:nvSpPr>
+        <p:spPr>
+          <a:xfrm>
+            <a:off x="4729124" y="871550"/>
+            <a:ext cx="27940" cy="27940"/>
+          </a:xfrm>
+          <a:prstGeom prst="rect">
+            <a:avLst/>
+          </a:prstGeom>
+          <a:solidFill>
+            <a:srgbClr val="215499"/>
+          </a:solidFill>
+          <a:ln>
+            <a:noFill/>
+          </a:ln>
+          <a:effectLst/>
+        </p:spPr>
+        <p:style>
+          <a:lnRef idx="1">
+            <a:schemeClr val="accent1"/>
+          </a:lnRef>
+          <a:fillRef idx="3">
+            <a:schemeClr val="accent1"/>
+          </a:fillRef>
+          <a:effectRef idx="2">
+            <a:schemeClr val="accent1"/>
+          </a:effectRef>
+          <a:fontRef idx="minor">
+            <a:schemeClr val="lt1"/>
+          </a:fontRef>
+        </p:style>
+        <p:txBody>
+          <a:bodyPr rtlCol="0" anchor="ctr"/>
+          <a:lstStyle/>
+          <a:p>
+            <a:pPr algn="ctr"/>
+          </a:p>
+        </p:txBody>
+      </p:sp>
+      <p:sp>
+        <p:nvSpPr>
+          <p:cNvPr id="119" name="Rectangle 118"/>
           <p:cNvSpPr/>
           <p:nvPr/>
         </p:nvSpPr>
@@ -7370,7 +7722,7 @@
       </p:sp>
       <p:sp>
         <p:nvSpPr>
-          <p:cNvPr id="112" name="Rectangle 111"/>
+          <p:cNvPr id="120" name="Rectangle 119"/>
           <p:cNvSpPr/>
           <p:nvPr/>
         </p:nvSpPr>
@@ -7414,7 +7766,7 @@
       </p:sp>
       <p:sp>
         <p:nvSpPr>
-          <p:cNvPr id="113" name="Rectangle 112"/>
+          <p:cNvPr id="121" name="Rectangle 120"/>
           <p:cNvSpPr/>
           <p:nvPr/>
         </p:nvSpPr>
@@ -7458,7 +7810,7 @@
       </p:sp>
       <p:sp>
         <p:nvSpPr>
-          <p:cNvPr id="114" name="Rectangle 113"/>
+          <p:cNvPr id="122" name="Rectangle 121"/>
           <p:cNvSpPr/>
           <p:nvPr/>
         </p:nvSpPr>
@@ -7502,497 +7854,13 @@
       </p:sp>
       <p:sp>
         <p:nvSpPr>
-          <p:cNvPr id="115" name="Rectangle 114"/>
-          <p:cNvSpPr/>
-          <p:nvPr/>
-        </p:nvSpPr>
-        <p:spPr>
-          <a:xfrm>
-            <a:off x="4497406" y="1247037"/>
-            <a:ext cx="27940" cy="27940"/>
-          </a:xfrm>
-          <a:prstGeom prst="rect">
-            <a:avLst/>
-          </a:prstGeom>
-          <a:solidFill>
-            <a:srgbClr val="AD6B0A"/>
-          </a:solidFill>
-          <a:ln>
-            <a:noFill/>
-          </a:ln>
-          <a:effectLst/>
-        </p:spPr>
-        <p:style>
-          <a:lnRef idx="1">
-            <a:schemeClr val="accent1"/>
-          </a:lnRef>
-          <a:fillRef idx="3">
-            <a:schemeClr val="accent1"/>
-          </a:fillRef>
-          <a:effectRef idx="2">
-            <a:schemeClr val="accent1"/>
-          </a:effectRef>
-          <a:fontRef idx="minor">
-            <a:schemeClr val="lt1"/>
-          </a:fontRef>
-        </p:style>
-        <p:txBody>
-          <a:bodyPr rtlCol="0" anchor="ctr"/>
-          <a:lstStyle/>
-          <a:p>
-            <a:pPr algn="ctr"/>
-          </a:p>
-        </p:txBody>
-      </p:sp>
-      <p:sp>
-        <p:nvSpPr>
-          <p:cNvPr id="116" name="Rectangle 115"/>
-          <p:cNvSpPr/>
-          <p:nvPr/>
-        </p:nvSpPr>
-        <p:spPr>
-          <a:xfrm>
-            <a:off x="4589238" y="1293049"/>
-            <a:ext cx="27940" cy="27940"/>
-          </a:xfrm>
-          <a:prstGeom prst="rect">
-            <a:avLst/>
-          </a:prstGeom>
-          <a:solidFill>
-            <a:srgbClr val="AD6B0A"/>
-          </a:solidFill>
-          <a:ln>
-            <a:noFill/>
-          </a:ln>
-          <a:effectLst/>
-        </p:spPr>
-        <p:style>
-          <a:lnRef idx="1">
-            <a:schemeClr val="accent1"/>
-          </a:lnRef>
-          <a:fillRef idx="3">
-            <a:schemeClr val="accent1"/>
-          </a:fillRef>
-          <a:effectRef idx="2">
-            <a:schemeClr val="accent1"/>
-          </a:effectRef>
-          <a:fontRef idx="minor">
-            <a:schemeClr val="lt1"/>
-          </a:fontRef>
-        </p:style>
-        <p:txBody>
-          <a:bodyPr rtlCol="0" anchor="ctr"/>
-          <a:lstStyle/>
-          <a:p>
-            <a:pPr algn="ctr"/>
-          </a:p>
-        </p:txBody>
-      </p:sp>
-      <p:sp>
-        <p:nvSpPr>
-          <p:cNvPr id="117" name="Rectangle 116"/>
-          <p:cNvSpPr/>
-          <p:nvPr/>
-        </p:nvSpPr>
-        <p:spPr>
-          <a:xfrm>
-            <a:off x="4618070" y="1128665"/>
-            <a:ext cx="27940" cy="27940"/>
-          </a:xfrm>
-          <a:prstGeom prst="rect">
-            <a:avLst/>
-          </a:prstGeom>
-          <a:solidFill>
-            <a:srgbClr val="AD6B0A"/>
-          </a:solidFill>
-          <a:ln>
-            <a:noFill/>
-          </a:ln>
-          <a:effectLst/>
-        </p:spPr>
-        <p:style>
-          <a:lnRef idx="1">
-            <a:schemeClr val="accent1"/>
-          </a:lnRef>
-          <a:fillRef idx="3">
-            <a:schemeClr val="accent1"/>
-          </a:fillRef>
-          <a:effectRef idx="2">
-            <a:schemeClr val="accent1"/>
-          </a:effectRef>
-          <a:fontRef idx="minor">
-            <a:schemeClr val="lt1"/>
-          </a:fontRef>
-        </p:style>
-        <p:txBody>
-          <a:bodyPr rtlCol="0" anchor="ctr"/>
-          <a:lstStyle/>
-          <a:p>
-            <a:pPr algn="ctr"/>
-          </a:p>
-        </p:txBody>
-      </p:sp>
-      <p:sp>
-        <p:nvSpPr>
-          <p:cNvPr id="118" name="Rectangle 117"/>
-          <p:cNvSpPr/>
-          <p:nvPr/>
-        </p:nvSpPr>
-        <p:spPr>
-          <a:xfrm>
-            <a:off x="4627680" y="1234984"/>
-            <a:ext cx="27940" cy="27940"/>
-          </a:xfrm>
-          <a:prstGeom prst="rect">
-            <a:avLst/>
-          </a:prstGeom>
-          <a:solidFill>
-            <a:srgbClr val="AD6B0A"/>
-          </a:solidFill>
-          <a:ln>
-            <a:noFill/>
-          </a:ln>
-          <a:effectLst/>
-        </p:spPr>
-        <p:style>
-          <a:lnRef idx="1">
-            <a:schemeClr val="accent1"/>
-          </a:lnRef>
-          <a:fillRef idx="3">
-            <a:schemeClr val="accent1"/>
-          </a:fillRef>
-          <a:effectRef idx="2">
-            <a:schemeClr val="accent1"/>
-          </a:effectRef>
-          <a:fontRef idx="minor">
-            <a:schemeClr val="lt1"/>
-          </a:fontRef>
-        </p:style>
-        <p:txBody>
-          <a:bodyPr rtlCol="0" anchor="ctr"/>
-          <a:lstStyle/>
-          <a:p>
-            <a:pPr algn="ctr"/>
-          </a:p>
-        </p:txBody>
-      </p:sp>
-      <p:sp>
-        <p:nvSpPr>
-          <p:cNvPr id="119" name="Rectangle 118"/>
-          <p:cNvSpPr/>
-          <p:nvPr/>
-        </p:nvSpPr>
-        <p:spPr>
-          <a:xfrm>
-            <a:off x="4707767" y="1152715"/>
-            <a:ext cx="27940" cy="27940"/>
-          </a:xfrm>
-          <a:prstGeom prst="rect">
-            <a:avLst/>
-          </a:prstGeom>
-          <a:solidFill>
-            <a:srgbClr val="AD6B0A"/>
-          </a:solidFill>
-          <a:ln>
-            <a:noFill/>
-          </a:ln>
-          <a:effectLst/>
-        </p:spPr>
-        <p:style>
-          <a:lnRef idx="1">
-            <a:schemeClr val="accent1"/>
-          </a:lnRef>
-          <a:fillRef idx="3">
-            <a:schemeClr val="accent1"/>
-          </a:fillRef>
-          <a:effectRef idx="2">
-            <a:schemeClr val="accent1"/>
-          </a:effectRef>
-          <a:fontRef idx="minor">
-            <a:schemeClr val="lt1"/>
-          </a:fontRef>
-        </p:style>
-        <p:txBody>
-          <a:bodyPr rtlCol="0" anchor="ctr"/>
-          <a:lstStyle/>
-          <a:p>
-            <a:pPr algn="ctr"/>
-          </a:p>
-        </p:txBody>
-      </p:sp>
-      <p:sp>
-        <p:nvSpPr>
-          <p:cNvPr id="120" name="Rectangle 119"/>
-          <p:cNvSpPr/>
-          <p:nvPr/>
-        </p:nvSpPr>
-        <p:spPr>
-          <a:xfrm>
-            <a:off x="4748344" y="1089416"/>
-            <a:ext cx="27940" cy="27940"/>
-          </a:xfrm>
-          <a:prstGeom prst="rect">
-            <a:avLst/>
-          </a:prstGeom>
-          <a:solidFill>
-            <a:srgbClr val="AD6B0A"/>
-          </a:solidFill>
-          <a:ln>
-            <a:noFill/>
-          </a:ln>
-          <a:effectLst/>
-        </p:spPr>
-        <p:style>
-          <a:lnRef idx="1">
-            <a:schemeClr val="accent1"/>
-          </a:lnRef>
-          <a:fillRef idx="3">
-            <a:schemeClr val="accent1"/>
-          </a:fillRef>
-          <a:effectRef idx="2">
-            <a:schemeClr val="accent1"/>
-          </a:effectRef>
-          <a:fontRef idx="minor">
-            <a:schemeClr val="lt1"/>
-          </a:fontRef>
-        </p:style>
-        <p:txBody>
-          <a:bodyPr rtlCol="0" anchor="ctr"/>
-          <a:lstStyle/>
-          <a:p>
-            <a:pPr algn="ctr"/>
-          </a:p>
-        </p:txBody>
-      </p:sp>
-      <p:sp>
-        <p:nvSpPr>
-          <p:cNvPr id="121" name="Rectangle 120"/>
-          <p:cNvSpPr/>
-          <p:nvPr/>
-        </p:nvSpPr>
-        <p:spPr>
-          <a:xfrm>
-            <a:off x="4756887" y="1237878"/>
-            <a:ext cx="27940" cy="27940"/>
-          </a:xfrm>
-          <a:prstGeom prst="rect">
-            <a:avLst/>
-          </a:prstGeom>
-          <a:solidFill>
-            <a:srgbClr val="AD6B0A"/>
-          </a:solidFill>
-          <a:ln>
-            <a:noFill/>
-          </a:ln>
-          <a:effectLst/>
-        </p:spPr>
-        <p:style>
-          <a:lnRef idx="1">
-            <a:schemeClr val="accent1"/>
-          </a:lnRef>
-          <a:fillRef idx="3">
-            <a:schemeClr val="accent1"/>
-          </a:fillRef>
-          <a:effectRef idx="2">
-            <a:schemeClr val="accent1"/>
-          </a:effectRef>
-          <a:fontRef idx="minor">
-            <a:schemeClr val="lt1"/>
-          </a:fontRef>
-        </p:style>
-        <p:txBody>
-          <a:bodyPr rtlCol="0" anchor="ctr"/>
-          <a:lstStyle/>
-          <a:p>
-            <a:pPr algn="ctr"/>
-          </a:p>
-        </p:txBody>
-      </p:sp>
-      <p:sp>
-        <p:nvSpPr>
-          <p:cNvPr id="122" name="Rectangle 121"/>
-          <p:cNvSpPr/>
-          <p:nvPr/>
-        </p:nvSpPr>
-        <p:spPr>
-          <a:xfrm>
-            <a:off x="4779311" y="1183937"/>
-            <a:ext cx="27940" cy="27940"/>
-          </a:xfrm>
-          <a:prstGeom prst="rect">
-            <a:avLst/>
-          </a:prstGeom>
-          <a:solidFill>
-            <a:srgbClr val="AD6B0A"/>
-          </a:solidFill>
-          <a:ln>
-            <a:noFill/>
-          </a:ln>
-          <a:effectLst/>
-        </p:spPr>
-        <p:style>
-          <a:lnRef idx="1">
-            <a:schemeClr val="accent1"/>
-          </a:lnRef>
-          <a:fillRef idx="3">
-            <a:schemeClr val="accent1"/>
-          </a:fillRef>
-          <a:effectRef idx="2">
-            <a:schemeClr val="accent1"/>
-          </a:effectRef>
-          <a:fontRef idx="minor">
-            <a:schemeClr val="lt1"/>
-          </a:fontRef>
-        </p:style>
-        <p:txBody>
-          <a:bodyPr rtlCol="0" anchor="ctr"/>
-          <a:lstStyle/>
-          <a:p>
-            <a:pPr algn="ctr"/>
-          </a:p>
-        </p:txBody>
-      </p:sp>
-      <p:sp>
-        <p:nvSpPr>
           <p:cNvPr id="123" name="Rectangle 122"/>
           <p:cNvSpPr/>
           <p:nvPr/>
         </p:nvSpPr>
         <p:spPr>
           <a:xfrm>
-            <a:off x="4813482" y="1130511"/>
-            <a:ext cx="27940" cy="27940"/>
-          </a:xfrm>
-          <a:prstGeom prst="rect">
-            <a:avLst/>
-          </a:prstGeom>
-          <a:solidFill>
-            <a:srgbClr val="AD6B0A"/>
-          </a:solidFill>
-          <a:ln>
-            <a:noFill/>
-          </a:ln>
-          <a:effectLst/>
-        </p:spPr>
-        <p:style>
-          <a:lnRef idx="1">
-            <a:schemeClr val="accent1"/>
-          </a:lnRef>
-          <a:fillRef idx="3">
-            <a:schemeClr val="accent1"/>
-          </a:fillRef>
-          <a:effectRef idx="2">
-            <a:schemeClr val="accent1"/>
-          </a:effectRef>
-          <a:fontRef idx="minor">
-            <a:schemeClr val="lt1"/>
-          </a:fontRef>
-        </p:style>
-        <p:txBody>
-          <a:bodyPr rtlCol="0" anchor="ctr"/>
-          <a:lstStyle/>
-          <a:p>
-            <a:pPr algn="ctr"/>
-          </a:p>
-        </p:txBody>
-      </p:sp>
-      <p:sp>
-        <p:nvSpPr>
-          <p:cNvPr id="124" name="Rectangle 123"/>
-          <p:cNvSpPr/>
-          <p:nvPr/>
-        </p:nvSpPr>
-        <p:spPr>
-          <a:xfrm>
-            <a:off x="4819889" y="1198496"/>
-            <a:ext cx="27940" cy="27940"/>
-          </a:xfrm>
-          <a:prstGeom prst="rect">
-            <a:avLst/>
-          </a:prstGeom>
-          <a:solidFill>
-            <a:srgbClr val="AD6B0A"/>
-          </a:solidFill>
-          <a:ln>
-            <a:noFill/>
-          </a:ln>
-          <a:effectLst/>
-        </p:spPr>
-        <p:style>
-          <a:lnRef idx="1">
-            <a:schemeClr val="accent1"/>
-          </a:lnRef>
-          <a:fillRef idx="3">
-            <a:schemeClr val="accent1"/>
-          </a:fillRef>
-          <a:effectRef idx="2">
-            <a:schemeClr val="accent1"/>
-          </a:effectRef>
-          <a:fontRef idx="minor">
-            <a:schemeClr val="lt1"/>
-          </a:fontRef>
-        </p:style>
-        <p:txBody>
-          <a:bodyPr rtlCol="0" anchor="ctr"/>
-          <a:lstStyle/>
-          <a:p>
-            <a:pPr algn="ctr"/>
-          </a:p>
-        </p:txBody>
-      </p:sp>
-      <p:sp>
-        <p:nvSpPr>
-          <p:cNvPr id="125" name="Rectangle 124"/>
-          <p:cNvSpPr/>
-          <p:nvPr/>
-        </p:nvSpPr>
-        <p:spPr>
-          <a:xfrm>
-            <a:off x="4843381" y="1155800"/>
-            <a:ext cx="27940" cy="27940"/>
-          </a:xfrm>
-          <a:prstGeom prst="rect">
-            <a:avLst/>
-          </a:prstGeom>
-          <a:solidFill>
-            <a:srgbClr val="AD6B0A"/>
-          </a:solidFill>
-          <a:ln>
-            <a:noFill/>
-          </a:ln>
-          <a:effectLst/>
-        </p:spPr>
-        <p:style>
-          <a:lnRef idx="1">
-            <a:schemeClr val="accent1"/>
-          </a:lnRef>
-          <a:fillRef idx="3">
-            <a:schemeClr val="accent1"/>
-          </a:fillRef>
-          <a:effectRef idx="2">
-            <a:schemeClr val="accent1"/>
-          </a:effectRef>
-          <a:fontRef idx="minor">
-            <a:schemeClr val="lt1"/>
-          </a:fontRef>
-        </p:style>
-        <p:txBody>
-          <a:bodyPr rtlCol="0" anchor="ctr"/>
-          <a:lstStyle/>
-          <a:p>
-            <a:pPr algn="ctr"/>
-          </a:p>
-        </p:txBody>
-      </p:sp>
-      <p:sp>
-        <p:nvSpPr>
-          <p:cNvPr id="126" name="Rectangle 125"/>
-          <p:cNvSpPr/>
-          <p:nvPr/>
-        </p:nvSpPr>
-        <p:spPr>
-          <a:xfrm>
-            <a:off x="4841820" y="1170263"/>
+            <a:off x="4480896" y="1230527"/>
             <a:ext cx="60960" cy="60960"/>
           </a:xfrm>
           <a:prstGeom prst="rect">
@@ -8032,20 +7900,152 @@
       </p:sp>
       <p:sp>
         <p:nvSpPr>
+          <p:cNvPr id="124" name="Rectangle 123"/>
+          <p:cNvSpPr/>
+          <p:nvPr/>
+        </p:nvSpPr>
+        <p:spPr>
+          <a:xfrm>
+            <a:off x="4589238" y="1293049"/>
+            <a:ext cx="27940" cy="27940"/>
+          </a:xfrm>
+          <a:prstGeom prst="rect">
+            <a:avLst/>
+          </a:prstGeom>
+          <a:solidFill>
+            <a:srgbClr val="AD6B0A"/>
+          </a:solidFill>
+          <a:ln>
+            <a:noFill/>
+          </a:ln>
+          <a:effectLst/>
+        </p:spPr>
+        <p:style>
+          <a:lnRef idx="1">
+            <a:schemeClr val="accent1"/>
+          </a:lnRef>
+          <a:fillRef idx="3">
+            <a:schemeClr val="accent1"/>
+          </a:fillRef>
+          <a:effectRef idx="2">
+            <a:schemeClr val="accent1"/>
+          </a:effectRef>
+          <a:fontRef idx="minor">
+            <a:schemeClr val="lt1"/>
+          </a:fontRef>
+        </p:style>
+        <p:txBody>
+          <a:bodyPr rtlCol="0" anchor="ctr"/>
+          <a:lstStyle/>
+          <a:p>
+            <a:pPr algn="ctr"/>
+          </a:p>
+        </p:txBody>
+      </p:sp>
+      <p:sp>
+        <p:nvSpPr>
+          <p:cNvPr id="125" name="Rectangle 124"/>
+          <p:cNvSpPr/>
+          <p:nvPr/>
+        </p:nvSpPr>
+        <p:spPr>
+          <a:xfrm>
+            <a:off x="4618070" y="1128665"/>
+            <a:ext cx="27940" cy="27940"/>
+          </a:xfrm>
+          <a:prstGeom prst="rect">
+            <a:avLst/>
+          </a:prstGeom>
+          <a:solidFill>
+            <a:srgbClr val="AD6B0A"/>
+          </a:solidFill>
+          <a:ln>
+            <a:noFill/>
+          </a:ln>
+          <a:effectLst/>
+        </p:spPr>
+        <p:style>
+          <a:lnRef idx="1">
+            <a:schemeClr val="accent1"/>
+          </a:lnRef>
+          <a:fillRef idx="3">
+            <a:schemeClr val="accent1"/>
+          </a:fillRef>
+          <a:effectRef idx="2">
+            <a:schemeClr val="accent1"/>
+          </a:effectRef>
+          <a:fontRef idx="minor">
+            <a:schemeClr val="lt1"/>
+          </a:fontRef>
+        </p:style>
+        <p:txBody>
+          <a:bodyPr rtlCol="0" anchor="ctr"/>
+          <a:lstStyle/>
+          <a:p>
+            <a:pPr algn="ctr"/>
+          </a:p>
+        </p:txBody>
+      </p:sp>
+      <p:sp>
+        <p:nvSpPr>
+          <p:cNvPr id="126" name="Rectangle 125"/>
+          <p:cNvSpPr/>
+          <p:nvPr/>
+        </p:nvSpPr>
+        <p:spPr>
+          <a:xfrm>
+            <a:off x="4627680" y="1234984"/>
+            <a:ext cx="27940" cy="27940"/>
+          </a:xfrm>
+          <a:prstGeom prst="rect">
+            <a:avLst/>
+          </a:prstGeom>
+          <a:solidFill>
+            <a:srgbClr val="AD6B0A"/>
+          </a:solidFill>
+          <a:ln>
+            <a:noFill/>
+          </a:ln>
+          <a:effectLst/>
+        </p:spPr>
+        <p:style>
+          <a:lnRef idx="1">
+            <a:schemeClr val="accent1"/>
+          </a:lnRef>
+          <a:fillRef idx="3">
+            <a:schemeClr val="accent1"/>
+          </a:fillRef>
+          <a:effectRef idx="2">
+            <a:schemeClr val="accent1"/>
+          </a:effectRef>
+          <a:fontRef idx="minor">
+            <a:schemeClr val="lt1"/>
+          </a:fontRef>
+        </p:style>
+        <p:txBody>
+          <a:bodyPr rtlCol="0" anchor="ctr"/>
+          <a:lstStyle/>
+          <a:p>
+            <a:pPr algn="ctr"/>
+          </a:p>
+        </p:txBody>
+      </p:sp>
+      <p:sp>
+        <p:nvSpPr>
           <p:cNvPr id="127" name="Rectangle 126"/>
           <p:cNvSpPr/>
           <p:nvPr/>
         </p:nvSpPr>
         <p:spPr>
           <a:xfrm>
-            <a:off x="3516074" y="961766"/>
+            <a:off x="4707767" y="1152715"/>
             <a:ext cx="27940" cy="27940"/>
           </a:xfrm>
           <a:prstGeom prst="rect">
             <a:avLst/>
           </a:prstGeom>
           <a:solidFill>
-            <a:srgbClr val="19704F"/>
+            <a:srgbClr val="AD6B0A"/>
           </a:solidFill>
           <a:ln>
             <a:noFill/>
@@ -8082,14 +8082,14 @@
         </p:nvSpPr>
         <p:spPr>
           <a:xfrm>
-            <a:off x="3522481" y="917681"/>
+            <a:off x="4748344" y="1089416"/>
             <a:ext cx="27940" cy="27940"/>
           </a:xfrm>
           <a:prstGeom prst="rect">
             <a:avLst/>
           </a:prstGeom>
           <a:solidFill>
-            <a:srgbClr val="19704F"/>
+            <a:srgbClr val="AD6B0A"/>
           </a:solidFill>
           <a:ln>
             <a:noFill/>
@@ -8126,14 +8126,14 @@
         </p:nvSpPr>
         <p:spPr>
           <a:xfrm>
-            <a:off x="3654891" y="1084044"/>
+            <a:off x="4756887" y="1237878"/>
             <a:ext cx="27940" cy="27940"/>
           </a:xfrm>
           <a:prstGeom prst="rect">
             <a:avLst/>
           </a:prstGeom>
           <a:solidFill>
-            <a:srgbClr val="19704F"/>
+            <a:srgbClr val="AD6B0A"/>
           </a:solidFill>
           <a:ln>
             <a:noFill/>
@@ -8170,14 +8170,14 @@
         </p:nvSpPr>
         <p:spPr>
           <a:xfrm>
-            <a:off x="3709351" y="1102434"/>
+            <a:off x="4776108" y="1245243"/>
             <a:ext cx="27940" cy="27940"/>
           </a:xfrm>
           <a:prstGeom prst="rect">
             <a:avLst/>
           </a:prstGeom>
           <a:solidFill>
-            <a:srgbClr val="19704F"/>
+            <a:srgbClr val="AD6B0A"/>
           </a:solidFill>
           <a:ln>
             <a:noFill/>
@@ -8214,14 +8214,14 @@
         </p:nvSpPr>
         <p:spPr>
           <a:xfrm>
-            <a:off x="3918644" y="825853"/>
+            <a:off x="4779311" y="1183937"/>
             <a:ext cx="27940" cy="27940"/>
           </a:xfrm>
           <a:prstGeom prst="rect">
             <a:avLst/>
           </a:prstGeom>
           <a:solidFill>
-            <a:srgbClr val="19704F"/>
+            <a:srgbClr val="AD6B0A"/>
           </a:solidFill>
           <a:ln>
             <a:noFill/>
@@ -8258,14 +8258,14 @@
         </p:nvSpPr>
         <p:spPr>
           <a:xfrm>
-            <a:off x="3936797" y="845903"/>
+            <a:off x="4813482" y="1130511"/>
             <a:ext cx="27940" cy="27940"/>
           </a:xfrm>
           <a:prstGeom prst="rect">
             <a:avLst/>
           </a:prstGeom>
           <a:solidFill>
-            <a:srgbClr val="19704F"/>
+            <a:srgbClr val="AD6B0A"/>
           </a:solidFill>
           <a:ln>
             <a:noFill/>
@@ -8302,14 +8302,14 @@
         </p:nvSpPr>
         <p:spPr>
           <a:xfrm>
-            <a:off x="3986985" y="879137"/>
+            <a:off x="4819889" y="1198496"/>
             <a:ext cx="27940" cy="27940"/>
           </a:xfrm>
           <a:prstGeom prst="rect">
             <a:avLst/>
           </a:prstGeom>
           <a:solidFill>
-            <a:srgbClr val="19704F"/>
+            <a:srgbClr val="AD6B0A"/>
           </a:solidFill>
           <a:ln>
             <a:noFill/>
@@ -8346,14 +8346,14 @@
         </p:nvSpPr>
         <p:spPr>
           <a:xfrm>
-            <a:off x="4008342" y="975571"/>
+            <a:off x="4843381" y="1155800"/>
             <a:ext cx="27940" cy="27940"/>
           </a:xfrm>
           <a:prstGeom prst="rect">
             <a:avLst/>
           </a:prstGeom>
           <a:solidFill>
-            <a:srgbClr val="19704F"/>
+            <a:srgbClr val="AD6B0A"/>
           </a:solidFill>
           <a:ln>
             <a:noFill/>
@@ -8390,14 +8390,14 @@
         </p:nvSpPr>
         <p:spPr>
           <a:xfrm>
-            <a:off x="4205889" y="797654"/>
+            <a:off x="4844449" y="1223722"/>
             <a:ext cx="27940" cy="27940"/>
           </a:xfrm>
           <a:prstGeom prst="rect">
             <a:avLst/>
           </a:prstGeom>
           <a:solidFill>
-            <a:srgbClr val="19704F"/>
+            <a:srgbClr val="AD6B0A"/>
           </a:solidFill>
           <a:ln>
             <a:noFill/>
@@ -8434,14 +8434,14 @@
         </p:nvSpPr>
         <p:spPr>
           <a:xfrm>
-            <a:off x="4222974" y="876255"/>
+            <a:off x="4858330" y="1186773"/>
             <a:ext cx="27940" cy="27940"/>
           </a:xfrm>
           <a:prstGeom prst="rect">
             <a:avLst/>
           </a:prstGeom>
           <a:solidFill>
-            <a:srgbClr val="19704F"/>
+            <a:srgbClr val="AD6B0A"/>
           </a:solidFill>
           <a:ln>
             <a:noFill/>
@@ -8478,14 +8478,14 @@
         </p:nvSpPr>
         <p:spPr>
           <a:xfrm>
-            <a:off x="4246467" y="862834"/>
+            <a:off x="4867941" y="1220988"/>
             <a:ext cx="27940" cy="27940"/>
           </a:xfrm>
           <a:prstGeom prst="rect">
             <a:avLst/>
           </a:prstGeom>
           <a:solidFill>
-            <a:srgbClr val="19704F"/>
+            <a:srgbClr val="AD6B0A"/>
           </a:solidFill>
           <a:ln>
             <a:noFill/>
@@ -8522,14 +8522,14 @@
         </p:nvSpPr>
         <p:spPr>
           <a:xfrm>
-            <a:off x="4249670" y="883253"/>
+            <a:off x="4878619" y="1218810"/>
             <a:ext cx="27940" cy="27940"/>
           </a:xfrm>
           <a:prstGeom prst="rect">
             <a:avLst/>
           </a:prstGeom>
           <a:solidFill>
-            <a:srgbClr val="19704F"/>
+            <a:srgbClr val="AD6B0A"/>
           </a:solidFill>
           <a:ln>
             <a:noFill/>
@@ -8566,7 +8566,183 @@
         </p:nvSpPr>
         <p:spPr>
           <a:xfrm>
-            <a:off x="4416826" y="815126"/>
+            <a:off x="4879687" y="1206488"/>
+            <a:ext cx="27940" cy="27940"/>
+          </a:xfrm>
+          <a:prstGeom prst="rect">
+            <a:avLst/>
+          </a:prstGeom>
+          <a:solidFill>
+            <a:srgbClr val="AD6B0A"/>
+          </a:solidFill>
+          <a:ln>
+            <a:noFill/>
+          </a:ln>
+          <a:effectLst/>
+        </p:spPr>
+        <p:style>
+          <a:lnRef idx="1">
+            <a:schemeClr val="accent1"/>
+          </a:lnRef>
+          <a:fillRef idx="3">
+            <a:schemeClr val="accent1"/>
+          </a:fillRef>
+          <a:effectRef idx="2">
+            <a:schemeClr val="accent1"/>
+          </a:effectRef>
+          <a:fontRef idx="minor">
+            <a:schemeClr val="lt1"/>
+          </a:fontRef>
+        </p:style>
+        <p:txBody>
+          <a:bodyPr rtlCol="0" anchor="ctr"/>
+          <a:lstStyle/>
+          <a:p>
+            <a:pPr algn="ctr"/>
+          </a:p>
+        </p:txBody>
+      </p:sp>
+      <p:sp>
+        <p:nvSpPr>
+          <p:cNvPr id="140" name="Rectangle 139"/>
+          <p:cNvSpPr/>
+          <p:nvPr/>
+        </p:nvSpPr>
+        <p:spPr>
+          <a:xfrm>
+            <a:off x="4886094" y="1224643"/>
+            <a:ext cx="27940" cy="27940"/>
+          </a:xfrm>
+          <a:prstGeom prst="rect">
+            <a:avLst/>
+          </a:prstGeom>
+          <a:solidFill>
+            <a:srgbClr val="AD6B0A"/>
+          </a:solidFill>
+          <a:ln>
+            <a:noFill/>
+          </a:ln>
+          <a:effectLst/>
+        </p:spPr>
+        <p:style>
+          <a:lnRef idx="1">
+            <a:schemeClr val="accent1"/>
+          </a:lnRef>
+          <a:fillRef idx="3">
+            <a:schemeClr val="accent1"/>
+          </a:fillRef>
+          <a:effectRef idx="2">
+            <a:schemeClr val="accent1"/>
+          </a:effectRef>
+          <a:fontRef idx="minor">
+            <a:schemeClr val="lt1"/>
+          </a:fontRef>
+        </p:style>
+        <p:txBody>
+          <a:bodyPr rtlCol="0" anchor="ctr"/>
+          <a:lstStyle/>
+          <a:p>
+            <a:pPr algn="ctr"/>
+          </a:p>
+        </p:txBody>
+      </p:sp>
+      <p:sp>
+        <p:nvSpPr>
+          <p:cNvPr id="141" name="Rectangle 140"/>
+          <p:cNvSpPr/>
+          <p:nvPr/>
+        </p:nvSpPr>
+        <p:spPr>
+          <a:xfrm>
+            <a:off x="4888230" y="1210583"/>
+            <a:ext cx="27940" cy="27940"/>
+          </a:xfrm>
+          <a:prstGeom prst="rect">
+            <a:avLst/>
+          </a:prstGeom>
+          <a:solidFill>
+            <a:srgbClr val="AD6B0A"/>
+          </a:solidFill>
+          <a:ln>
+            <a:noFill/>
+          </a:ln>
+          <a:effectLst/>
+        </p:spPr>
+        <p:style>
+          <a:lnRef idx="1">
+            <a:schemeClr val="accent1"/>
+          </a:lnRef>
+          <a:fillRef idx="3">
+            <a:schemeClr val="accent1"/>
+          </a:fillRef>
+          <a:effectRef idx="2">
+            <a:schemeClr val="accent1"/>
+          </a:effectRef>
+          <a:fontRef idx="minor">
+            <a:schemeClr val="lt1"/>
+          </a:fontRef>
+        </p:style>
+        <p:txBody>
+          <a:bodyPr rtlCol="0" anchor="ctr"/>
+          <a:lstStyle/>
+          <a:p>
+            <a:pPr algn="ctr"/>
+          </a:p>
+        </p:txBody>
+      </p:sp>
+      <p:sp>
+        <p:nvSpPr>
+          <p:cNvPr id="142" name="Rectangle 141"/>
+          <p:cNvSpPr/>
+          <p:nvPr/>
+        </p:nvSpPr>
+        <p:spPr>
+          <a:xfrm>
+            <a:off x="4888230" y="1197484"/>
+            <a:ext cx="27940" cy="27940"/>
+          </a:xfrm>
+          <a:prstGeom prst="rect">
+            <a:avLst/>
+          </a:prstGeom>
+          <a:solidFill>
+            <a:srgbClr val="AD6B0A"/>
+          </a:solidFill>
+          <a:ln>
+            <a:noFill/>
+          </a:ln>
+          <a:effectLst/>
+        </p:spPr>
+        <p:style>
+          <a:lnRef idx="1">
+            <a:schemeClr val="accent1"/>
+          </a:lnRef>
+          <a:fillRef idx="3">
+            <a:schemeClr val="accent1"/>
+          </a:fillRef>
+          <a:effectRef idx="2">
+            <a:schemeClr val="accent1"/>
+          </a:effectRef>
+          <a:fontRef idx="minor">
+            <a:schemeClr val="lt1"/>
+          </a:fontRef>
+        </p:style>
+        <p:txBody>
+          <a:bodyPr rtlCol="0" anchor="ctr"/>
+          <a:lstStyle/>
+          <a:p>
+            <a:pPr algn="ctr"/>
+          </a:p>
+        </p:txBody>
+      </p:sp>
+      <p:sp>
+        <p:nvSpPr>
+          <p:cNvPr id="143" name="Rectangle 142"/>
+          <p:cNvSpPr/>
+          <p:nvPr/>
+        </p:nvSpPr>
+        <p:spPr>
+          <a:xfrm>
+            <a:off x="3499564" y="945256"/>
             <a:ext cx="60960" cy="60960"/>
           </a:xfrm>
           <a:prstGeom prst="rect">
@@ -8606,7 +8782,843 @@
       </p:sp>
       <p:sp>
         <p:nvSpPr>
-          <p:cNvPr id="140" name="Rectangle 139"/>
+          <p:cNvPr id="144" name="Rectangle 143"/>
+          <p:cNvSpPr/>
+          <p:nvPr/>
+        </p:nvSpPr>
+        <p:spPr>
+          <a:xfrm>
+            <a:off x="3522481" y="917681"/>
+            <a:ext cx="27940" cy="27940"/>
+          </a:xfrm>
+          <a:prstGeom prst="rect">
+            <a:avLst/>
+          </a:prstGeom>
+          <a:solidFill>
+            <a:srgbClr val="19704F"/>
+          </a:solidFill>
+          <a:ln>
+            <a:noFill/>
+          </a:ln>
+          <a:effectLst/>
+        </p:spPr>
+        <p:style>
+          <a:lnRef idx="1">
+            <a:schemeClr val="accent1"/>
+          </a:lnRef>
+          <a:fillRef idx="3">
+            <a:schemeClr val="accent1"/>
+          </a:fillRef>
+          <a:effectRef idx="2">
+            <a:schemeClr val="accent1"/>
+          </a:effectRef>
+          <a:fontRef idx="minor">
+            <a:schemeClr val="lt1"/>
+          </a:fontRef>
+        </p:style>
+        <p:txBody>
+          <a:bodyPr rtlCol="0" anchor="ctr"/>
+          <a:lstStyle/>
+          <a:p>
+            <a:pPr algn="ctr"/>
+          </a:p>
+        </p:txBody>
+      </p:sp>
+      <p:sp>
+        <p:nvSpPr>
+          <p:cNvPr id="145" name="Rectangle 144"/>
+          <p:cNvSpPr/>
+          <p:nvPr/>
+        </p:nvSpPr>
+        <p:spPr>
+          <a:xfrm>
+            <a:off x="3654891" y="1084044"/>
+            <a:ext cx="27940" cy="27940"/>
+          </a:xfrm>
+          <a:prstGeom prst="rect">
+            <a:avLst/>
+          </a:prstGeom>
+          <a:solidFill>
+            <a:srgbClr val="19704F"/>
+          </a:solidFill>
+          <a:ln>
+            <a:noFill/>
+          </a:ln>
+          <a:effectLst/>
+        </p:spPr>
+        <p:style>
+          <a:lnRef idx="1">
+            <a:schemeClr val="accent1"/>
+          </a:lnRef>
+          <a:fillRef idx="3">
+            <a:schemeClr val="accent1"/>
+          </a:fillRef>
+          <a:effectRef idx="2">
+            <a:schemeClr val="accent1"/>
+          </a:effectRef>
+          <a:fontRef idx="minor">
+            <a:schemeClr val="lt1"/>
+          </a:fontRef>
+        </p:style>
+        <p:txBody>
+          <a:bodyPr rtlCol="0" anchor="ctr"/>
+          <a:lstStyle/>
+          <a:p>
+            <a:pPr algn="ctr"/>
+          </a:p>
+        </p:txBody>
+      </p:sp>
+      <p:sp>
+        <p:nvSpPr>
+          <p:cNvPr id="146" name="Rectangle 145"/>
+          <p:cNvSpPr/>
+          <p:nvPr/>
+        </p:nvSpPr>
+        <p:spPr>
+          <a:xfrm>
+            <a:off x="3709351" y="1102434"/>
+            <a:ext cx="27940" cy="27940"/>
+          </a:xfrm>
+          <a:prstGeom prst="rect">
+            <a:avLst/>
+          </a:prstGeom>
+          <a:solidFill>
+            <a:srgbClr val="19704F"/>
+          </a:solidFill>
+          <a:ln>
+            <a:noFill/>
+          </a:ln>
+          <a:effectLst/>
+        </p:spPr>
+        <p:style>
+          <a:lnRef idx="1">
+            <a:schemeClr val="accent1"/>
+          </a:lnRef>
+          <a:fillRef idx="3">
+            <a:schemeClr val="accent1"/>
+          </a:fillRef>
+          <a:effectRef idx="2">
+            <a:schemeClr val="accent1"/>
+          </a:effectRef>
+          <a:fontRef idx="minor">
+            <a:schemeClr val="lt1"/>
+          </a:fontRef>
+        </p:style>
+        <p:txBody>
+          <a:bodyPr rtlCol="0" anchor="ctr"/>
+          <a:lstStyle/>
+          <a:p>
+            <a:pPr algn="ctr"/>
+          </a:p>
+        </p:txBody>
+      </p:sp>
+      <p:sp>
+        <p:nvSpPr>
+          <p:cNvPr id="147" name="Rectangle 146"/>
+          <p:cNvSpPr/>
+          <p:nvPr/>
+        </p:nvSpPr>
+        <p:spPr>
+          <a:xfrm>
+            <a:off x="3779827" y="1018577"/>
+            <a:ext cx="27940" cy="27940"/>
+          </a:xfrm>
+          <a:prstGeom prst="rect">
+            <a:avLst/>
+          </a:prstGeom>
+          <a:solidFill>
+            <a:srgbClr val="19704F"/>
+          </a:solidFill>
+          <a:ln>
+            <a:noFill/>
+          </a:ln>
+          <a:effectLst/>
+        </p:spPr>
+        <p:style>
+          <a:lnRef idx="1">
+            <a:schemeClr val="accent1"/>
+          </a:lnRef>
+          <a:fillRef idx="3">
+            <a:schemeClr val="accent1"/>
+          </a:fillRef>
+          <a:effectRef idx="2">
+            <a:schemeClr val="accent1"/>
+          </a:effectRef>
+          <a:fontRef idx="minor">
+            <a:schemeClr val="lt1"/>
+          </a:fontRef>
+        </p:style>
+        <p:txBody>
+          <a:bodyPr rtlCol="0" anchor="ctr"/>
+          <a:lstStyle/>
+          <a:p>
+            <a:pPr algn="ctr"/>
+          </a:p>
+        </p:txBody>
+      </p:sp>
+      <p:sp>
+        <p:nvSpPr>
+          <p:cNvPr id="148" name="Rectangle 147"/>
+          <p:cNvSpPr/>
+          <p:nvPr/>
+        </p:nvSpPr>
+        <p:spPr>
+          <a:xfrm>
+            <a:off x="3918644" y="825853"/>
+            <a:ext cx="27940" cy="27940"/>
+          </a:xfrm>
+          <a:prstGeom prst="rect">
+            <a:avLst/>
+          </a:prstGeom>
+          <a:solidFill>
+            <a:srgbClr val="19704F"/>
+          </a:solidFill>
+          <a:ln>
+            <a:noFill/>
+          </a:ln>
+          <a:effectLst/>
+        </p:spPr>
+        <p:style>
+          <a:lnRef idx="1">
+            <a:schemeClr val="accent1"/>
+          </a:lnRef>
+          <a:fillRef idx="3">
+            <a:schemeClr val="accent1"/>
+          </a:fillRef>
+          <a:effectRef idx="2">
+            <a:schemeClr val="accent1"/>
+          </a:effectRef>
+          <a:fontRef idx="minor">
+            <a:schemeClr val="lt1"/>
+          </a:fontRef>
+        </p:style>
+        <p:txBody>
+          <a:bodyPr rtlCol="0" anchor="ctr"/>
+          <a:lstStyle/>
+          <a:p>
+            <a:pPr algn="ctr"/>
+          </a:p>
+        </p:txBody>
+      </p:sp>
+      <p:sp>
+        <p:nvSpPr>
+          <p:cNvPr id="149" name="Rectangle 148"/>
+          <p:cNvSpPr/>
+          <p:nvPr/>
+        </p:nvSpPr>
+        <p:spPr>
+          <a:xfrm>
+            <a:off x="3936797" y="845903"/>
+            <a:ext cx="27940" cy="27940"/>
+          </a:xfrm>
+          <a:prstGeom prst="rect">
+            <a:avLst/>
+          </a:prstGeom>
+          <a:solidFill>
+            <a:srgbClr val="19704F"/>
+          </a:solidFill>
+          <a:ln>
+            <a:noFill/>
+          </a:ln>
+          <a:effectLst/>
+        </p:spPr>
+        <p:style>
+          <a:lnRef idx="1">
+            <a:schemeClr val="accent1"/>
+          </a:lnRef>
+          <a:fillRef idx="3">
+            <a:schemeClr val="accent1"/>
+          </a:fillRef>
+          <a:effectRef idx="2">
+            <a:schemeClr val="accent1"/>
+          </a:effectRef>
+          <a:fontRef idx="minor">
+            <a:schemeClr val="lt1"/>
+          </a:fontRef>
+        </p:style>
+        <p:txBody>
+          <a:bodyPr rtlCol="0" anchor="ctr"/>
+          <a:lstStyle/>
+          <a:p>
+            <a:pPr algn="ctr"/>
+          </a:p>
+        </p:txBody>
+      </p:sp>
+      <p:sp>
+        <p:nvSpPr>
+          <p:cNvPr id="150" name="Rectangle 149"/>
+          <p:cNvSpPr/>
+          <p:nvPr/>
+        </p:nvSpPr>
+        <p:spPr>
+          <a:xfrm>
+            <a:off x="3986985" y="879137"/>
+            <a:ext cx="27940" cy="27940"/>
+          </a:xfrm>
+          <a:prstGeom prst="rect">
+            <a:avLst/>
+          </a:prstGeom>
+          <a:solidFill>
+            <a:srgbClr val="19704F"/>
+          </a:solidFill>
+          <a:ln>
+            <a:noFill/>
+          </a:ln>
+          <a:effectLst/>
+        </p:spPr>
+        <p:style>
+          <a:lnRef idx="1">
+            <a:schemeClr val="accent1"/>
+          </a:lnRef>
+          <a:fillRef idx="3">
+            <a:schemeClr val="accent1"/>
+          </a:fillRef>
+          <a:effectRef idx="2">
+            <a:schemeClr val="accent1"/>
+          </a:effectRef>
+          <a:fontRef idx="minor">
+            <a:schemeClr val="lt1"/>
+          </a:fontRef>
+        </p:style>
+        <p:txBody>
+          <a:bodyPr rtlCol="0" anchor="ctr"/>
+          <a:lstStyle/>
+          <a:p>
+            <a:pPr algn="ctr"/>
+          </a:p>
+        </p:txBody>
+      </p:sp>
+      <p:sp>
+        <p:nvSpPr>
+          <p:cNvPr id="151" name="Rectangle 150"/>
+          <p:cNvSpPr/>
+          <p:nvPr/>
+        </p:nvSpPr>
+        <p:spPr>
+          <a:xfrm>
+            <a:off x="4006206" y="952449"/>
+            <a:ext cx="27940" cy="27940"/>
+          </a:xfrm>
+          <a:prstGeom prst="rect">
+            <a:avLst/>
+          </a:prstGeom>
+          <a:solidFill>
+            <a:srgbClr val="19704F"/>
+          </a:solidFill>
+          <a:ln>
+            <a:noFill/>
+          </a:ln>
+          <a:effectLst/>
+        </p:spPr>
+        <p:style>
+          <a:lnRef idx="1">
+            <a:schemeClr val="accent1"/>
+          </a:lnRef>
+          <a:fillRef idx="3">
+            <a:schemeClr val="accent1"/>
+          </a:fillRef>
+          <a:effectRef idx="2">
+            <a:schemeClr val="accent1"/>
+          </a:effectRef>
+          <a:fontRef idx="minor">
+            <a:schemeClr val="lt1"/>
+          </a:fontRef>
+        </p:style>
+        <p:txBody>
+          <a:bodyPr rtlCol="0" anchor="ctr"/>
+          <a:lstStyle/>
+          <a:p>
+            <a:pPr algn="ctr"/>
+          </a:p>
+        </p:txBody>
+      </p:sp>
+      <p:sp>
+        <p:nvSpPr>
+          <p:cNvPr id="152" name="Rectangle 151"/>
+          <p:cNvSpPr/>
+          <p:nvPr/>
+        </p:nvSpPr>
+        <p:spPr>
+          <a:xfrm>
+            <a:off x="4008342" y="975571"/>
+            <a:ext cx="27940" cy="27940"/>
+          </a:xfrm>
+          <a:prstGeom prst="rect">
+            <a:avLst/>
+          </a:prstGeom>
+          <a:solidFill>
+            <a:srgbClr val="19704F"/>
+          </a:solidFill>
+          <a:ln>
+            <a:noFill/>
+          </a:ln>
+          <a:effectLst/>
+        </p:spPr>
+        <p:style>
+          <a:lnRef idx="1">
+            <a:schemeClr val="accent1"/>
+          </a:lnRef>
+          <a:fillRef idx="3">
+            <a:schemeClr val="accent1"/>
+          </a:fillRef>
+          <a:effectRef idx="2">
+            <a:schemeClr val="accent1"/>
+          </a:effectRef>
+          <a:fontRef idx="minor">
+            <a:schemeClr val="lt1"/>
+          </a:fontRef>
+        </p:style>
+        <p:txBody>
+          <a:bodyPr rtlCol="0" anchor="ctr"/>
+          <a:lstStyle/>
+          <a:p>
+            <a:pPr algn="ctr"/>
+          </a:p>
+        </p:txBody>
+      </p:sp>
+      <p:sp>
+        <p:nvSpPr>
+          <p:cNvPr id="153" name="Rectangle 152"/>
+          <p:cNvSpPr/>
+          <p:nvPr/>
+        </p:nvSpPr>
+        <p:spPr>
+          <a:xfrm>
+            <a:off x="4025427" y="946441"/>
+            <a:ext cx="27940" cy="27940"/>
+          </a:xfrm>
+          <a:prstGeom prst="rect">
+            <a:avLst/>
+          </a:prstGeom>
+          <a:solidFill>
+            <a:srgbClr val="19704F"/>
+          </a:solidFill>
+          <a:ln>
+            <a:noFill/>
+          </a:ln>
+          <a:effectLst/>
+        </p:spPr>
+        <p:style>
+          <a:lnRef idx="1">
+            <a:schemeClr val="accent1"/>
+          </a:lnRef>
+          <a:fillRef idx="3">
+            <a:schemeClr val="accent1"/>
+          </a:fillRef>
+          <a:effectRef idx="2">
+            <a:schemeClr val="accent1"/>
+          </a:effectRef>
+          <a:fontRef idx="minor">
+            <a:schemeClr val="lt1"/>
+          </a:fontRef>
+        </p:style>
+        <p:txBody>
+          <a:bodyPr rtlCol="0" anchor="ctr"/>
+          <a:lstStyle/>
+          <a:p>
+            <a:pPr algn="ctr"/>
+          </a:p>
+        </p:txBody>
+      </p:sp>
+      <p:sp>
+        <p:nvSpPr>
+          <p:cNvPr id="154" name="Rectangle 153"/>
+          <p:cNvSpPr/>
+          <p:nvPr/>
+        </p:nvSpPr>
+        <p:spPr>
+          <a:xfrm>
+            <a:off x="4196279" y="864834"/>
+            <a:ext cx="27940" cy="27940"/>
+          </a:xfrm>
+          <a:prstGeom prst="rect">
+            <a:avLst/>
+          </a:prstGeom>
+          <a:solidFill>
+            <a:srgbClr val="19704F"/>
+          </a:solidFill>
+          <a:ln>
+            <a:noFill/>
+          </a:ln>
+          <a:effectLst/>
+        </p:spPr>
+        <p:style>
+          <a:lnRef idx="1">
+            <a:schemeClr val="accent1"/>
+          </a:lnRef>
+          <a:fillRef idx="3">
+            <a:schemeClr val="accent1"/>
+          </a:fillRef>
+          <a:effectRef idx="2">
+            <a:schemeClr val="accent1"/>
+          </a:effectRef>
+          <a:fontRef idx="minor">
+            <a:schemeClr val="lt1"/>
+          </a:fontRef>
+        </p:style>
+        <p:txBody>
+          <a:bodyPr rtlCol="0" anchor="ctr"/>
+          <a:lstStyle/>
+          <a:p>
+            <a:pPr algn="ctr"/>
+          </a:p>
+        </p:txBody>
+      </p:sp>
+      <p:sp>
+        <p:nvSpPr>
+          <p:cNvPr id="155" name="Rectangle 154"/>
+          <p:cNvSpPr/>
+          <p:nvPr/>
+        </p:nvSpPr>
+        <p:spPr>
+          <a:xfrm>
+            <a:off x="4205889" y="797654"/>
+            <a:ext cx="27940" cy="27940"/>
+          </a:xfrm>
+          <a:prstGeom prst="rect">
+            <a:avLst/>
+          </a:prstGeom>
+          <a:solidFill>
+            <a:srgbClr val="19704F"/>
+          </a:solidFill>
+          <a:ln>
+            <a:noFill/>
+          </a:ln>
+          <a:effectLst/>
+        </p:spPr>
+        <p:style>
+          <a:lnRef idx="1">
+            <a:schemeClr val="accent1"/>
+          </a:lnRef>
+          <a:fillRef idx="3">
+            <a:schemeClr val="accent1"/>
+          </a:fillRef>
+          <a:effectRef idx="2">
+            <a:schemeClr val="accent1"/>
+          </a:effectRef>
+          <a:fontRef idx="minor">
+            <a:schemeClr val="lt1"/>
+          </a:fontRef>
+        </p:style>
+        <p:txBody>
+          <a:bodyPr rtlCol="0" anchor="ctr"/>
+          <a:lstStyle/>
+          <a:p>
+            <a:pPr algn="ctr"/>
+          </a:p>
+        </p:txBody>
+      </p:sp>
+      <p:sp>
+        <p:nvSpPr>
+          <p:cNvPr id="156" name="Rectangle 155"/>
+          <p:cNvSpPr/>
+          <p:nvPr/>
+        </p:nvSpPr>
+        <p:spPr>
+          <a:xfrm>
+            <a:off x="4218703" y="890133"/>
+            <a:ext cx="27940" cy="27940"/>
+          </a:xfrm>
+          <a:prstGeom prst="rect">
+            <a:avLst/>
+          </a:prstGeom>
+          <a:solidFill>
+            <a:srgbClr val="19704F"/>
+          </a:solidFill>
+          <a:ln>
+            <a:noFill/>
+          </a:ln>
+          <a:effectLst/>
+        </p:spPr>
+        <p:style>
+          <a:lnRef idx="1">
+            <a:schemeClr val="accent1"/>
+          </a:lnRef>
+          <a:fillRef idx="3">
+            <a:schemeClr val="accent1"/>
+          </a:fillRef>
+          <a:effectRef idx="2">
+            <a:schemeClr val="accent1"/>
+          </a:effectRef>
+          <a:fontRef idx="minor">
+            <a:schemeClr val="lt1"/>
+          </a:fontRef>
+        </p:style>
+        <p:txBody>
+          <a:bodyPr rtlCol="0" anchor="ctr"/>
+          <a:lstStyle/>
+          <a:p>
+            <a:pPr algn="ctr"/>
+          </a:p>
+        </p:txBody>
+      </p:sp>
+      <p:sp>
+        <p:nvSpPr>
+          <p:cNvPr id="157" name="Rectangle 156"/>
+          <p:cNvSpPr/>
+          <p:nvPr/>
+        </p:nvSpPr>
+        <p:spPr>
+          <a:xfrm>
+            <a:off x="4222974" y="876255"/>
+            <a:ext cx="27940" cy="27940"/>
+          </a:xfrm>
+          <a:prstGeom prst="rect">
+            <a:avLst/>
+          </a:prstGeom>
+          <a:solidFill>
+            <a:srgbClr val="19704F"/>
+          </a:solidFill>
+          <a:ln>
+            <a:noFill/>
+          </a:ln>
+          <a:effectLst/>
+        </p:spPr>
+        <p:style>
+          <a:lnRef idx="1">
+            <a:schemeClr val="accent1"/>
+          </a:lnRef>
+          <a:fillRef idx="3">
+            <a:schemeClr val="accent1"/>
+          </a:fillRef>
+          <a:effectRef idx="2">
+            <a:schemeClr val="accent1"/>
+          </a:effectRef>
+          <a:fontRef idx="minor">
+            <a:schemeClr val="lt1"/>
+          </a:fontRef>
+        </p:style>
+        <p:txBody>
+          <a:bodyPr rtlCol="0" anchor="ctr"/>
+          <a:lstStyle/>
+          <a:p>
+            <a:pPr algn="ctr"/>
+          </a:p>
+        </p:txBody>
+      </p:sp>
+      <p:sp>
+        <p:nvSpPr>
+          <p:cNvPr id="158" name="Rectangle 157"/>
+          <p:cNvSpPr/>
+          <p:nvPr/>
+        </p:nvSpPr>
+        <p:spPr>
+          <a:xfrm>
+            <a:off x="4246467" y="862834"/>
+            <a:ext cx="27940" cy="27940"/>
+          </a:xfrm>
+          <a:prstGeom prst="rect">
+            <a:avLst/>
+          </a:prstGeom>
+          <a:solidFill>
+            <a:srgbClr val="19704F"/>
+          </a:solidFill>
+          <a:ln>
+            <a:noFill/>
+          </a:ln>
+          <a:effectLst/>
+        </p:spPr>
+        <p:style>
+          <a:lnRef idx="1">
+            <a:schemeClr val="accent1"/>
+          </a:lnRef>
+          <a:fillRef idx="3">
+            <a:schemeClr val="accent1"/>
+          </a:fillRef>
+          <a:effectRef idx="2">
+            <a:schemeClr val="accent1"/>
+          </a:effectRef>
+          <a:fontRef idx="minor">
+            <a:schemeClr val="lt1"/>
+          </a:fontRef>
+        </p:style>
+        <p:txBody>
+          <a:bodyPr rtlCol="0" anchor="ctr"/>
+          <a:lstStyle/>
+          <a:p>
+            <a:pPr algn="ctr"/>
+          </a:p>
+        </p:txBody>
+      </p:sp>
+      <p:sp>
+        <p:nvSpPr>
+          <p:cNvPr id="159" name="Rectangle 158"/>
+          <p:cNvSpPr/>
+          <p:nvPr/>
+        </p:nvSpPr>
+        <p:spPr>
+          <a:xfrm>
+            <a:off x="4249670" y="883253"/>
+            <a:ext cx="27940" cy="27940"/>
+          </a:xfrm>
+          <a:prstGeom prst="rect">
+            <a:avLst/>
+          </a:prstGeom>
+          <a:solidFill>
+            <a:srgbClr val="19704F"/>
+          </a:solidFill>
+          <a:ln>
+            <a:noFill/>
+          </a:ln>
+          <a:effectLst/>
+        </p:spPr>
+        <p:style>
+          <a:lnRef idx="1">
+            <a:schemeClr val="accent1"/>
+          </a:lnRef>
+          <a:fillRef idx="3">
+            <a:schemeClr val="accent1"/>
+          </a:fillRef>
+          <a:effectRef idx="2">
+            <a:schemeClr val="accent1"/>
+          </a:effectRef>
+          <a:fontRef idx="minor">
+            <a:schemeClr val="lt1"/>
+          </a:fontRef>
+        </p:style>
+        <p:txBody>
+          <a:bodyPr rtlCol="0" anchor="ctr"/>
+          <a:lstStyle/>
+          <a:p>
+            <a:pPr algn="ctr"/>
+          </a:p>
+        </p:txBody>
+      </p:sp>
+      <p:sp>
+        <p:nvSpPr>
+          <p:cNvPr id="160" name="Rectangle 159"/>
+          <p:cNvSpPr/>
+          <p:nvPr/>
+        </p:nvSpPr>
+        <p:spPr>
+          <a:xfrm>
+            <a:off x="4321214" y="853785"/>
+            <a:ext cx="27940" cy="27940"/>
+          </a:xfrm>
+          <a:prstGeom prst="rect">
+            <a:avLst/>
+          </a:prstGeom>
+          <a:solidFill>
+            <a:srgbClr val="19704F"/>
+          </a:solidFill>
+          <a:ln>
+            <a:noFill/>
+          </a:ln>
+          <a:effectLst/>
+        </p:spPr>
+        <p:style>
+          <a:lnRef idx="1">
+            <a:schemeClr val="accent1"/>
+          </a:lnRef>
+          <a:fillRef idx="3">
+            <a:schemeClr val="accent1"/>
+          </a:fillRef>
+          <a:effectRef idx="2">
+            <a:schemeClr val="accent1"/>
+          </a:effectRef>
+          <a:fontRef idx="minor">
+            <a:schemeClr val="lt1"/>
+          </a:fontRef>
+        </p:style>
+        <p:txBody>
+          <a:bodyPr rtlCol="0" anchor="ctr"/>
+          <a:lstStyle/>
+          <a:p>
+            <a:pPr algn="ctr"/>
+          </a:p>
+        </p:txBody>
+      </p:sp>
+      <p:sp>
+        <p:nvSpPr>
+          <p:cNvPr id="161" name="Rectangle 160"/>
+          <p:cNvSpPr/>
+          <p:nvPr/>
+        </p:nvSpPr>
+        <p:spPr>
+          <a:xfrm>
+            <a:off x="4408776" y="809884"/>
+            <a:ext cx="27940" cy="27940"/>
+          </a:xfrm>
+          <a:prstGeom prst="rect">
+            <a:avLst/>
+          </a:prstGeom>
+          <a:solidFill>
+            <a:srgbClr val="19704F"/>
+          </a:solidFill>
+          <a:ln>
+            <a:noFill/>
+          </a:ln>
+          <a:effectLst/>
+        </p:spPr>
+        <p:style>
+          <a:lnRef idx="1">
+            <a:schemeClr val="accent1"/>
+          </a:lnRef>
+          <a:fillRef idx="3">
+            <a:schemeClr val="accent1"/>
+          </a:fillRef>
+          <a:effectRef idx="2">
+            <a:schemeClr val="accent1"/>
+          </a:effectRef>
+          <a:fontRef idx="minor">
+            <a:schemeClr val="lt1"/>
+          </a:fontRef>
+        </p:style>
+        <p:txBody>
+          <a:bodyPr rtlCol="0" anchor="ctr"/>
+          <a:lstStyle/>
+          <a:p>
+            <a:pPr algn="ctr"/>
+          </a:p>
+        </p:txBody>
+      </p:sp>
+      <p:sp>
+        <p:nvSpPr>
+          <p:cNvPr id="162" name="Rectangle 161"/>
+          <p:cNvSpPr/>
+          <p:nvPr/>
+        </p:nvSpPr>
+        <p:spPr>
+          <a:xfrm>
+            <a:off x="4433336" y="831636"/>
+            <a:ext cx="27940" cy="27940"/>
+          </a:xfrm>
+          <a:prstGeom prst="rect">
+            <a:avLst/>
+          </a:prstGeom>
+          <a:solidFill>
+            <a:srgbClr val="19704F"/>
+          </a:solidFill>
+          <a:ln>
+            <a:noFill/>
+          </a:ln>
+          <a:effectLst/>
+        </p:spPr>
+        <p:style>
+          <a:lnRef idx="1">
+            <a:schemeClr val="accent1"/>
+          </a:lnRef>
+          <a:fillRef idx="3">
+            <a:schemeClr val="accent1"/>
+          </a:fillRef>
+          <a:effectRef idx="2">
+            <a:schemeClr val="accent1"/>
+          </a:effectRef>
+          <a:fontRef idx="minor">
+            <a:schemeClr val="lt1"/>
+          </a:fontRef>
+        </p:style>
+        <p:txBody>
+          <a:bodyPr rtlCol="0" anchor="ctr"/>
+          <a:lstStyle/>
+          <a:p>
+            <a:pPr algn="ctr"/>
+          </a:p>
+        </p:txBody>
+      </p:sp>
+      <p:sp>
+        <p:nvSpPr>
+          <p:cNvPr id="163" name="Rectangle 162"/>
           <p:cNvSpPr/>
           <p:nvPr/>
         </p:nvSpPr>
@@ -8650,7 +9662,7 @@
       </p:sp>
       <p:sp>
         <p:nvSpPr>
-          <p:cNvPr id="141" name="Rectangle 140"/>
+          <p:cNvPr id="164" name="Rectangle 163"/>
           <p:cNvSpPr/>
           <p:nvPr/>
         </p:nvSpPr>
@@ -8694,7 +9706,7 @@
       </p:sp>
       <p:sp>
         <p:nvSpPr>
-          <p:cNvPr id="142" name="Rectangle 141"/>
+          <p:cNvPr id="165" name="Rectangle 164"/>
           <p:cNvSpPr/>
           <p:nvPr/>
         </p:nvSpPr>
@@ -8736,9 +9748,53 @@
           </a:p>
         </p:txBody>
       </p:sp>
+      <p:sp>
+        <p:nvSpPr>
+          <p:cNvPr id="166" name="Rectangle 165"/>
+          <p:cNvSpPr/>
+          <p:nvPr/>
+        </p:nvSpPr>
+        <p:spPr>
+          <a:xfrm>
+            <a:off x="4489931" y="766157"/>
+            <a:ext cx="27940" cy="27940"/>
+          </a:xfrm>
+          <a:prstGeom prst="rect">
+            <a:avLst/>
+          </a:prstGeom>
+          <a:solidFill>
+            <a:srgbClr val="19704F"/>
+          </a:solidFill>
+          <a:ln>
+            <a:noFill/>
+          </a:ln>
+          <a:effectLst/>
+        </p:spPr>
+        <p:style>
+          <a:lnRef idx="1">
+            <a:schemeClr val="accent1"/>
+          </a:lnRef>
+          <a:fillRef idx="3">
+            <a:schemeClr val="accent1"/>
+          </a:fillRef>
+          <a:effectRef idx="2">
+            <a:schemeClr val="accent1"/>
+          </a:effectRef>
+          <a:fontRef idx="minor">
+            <a:schemeClr val="lt1"/>
+          </a:fontRef>
+        </p:style>
+        <p:txBody>
+          <a:bodyPr rtlCol="0" anchor="ctr"/>
+          <a:lstStyle/>
+          <a:p>
+            <a:pPr algn="ctr"/>
+          </a:p>
+        </p:txBody>
+      </p:sp>
       <p:cxnSp>
         <p:nvCxnSpPr>
-          <p:cNvPr id="143" name="Connector 142"/>
+          <p:cNvPr id="167" name="Connector 166"/>
           <p:cNvCxnSpPr/>
           <p:nvPr/>
         </p:nvCxnSpPr>
@@ -8774,7 +9830,7 @@
       </p:cxnSp>
       <p:sp>
         <p:nvSpPr>
-          <p:cNvPr id="144" name="TextBox 143"/>
+          <p:cNvPr id="168" name="TextBox 167"/>
           <p:cNvSpPr txBox="1"/>
           <p:nvPr/>
         </p:nvSpPr>
@@ -8809,7 +9865,7 @@
       </p:sp>
       <p:sp>
         <p:nvSpPr>
-          <p:cNvPr id="145" name="Rectangle 144"/>
+          <p:cNvPr id="169" name="Rectangle 168"/>
           <p:cNvSpPr/>
           <p:nvPr/>
         </p:nvSpPr>
@@ -8853,7 +9909,7 @@
       </p:sp>
       <p:sp>
         <p:nvSpPr>
-          <p:cNvPr id="146" name="TextBox 145"/>
+          <p:cNvPr id="170" name="TextBox 169"/>
           <p:cNvSpPr txBox="1"/>
           <p:nvPr/>
         </p:nvSpPr>
@@ -8888,7 +9944,7 @@
       </p:sp>
       <p:sp>
         <p:nvSpPr>
-          <p:cNvPr id="147" name="Rectangle 146"/>
+          <p:cNvPr id="171" name="Rectangle 170"/>
           <p:cNvSpPr/>
           <p:nvPr/>
         </p:nvSpPr>
@@ -8932,7 +9988,7 @@
       </p:sp>
       <p:sp>
         <p:nvSpPr>
-          <p:cNvPr id="148" name="TextBox 147"/>
+          <p:cNvPr id="172" name="TextBox 171"/>
           <p:cNvSpPr txBox="1"/>
           <p:nvPr/>
         </p:nvSpPr>
@@ -8967,7 +10023,7 @@
       </p:sp>
       <p:sp>
         <p:nvSpPr>
-          <p:cNvPr id="149" name="Rectangle 148"/>
+          <p:cNvPr id="173" name="Rectangle 172"/>
           <p:cNvSpPr/>
           <p:nvPr/>
         </p:nvSpPr>
@@ -9011,7 +10067,7 @@
       </p:sp>
       <p:sp>
         <p:nvSpPr>
-          <p:cNvPr id="150" name="TextBox 149"/>
+          <p:cNvPr id="174" name="TextBox 173"/>
           <p:cNvSpPr txBox="1"/>
           <p:nvPr/>
         </p:nvSpPr>
@@ -9046,7 +10102,7 @@
       </p:sp>
       <p:sp>
         <p:nvSpPr>
-          <p:cNvPr id="151" name="TextBox 150"/>
+          <p:cNvPr id="175" name="TextBox 174"/>
           <p:cNvSpPr txBox="1"/>
           <p:nvPr/>
         </p:nvSpPr>
@@ -9081,7 +10137,7 @@
       </p:sp>
       <p:sp>
         <p:nvSpPr>
-          <p:cNvPr id="152" name="TextBox 151"/>
+          <p:cNvPr id="176" name="TextBox 175"/>
           <p:cNvSpPr txBox="1"/>
           <p:nvPr/>
         </p:nvSpPr>
@@ -9116,7 +10172,7 @@
       </p:sp>
       <p:sp>
         <p:nvSpPr>
-          <p:cNvPr id="153" name="TextBox 152"/>
+          <p:cNvPr id="177" name="TextBox 176"/>
           <p:cNvSpPr txBox="1"/>
           <p:nvPr/>
         </p:nvSpPr>
@@ -9151,7 +10207,7 @@
       </p:sp>
       <p:sp>
         <p:nvSpPr>
-          <p:cNvPr id="154" name="TextBox 153"/>
+          <p:cNvPr id="178" name="TextBox 177"/>
           <p:cNvSpPr txBox="1"/>
           <p:nvPr/>
         </p:nvSpPr>
